--- a/practice.pptx
+++ b/practice.pptx
@@ -15,6 +15,11 @@
     <p:sldId id="567" r:id="rId9"/>
     <p:sldId id="568" r:id="rId10"/>
     <p:sldId id="569" r:id="rId11"/>
+    <p:sldId id="570" r:id="rId12"/>
+    <p:sldId id="571" r:id="rId13"/>
+    <p:sldId id="572" r:id="rId14"/>
+    <p:sldId id="573" r:id="rId15"/>
+    <p:sldId id="574" r:id="rId16"/>
   </p:sldIdLst>
   <p:sldSz cx="9144000" cy="6858000" type="screen4x3"/>
   <p:notesSz cx="6858000" cy="9144000"/>
@@ -113,6 +118,11 @@
       </a:defRPr>
     </a:lvl9pPr>
   </p:defaultTextStyle>
+  <p:extLst>
+    <p:ext uri="{EFAFB233-063F-42B5-8137-9DF3F51BA10A}">
+      <p15:sldGuideLst xmlns:p15="http://schemas.microsoft.com/office/powerpoint/2012/main"/>
+    </p:ext>
+  </p:extLst>
 </p:presentation>
 </file>
 
@@ -247,7 +257,7 @@
           <a:p>
             <a:fld id="{0F351541-4E41-5244-B337-927E1F15D341}" type="datetimeFigureOut">
               <a:rPr lang="ru-RU" smtClean="0"/>
-              <a:t>09.02.2026</a:t>
+              <a:t>17.02.2026</a:t>
             </a:fld>
             <a:endParaRPr lang="ru-RU"/>
           </a:p>
@@ -417,7 +427,7 @@
           <a:p>
             <a:fld id="{0F351541-4E41-5244-B337-927E1F15D341}" type="datetimeFigureOut">
               <a:rPr lang="ru-RU" smtClean="0"/>
-              <a:t>09.02.2026</a:t>
+              <a:t>17.02.2026</a:t>
             </a:fld>
             <a:endParaRPr lang="ru-RU"/>
           </a:p>
@@ -597,7 +607,7 @@
           <a:p>
             <a:fld id="{0F351541-4E41-5244-B337-927E1F15D341}" type="datetimeFigureOut">
               <a:rPr lang="ru-RU" smtClean="0"/>
-              <a:t>09.02.2026</a:t>
+              <a:t>17.02.2026</a:t>
             </a:fld>
             <a:endParaRPr lang="ru-RU"/>
           </a:p>
@@ -767,7 +777,7 @@
           <a:p>
             <a:fld id="{0F351541-4E41-5244-B337-927E1F15D341}" type="datetimeFigureOut">
               <a:rPr lang="ru-RU" smtClean="0"/>
-              <a:t>09.02.2026</a:t>
+              <a:t>17.02.2026</a:t>
             </a:fld>
             <a:endParaRPr lang="ru-RU"/>
           </a:p>
@@ -1011,7 +1021,7 @@
           <a:p>
             <a:fld id="{0F351541-4E41-5244-B337-927E1F15D341}" type="datetimeFigureOut">
               <a:rPr lang="ru-RU" smtClean="0"/>
-              <a:t>09.02.2026</a:t>
+              <a:t>17.02.2026</a:t>
             </a:fld>
             <a:endParaRPr lang="ru-RU"/>
           </a:p>
@@ -1243,7 +1253,7 @@
           <a:p>
             <a:fld id="{0F351541-4E41-5244-B337-927E1F15D341}" type="datetimeFigureOut">
               <a:rPr lang="ru-RU" smtClean="0"/>
-              <a:t>09.02.2026</a:t>
+              <a:t>17.02.2026</a:t>
             </a:fld>
             <a:endParaRPr lang="ru-RU"/>
           </a:p>
@@ -1610,7 +1620,7 @@
           <a:p>
             <a:fld id="{0F351541-4E41-5244-B337-927E1F15D341}" type="datetimeFigureOut">
               <a:rPr lang="ru-RU" smtClean="0"/>
-              <a:t>09.02.2026</a:t>
+              <a:t>17.02.2026</a:t>
             </a:fld>
             <a:endParaRPr lang="ru-RU"/>
           </a:p>
@@ -1728,7 +1738,7 @@
           <a:p>
             <a:fld id="{0F351541-4E41-5244-B337-927E1F15D341}" type="datetimeFigureOut">
               <a:rPr lang="ru-RU" smtClean="0"/>
-              <a:t>09.02.2026</a:t>
+              <a:t>17.02.2026</a:t>
             </a:fld>
             <a:endParaRPr lang="ru-RU"/>
           </a:p>
@@ -1823,7 +1833,7 @@
           <a:p>
             <a:fld id="{0F351541-4E41-5244-B337-927E1F15D341}" type="datetimeFigureOut">
               <a:rPr lang="ru-RU" smtClean="0"/>
-              <a:t>09.02.2026</a:t>
+              <a:t>17.02.2026</a:t>
             </a:fld>
             <a:endParaRPr lang="ru-RU"/>
           </a:p>
@@ -2100,7 +2110,7 @@
           <a:p>
             <a:fld id="{0F351541-4E41-5244-B337-927E1F15D341}" type="datetimeFigureOut">
               <a:rPr lang="ru-RU" smtClean="0"/>
-              <a:t>09.02.2026</a:t>
+              <a:t>17.02.2026</a:t>
             </a:fld>
             <a:endParaRPr lang="ru-RU"/>
           </a:p>
@@ -2357,7 +2367,7 @@
           <a:p>
             <a:fld id="{0F351541-4E41-5244-B337-927E1F15D341}" type="datetimeFigureOut">
               <a:rPr lang="ru-RU" smtClean="0"/>
-              <a:t>09.02.2026</a:t>
+              <a:t>17.02.2026</a:t>
             </a:fld>
             <a:endParaRPr lang="ru-RU"/>
           </a:p>
@@ -2570,7 +2580,7 @@
           <a:p>
             <a:fld id="{0F351541-4E41-5244-B337-927E1F15D341}" type="datetimeFigureOut">
               <a:rPr lang="ru-RU" smtClean="0"/>
-              <a:t>09.02.2026</a:t>
+              <a:t>17.02.2026</a:t>
             </a:fld>
             <a:endParaRPr lang="ru-RU"/>
           </a:p>
@@ -3186,6 +3196,2656 @@
 </p:sld>
 </file>
 
+<file path=ppt/slides/slide11.xml><?xml version="1.0" encoding="utf-8"?>
+<p:sld xmlns:a="http://schemas.openxmlformats.org/drawingml/2006/main" xmlns:r="http://schemas.openxmlformats.org/officeDocument/2006/relationships" xmlns:p="http://schemas.openxmlformats.org/presentationml/2006/main">
+  <p:cSld>
+    <p:spTree>
+      <p:nvGrpSpPr>
+        <p:cNvPr id="1" name=""/>
+        <p:cNvGrpSpPr/>
+        <p:nvPr/>
+      </p:nvGrpSpPr>
+      <p:grpSpPr>
+        <a:xfrm>
+          <a:off x="0" y="0"/>
+          <a:ext cx="0" cy="0"/>
+          <a:chOff x="0" y="0"/>
+          <a:chExt cx="0" cy="0"/>
+        </a:xfrm>
+      </p:grpSpPr>
+      <p:sp>
+        <p:nvSpPr>
+          <p:cNvPr id="2" name="Заголовок 1">
+            <a:extLst>
+              <a:ext uri="{FF2B5EF4-FFF2-40B4-BE49-F238E27FC236}">
+                <a16:creationId xmlns:a16="http://schemas.microsoft.com/office/drawing/2014/main" id="{4E76C845-9A5F-544D-A04E-5CBB8D141461}"/>
+              </a:ext>
+            </a:extLst>
+          </p:cNvPr>
+          <p:cNvSpPr>
+            <a:spLocks noGrp="1"/>
+          </p:cNvSpPr>
+          <p:nvPr>
+            <p:ph type="title"/>
+          </p:nvPr>
+        </p:nvSpPr>
+        <p:spPr/>
+        <p:txBody>
+          <a:bodyPr/>
+          <a:lstStyle/>
+          <a:p>
+            <a:r>
+              <a:rPr lang="ru-RU" dirty="0"/>
+              <a:t>Упражнение 1</a:t>
+            </a:r>
+          </a:p>
+        </p:txBody>
+      </p:sp>
+      <mc:AlternateContent xmlns:mc="http://schemas.openxmlformats.org/markup-compatibility/2006">
+        <mc:Choice xmlns:a14="http://schemas.microsoft.com/office/drawing/2010/main" Requires="a14">
+          <p:sp>
+            <p:nvSpPr>
+              <p:cNvPr id="3" name="Объект 2">
+                <a:extLst>
+                  <a:ext uri="{FF2B5EF4-FFF2-40B4-BE49-F238E27FC236}">
+                    <a16:creationId xmlns:a16="http://schemas.microsoft.com/office/drawing/2014/main" id="{2D72DB38-5479-E042-9987-95764483FC7D}"/>
+                  </a:ext>
+                </a:extLst>
+              </p:cNvPr>
+              <p:cNvSpPr>
+                <a:spLocks noGrp="1"/>
+              </p:cNvSpPr>
+              <p:nvPr>
+                <p:ph idx="1"/>
+              </p:nvPr>
+            </p:nvSpPr>
+            <p:spPr>
+              <a:xfrm>
+                <a:off x="628650" y="1520456"/>
+                <a:ext cx="7886700" cy="4656507"/>
+              </a:xfrm>
+            </p:spPr>
+            <p:txBody>
+              <a:bodyPr>
+                <a:noAutofit/>
+              </a:bodyPr>
+              <a:lstStyle/>
+              <a:p>
+                <a:r>
+                  <a:rPr lang="ru-RU" sz="1800" dirty="0">
+                    <a:latin typeface="Times New Roman" panose="02020603050405020304" pitchFamily="18" charset="0"/>
+                    <a:ea typeface="Cambria Math" panose="02040503050406030204" pitchFamily="18" charset="0"/>
+                    <a:cs typeface="Times New Roman" panose="02020603050405020304" pitchFamily="18" charset="0"/>
+                  </a:rPr>
+                  <a:t>Имеется город, в котором </a:t>
+                </a:r>
+                <a:r>
+                  <a:rPr lang="ru-RU" sz="1800" i="1" dirty="0" err="1">
+                    <a:latin typeface="Times New Roman" panose="02020603050405020304" pitchFamily="18" charset="0"/>
+                    <a:ea typeface="Cambria Math" panose="02040503050406030204" pitchFamily="18" charset="0"/>
+                    <a:cs typeface="Times New Roman" panose="02020603050405020304" pitchFamily="18" charset="0"/>
+                  </a:rPr>
+                  <a:t>n</a:t>
+                </a:r>
+                <a:r>
+                  <a:rPr lang="ru-RU" sz="1800" dirty="0">
+                    <a:latin typeface="Times New Roman" panose="02020603050405020304" pitchFamily="18" charset="0"/>
+                    <a:ea typeface="Cambria Math" panose="02040503050406030204" pitchFamily="18" charset="0"/>
+                    <a:cs typeface="Times New Roman" panose="02020603050405020304" pitchFamily="18" charset="0"/>
+                  </a:rPr>
+                  <a:t> мужчин и </a:t>
+                </a:r>
+                <a:r>
+                  <a:rPr lang="en-US" sz="1800" i="1" dirty="0">
+                    <a:latin typeface="Times New Roman" panose="02020603050405020304" pitchFamily="18" charset="0"/>
+                    <a:ea typeface="Cambria Math" panose="02040503050406030204" pitchFamily="18" charset="0"/>
+                    <a:cs typeface="Times New Roman" panose="02020603050405020304" pitchFamily="18" charset="0"/>
+                  </a:rPr>
+                  <a:t>n</a:t>
+                </a:r>
+                <a:r>
+                  <a:rPr lang="ru-RU" sz="1800" dirty="0">
+                    <a:latin typeface="Times New Roman" panose="02020603050405020304" pitchFamily="18" charset="0"/>
+                    <a:ea typeface="Cambria Math" panose="02040503050406030204" pitchFamily="18" charset="0"/>
+                    <a:cs typeface="Times New Roman" panose="02020603050405020304" pitchFamily="18" charset="0"/>
+                  </a:rPr>
+                  <a:t> женщин пытаются вступить в брак. У каждого мужчины имеется список предпочтений, содержащий оценки всех женщин, а у каждой женщины — список предпочтений с оценками всех мужчин.</a:t>
+                </a:r>
+              </a:p>
+              <a:p>
+                <a:r>
+                  <a:rPr lang="ru-RU" sz="1800" dirty="0">
+                    <a:latin typeface="Times New Roman" panose="02020603050405020304" pitchFamily="18" charset="0"/>
+                    <a:ea typeface="Cambria Math" panose="02040503050406030204" pitchFamily="18" charset="0"/>
+                    <a:cs typeface="Times New Roman" panose="02020603050405020304" pitchFamily="18" charset="0"/>
+                  </a:rPr>
+                  <a:t>Множество всех 2</a:t>
+                </a:r>
+                <a:r>
+                  <a:rPr lang="en-US" sz="1800" i="1" dirty="0">
+                    <a:latin typeface="Times New Roman" panose="02020603050405020304" pitchFamily="18" charset="0"/>
+                    <a:ea typeface="Cambria Math" panose="02040503050406030204" pitchFamily="18" charset="0"/>
+                    <a:cs typeface="Times New Roman" panose="02020603050405020304" pitchFamily="18" charset="0"/>
+                  </a:rPr>
+                  <a:t>n</a:t>
+                </a:r>
+                <a:r>
+                  <a:rPr lang="ru-RU" sz="1800" dirty="0">
+                    <a:latin typeface="Times New Roman" panose="02020603050405020304" pitchFamily="18" charset="0"/>
+                    <a:ea typeface="Cambria Math" panose="02040503050406030204" pitchFamily="18" charset="0"/>
+                    <a:cs typeface="Times New Roman" panose="02020603050405020304" pitchFamily="18" charset="0"/>
+                  </a:rPr>
+                  <a:t> людей разделено на две категории: хорошие люди и плохие люди. Предположим, для некоторого числа </a:t>
+                </a:r>
+                <a:r>
+                  <a:rPr lang="en-US" sz="1800" i="1" dirty="0">
+                    <a:latin typeface="Times New Roman" panose="02020603050405020304" pitchFamily="18" charset="0"/>
+                    <a:ea typeface="Cambria Math" panose="02040503050406030204" pitchFamily="18" charset="0"/>
+                    <a:cs typeface="Times New Roman" panose="02020603050405020304" pitchFamily="18" charset="0"/>
+                  </a:rPr>
+                  <a:t>k</a:t>
+                </a:r>
+                <a:r>
+                  <a:rPr lang="ru-RU" sz="1800" dirty="0">
+                    <a:latin typeface="Times New Roman" panose="02020603050405020304" pitchFamily="18" charset="0"/>
+                    <a:ea typeface="Cambria Math" panose="02040503050406030204" pitchFamily="18" charset="0"/>
+                    <a:cs typeface="Times New Roman" panose="02020603050405020304" pitchFamily="18" charset="0"/>
+                  </a:rPr>
+                  <a:t> (</a:t>
+                </a:r>
+                <a14:m>
+                  <m:oMath xmlns:m="http://schemas.openxmlformats.org/officeDocument/2006/math">
+                    <m:r>
+                      <a:rPr lang="en-US" sz="1800" b="0" i="1" smtClean="0">
+                        <a:latin typeface="Cambria Math" panose="02040503050406030204" pitchFamily="18" charset="0"/>
+                        <a:ea typeface="Cambria Math" panose="02040503050406030204" pitchFamily="18" charset="0"/>
+                        <a:cs typeface="Times New Roman" panose="02020603050405020304" pitchFamily="18" charset="0"/>
+                      </a:rPr>
+                      <m:t>1≤</m:t>
+                    </m:r>
+                    <m:r>
+                      <a:rPr lang="en-US" sz="1800" b="0" i="1" smtClean="0">
+                        <a:latin typeface="Cambria Math" panose="02040503050406030204" pitchFamily="18" charset="0"/>
+                        <a:ea typeface="Cambria Math" panose="02040503050406030204" pitchFamily="18" charset="0"/>
+                        <a:cs typeface="Times New Roman" panose="02020603050405020304" pitchFamily="18" charset="0"/>
+                      </a:rPr>
+                      <m:t>𝑘</m:t>
+                    </m:r>
+                    <m:r>
+                      <a:rPr lang="en-US" sz="1800" b="0" i="1" smtClean="0">
+                        <a:latin typeface="Cambria Math" panose="02040503050406030204" pitchFamily="18" charset="0"/>
+                        <a:ea typeface="Cambria Math" panose="02040503050406030204" pitchFamily="18" charset="0"/>
+                        <a:cs typeface="Times New Roman" panose="02020603050405020304" pitchFamily="18" charset="0"/>
+                      </a:rPr>
+                      <m:t>≤</m:t>
+                    </m:r>
+                    <m:r>
+                      <a:rPr lang="en-US" sz="1800" b="0" i="1" smtClean="0">
+                        <a:latin typeface="Cambria Math" panose="02040503050406030204" pitchFamily="18" charset="0"/>
+                        <a:ea typeface="Cambria Math" panose="02040503050406030204" pitchFamily="18" charset="0"/>
+                        <a:cs typeface="Times New Roman" panose="02020603050405020304" pitchFamily="18" charset="0"/>
+                      </a:rPr>
+                      <m:t>𝑛</m:t>
+                    </m:r>
+                    <m:r>
+                      <a:rPr lang="en-US" sz="1800" b="0" i="1" smtClean="0">
+                        <a:latin typeface="Cambria Math" panose="02040503050406030204" pitchFamily="18" charset="0"/>
+                        <a:ea typeface="Cambria Math" panose="02040503050406030204" pitchFamily="18" charset="0"/>
+                        <a:cs typeface="Times New Roman" panose="02020603050405020304" pitchFamily="18" charset="0"/>
+                      </a:rPr>
+                      <m:t>−1</m:t>
+                    </m:r>
+                  </m:oMath>
+                </a14:m>
+                <a:r>
+                  <a:rPr lang="ru-RU" sz="1800" dirty="0">
+                    <a:latin typeface="Times New Roman" panose="02020603050405020304" pitchFamily="18" charset="0"/>
+                    <a:ea typeface="Cambria Math" panose="02040503050406030204" pitchFamily="18" charset="0"/>
+                    <a:cs typeface="Times New Roman" panose="02020603050405020304" pitchFamily="18" charset="0"/>
+                  </a:rPr>
+                  <a:t>) имеются </a:t>
+                </a:r>
+                <a:r>
+                  <a:rPr lang="en-US" sz="1800" i="1" dirty="0">
+                    <a:latin typeface="Times New Roman" panose="02020603050405020304" pitchFamily="18" charset="0"/>
+                    <a:ea typeface="Cambria Math" panose="02040503050406030204" pitchFamily="18" charset="0"/>
+                    <a:cs typeface="Times New Roman" panose="02020603050405020304" pitchFamily="18" charset="0"/>
+                  </a:rPr>
+                  <a:t>k</a:t>
+                </a:r>
+                <a:r>
+                  <a:rPr lang="ru-RU" sz="1800" dirty="0">
+                    <a:latin typeface="Times New Roman" panose="02020603050405020304" pitchFamily="18" charset="0"/>
+                    <a:ea typeface="Cambria Math" panose="02040503050406030204" pitchFamily="18" charset="0"/>
+                    <a:cs typeface="Times New Roman" panose="02020603050405020304" pitchFamily="18" charset="0"/>
+                  </a:rPr>
+                  <a:t> хороших мужчин и </a:t>
+                </a:r>
+                <a:r>
+                  <a:rPr lang="en-US" sz="1800" i="1" dirty="0">
+                    <a:latin typeface="Times New Roman" panose="02020603050405020304" pitchFamily="18" charset="0"/>
+                    <a:ea typeface="Cambria Math" panose="02040503050406030204" pitchFamily="18" charset="0"/>
+                    <a:cs typeface="Times New Roman" panose="02020603050405020304" pitchFamily="18" charset="0"/>
+                  </a:rPr>
+                  <a:t>k</a:t>
+                </a:r>
+                <a:r>
+                  <a:rPr lang="ru-RU" sz="1800" dirty="0">
+                    <a:latin typeface="Times New Roman" panose="02020603050405020304" pitchFamily="18" charset="0"/>
+                    <a:ea typeface="Cambria Math" panose="02040503050406030204" pitchFamily="18" charset="0"/>
+                    <a:cs typeface="Times New Roman" panose="02020603050405020304" pitchFamily="18" charset="0"/>
+                  </a:rPr>
+                  <a:t> хороших женщин; следовательно, существует </a:t>
+                </a:r>
+                <a:r>
+                  <a:rPr lang="en-US" sz="1800" i="1" dirty="0">
+                    <a:latin typeface="Times New Roman" panose="02020603050405020304" pitchFamily="18" charset="0"/>
+                    <a:ea typeface="Cambria Math" panose="02040503050406030204" pitchFamily="18" charset="0"/>
+                    <a:cs typeface="Times New Roman" panose="02020603050405020304" pitchFamily="18" charset="0"/>
+                  </a:rPr>
+                  <a:t>n</a:t>
+                </a:r>
+                <a:r>
+                  <a:rPr lang="en-US" sz="1800" dirty="0">
+                    <a:latin typeface="Times New Roman" panose="02020603050405020304" pitchFamily="18" charset="0"/>
+                    <a:ea typeface="Cambria Math" panose="02040503050406030204" pitchFamily="18" charset="0"/>
+                    <a:cs typeface="Times New Roman" panose="02020603050405020304" pitchFamily="18" charset="0"/>
+                  </a:rPr>
+                  <a:t>-</a:t>
+                </a:r>
+                <a:r>
+                  <a:rPr lang="en-US" sz="1800" i="1" dirty="0">
+                    <a:latin typeface="Times New Roman" panose="02020603050405020304" pitchFamily="18" charset="0"/>
+                    <a:ea typeface="Cambria Math" panose="02040503050406030204" pitchFamily="18" charset="0"/>
+                    <a:cs typeface="Times New Roman" panose="02020603050405020304" pitchFamily="18" charset="0"/>
+                  </a:rPr>
+                  <a:t>k</a:t>
+                </a:r>
+                <a:r>
+                  <a:rPr lang="ru-RU" sz="1800" dirty="0">
+                    <a:latin typeface="Times New Roman" panose="02020603050405020304" pitchFamily="18" charset="0"/>
+                    <a:ea typeface="Cambria Math" panose="02040503050406030204" pitchFamily="18" charset="0"/>
+                    <a:cs typeface="Times New Roman" panose="02020603050405020304" pitchFamily="18" charset="0"/>
+                  </a:rPr>
+                  <a:t> плохих мужчин </a:t>
+                </a:r>
+                <a:r>
+                  <a:rPr lang="en" sz="1800" dirty="0" err="1">
+                    <a:latin typeface="Times New Roman" panose="02020603050405020304" pitchFamily="18" charset="0"/>
+                    <a:ea typeface="Cambria Math" panose="02040503050406030204" pitchFamily="18" charset="0"/>
+                    <a:cs typeface="Times New Roman" panose="02020603050405020304" pitchFamily="18" charset="0"/>
+                  </a:rPr>
+                  <a:t>и</a:t>
+                </a:r>
+                <a:r>
+                  <a:rPr lang="ru-RU" sz="1800" dirty="0">
+                    <a:latin typeface="Times New Roman" panose="02020603050405020304" pitchFamily="18" charset="0"/>
+                    <a:ea typeface="Cambria Math" panose="02040503050406030204" pitchFamily="18" charset="0"/>
+                    <a:cs typeface="Times New Roman" panose="02020603050405020304" pitchFamily="18" charset="0"/>
+                  </a:rPr>
+                  <a:t> </a:t>
+                </a:r>
+                <a:r>
+                  <a:rPr lang="ru-RU" sz="1800" i="1" dirty="0" err="1">
+                    <a:latin typeface="Times New Roman" panose="02020603050405020304" pitchFamily="18" charset="0"/>
+                    <a:ea typeface="Cambria Math" panose="02040503050406030204" pitchFamily="18" charset="0"/>
+                    <a:cs typeface="Times New Roman" panose="02020603050405020304" pitchFamily="18" charset="0"/>
+                  </a:rPr>
+                  <a:t>n</a:t>
+                </a:r>
+                <a:r>
+                  <a:rPr lang="en" sz="1800" dirty="0">
+                    <a:latin typeface="Times New Roman" panose="02020603050405020304" pitchFamily="18" charset="0"/>
+                    <a:ea typeface="Cambria Math" panose="02040503050406030204" pitchFamily="18" charset="0"/>
+                    <a:cs typeface="Times New Roman" panose="02020603050405020304" pitchFamily="18" charset="0"/>
+                  </a:rPr>
+                  <a:t>-</a:t>
+                </a:r>
+                <a:r>
+                  <a:rPr lang="en" sz="1800" i="1" dirty="0">
+                    <a:latin typeface="Times New Roman" panose="02020603050405020304" pitchFamily="18" charset="0"/>
+                    <a:ea typeface="Cambria Math" panose="02040503050406030204" pitchFamily="18" charset="0"/>
+                    <a:cs typeface="Times New Roman" panose="02020603050405020304" pitchFamily="18" charset="0"/>
+                  </a:rPr>
+                  <a:t>k</a:t>
+                </a:r>
+                <a:r>
+                  <a:rPr lang="ru-RU" sz="1800" dirty="0">
+                    <a:latin typeface="Times New Roman" panose="02020603050405020304" pitchFamily="18" charset="0"/>
+                    <a:ea typeface="Cambria Math" panose="02040503050406030204" pitchFamily="18" charset="0"/>
+                    <a:cs typeface="Times New Roman" panose="02020603050405020304" pitchFamily="18" charset="0"/>
+                  </a:rPr>
+                  <a:t> плохих женщин.</a:t>
+                </a:r>
+              </a:p>
+              <a:p>
+                <a:r>
+                  <a:rPr lang="ru-RU" sz="1800" dirty="0">
+                    <a:latin typeface="Times New Roman" panose="02020603050405020304" pitchFamily="18" charset="0"/>
+                    <a:ea typeface="Cambria Math" panose="02040503050406030204" pitchFamily="18" charset="0"/>
+                    <a:cs typeface="Times New Roman" panose="02020603050405020304" pitchFamily="18" charset="0"/>
+                  </a:rPr>
+                  <a:t>Каждый участник предпочитает любого хорошего человека любому плохому человеку. Формально каждый список предпочтений обладает тем свойством, что оценка любого хорошего человека противоположного пола выше оценки любого плохого человека противоположного пола: первые к позиций в нем занимают хорошие люди (противоположного пола) в некотором порядке, а затем идут </a:t>
+                </a:r>
+                <a:r>
+                  <a:rPr lang="ru-RU" sz="1800" i="1" dirty="0" err="1">
+                    <a:latin typeface="Times New Roman" panose="02020603050405020304" pitchFamily="18" charset="0"/>
+                    <a:ea typeface="Cambria Math" panose="02040503050406030204" pitchFamily="18" charset="0"/>
+                    <a:cs typeface="Times New Roman" panose="02020603050405020304" pitchFamily="18" charset="0"/>
+                  </a:rPr>
+                  <a:t>n</a:t>
+                </a:r>
+                <a:r>
+                  <a:rPr lang="en" sz="1800" dirty="0">
+                    <a:latin typeface="Times New Roman" panose="02020603050405020304" pitchFamily="18" charset="0"/>
+                    <a:ea typeface="Cambria Math" panose="02040503050406030204" pitchFamily="18" charset="0"/>
+                    <a:cs typeface="Times New Roman" panose="02020603050405020304" pitchFamily="18" charset="0"/>
+                  </a:rPr>
+                  <a:t>-</a:t>
+                </a:r>
+                <a:r>
+                  <a:rPr lang="en" sz="1800" i="1" dirty="0">
+                    <a:latin typeface="Times New Roman" panose="02020603050405020304" pitchFamily="18" charset="0"/>
+                    <a:ea typeface="Cambria Math" panose="02040503050406030204" pitchFamily="18" charset="0"/>
+                    <a:cs typeface="Times New Roman" panose="02020603050405020304" pitchFamily="18" charset="0"/>
+                  </a:rPr>
+                  <a:t>k</a:t>
+                </a:r>
+                <a:r>
+                  <a:rPr lang="ru-RU" sz="1800" dirty="0">
+                    <a:latin typeface="Times New Roman" panose="02020603050405020304" pitchFamily="18" charset="0"/>
+                    <a:ea typeface="Cambria Math" panose="02040503050406030204" pitchFamily="18" charset="0"/>
+                    <a:cs typeface="Times New Roman" panose="02020603050405020304" pitchFamily="18" charset="0"/>
+                  </a:rPr>
+                  <a:t> плохих людей (противоположного пола) в некотором порядке.</a:t>
+                </a:r>
+              </a:p>
+              <a:p>
+                <a:r>
+                  <a:rPr lang="ru-RU" sz="1800" dirty="0">
+                    <a:latin typeface="Times New Roman" panose="02020603050405020304" pitchFamily="18" charset="0"/>
+                    <a:ea typeface="Cambria Math" panose="02040503050406030204" pitchFamily="18" charset="0"/>
+                    <a:cs typeface="Times New Roman" panose="02020603050405020304" pitchFamily="18" charset="0"/>
+                  </a:rPr>
+                  <a:t>Покажите, что в каждом устойчивом </a:t>
+                </a:r>
+                <a:r>
+                  <a:rPr lang="ru-RU" sz="1800" dirty="0" err="1">
+                    <a:latin typeface="Times New Roman" panose="02020603050405020304" pitchFamily="18" charset="0"/>
+                    <a:ea typeface="Cambria Math" panose="02040503050406030204" pitchFamily="18" charset="0"/>
+                    <a:cs typeface="Times New Roman" panose="02020603050405020304" pitchFamily="18" charset="0"/>
+                  </a:rPr>
+                  <a:t>паросочетании</a:t>
+                </a:r>
+                <a:r>
+                  <a:rPr lang="ru-RU" sz="1800" dirty="0">
+                    <a:latin typeface="Times New Roman" panose="02020603050405020304" pitchFamily="18" charset="0"/>
+                    <a:ea typeface="Cambria Math" panose="02040503050406030204" pitchFamily="18" charset="0"/>
+                    <a:cs typeface="Times New Roman" panose="02020603050405020304" pitchFamily="18" charset="0"/>
+                  </a:rPr>
+                  <a:t> каждый хороший мужчина вступает в брак с хорошей женщиной. </a:t>
+                </a:r>
+              </a:p>
+            </p:txBody>
+          </p:sp>
+        </mc:Choice>
+        <mc:Fallback>
+          <p:sp>
+            <p:nvSpPr>
+              <p:cNvPr id="3" name="Объект 2">
+                <a:extLst>
+                  <a:ext uri="{FF2B5EF4-FFF2-40B4-BE49-F238E27FC236}">
+                    <a16:creationId xmlns:a16="http://schemas.microsoft.com/office/drawing/2014/main" id="{2D72DB38-5479-E042-9987-95764483FC7D}"/>
+                  </a:ext>
+                </a:extLst>
+              </p:cNvPr>
+              <p:cNvSpPr>
+                <a:spLocks noGrp="1" noRot="1" noChangeAspect="1" noMove="1" noResize="1" noEditPoints="1" noAdjustHandles="1" noChangeArrowheads="1" noChangeShapeType="1" noTextEdit="1"/>
+              </p:cNvSpPr>
+              <p:nvPr>
+                <p:ph idx="1"/>
+              </p:nvPr>
+            </p:nvSpPr>
+            <p:spPr>
+              <a:xfrm>
+                <a:off x="628650" y="1520456"/>
+                <a:ext cx="7886700" cy="4656507"/>
+              </a:xfrm>
+              <a:blipFill>
+                <a:blip r:embed="rId2"/>
+                <a:stretch>
+                  <a:fillRect l="-482" t="-1087" b="-2174"/>
+                </a:stretch>
+              </a:blipFill>
+            </p:spPr>
+            <p:txBody>
+              <a:bodyPr/>
+              <a:lstStyle/>
+              <a:p>
+                <a:r>
+                  <a:rPr lang="ru-RU">
+                    <a:noFill/>
+                  </a:rPr>
+                  <a:t> </a:t>
+                </a:r>
+              </a:p>
+            </p:txBody>
+          </p:sp>
+        </mc:Fallback>
+      </mc:AlternateContent>
+    </p:spTree>
+    <p:extLst>
+      <p:ext uri="{BB962C8B-B14F-4D97-AF65-F5344CB8AC3E}">
+        <p14:creationId xmlns:p14="http://schemas.microsoft.com/office/powerpoint/2010/main" val="2289987507"/>
+      </p:ext>
+    </p:extLst>
+  </p:cSld>
+  <p:clrMapOvr>
+    <a:masterClrMapping/>
+  </p:clrMapOvr>
+</p:sld>
+</file>
+
+<file path=ppt/slides/slide12.xml><?xml version="1.0" encoding="utf-8"?>
+<p:sld xmlns:a="http://schemas.openxmlformats.org/drawingml/2006/main" xmlns:r="http://schemas.openxmlformats.org/officeDocument/2006/relationships" xmlns:p="http://schemas.openxmlformats.org/presentationml/2006/main">
+  <p:cSld>
+    <p:spTree>
+      <p:nvGrpSpPr>
+        <p:cNvPr id="1" name=""/>
+        <p:cNvGrpSpPr/>
+        <p:nvPr/>
+      </p:nvGrpSpPr>
+      <p:grpSpPr>
+        <a:xfrm>
+          <a:off x="0" y="0"/>
+          <a:ext cx="0" cy="0"/>
+          <a:chOff x="0" y="0"/>
+          <a:chExt cx="0" cy="0"/>
+        </a:xfrm>
+      </p:grpSpPr>
+      <p:sp>
+        <p:nvSpPr>
+          <p:cNvPr id="2" name="Заголовок 1">
+            <a:extLst>
+              <a:ext uri="{FF2B5EF4-FFF2-40B4-BE49-F238E27FC236}">
+                <a16:creationId xmlns:a16="http://schemas.microsoft.com/office/drawing/2014/main" id="{68CA7DCB-5EA4-824C-BD2D-1440C6DAF054}"/>
+              </a:ext>
+            </a:extLst>
+          </p:cNvPr>
+          <p:cNvSpPr>
+            <a:spLocks noGrp="1"/>
+          </p:cNvSpPr>
+          <p:nvPr>
+            <p:ph type="title"/>
+          </p:nvPr>
+        </p:nvSpPr>
+        <p:spPr/>
+        <p:txBody>
+          <a:bodyPr/>
+          <a:lstStyle/>
+          <a:p>
+            <a:r>
+              <a:rPr lang="ru-RU" dirty="0"/>
+              <a:t>Упражнение 2</a:t>
+            </a:r>
+          </a:p>
+        </p:txBody>
+      </p:sp>
+      <p:sp>
+        <p:nvSpPr>
+          <p:cNvPr id="3" name="Объект 2">
+            <a:extLst>
+              <a:ext uri="{FF2B5EF4-FFF2-40B4-BE49-F238E27FC236}">
+                <a16:creationId xmlns:a16="http://schemas.microsoft.com/office/drawing/2014/main" id="{ADBEAFE5-583A-3B4B-B533-404A182512A1}"/>
+              </a:ext>
+            </a:extLst>
+          </p:cNvPr>
+          <p:cNvSpPr>
+            <a:spLocks noGrp="1"/>
+          </p:cNvSpPr>
+          <p:nvPr>
+            <p:ph idx="1"/>
+          </p:nvPr>
+        </p:nvSpPr>
+        <p:spPr>
+          <a:xfrm>
+            <a:off x="628650" y="1435395"/>
+            <a:ext cx="7886700" cy="4741568"/>
+          </a:xfrm>
+        </p:spPr>
+        <p:txBody>
+          <a:bodyPr>
+            <a:normAutofit/>
+          </a:bodyPr>
+          <a:lstStyle/>
+          <a:p>
+            <a:pPr marL="0" indent="0">
+              <a:buNone/>
+            </a:pPr>
+            <a:r>
+              <a:rPr lang="ru-RU" sz="2000" dirty="0">
+                <a:latin typeface="Times New Roman" panose="02020603050405020304" pitchFamily="18" charset="0"/>
+                <a:cs typeface="Times New Roman" panose="02020603050405020304" pitchFamily="18" charset="0"/>
+              </a:rPr>
+              <a:t>Решите, является ли приведенное ниже утверждение истинным или ложным. Если оно истинно, приведите короткое объяснение; если ложно — приведите </a:t>
+            </a:r>
+            <a:r>
+              <a:rPr lang="ru-RU" sz="2000" dirty="0" err="1">
+                <a:latin typeface="Times New Roman" panose="02020603050405020304" pitchFamily="18" charset="0"/>
+                <a:cs typeface="Times New Roman" panose="02020603050405020304" pitchFamily="18" charset="0"/>
+              </a:rPr>
+              <a:t>контрпример</a:t>
+            </a:r>
+            <a:r>
+              <a:rPr lang="ru-RU" sz="2000" dirty="0">
+                <a:latin typeface="Times New Roman" panose="02020603050405020304" pitchFamily="18" charset="0"/>
+                <a:cs typeface="Times New Roman" panose="02020603050405020304" pitchFamily="18" charset="0"/>
+              </a:rPr>
+              <a:t>:</a:t>
+            </a:r>
+          </a:p>
+          <a:p>
+            <a:pPr marL="514350" indent="-514350">
+              <a:buFont typeface="+mj-lt"/>
+              <a:buAutoNum type="arabicPeriod"/>
+            </a:pPr>
+            <a:r>
+              <a:rPr lang="ru-RU" sz="2000" dirty="0">
+                <a:latin typeface="Times New Roman" panose="02020603050405020304" pitchFamily="18" charset="0"/>
+                <a:cs typeface="Times New Roman" panose="02020603050405020304" pitchFamily="18" charset="0"/>
+              </a:rPr>
+              <a:t>В любой конфигурации задачи устойчивых </a:t>
+            </a:r>
+            <a:r>
+              <a:rPr lang="ru-RU" sz="2000" dirty="0" err="1">
+                <a:latin typeface="Times New Roman" panose="02020603050405020304" pitchFamily="18" charset="0"/>
+                <a:cs typeface="Times New Roman" panose="02020603050405020304" pitchFamily="18" charset="0"/>
+              </a:rPr>
+              <a:t>паросочетаний</a:t>
+            </a:r>
+            <a:r>
+              <a:rPr lang="ru-RU" sz="2000" dirty="0">
+                <a:latin typeface="Times New Roman" panose="02020603050405020304" pitchFamily="18" charset="0"/>
+                <a:cs typeface="Times New Roman" panose="02020603050405020304" pitchFamily="18" charset="0"/>
+              </a:rPr>
+              <a:t> существует устойчивое </a:t>
+            </a:r>
+            <a:r>
+              <a:rPr lang="ru-RU" sz="2000" dirty="0" err="1">
+                <a:latin typeface="Times New Roman" panose="02020603050405020304" pitchFamily="18" charset="0"/>
+                <a:cs typeface="Times New Roman" panose="02020603050405020304" pitchFamily="18" charset="0"/>
+              </a:rPr>
+              <a:t>паросочетание</a:t>
+            </a:r>
+            <a:r>
+              <a:rPr lang="ru-RU" sz="2000" dirty="0">
+                <a:latin typeface="Times New Roman" panose="02020603050405020304" pitchFamily="18" charset="0"/>
+                <a:cs typeface="Times New Roman" panose="02020603050405020304" pitchFamily="18" charset="0"/>
+              </a:rPr>
+              <a:t>, содержащее пару (</a:t>
+            </a:r>
+            <a:r>
+              <a:rPr lang="en" sz="2000" i="1" dirty="0">
+                <a:latin typeface="Times New Roman" panose="02020603050405020304" pitchFamily="18" charset="0"/>
+                <a:cs typeface="Times New Roman" panose="02020603050405020304" pitchFamily="18" charset="0"/>
+              </a:rPr>
+              <a:t>m</a:t>
+            </a:r>
+            <a:r>
+              <a:rPr lang="en" sz="2000" dirty="0">
+                <a:latin typeface="Times New Roman" panose="02020603050405020304" pitchFamily="18" charset="0"/>
+                <a:cs typeface="Times New Roman" panose="02020603050405020304" pitchFamily="18" charset="0"/>
+              </a:rPr>
+              <a:t>,</a:t>
+            </a:r>
+            <a:r>
+              <a:rPr lang="ru-RU" sz="2000" dirty="0">
+                <a:latin typeface="Times New Roman" panose="02020603050405020304" pitchFamily="18" charset="0"/>
+                <a:cs typeface="Times New Roman" panose="02020603050405020304" pitchFamily="18" charset="0"/>
+              </a:rPr>
+              <a:t> </a:t>
+            </a:r>
+            <a:r>
+              <a:rPr lang="en" sz="2000" i="1" dirty="0">
+                <a:latin typeface="Times New Roman" panose="02020603050405020304" pitchFamily="18" charset="0"/>
+                <a:cs typeface="Times New Roman" panose="02020603050405020304" pitchFamily="18" charset="0"/>
+              </a:rPr>
+              <a:t>w</a:t>
+            </a:r>
+            <a:r>
+              <a:rPr lang="en" sz="2000" dirty="0">
+                <a:latin typeface="Times New Roman" panose="02020603050405020304" pitchFamily="18" charset="0"/>
+                <a:cs typeface="Times New Roman" panose="02020603050405020304" pitchFamily="18" charset="0"/>
+              </a:rPr>
+              <a:t>), </a:t>
+            </a:r>
+            <a:r>
+              <a:rPr lang="ru-RU" sz="2000" dirty="0">
+                <a:latin typeface="Times New Roman" panose="02020603050405020304" pitchFamily="18" charset="0"/>
+                <a:cs typeface="Times New Roman" panose="02020603050405020304" pitchFamily="18" charset="0"/>
+              </a:rPr>
+              <a:t>в котором </a:t>
+            </a:r>
+            <a:r>
+              <a:rPr lang="en-US" sz="2000" i="1" dirty="0">
+                <a:latin typeface="Times New Roman" panose="02020603050405020304" pitchFamily="18" charset="0"/>
+                <a:cs typeface="Times New Roman" panose="02020603050405020304" pitchFamily="18" charset="0"/>
+              </a:rPr>
+              <a:t>m</a:t>
+            </a:r>
+            <a:r>
+              <a:rPr lang="ru-RU" sz="2000" dirty="0">
+                <a:latin typeface="Times New Roman" panose="02020603050405020304" pitchFamily="18" charset="0"/>
+                <a:cs typeface="Times New Roman" panose="02020603050405020304" pitchFamily="18" charset="0"/>
+              </a:rPr>
+              <a:t> находится на первом месте в списке предпочтений </a:t>
+            </a:r>
+            <a:r>
+              <a:rPr lang="en" sz="2000" i="1" dirty="0">
+                <a:latin typeface="Times New Roman" panose="02020603050405020304" pitchFamily="18" charset="0"/>
+                <a:cs typeface="Times New Roman" panose="02020603050405020304" pitchFamily="18" charset="0"/>
+              </a:rPr>
+              <a:t>w</a:t>
+            </a:r>
+            <a:r>
+              <a:rPr lang="en" sz="2000" dirty="0">
+                <a:latin typeface="Times New Roman" panose="02020603050405020304" pitchFamily="18" charset="0"/>
+                <a:cs typeface="Times New Roman" panose="02020603050405020304" pitchFamily="18" charset="0"/>
+              </a:rPr>
+              <a:t>, a </a:t>
+            </a:r>
+            <a:r>
+              <a:rPr lang="en" sz="2000" i="1" dirty="0">
+                <a:latin typeface="Times New Roman" panose="02020603050405020304" pitchFamily="18" charset="0"/>
+                <a:cs typeface="Times New Roman" panose="02020603050405020304" pitchFamily="18" charset="0"/>
+              </a:rPr>
+              <a:t>w</a:t>
+            </a:r>
+            <a:r>
+              <a:rPr lang="en" sz="2000" dirty="0">
+                <a:latin typeface="Times New Roman" panose="02020603050405020304" pitchFamily="18" charset="0"/>
+                <a:cs typeface="Times New Roman" panose="02020603050405020304" pitchFamily="18" charset="0"/>
+              </a:rPr>
+              <a:t> </a:t>
+            </a:r>
+            <a:r>
+              <a:rPr lang="ru-RU" sz="2000" dirty="0">
+                <a:latin typeface="Times New Roman" panose="02020603050405020304" pitchFamily="18" charset="0"/>
+                <a:cs typeface="Times New Roman" panose="02020603050405020304" pitchFamily="18" charset="0"/>
+              </a:rPr>
+              <a:t>находится на первом месте в списке предпочтений </a:t>
+            </a:r>
+            <a:r>
+              <a:rPr lang="en-US" sz="2000" i="1" dirty="0">
+                <a:latin typeface="Times New Roman" panose="02020603050405020304" pitchFamily="18" charset="0"/>
+                <a:cs typeface="Times New Roman" panose="02020603050405020304" pitchFamily="18" charset="0"/>
+              </a:rPr>
+              <a:t>m</a:t>
+            </a:r>
+            <a:r>
+              <a:rPr lang="ru-RU" sz="2000" dirty="0">
+                <a:latin typeface="Times New Roman" panose="02020603050405020304" pitchFamily="18" charset="0"/>
+                <a:cs typeface="Times New Roman" panose="02020603050405020304" pitchFamily="18" charset="0"/>
+              </a:rPr>
+              <a:t>.</a:t>
+            </a:r>
+          </a:p>
+          <a:p>
+            <a:pPr marL="514350" indent="-514350">
+              <a:buFont typeface="+mj-lt"/>
+              <a:buAutoNum type="arabicPeriod"/>
+            </a:pPr>
+            <a:r>
+              <a:rPr lang="ru-RU" sz="2000" dirty="0">
+                <a:latin typeface="Times New Roman" panose="02020603050405020304" pitchFamily="18" charset="0"/>
+                <a:cs typeface="Times New Roman" panose="02020603050405020304" pitchFamily="18" charset="0"/>
+              </a:rPr>
+              <a:t>Допустим, имеется конфигурация задачи устойчивых </a:t>
+            </a:r>
+            <a:r>
+              <a:rPr lang="ru-RU" sz="2000" dirty="0" err="1">
+                <a:latin typeface="Times New Roman" panose="02020603050405020304" pitchFamily="18" charset="0"/>
+                <a:cs typeface="Times New Roman" panose="02020603050405020304" pitchFamily="18" charset="0"/>
+              </a:rPr>
+              <a:t>паросочетаний</a:t>
+            </a:r>
+            <a:r>
+              <a:rPr lang="ru-RU" sz="2000" dirty="0">
+                <a:latin typeface="Times New Roman" panose="02020603050405020304" pitchFamily="18" charset="0"/>
+                <a:cs typeface="Times New Roman" panose="02020603050405020304" pitchFamily="18" charset="0"/>
+              </a:rPr>
+              <a:t> с мужчиной </a:t>
+            </a:r>
+            <a:r>
+              <a:rPr lang="en-US" sz="2000" i="1" dirty="0">
+                <a:latin typeface="Times New Roman" panose="02020603050405020304" pitchFamily="18" charset="0"/>
+                <a:cs typeface="Times New Roman" panose="02020603050405020304" pitchFamily="18" charset="0"/>
+              </a:rPr>
+              <a:t>m</a:t>
+            </a:r>
+            <a:r>
+              <a:rPr lang="ru-RU" sz="2000" dirty="0">
+                <a:latin typeface="Times New Roman" panose="02020603050405020304" pitchFamily="18" charset="0"/>
+                <a:cs typeface="Times New Roman" panose="02020603050405020304" pitchFamily="18" charset="0"/>
+              </a:rPr>
+              <a:t> и женщиной </a:t>
+            </a:r>
+            <a:r>
+              <a:rPr lang="en" sz="2000" i="1" dirty="0">
+                <a:latin typeface="Times New Roman" panose="02020603050405020304" pitchFamily="18" charset="0"/>
+                <a:cs typeface="Times New Roman" panose="02020603050405020304" pitchFamily="18" charset="0"/>
+              </a:rPr>
+              <a:t>w</a:t>
+            </a:r>
+            <a:r>
+              <a:rPr lang="en" sz="2000" dirty="0">
+                <a:latin typeface="Times New Roman" panose="02020603050405020304" pitchFamily="18" charset="0"/>
+                <a:cs typeface="Times New Roman" panose="02020603050405020304" pitchFamily="18" charset="0"/>
+              </a:rPr>
+              <a:t>, </a:t>
+            </a:r>
+            <a:r>
+              <a:rPr lang="ru-RU" sz="2000" dirty="0">
+                <a:latin typeface="Times New Roman" panose="02020603050405020304" pitchFamily="18" charset="0"/>
+                <a:cs typeface="Times New Roman" panose="02020603050405020304" pitchFamily="18" charset="0"/>
+              </a:rPr>
+              <a:t>для которых </a:t>
+            </a:r>
+            <a:r>
+              <a:rPr lang="en-US" sz="2000" i="1" dirty="0">
+                <a:latin typeface="Times New Roman" panose="02020603050405020304" pitchFamily="18" charset="0"/>
+                <a:cs typeface="Times New Roman" panose="02020603050405020304" pitchFamily="18" charset="0"/>
+              </a:rPr>
+              <a:t>m</a:t>
+            </a:r>
+            <a:r>
+              <a:rPr lang="ru-RU" sz="2000" dirty="0">
+                <a:latin typeface="Times New Roman" panose="02020603050405020304" pitchFamily="18" charset="0"/>
+                <a:cs typeface="Times New Roman" panose="02020603050405020304" pitchFamily="18" charset="0"/>
+              </a:rPr>
+              <a:t> находится на первом месте в списке предпочтений </a:t>
+            </a:r>
+            <a:r>
+              <a:rPr lang="en" sz="2000" i="1" dirty="0">
+                <a:latin typeface="Times New Roman" panose="02020603050405020304" pitchFamily="18" charset="0"/>
+                <a:cs typeface="Times New Roman" panose="02020603050405020304" pitchFamily="18" charset="0"/>
+              </a:rPr>
+              <a:t>w</a:t>
+            </a:r>
+            <a:r>
+              <a:rPr lang="en" sz="2000" dirty="0">
+                <a:latin typeface="Times New Roman" panose="02020603050405020304" pitchFamily="18" charset="0"/>
+                <a:cs typeface="Times New Roman" panose="02020603050405020304" pitchFamily="18" charset="0"/>
+              </a:rPr>
+              <a:t>, a </a:t>
+            </a:r>
+            <a:r>
+              <a:rPr lang="en" sz="2000" i="1" dirty="0">
+                <a:latin typeface="Times New Roman" panose="02020603050405020304" pitchFamily="18" charset="0"/>
+                <a:cs typeface="Times New Roman" panose="02020603050405020304" pitchFamily="18" charset="0"/>
+              </a:rPr>
+              <a:t>w</a:t>
+            </a:r>
+            <a:r>
+              <a:rPr lang="en" sz="2000" dirty="0">
+                <a:latin typeface="Times New Roman" panose="02020603050405020304" pitchFamily="18" charset="0"/>
+                <a:cs typeface="Times New Roman" panose="02020603050405020304" pitchFamily="18" charset="0"/>
+              </a:rPr>
+              <a:t> </a:t>
+            </a:r>
+            <a:r>
+              <a:rPr lang="ru-RU" sz="2000" dirty="0">
+                <a:latin typeface="Times New Roman" panose="02020603050405020304" pitchFamily="18" charset="0"/>
+                <a:cs typeface="Times New Roman" panose="02020603050405020304" pitchFamily="18" charset="0"/>
+              </a:rPr>
+              <a:t>находится на первом месте в списке предпочтений </a:t>
+            </a:r>
+            <a:r>
+              <a:rPr lang="en-US" sz="2000" i="1" dirty="0">
+                <a:latin typeface="Times New Roman" panose="02020603050405020304" pitchFamily="18" charset="0"/>
+                <a:cs typeface="Times New Roman" panose="02020603050405020304" pitchFamily="18" charset="0"/>
+              </a:rPr>
+              <a:t>m</a:t>
+            </a:r>
+            <a:r>
+              <a:rPr lang="ru-RU" sz="2000" dirty="0">
+                <a:latin typeface="Times New Roman" panose="02020603050405020304" pitchFamily="18" charset="0"/>
+                <a:cs typeface="Times New Roman" panose="02020603050405020304" pitchFamily="18" charset="0"/>
+              </a:rPr>
+              <a:t>. В этом случае в каждом устойчивом </a:t>
+            </a:r>
+            <a:r>
+              <a:rPr lang="ru-RU" sz="2000" dirty="0" err="1">
+                <a:latin typeface="Times New Roman" panose="02020603050405020304" pitchFamily="18" charset="0"/>
+                <a:cs typeface="Times New Roman" panose="02020603050405020304" pitchFamily="18" charset="0"/>
+              </a:rPr>
+              <a:t>паросочетании</a:t>
+            </a:r>
+            <a:r>
+              <a:rPr lang="ru-RU" sz="2000" dirty="0">
+                <a:latin typeface="Times New Roman" panose="02020603050405020304" pitchFamily="18" charset="0"/>
+                <a:cs typeface="Times New Roman" panose="02020603050405020304" pitchFamily="18" charset="0"/>
+              </a:rPr>
+              <a:t> </a:t>
+            </a:r>
+            <a:r>
+              <a:rPr lang="en" sz="2000" i="1" dirty="0">
+                <a:latin typeface="Times New Roman" panose="02020603050405020304" pitchFamily="18" charset="0"/>
+                <a:cs typeface="Times New Roman" panose="02020603050405020304" pitchFamily="18" charset="0"/>
+              </a:rPr>
+              <a:t>S</a:t>
+            </a:r>
+            <a:r>
+              <a:rPr lang="en" sz="2000" dirty="0">
+                <a:latin typeface="Times New Roman" panose="02020603050405020304" pitchFamily="18" charset="0"/>
+                <a:cs typeface="Times New Roman" panose="02020603050405020304" pitchFamily="18" charset="0"/>
+              </a:rPr>
+              <a:t> </a:t>
+            </a:r>
+            <a:r>
+              <a:rPr lang="ru-RU" sz="2000" dirty="0">
+                <a:latin typeface="Times New Roman" panose="02020603050405020304" pitchFamily="18" charset="0"/>
+                <a:cs typeface="Times New Roman" panose="02020603050405020304" pitchFamily="18" charset="0"/>
+              </a:rPr>
+              <a:t>для этой конфигурации пара (</a:t>
+            </a:r>
+            <a:r>
+              <a:rPr lang="en-US" sz="2000" i="1" dirty="0">
+                <a:latin typeface="Times New Roman" panose="02020603050405020304" pitchFamily="18" charset="0"/>
+                <a:cs typeface="Times New Roman" panose="02020603050405020304" pitchFamily="18" charset="0"/>
+              </a:rPr>
+              <a:t>m</a:t>
+            </a:r>
+            <a:r>
+              <a:rPr lang="ru-RU" sz="2000" dirty="0">
+                <a:latin typeface="Times New Roman" panose="02020603050405020304" pitchFamily="18" charset="0"/>
+                <a:cs typeface="Times New Roman" panose="02020603050405020304" pitchFamily="18" charset="0"/>
+              </a:rPr>
+              <a:t>, </a:t>
+            </a:r>
+            <a:r>
+              <a:rPr lang="en" sz="2000" i="1" dirty="0">
+                <a:latin typeface="Times New Roman" panose="02020603050405020304" pitchFamily="18" charset="0"/>
+                <a:cs typeface="Times New Roman" panose="02020603050405020304" pitchFamily="18" charset="0"/>
+              </a:rPr>
+              <a:t>w</a:t>
+            </a:r>
+            <a:r>
+              <a:rPr lang="en" sz="2000" dirty="0">
+                <a:latin typeface="Times New Roman" panose="02020603050405020304" pitchFamily="18" charset="0"/>
+                <a:cs typeface="Times New Roman" panose="02020603050405020304" pitchFamily="18" charset="0"/>
+              </a:rPr>
+              <a:t>) </a:t>
+            </a:r>
+            <a:r>
+              <a:rPr lang="ru-RU" sz="2000" dirty="0">
+                <a:latin typeface="Times New Roman" panose="02020603050405020304" pitchFamily="18" charset="0"/>
+                <a:cs typeface="Times New Roman" panose="02020603050405020304" pitchFamily="18" charset="0"/>
+              </a:rPr>
+              <a:t>принадлежит </a:t>
+            </a:r>
+            <a:r>
+              <a:rPr lang="en" sz="2000" i="1" dirty="0">
+                <a:latin typeface="Times New Roman" panose="02020603050405020304" pitchFamily="18" charset="0"/>
+                <a:cs typeface="Times New Roman" panose="02020603050405020304" pitchFamily="18" charset="0"/>
+              </a:rPr>
+              <a:t>S</a:t>
+            </a:r>
+            <a:r>
+              <a:rPr lang="en" sz="2000" dirty="0">
+                <a:latin typeface="Times New Roman" panose="02020603050405020304" pitchFamily="18" charset="0"/>
+                <a:cs typeface="Times New Roman" panose="02020603050405020304" pitchFamily="18" charset="0"/>
+              </a:rPr>
+              <a:t>.</a:t>
+            </a:r>
+          </a:p>
+        </p:txBody>
+      </p:sp>
+    </p:spTree>
+    <p:extLst>
+      <p:ext uri="{BB962C8B-B14F-4D97-AF65-F5344CB8AC3E}">
+        <p14:creationId xmlns:p14="http://schemas.microsoft.com/office/powerpoint/2010/main" val="885142227"/>
+      </p:ext>
+    </p:extLst>
+  </p:cSld>
+  <p:clrMapOvr>
+    <a:masterClrMapping/>
+  </p:clrMapOvr>
+</p:sld>
+</file>
+
+<file path=ppt/slides/slide13.xml><?xml version="1.0" encoding="utf-8"?>
+<p:sld xmlns:a="http://schemas.openxmlformats.org/drawingml/2006/main" xmlns:r="http://schemas.openxmlformats.org/officeDocument/2006/relationships" xmlns:p="http://schemas.openxmlformats.org/presentationml/2006/main">
+  <p:cSld>
+    <p:spTree>
+      <p:nvGrpSpPr>
+        <p:cNvPr id="1" name=""/>
+        <p:cNvGrpSpPr/>
+        <p:nvPr/>
+      </p:nvGrpSpPr>
+      <p:grpSpPr>
+        <a:xfrm>
+          <a:off x="0" y="0"/>
+          <a:ext cx="0" cy="0"/>
+          <a:chOff x="0" y="0"/>
+          <a:chExt cx="0" cy="0"/>
+        </a:xfrm>
+      </p:grpSpPr>
+      <p:sp>
+        <p:nvSpPr>
+          <p:cNvPr id="2" name="Заголовок 1">
+            <a:extLst>
+              <a:ext uri="{FF2B5EF4-FFF2-40B4-BE49-F238E27FC236}">
+                <a16:creationId xmlns:a16="http://schemas.microsoft.com/office/drawing/2014/main" id="{77CD686D-2DB2-3540-8EBA-23E0F01F2CDC}"/>
+              </a:ext>
+            </a:extLst>
+          </p:cNvPr>
+          <p:cNvSpPr>
+            <a:spLocks noGrp="1"/>
+          </p:cNvSpPr>
+          <p:nvPr>
+            <p:ph type="title"/>
+          </p:nvPr>
+        </p:nvSpPr>
+        <p:spPr>
+          <a:xfrm>
+            <a:off x="628650" y="0"/>
+            <a:ext cx="7886700" cy="602437"/>
+          </a:xfrm>
+        </p:spPr>
+        <p:txBody>
+          <a:bodyPr>
+            <a:normAutofit fontScale="90000"/>
+          </a:bodyPr>
+          <a:lstStyle/>
+          <a:p>
+            <a:r>
+              <a:rPr lang="ru-RU" dirty="0"/>
+              <a:t>Упражнение 3</a:t>
+            </a:r>
+          </a:p>
+        </p:txBody>
+      </p:sp>
+      <p:sp>
+        <p:nvSpPr>
+          <p:cNvPr id="3" name="Объект 2">
+            <a:extLst>
+              <a:ext uri="{FF2B5EF4-FFF2-40B4-BE49-F238E27FC236}">
+                <a16:creationId xmlns:a16="http://schemas.microsoft.com/office/drawing/2014/main" id="{01ECD37B-FAAE-E84B-8633-1212F4F38791}"/>
+              </a:ext>
+            </a:extLst>
+          </p:cNvPr>
+          <p:cNvSpPr>
+            <a:spLocks noGrp="1"/>
+          </p:cNvSpPr>
+          <p:nvPr>
+            <p:ph idx="1"/>
+          </p:nvPr>
+        </p:nvSpPr>
+        <p:spPr>
+          <a:xfrm>
+            <a:off x="628650" y="602437"/>
+            <a:ext cx="8292066" cy="6085442"/>
+          </a:xfrm>
+        </p:spPr>
+        <p:txBody>
+          <a:bodyPr>
+            <a:noAutofit/>
+          </a:bodyPr>
+          <a:lstStyle/>
+          <a:p>
+            <a:pPr marL="0" indent="0">
+              <a:spcBef>
+                <a:spcPts val="0"/>
+              </a:spcBef>
+              <a:spcAft>
+                <a:spcPts val="600"/>
+              </a:spcAft>
+              <a:buNone/>
+            </a:pPr>
+            <a:r>
+              <a:rPr lang="ru-RU" sz="1400" dirty="0">
+                <a:latin typeface="Times New Roman" panose="02020603050405020304" pitchFamily="18" charset="0"/>
+                <a:cs typeface="Times New Roman" panose="02020603050405020304" pitchFamily="18" charset="0"/>
+              </a:rPr>
+              <a:t>Существует много ситуаций, в которых можно задавать вопросы, относящиеся к некой разновидности принципа «устойчивости». В следующем примере используется формулировка, основанная на конкуренции между двумя компаниями.</a:t>
+            </a:r>
+          </a:p>
+          <a:p>
+            <a:pPr marL="0" indent="0">
+              <a:spcBef>
+                <a:spcPts val="0"/>
+              </a:spcBef>
+              <a:spcAft>
+                <a:spcPts val="600"/>
+              </a:spcAft>
+              <a:buNone/>
+            </a:pPr>
+            <a:r>
+              <a:rPr lang="ru-RU" sz="1400" dirty="0">
+                <a:latin typeface="Times New Roman" panose="02020603050405020304" pitchFamily="18" charset="0"/>
+                <a:cs typeface="Times New Roman" panose="02020603050405020304" pitchFamily="18" charset="0"/>
+              </a:rPr>
+              <a:t>Допустим, имеются две телевизионные сети; назовем их </a:t>
+            </a:r>
+            <a:r>
+              <a:rPr lang="ru-RU" sz="1400" i="1" dirty="0">
+                <a:latin typeface="Times New Roman" panose="02020603050405020304" pitchFamily="18" charset="0"/>
+                <a:cs typeface="Times New Roman" panose="02020603050405020304" pitchFamily="18" charset="0"/>
+              </a:rPr>
+              <a:t>А</a:t>
+            </a:r>
+            <a:r>
+              <a:rPr lang="ru-RU" sz="1400" dirty="0">
+                <a:latin typeface="Times New Roman" panose="02020603050405020304" pitchFamily="18" charset="0"/>
+                <a:cs typeface="Times New Roman" panose="02020603050405020304" pitchFamily="18" charset="0"/>
+              </a:rPr>
+              <a:t> и </a:t>
+            </a:r>
+            <a:r>
+              <a:rPr lang="ru-RU" sz="1400" i="1" dirty="0">
+                <a:latin typeface="Times New Roman" panose="02020603050405020304" pitchFamily="18" charset="0"/>
+                <a:cs typeface="Times New Roman" panose="02020603050405020304" pitchFamily="18" charset="0"/>
+              </a:rPr>
+              <a:t>В</a:t>
+            </a:r>
+            <a:r>
+              <a:rPr lang="ru-RU" sz="1400" dirty="0">
+                <a:latin typeface="Times New Roman" panose="02020603050405020304" pitchFamily="18" charset="0"/>
+                <a:cs typeface="Times New Roman" panose="02020603050405020304" pitchFamily="18" charset="0"/>
+              </a:rPr>
+              <a:t>. Также доступны </a:t>
+            </a:r>
+            <a:r>
+              <a:rPr lang="ru-RU" sz="1400" i="1" dirty="0" err="1">
+                <a:latin typeface="Times New Roman" panose="02020603050405020304" pitchFamily="18" charset="0"/>
+                <a:cs typeface="Times New Roman" panose="02020603050405020304" pitchFamily="18" charset="0"/>
+              </a:rPr>
+              <a:t>n</a:t>
+            </a:r>
+            <a:r>
+              <a:rPr lang="ru-RU" sz="1400" dirty="0">
+                <a:latin typeface="Times New Roman" panose="02020603050405020304" pitchFamily="18" charset="0"/>
+                <a:cs typeface="Times New Roman" panose="02020603050405020304" pitchFamily="18" charset="0"/>
+              </a:rPr>
+              <a:t> программных окон в течение времени массового просмотра, а каждая сеть проводит </a:t>
+            </a:r>
+            <a:r>
+              <a:rPr lang="en-US" sz="1400" i="1" dirty="0">
+                <a:latin typeface="Times New Roman" panose="02020603050405020304" pitchFamily="18" charset="0"/>
+                <a:cs typeface="Times New Roman" panose="02020603050405020304" pitchFamily="18" charset="0"/>
+              </a:rPr>
+              <a:t>n</a:t>
+            </a:r>
+            <a:r>
+              <a:rPr lang="ru-RU" sz="1400" dirty="0">
+                <a:latin typeface="Times New Roman" panose="02020603050405020304" pitchFamily="18" charset="0"/>
+                <a:cs typeface="Times New Roman" panose="02020603050405020304" pitchFamily="18" charset="0"/>
+              </a:rPr>
+              <a:t> телевизионных передач. Каждая сеть хочет создать расписание — схему распределения передач по разным окнам, чтобы обеспечить себе как можно большую долю рынка.</a:t>
+            </a:r>
+          </a:p>
+          <a:p>
+            <a:pPr marL="0" indent="0">
+              <a:spcBef>
+                <a:spcPts val="0"/>
+              </a:spcBef>
+              <a:spcAft>
+                <a:spcPts val="600"/>
+              </a:spcAft>
+              <a:buNone/>
+            </a:pPr>
+            <a:r>
+              <a:rPr lang="ru-RU" sz="1400" dirty="0">
+                <a:latin typeface="Times New Roman" panose="02020603050405020304" pitchFamily="18" charset="0"/>
+                <a:cs typeface="Times New Roman" panose="02020603050405020304" pitchFamily="18" charset="0"/>
+              </a:rPr>
+              <a:t>Следующий способ поможет сравнить, насколько хорошо две сети справляются со своей задачей, исходя из их расписания. У каждой передачи имеется фиксированный рейтинг, основанный на количестве людей, посмотревших передачу в прошлом году; будем считать, что рейтинги двух передач никогда не совпадают. Сеть выигрывает заданное окно, если передача, которую она ставит в это окно, обладает более высоким рейтингом, чем передача в расписании других сетей для этого окна. Цель каждой сети — захватить как можно больше окон.</a:t>
+            </a:r>
+          </a:p>
+          <a:p>
+            <a:pPr marL="0" indent="0">
+              <a:spcBef>
+                <a:spcPts val="0"/>
+              </a:spcBef>
+              <a:spcAft>
+                <a:spcPts val="600"/>
+              </a:spcAft>
+              <a:buNone/>
+            </a:pPr>
+            <a:r>
+              <a:rPr lang="ru-RU" sz="1400" dirty="0">
+                <a:latin typeface="Times New Roman" panose="02020603050405020304" pitchFamily="18" charset="0"/>
+                <a:cs typeface="Times New Roman" panose="02020603050405020304" pitchFamily="18" charset="0"/>
+              </a:rPr>
+              <a:t>Допустим, в первую неделю осеннего сезона сеть </a:t>
+            </a:r>
+            <a:r>
+              <a:rPr lang="ru-RU" sz="1400" i="1" dirty="0">
+                <a:latin typeface="Times New Roman" panose="02020603050405020304" pitchFamily="18" charset="0"/>
+                <a:cs typeface="Times New Roman" panose="02020603050405020304" pitchFamily="18" charset="0"/>
+              </a:rPr>
+              <a:t>А </a:t>
+            </a:r>
+            <a:r>
+              <a:rPr lang="ru-RU" sz="1400" dirty="0">
+                <a:latin typeface="Times New Roman" panose="02020603050405020304" pitchFamily="18" charset="0"/>
+                <a:cs typeface="Times New Roman" panose="02020603050405020304" pitchFamily="18" charset="0"/>
+              </a:rPr>
+              <a:t>публикует расписание </a:t>
+            </a:r>
+            <a:r>
+              <a:rPr lang="en" sz="1400" i="1" dirty="0">
+                <a:latin typeface="Times New Roman" panose="02020603050405020304" pitchFamily="18" charset="0"/>
+                <a:cs typeface="Times New Roman" panose="02020603050405020304" pitchFamily="18" charset="0"/>
+              </a:rPr>
+              <a:t>S</a:t>
+            </a:r>
+            <a:r>
+              <a:rPr lang="en" sz="1400" dirty="0">
+                <a:latin typeface="Times New Roman" panose="02020603050405020304" pitchFamily="18" charset="0"/>
+                <a:cs typeface="Times New Roman" panose="02020603050405020304" pitchFamily="18" charset="0"/>
+              </a:rPr>
+              <a:t>, </a:t>
+            </a:r>
+            <a:r>
+              <a:rPr lang="ru-RU" sz="1400" dirty="0">
+                <a:latin typeface="Times New Roman" panose="02020603050405020304" pitchFamily="18" charset="0"/>
+                <a:cs typeface="Times New Roman" panose="02020603050405020304" pitchFamily="18" charset="0"/>
+              </a:rPr>
+              <a:t>а сеть </a:t>
+            </a:r>
+            <a:r>
+              <a:rPr lang="ru-RU" sz="1400" i="1" dirty="0">
+                <a:latin typeface="Times New Roman" panose="02020603050405020304" pitchFamily="18" charset="0"/>
+                <a:cs typeface="Times New Roman" panose="02020603050405020304" pitchFamily="18" charset="0"/>
+              </a:rPr>
+              <a:t>В</a:t>
+            </a:r>
+            <a:r>
+              <a:rPr lang="ru-RU" sz="1400" dirty="0">
+                <a:latin typeface="Times New Roman" panose="02020603050405020304" pitchFamily="18" charset="0"/>
+                <a:cs typeface="Times New Roman" panose="02020603050405020304" pitchFamily="18" charset="0"/>
+              </a:rPr>
+              <a:t> — расписание </a:t>
+            </a:r>
+            <a:r>
+              <a:rPr lang="ru-RU" sz="1400" i="1" dirty="0">
+                <a:latin typeface="Times New Roman" panose="02020603050405020304" pitchFamily="18" charset="0"/>
+                <a:cs typeface="Times New Roman" panose="02020603050405020304" pitchFamily="18" charset="0"/>
+              </a:rPr>
+              <a:t>Т</a:t>
+            </a:r>
+            <a:r>
+              <a:rPr lang="ru-RU" sz="1400" dirty="0">
+                <a:latin typeface="Times New Roman" panose="02020603050405020304" pitchFamily="18" charset="0"/>
+                <a:cs typeface="Times New Roman" panose="02020603050405020304" pitchFamily="18" charset="0"/>
+              </a:rPr>
+              <a:t>. На основе этой пары расписаний каждая сеть захватывает некоторые окна в соответствии с приведенным выше правилом. Пара расписаний (</a:t>
+            </a:r>
+            <a:r>
+              <a:rPr lang="en" sz="1400" i="1" dirty="0">
+                <a:latin typeface="Times New Roman" panose="02020603050405020304" pitchFamily="18" charset="0"/>
+                <a:cs typeface="Times New Roman" panose="02020603050405020304" pitchFamily="18" charset="0"/>
+              </a:rPr>
+              <a:t>S</a:t>
+            </a:r>
+            <a:r>
+              <a:rPr lang="en" sz="1400" dirty="0">
+                <a:latin typeface="Times New Roman" panose="02020603050405020304" pitchFamily="18" charset="0"/>
+                <a:cs typeface="Times New Roman" panose="02020603050405020304" pitchFamily="18" charset="0"/>
+              </a:rPr>
+              <a:t>, </a:t>
+            </a:r>
+            <a:r>
+              <a:rPr lang="ru-RU" sz="1400" i="1" dirty="0">
+                <a:latin typeface="Times New Roman" panose="02020603050405020304" pitchFamily="18" charset="0"/>
+                <a:cs typeface="Times New Roman" panose="02020603050405020304" pitchFamily="18" charset="0"/>
+              </a:rPr>
+              <a:t>Т</a:t>
+            </a:r>
+            <a:r>
+              <a:rPr lang="ru-RU" sz="1400" dirty="0">
+                <a:latin typeface="Times New Roman" panose="02020603050405020304" pitchFamily="18" charset="0"/>
+                <a:cs typeface="Times New Roman" panose="02020603050405020304" pitchFamily="18" charset="0"/>
+              </a:rPr>
+              <a:t>) будет называться устойчивой, если ни одна из сетей не может в одностороннем порядке изменить свое расписание и получить дополнительные окна. Иначе говоря, не существует расписания </a:t>
+            </a:r>
+            <a:r>
+              <a:rPr lang="en" sz="1400" i="1" dirty="0">
+                <a:latin typeface="Times New Roman" panose="02020603050405020304" pitchFamily="18" charset="0"/>
+                <a:cs typeface="Times New Roman" panose="02020603050405020304" pitchFamily="18" charset="0"/>
+              </a:rPr>
+              <a:t>S'</a:t>
+            </a:r>
+            <a:r>
+              <a:rPr lang="en" sz="1400" dirty="0">
+                <a:latin typeface="Times New Roman" panose="02020603050405020304" pitchFamily="18" charset="0"/>
+                <a:cs typeface="Times New Roman" panose="02020603050405020304" pitchFamily="18" charset="0"/>
+              </a:rPr>
+              <a:t> </a:t>
+            </a:r>
+            <a:r>
+              <a:rPr lang="ru-RU" sz="1400" dirty="0">
+                <a:latin typeface="Times New Roman" panose="02020603050405020304" pitchFamily="18" charset="0"/>
+                <a:cs typeface="Times New Roman" panose="02020603050405020304" pitchFamily="18" charset="0"/>
+              </a:rPr>
+              <a:t>такого, что сеть </a:t>
+            </a:r>
+            <a:r>
+              <a:rPr lang="ru-RU" sz="1400" i="1" dirty="0">
+                <a:latin typeface="Times New Roman" panose="02020603050405020304" pitchFamily="18" charset="0"/>
+                <a:cs typeface="Times New Roman" panose="02020603050405020304" pitchFamily="18" charset="0"/>
+              </a:rPr>
+              <a:t>А</a:t>
+            </a:r>
+            <a:r>
+              <a:rPr lang="ru-RU" sz="1400" dirty="0">
+                <a:latin typeface="Times New Roman" panose="02020603050405020304" pitchFamily="18" charset="0"/>
+                <a:cs typeface="Times New Roman" panose="02020603050405020304" pitchFamily="18" charset="0"/>
+              </a:rPr>
+              <a:t> с парой (</a:t>
+            </a:r>
+            <a:r>
+              <a:rPr lang="en" sz="1400" i="1" dirty="0">
+                <a:latin typeface="Times New Roman" panose="02020603050405020304" pitchFamily="18" charset="0"/>
+                <a:cs typeface="Times New Roman" panose="02020603050405020304" pitchFamily="18" charset="0"/>
+              </a:rPr>
+              <a:t>S'</a:t>
+            </a:r>
+            <a:r>
+              <a:rPr lang="en" sz="1400" dirty="0">
+                <a:latin typeface="Times New Roman" panose="02020603050405020304" pitchFamily="18" charset="0"/>
+                <a:cs typeface="Times New Roman" panose="02020603050405020304" pitchFamily="18" charset="0"/>
+              </a:rPr>
+              <a:t>, </a:t>
+            </a:r>
+            <a:r>
+              <a:rPr lang="ru-RU" sz="1400" i="1" dirty="0">
+                <a:latin typeface="Times New Roman" panose="02020603050405020304" pitchFamily="18" charset="0"/>
+                <a:cs typeface="Times New Roman" panose="02020603050405020304" pitchFamily="18" charset="0"/>
+              </a:rPr>
+              <a:t>Т</a:t>
+            </a:r>
+            <a:r>
+              <a:rPr lang="ru-RU" sz="1400" dirty="0">
+                <a:latin typeface="Times New Roman" panose="02020603050405020304" pitchFamily="18" charset="0"/>
+                <a:cs typeface="Times New Roman" panose="02020603050405020304" pitchFamily="18" charset="0"/>
+              </a:rPr>
+              <a:t>) получит больше окон, чем с парой (</a:t>
+            </a:r>
+            <a:r>
+              <a:rPr lang="en" sz="1400" i="1" dirty="0">
+                <a:latin typeface="Times New Roman" panose="02020603050405020304" pitchFamily="18" charset="0"/>
+                <a:cs typeface="Times New Roman" panose="02020603050405020304" pitchFamily="18" charset="0"/>
+              </a:rPr>
+              <a:t>S</a:t>
+            </a:r>
+            <a:r>
+              <a:rPr lang="en" sz="1400" dirty="0">
+                <a:latin typeface="Times New Roman" panose="02020603050405020304" pitchFamily="18" charset="0"/>
+                <a:cs typeface="Times New Roman" panose="02020603050405020304" pitchFamily="18" charset="0"/>
+              </a:rPr>
+              <a:t>, </a:t>
+            </a:r>
+            <a:r>
+              <a:rPr lang="ru-RU" sz="1400" i="1" dirty="0">
+                <a:latin typeface="Times New Roman" panose="02020603050405020304" pitchFamily="18" charset="0"/>
+                <a:cs typeface="Times New Roman" panose="02020603050405020304" pitchFamily="18" charset="0"/>
+              </a:rPr>
+              <a:t>Т</a:t>
+            </a:r>
+            <a:r>
+              <a:rPr lang="ru-RU" sz="1400" dirty="0">
+                <a:latin typeface="Times New Roman" panose="02020603050405020304" pitchFamily="18" charset="0"/>
+                <a:cs typeface="Times New Roman" panose="02020603050405020304" pitchFamily="18" charset="0"/>
+              </a:rPr>
+              <a:t>). По соображениям симметрии также не существует расписания </a:t>
+            </a:r>
+            <a:r>
+              <a:rPr lang="ru-RU" sz="1400" i="1" dirty="0">
+                <a:latin typeface="Times New Roman" panose="02020603050405020304" pitchFamily="18" charset="0"/>
+                <a:cs typeface="Times New Roman" panose="02020603050405020304" pitchFamily="18" charset="0"/>
+              </a:rPr>
+              <a:t>Т</a:t>
+            </a:r>
+            <a:r>
+              <a:rPr lang="en" sz="1400" i="1" dirty="0">
+                <a:latin typeface="Times New Roman" panose="02020603050405020304" pitchFamily="18" charset="0"/>
+                <a:cs typeface="Times New Roman" panose="02020603050405020304" pitchFamily="18" charset="0"/>
+              </a:rPr>
+              <a:t>'</a:t>
+            </a:r>
+            <a:r>
+              <a:rPr lang="en" sz="1400" dirty="0">
+                <a:latin typeface="Times New Roman" panose="02020603050405020304" pitchFamily="18" charset="0"/>
+                <a:cs typeface="Times New Roman" panose="02020603050405020304" pitchFamily="18" charset="0"/>
+              </a:rPr>
+              <a:t>, </a:t>
+            </a:r>
+            <a:r>
+              <a:rPr lang="ru-RU" sz="1400" dirty="0">
+                <a:latin typeface="Times New Roman" panose="02020603050405020304" pitchFamily="18" charset="0"/>
+                <a:cs typeface="Times New Roman" panose="02020603050405020304" pitchFamily="18" charset="0"/>
+              </a:rPr>
+              <a:t>с которым сеть </a:t>
+            </a:r>
+            <a:r>
+              <a:rPr lang="ru-RU" sz="1400" i="1" dirty="0">
+                <a:latin typeface="Times New Roman" panose="02020603050405020304" pitchFamily="18" charset="0"/>
+                <a:cs typeface="Times New Roman" panose="02020603050405020304" pitchFamily="18" charset="0"/>
+              </a:rPr>
+              <a:t>В</a:t>
+            </a:r>
+            <a:r>
+              <a:rPr lang="ru-RU" sz="1400" dirty="0">
+                <a:latin typeface="Times New Roman" panose="02020603050405020304" pitchFamily="18" charset="0"/>
+                <a:cs typeface="Times New Roman" panose="02020603050405020304" pitchFamily="18" charset="0"/>
+              </a:rPr>
+              <a:t> со своей парой (</a:t>
+            </a:r>
+            <a:r>
+              <a:rPr lang="en" sz="1400" i="1" dirty="0">
+                <a:latin typeface="Times New Roman" panose="02020603050405020304" pitchFamily="18" charset="0"/>
+                <a:cs typeface="Times New Roman" panose="02020603050405020304" pitchFamily="18" charset="0"/>
+              </a:rPr>
+              <a:t>S</a:t>
+            </a:r>
+            <a:r>
+              <a:rPr lang="en" sz="1400" dirty="0">
+                <a:latin typeface="Times New Roman" panose="02020603050405020304" pitchFamily="18" charset="0"/>
+                <a:cs typeface="Times New Roman" panose="02020603050405020304" pitchFamily="18" charset="0"/>
+              </a:rPr>
+              <a:t>, </a:t>
+            </a:r>
+            <a:r>
+              <a:rPr lang="ru-RU" sz="1400" i="1" dirty="0">
+                <a:latin typeface="Times New Roman" panose="02020603050405020304" pitchFamily="18" charset="0"/>
+                <a:cs typeface="Times New Roman" panose="02020603050405020304" pitchFamily="18" charset="0"/>
+              </a:rPr>
+              <a:t>Т</a:t>
+            </a:r>
+            <a:r>
+              <a:rPr lang="en" sz="1400" i="1" dirty="0">
+                <a:latin typeface="Times New Roman" panose="02020603050405020304" pitchFamily="18" charset="0"/>
+                <a:cs typeface="Times New Roman" panose="02020603050405020304" pitchFamily="18" charset="0"/>
+              </a:rPr>
+              <a:t>'</a:t>
+            </a:r>
+            <a:r>
+              <a:rPr lang="en" sz="1400" dirty="0">
+                <a:latin typeface="Times New Roman" panose="02020603050405020304" pitchFamily="18" charset="0"/>
+                <a:cs typeface="Times New Roman" panose="02020603050405020304" pitchFamily="18" charset="0"/>
+              </a:rPr>
+              <a:t>) </a:t>
+            </a:r>
+            <a:r>
+              <a:rPr lang="ru-RU" sz="1400" dirty="0">
+                <a:latin typeface="Times New Roman" panose="02020603050405020304" pitchFamily="18" charset="0"/>
+                <a:cs typeface="Times New Roman" panose="02020603050405020304" pitchFamily="18" charset="0"/>
+              </a:rPr>
+              <a:t>захватит больше окон, чем с парой (</a:t>
+            </a:r>
+            <a:r>
+              <a:rPr lang="en" sz="1400" i="1" dirty="0">
+                <a:latin typeface="Times New Roman" panose="02020603050405020304" pitchFamily="18" charset="0"/>
+                <a:cs typeface="Times New Roman" panose="02020603050405020304" pitchFamily="18" charset="0"/>
+              </a:rPr>
+              <a:t>S</a:t>
+            </a:r>
+            <a:r>
+              <a:rPr lang="en" sz="1400" dirty="0">
+                <a:latin typeface="Times New Roman" panose="02020603050405020304" pitchFamily="18" charset="0"/>
+                <a:cs typeface="Times New Roman" panose="02020603050405020304" pitchFamily="18" charset="0"/>
+              </a:rPr>
+              <a:t>, </a:t>
+            </a:r>
+            <a:r>
+              <a:rPr lang="ru-RU" sz="1400" i="1" dirty="0">
+                <a:latin typeface="Times New Roman" panose="02020603050405020304" pitchFamily="18" charset="0"/>
+                <a:cs typeface="Times New Roman" panose="02020603050405020304" pitchFamily="18" charset="0"/>
+              </a:rPr>
+              <a:t>Т</a:t>
+            </a:r>
+            <a:r>
+              <a:rPr lang="ru-RU" sz="1400" dirty="0">
+                <a:latin typeface="Times New Roman" panose="02020603050405020304" pitchFamily="18" charset="0"/>
+                <a:cs typeface="Times New Roman" panose="02020603050405020304" pitchFamily="18" charset="0"/>
+              </a:rPr>
+              <a:t>).</a:t>
+            </a:r>
+          </a:p>
+          <a:p>
+            <a:pPr marL="0" indent="0">
+              <a:spcBef>
+                <a:spcPts val="0"/>
+              </a:spcBef>
+              <a:spcAft>
+                <a:spcPts val="600"/>
+              </a:spcAft>
+              <a:buNone/>
+            </a:pPr>
+            <a:r>
+              <a:rPr lang="ru-RU" sz="1400" dirty="0">
+                <a:latin typeface="Times New Roman" panose="02020603050405020304" pitchFamily="18" charset="0"/>
+                <a:cs typeface="Times New Roman" panose="02020603050405020304" pitchFamily="18" charset="0"/>
+              </a:rPr>
+              <a:t>Аналогия вопроса Гейла и Шепли для подобной устойчивости выглядит так: можно ли утверждать, что для каждого множества телепередач и оценок всегда существует устойчивая пара расписаний? Чтобы ответить на этот вопрос, сделайте одно из двух:</a:t>
+            </a:r>
+          </a:p>
+          <a:p>
+            <a:pPr marL="0" indent="0">
+              <a:spcBef>
+                <a:spcPts val="0"/>
+              </a:spcBef>
+              <a:spcAft>
+                <a:spcPts val="600"/>
+              </a:spcAft>
+              <a:buNone/>
+            </a:pPr>
+            <a:r>
+              <a:rPr lang="ru-RU" sz="1400" dirty="0">
+                <a:latin typeface="Times New Roman" panose="02020603050405020304" pitchFamily="18" charset="0"/>
+                <a:cs typeface="Times New Roman" panose="02020603050405020304" pitchFamily="18" charset="0"/>
+              </a:rPr>
+              <a:t>(а) приведите алгоритм, который для любого множества передач и связанных с ними оценок строит устойчивую пару расписаний; </a:t>
+            </a:r>
+          </a:p>
+          <a:p>
+            <a:pPr marL="0" indent="0">
+              <a:spcBef>
+                <a:spcPts val="0"/>
+              </a:spcBef>
+              <a:spcAft>
+                <a:spcPts val="600"/>
+              </a:spcAft>
+              <a:buNone/>
+            </a:pPr>
+            <a:r>
+              <a:rPr lang="ru-RU" sz="1400" dirty="0">
+                <a:latin typeface="Times New Roman" panose="02020603050405020304" pitchFamily="18" charset="0"/>
+                <a:cs typeface="Times New Roman" panose="02020603050405020304" pitchFamily="18" charset="0"/>
+              </a:rPr>
+              <a:t>или</a:t>
+            </a:r>
+          </a:p>
+          <a:p>
+            <a:pPr marL="0" indent="0">
+              <a:spcBef>
+                <a:spcPts val="0"/>
+              </a:spcBef>
+              <a:spcAft>
+                <a:spcPts val="600"/>
+              </a:spcAft>
+              <a:buNone/>
+            </a:pPr>
+            <a:r>
+              <a:rPr lang="ru-RU" sz="1400" dirty="0">
+                <a:latin typeface="Times New Roman" panose="02020603050405020304" pitchFamily="18" charset="0"/>
+                <a:cs typeface="Times New Roman" panose="02020603050405020304" pitchFamily="18" charset="0"/>
+              </a:rPr>
+              <a:t>(б) приведите пример множества передач и связанных с ними оценок, для которого не существует устойчивой пары расписаний.</a:t>
+            </a:r>
+          </a:p>
+        </p:txBody>
+      </p:sp>
+    </p:spTree>
+    <p:extLst>
+      <p:ext uri="{BB962C8B-B14F-4D97-AF65-F5344CB8AC3E}">
+        <p14:creationId xmlns:p14="http://schemas.microsoft.com/office/powerpoint/2010/main" val="1343919182"/>
+      </p:ext>
+    </p:extLst>
+  </p:cSld>
+  <p:clrMapOvr>
+    <a:masterClrMapping/>
+  </p:clrMapOvr>
+</p:sld>
+</file>
+
+<file path=ppt/slides/slide14.xml><?xml version="1.0" encoding="utf-8"?>
+<p:sld xmlns:a="http://schemas.openxmlformats.org/drawingml/2006/main" xmlns:r="http://schemas.openxmlformats.org/officeDocument/2006/relationships" xmlns:p="http://schemas.openxmlformats.org/presentationml/2006/main">
+  <p:cSld>
+    <p:spTree>
+      <p:nvGrpSpPr>
+        <p:cNvPr id="1" name=""/>
+        <p:cNvGrpSpPr/>
+        <p:nvPr/>
+      </p:nvGrpSpPr>
+      <p:grpSpPr>
+        <a:xfrm>
+          <a:off x="0" y="0"/>
+          <a:ext cx="0" cy="0"/>
+          <a:chOff x="0" y="0"/>
+          <a:chExt cx="0" cy="0"/>
+        </a:xfrm>
+      </p:grpSpPr>
+      <p:sp>
+        <p:nvSpPr>
+          <p:cNvPr id="2" name="Заголовок 1">
+            <a:extLst>
+              <a:ext uri="{FF2B5EF4-FFF2-40B4-BE49-F238E27FC236}">
+                <a16:creationId xmlns:a16="http://schemas.microsoft.com/office/drawing/2014/main" id="{64D1E9D5-5D31-044D-80D6-0761486A942C}"/>
+              </a:ext>
+            </a:extLst>
+          </p:cNvPr>
+          <p:cNvSpPr>
+            <a:spLocks noGrp="1"/>
+          </p:cNvSpPr>
+          <p:nvPr>
+            <p:ph type="title"/>
+          </p:nvPr>
+        </p:nvSpPr>
+        <p:spPr>
+          <a:xfrm>
+            <a:off x="628650" y="365127"/>
+            <a:ext cx="7886700" cy="464214"/>
+          </a:xfrm>
+        </p:spPr>
+        <p:txBody>
+          <a:bodyPr>
+            <a:normAutofit fontScale="90000"/>
+          </a:bodyPr>
+          <a:lstStyle/>
+          <a:p>
+            <a:r>
+              <a:rPr lang="ru-RU" dirty="0"/>
+              <a:t>Упражнение 4</a:t>
+            </a:r>
+          </a:p>
+        </p:txBody>
+      </p:sp>
+      <p:sp>
+        <p:nvSpPr>
+          <p:cNvPr id="3" name="Объект 2">
+            <a:extLst>
+              <a:ext uri="{FF2B5EF4-FFF2-40B4-BE49-F238E27FC236}">
+                <a16:creationId xmlns:a16="http://schemas.microsoft.com/office/drawing/2014/main" id="{397E55B0-3D45-1847-8754-908169DB1FF8}"/>
+              </a:ext>
+            </a:extLst>
+          </p:cNvPr>
+          <p:cNvSpPr>
+            <a:spLocks noGrp="1"/>
+          </p:cNvSpPr>
+          <p:nvPr>
+            <p:ph idx="1"/>
+          </p:nvPr>
+        </p:nvSpPr>
+        <p:spPr>
+          <a:xfrm>
+            <a:off x="628650" y="956930"/>
+            <a:ext cx="7886700" cy="5773479"/>
+          </a:xfrm>
+        </p:spPr>
+        <p:txBody>
+          <a:bodyPr>
+            <a:noAutofit/>
+          </a:bodyPr>
+          <a:lstStyle/>
+          <a:p>
+            <a:pPr marL="0" indent="0">
+              <a:spcBef>
+                <a:spcPts val="400"/>
+              </a:spcBef>
+              <a:buNone/>
+            </a:pPr>
+            <a:r>
+              <a:rPr lang="ru-RU" sz="1400" dirty="0">
+                <a:latin typeface="Times New Roman" panose="02020603050405020304" pitchFamily="18" charset="0"/>
+                <a:cs typeface="Times New Roman" panose="02020603050405020304" pitchFamily="18" charset="0"/>
+              </a:rPr>
+              <a:t>Гейл и Шепли опубликовали свою статью о задаче устойчивых </a:t>
+            </a:r>
+            <a:r>
+              <a:rPr lang="ru-RU" sz="1400" dirty="0" err="1">
+                <a:latin typeface="Times New Roman" panose="02020603050405020304" pitchFamily="18" charset="0"/>
+                <a:cs typeface="Times New Roman" panose="02020603050405020304" pitchFamily="18" charset="0"/>
+              </a:rPr>
+              <a:t>паросочетаний</a:t>
+            </a:r>
+            <a:r>
+              <a:rPr lang="ru-RU" sz="1400" dirty="0">
+                <a:latin typeface="Times New Roman" panose="02020603050405020304" pitchFamily="18" charset="0"/>
+                <a:cs typeface="Times New Roman" panose="02020603050405020304" pitchFamily="18" charset="0"/>
+              </a:rPr>
+              <a:t> в 1962 году; однако разновидность их алгоритма к тому времени уже почти 10 лет использовалась Национальной программой распределения студентов- медиков по больницам. По сути, ситуация выглядела так: было т больниц, в каждой из которых имелось некоторое количество вакансий. Также было п студентов-медиков, которые получали диплом и были заинтересованы в поступлении в одну из больниц. Каждая больница строила оценки студентов в порядке предпочтения, и каждый студент строил оценки больниц в порядке предпочтения. Будем считать, что количество выпускников превышает количество доступных вакансий в т больницах. Естественно, задача заключалась в поиске способа связывания каждого студента не более чем с одной больницей, при котором были бы заполнены все вакансии во всех больницах. (Так как предполагается, что количество студентов превышает количество вакансий, некоторые студенты не будут приняты ни в одну из больниц.)</a:t>
+            </a:r>
+          </a:p>
+          <a:p>
+            <a:pPr marL="0" indent="0">
+              <a:spcBef>
+                <a:spcPts val="400"/>
+              </a:spcBef>
+              <a:buNone/>
+            </a:pPr>
+            <a:r>
+              <a:rPr lang="ru-RU" sz="1400" dirty="0">
+                <a:latin typeface="Times New Roman" panose="02020603050405020304" pitchFamily="18" charset="0"/>
+                <a:cs typeface="Times New Roman" panose="02020603050405020304" pitchFamily="18" charset="0"/>
+              </a:rPr>
+              <a:t>Распределение студентов по больницам называется устойчивым, если не встречается ни одна из следующих ситуаций:</a:t>
+            </a:r>
+          </a:p>
+          <a:p>
+            <a:pPr marL="0" indent="0">
+              <a:spcBef>
+                <a:spcPts val="400"/>
+              </a:spcBef>
+              <a:buNone/>
+            </a:pPr>
+            <a:r>
+              <a:rPr lang="ru-RU" sz="1400" dirty="0">
+                <a:latin typeface="Times New Roman" panose="02020603050405020304" pitchFamily="18" charset="0"/>
+                <a:cs typeface="Times New Roman" panose="02020603050405020304" pitchFamily="18" charset="0"/>
+              </a:rPr>
+              <a:t>1. Неустойчивость первого типа: имеются студенты </a:t>
+            </a:r>
+            <a:r>
+              <a:rPr lang="en" sz="1400" dirty="0">
+                <a:latin typeface="Times New Roman" panose="02020603050405020304" pitchFamily="18" charset="0"/>
+                <a:cs typeface="Times New Roman" panose="02020603050405020304" pitchFamily="18" charset="0"/>
+              </a:rPr>
+              <a:t>s </a:t>
+            </a:r>
+            <a:r>
+              <a:rPr lang="ru-RU" sz="1400" dirty="0">
+                <a:latin typeface="Times New Roman" panose="02020603050405020304" pitchFamily="18" charset="0"/>
+                <a:cs typeface="Times New Roman" panose="02020603050405020304" pitchFamily="18" charset="0"/>
+              </a:rPr>
+              <a:t>и </a:t>
+            </a:r>
+            <a:r>
+              <a:rPr lang="en" sz="1400" dirty="0">
+                <a:latin typeface="Times New Roman" panose="02020603050405020304" pitchFamily="18" charset="0"/>
+                <a:cs typeface="Times New Roman" panose="02020603050405020304" pitchFamily="18" charset="0"/>
+              </a:rPr>
+              <a:t>s', </a:t>
+            </a:r>
+            <a:r>
+              <a:rPr lang="ru-RU" sz="1400" dirty="0">
+                <a:latin typeface="Times New Roman" panose="02020603050405020304" pitchFamily="18" charset="0"/>
+                <a:cs typeface="Times New Roman" panose="02020603050405020304" pitchFamily="18" charset="0"/>
+              </a:rPr>
+              <a:t>а также больница </a:t>
+            </a:r>
+            <a:r>
+              <a:rPr lang="en" sz="1400" dirty="0">
+                <a:latin typeface="Times New Roman" panose="02020603050405020304" pitchFamily="18" charset="0"/>
+                <a:cs typeface="Times New Roman" panose="02020603050405020304" pitchFamily="18" charset="0"/>
+              </a:rPr>
+              <a:t>h, </a:t>
+            </a:r>
+            <a:r>
+              <a:rPr lang="ru-RU" sz="1400" dirty="0">
+                <a:latin typeface="Times New Roman" panose="02020603050405020304" pitchFamily="18" charset="0"/>
+                <a:cs typeface="Times New Roman" panose="02020603050405020304" pitchFamily="18" charset="0"/>
+              </a:rPr>
+              <a:t>для которых:</a:t>
+            </a:r>
+          </a:p>
+          <a:p>
+            <a:pPr marL="0" indent="0">
+              <a:spcBef>
+                <a:spcPts val="400"/>
+              </a:spcBef>
+              <a:buNone/>
+            </a:pPr>
+            <a:r>
+              <a:rPr lang="ru-RU" sz="1400" dirty="0">
+                <a:latin typeface="Times New Roman" panose="02020603050405020304" pitchFamily="18" charset="0"/>
+                <a:cs typeface="Times New Roman" panose="02020603050405020304" pitchFamily="18" charset="0"/>
+              </a:rPr>
+              <a:t>• 	</a:t>
+            </a:r>
+            <a:r>
+              <a:rPr lang="en" sz="1400" dirty="0">
+                <a:latin typeface="Times New Roman" panose="02020603050405020304" pitchFamily="18" charset="0"/>
+                <a:cs typeface="Times New Roman" panose="02020603050405020304" pitchFamily="18" charset="0"/>
+              </a:rPr>
+              <a:t>s </a:t>
+            </a:r>
+            <a:r>
+              <a:rPr lang="ru-RU" sz="1400" dirty="0">
+                <a:latin typeface="Times New Roman" panose="02020603050405020304" pitchFamily="18" charset="0"/>
+                <a:cs typeface="Times New Roman" panose="02020603050405020304" pitchFamily="18" charset="0"/>
+              </a:rPr>
+              <a:t>назначается в </a:t>
+            </a:r>
+            <a:r>
+              <a:rPr lang="en" sz="1400" dirty="0">
+                <a:latin typeface="Times New Roman" panose="02020603050405020304" pitchFamily="18" charset="0"/>
+                <a:cs typeface="Times New Roman" panose="02020603050405020304" pitchFamily="18" charset="0"/>
+              </a:rPr>
+              <a:t>h,</a:t>
+            </a:r>
+          </a:p>
+          <a:p>
+            <a:pPr marL="0" indent="0">
+              <a:spcBef>
+                <a:spcPts val="400"/>
+              </a:spcBef>
+              <a:buNone/>
+            </a:pPr>
+            <a:r>
+              <a:rPr lang="en" sz="1400" dirty="0">
+                <a:latin typeface="Times New Roman" panose="02020603050405020304" pitchFamily="18" charset="0"/>
+                <a:cs typeface="Times New Roman" panose="02020603050405020304" pitchFamily="18" charset="0"/>
+              </a:rPr>
+              <a:t>•</a:t>
+            </a:r>
+            <a:r>
+              <a:rPr lang="ru-RU" sz="1400" dirty="0">
+                <a:latin typeface="Times New Roman" panose="02020603050405020304" pitchFamily="18" charset="0"/>
+                <a:cs typeface="Times New Roman" panose="02020603050405020304" pitchFamily="18" charset="0"/>
+              </a:rPr>
+              <a:t> 	</a:t>
+            </a:r>
+            <a:r>
+              <a:rPr lang="en" sz="1400" dirty="0">
+                <a:latin typeface="Times New Roman" panose="02020603050405020304" pitchFamily="18" charset="0"/>
+                <a:cs typeface="Times New Roman" panose="02020603050405020304" pitchFamily="18" charset="0"/>
+              </a:rPr>
+              <a:t>s' </a:t>
+            </a:r>
+            <a:r>
+              <a:rPr lang="ru-RU" sz="1400" dirty="0">
+                <a:latin typeface="Times New Roman" panose="02020603050405020304" pitchFamily="18" charset="0"/>
+                <a:cs typeface="Times New Roman" panose="02020603050405020304" pitchFamily="18" charset="0"/>
+              </a:rPr>
+              <a:t>не назначается ни в одну больницу,</a:t>
+            </a:r>
+          </a:p>
+          <a:p>
+            <a:pPr marL="0" indent="0">
+              <a:spcBef>
+                <a:spcPts val="400"/>
+              </a:spcBef>
+              <a:buNone/>
+            </a:pPr>
+            <a:r>
+              <a:rPr lang="ru-RU" sz="1400" dirty="0">
+                <a:latin typeface="Times New Roman" panose="02020603050405020304" pitchFamily="18" charset="0"/>
+                <a:cs typeface="Times New Roman" panose="02020603050405020304" pitchFamily="18" charset="0"/>
+              </a:rPr>
+              <a:t>• 	</a:t>
+            </a:r>
+            <a:r>
+              <a:rPr lang="en" sz="1400" dirty="0">
+                <a:latin typeface="Times New Roman" panose="02020603050405020304" pitchFamily="18" charset="0"/>
+                <a:cs typeface="Times New Roman" panose="02020603050405020304" pitchFamily="18" charset="0"/>
+              </a:rPr>
+              <a:t>h </a:t>
+            </a:r>
+            <a:r>
+              <a:rPr lang="ru-RU" sz="1400" dirty="0">
+                <a:latin typeface="Times New Roman" panose="02020603050405020304" pitchFamily="18" charset="0"/>
+                <a:cs typeface="Times New Roman" panose="02020603050405020304" pitchFamily="18" charset="0"/>
+              </a:rPr>
+              <a:t>предпочитает </a:t>
+            </a:r>
+            <a:r>
+              <a:rPr lang="en" sz="1400" dirty="0">
+                <a:latin typeface="Times New Roman" panose="02020603050405020304" pitchFamily="18" charset="0"/>
+                <a:cs typeface="Times New Roman" panose="02020603050405020304" pitchFamily="18" charset="0"/>
+              </a:rPr>
+              <a:t>s' </a:t>
+            </a:r>
+            <a:r>
+              <a:rPr lang="ru-RU" sz="1400" dirty="0">
+                <a:latin typeface="Times New Roman" panose="02020603050405020304" pitchFamily="18" charset="0"/>
+                <a:cs typeface="Times New Roman" panose="02020603050405020304" pitchFamily="18" charset="0"/>
+              </a:rPr>
+              <a:t>студенту </a:t>
+            </a:r>
+            <a:r>
+              <a:rPr lang="en" sz="1400" dirty="0">
+                <a:latin typeface="Times New Roman" panose="02020603050405020304" pitchFamily="18" charset="0"/>
+                <a:cs typeface="Times New Roman" panose="02020603050405020304" pitchFamily="18" charset="0"/>
+              </a:rPr>
+              <a:t>s.</a:t>
+            </a:r>
+          </a:p>
+          <a:p>
+            <a:pPr marL="0" indent="0">
+              <a:spcBef>
+                <a:spcPts val="400"/>
+              </a:spcBef>
+              <a:buNone/>
+            </a:pPr>
+            <a:r>
+              <a:rPr lang="ru-RU" sz="1400" dirty="0">
+                <a:latin typeface="Times New Roman" panose="02020603050405020304" pitchFamily="18" charset="0"/>
+                <a:cs typeface="Times New Roman" panose="02020603050405020304" pitchFamily="18" charset="0"/>
+              </a:rPr>
+              <a:t>2. Неустойчивость второго типа: имеются студенты </a:t>
+            </a:r>
+            <a:r>
+              <a:rPr lang="en" sz="1400" dirty="0">
+                <a:latin typeface="Times New Roman" panose="02020603050405020304" pitchFamily="18" charset="0"/>
+                <a:cs typeface="Times New Roman" panose="02020603050405020304" pitchFamily="18" charset="0"/>
+              </a:rPr>
+              <a:t>s </a:t>
+            </a:r>
+            <a:r>
+              <a:rPr lang="ru-RU" sz="1400" dirty="0">
+                <a:latin typeface="Times New Roman" panose="02020603050405020304" pitchFamily="18" charset="0"/>
+                <a:cs typeface="Times New Roman" panose="02020603050405020304" pitchFamily="18" charset="0"/>
+              </a:rPr>
+              <a:t>и </a:t>
+            </a:r>
+            <a:r>
+              <a:rPr lang="en" sz="1400" dirty="0">
+                <a:latin typeface="Times New Roman" panose="02020603050405020304" pitchFamily="18" charset="0"/>
+                <a:cs typeface="Times New Roman" panose="02020603050405020304" pitchFamily="18" charset="0"/>
+              </a:rPr>
+              <a:t>s', </a:t>
+            </a:r>
+            <a:r>
+              <a:rPr lang="ru-RU" sz="1400" dirty="0">
+                <a:latin typeface="Times New Roman" panose="02020603050405020304" pitchFamily="18" charset="0"/>
+                <a:cs typeface="Times New Roman" panose="02020603050405020304" pitchFamily="18" charset="0"/>
+              </a:rPr>
+              <a:t>а также больницы </a:t>
+            </a:r>
+            <a:r>
+              <a:rPr lang="en" sz="1400" dirty="0">
+                <a:latin typeface="Times New Roman" panose="02020603050405020304" pitchFamily="18" charset="0"/>
+                <a:cs typeface="Times New Roman" panose="02020603050405020304" pitchFamily="18" charset="0"/>
+              </a:rPr>
+              <a:t>h</a:t>
+            </a:r>
+            <a:r>
+              <a:rPr lang="ru-RU" sz="1400" dirty="0">
+                <a:latin typeface="Times New Roman" panose="02020603050405020304" pitchFamily="18" charset="0"/>
+                <a:cs typeface="Times New Roman" panose="02020603050405020304" pitchFamily="18" charset="0"/>
+              </a:rPr>
+              <a:t> </a:t>
+            </a:r>
+            <a:r>
+              <a:rPr lang="en-US" sz="1400" dirty="0" err="1">
+                <a:latin typeface="Times New Roman" panose="02020603050405020304" pitchFamily="18" charset="0"/>
+                <a:cs typeface="Times New Roman" panose="02020603050405020304" pitchFamily="18" charset="0"/>
+              </a:rPr>
+              <a:t>и</a:t>
+            </a:r>
+            <a:r>
+              <a:rPr lang="ru-RU" sz="1400" dirty="0">
+                <a:latin typeface="Times New Roman" panose="02020603050405020304" pitchFamily="18" charset="0"/>
+                <a:cs typeface="Times New Roman" panose="02020603050405020304" pitchFamily="18" charset="0"/>
+              </a:rPr>
+              <a:t> </a:t>
+            </a:r>
+            <a:r>
+              <a:rPr lang="en" sz="1400" dirty="0">
+                <a:latin typeface="Times New Roman" panose="02020603050405020304" pitchFamily="18" charset="0"/>
+                <a:cs typeface="Times New Roman" panose="02020603050405020304" pitchFamily="18" charset="0"/>
+              </a:rPr>
+              <a:t>h', </a:t>
+            </a:r>
+            <a:r>
+              <a:rPr lang="ru-RU" sz="1400" dirty="0">
+                <a:latin typeface="Times New Roman" panose="02020603050405020304" pitchFamily="18" charset="0"/>
+                <a:cs typeface="Times New Roman" panose="02020603050405020304" pitchFamily="18" charset="0"/>
+              </a:rPr>
+              <a:t>для которых:</a:t>
+            </a:r>
+          </a:p>
+          <a:p>
+            <a:pPr marL="0" indent="0">
+              <a:spcBef>
+                <a:spcPts val="400"/>
+              </a:spcBef>
+              <a:buNone/>
+            </a:pPr>
+            <a:r>
+              <a:rPr lang="ru-RU" sz="1400" dirty="0">
+                <a:latin typeface="Times New Roman" panose="02020603050405020304" pitchFamily="18" charset="0"/>
+                <a:cs typeface="Times New Roman" panose="02020603050405020304" pitchFamily="18" charset="0"/>
+              </a:rPr>
+              <a:t>•	</a:t>
+            </a:r>
+            <a:r>
+              <a:rPr lang="en" sz="1400" dirty="0">
+                <a:latin typeface="Times New Roman" panose="02020603050405020304" pitchFamily="18" charset="0"/>
+                <a:cs typeface="Times New Roman" panose="02020603050405020304" pitchFamily="18" charset="0"/>
+              </a:rPr>
+              <a:t>s </a:t>
+            </a:r>
+            <a:r>
+              <a:rPr lang="ru-RU" sz="1400" dirty="0">
+                <a:latin typeface="Times New Roman" panose="02020603050405020304" pitchFamily="18" charset="0"/>
+                <a:cs typeface="Times New Roman" panose="02020603050405020304" pitchFamily="18" charset="0"/>
+              </a:rPr>
+              <a:t>назначается в </a:t>
+            </a:r>
+            <a:r>
+              <a:rPr lang="en" sz="1400" dirty="0">
+                <a:latin typeface="Times New Roman" panose="02020603050405020304" pitchFamily="18" charset="0"/>
+                <a:cs typeface="Times New Roman" panose="02020603050405020304" pitchFamily="18" charset="0"/>
+              </a:rPr>
+              <a:t>h,</a:t>
+            </a:r>
+          </a:p>
+          <a:p>
+            <a:pPr marL="0" indent="0">
+              <a:spcBef>
+                <a:spcPts val="400"/>
+              </a:spcBef>
+              <a:buNone/>
+            </a:pPr>
+            <a:r>
+              <a:rPr lang="en" sz="1400" dirty="0">
+                <a:latin typeface="Times New Roman" panose="02020603050405020304" pitchFamily="18" charset="0"/>
+                <a:cs typeface="Times New Roman" panose="02020603050405020304" pitchFamily="18" charset="0"/>
+              </a:rPr>
+              <a:t>•	s' </a:t>
+            </a:r>
+            <a:r>
+              <a:rPr lang="ru-RU" sz="1400" dirty="0">
+                <a:latin typeface="Times New Roman" panose="02020603050405020304" pitchFamily="18" charset="0"/>
+                <a:cs typeface="Times New Roman" panose="02020603050405020304" pitchFamily="18" charset="0"/>
+              </a:rPr>
+              <a:t>назначается в </a:t>
+            </a:r>
+            <a:r>
+              <a:rPr lang="en" sz="1400" dirty="0">
+                <a:latin typeface="Times New Roman" panose="02020603050405020304" pitchFamily="18" charset="0"/>
+                <a:cs typeface="Times New Roman" panose="02020603050405020304" pitchFamily="18" charset="0"/>
+              </a:rPr>
+              <a:t>h',</a:t>
+            </a:r>
+          </a:p>
+          <a:p>
+            <a:pPr marL="0" indent="0">
+              <a:spcBef>
+                <a:spcPts val="400"/>
+              </a:spcBef>
+              <a:buNone/>
+            </a:pPr>
+            <a:r>
+              <a:rPr lang="en" sz="1400" dirty="0">
+                <a:latin typeface="Times New Roman" panose="02020603050405020304" pitchFamily="18" charset="0"/>
+                <a:cs typeface="Times New Roman" panose="02020603050405020304" pitchFamily="18" charset="0"/>
+              </a:rPr>
+              <a:t>•	h </a:t>
+            </a:r>
+            <a:r>
+              <a:rPr lang="ru-RU" sz="1400" dirty="0">
+                <a:latin typeface="Times New Roman" panose="02020603050405020304" pitchFamily="18" charset="0"/>
+                <a:cs typeface="Times New Roman" panose="02020603050405020304" pitchFamily="18" charset="0"/>
+              </a:rPr>
+              <a:t>предпочитает </a:t>
+            </a:r>
+            <a:r>
+              <a:rPr lang="en" sz="1400" dirty="0">
+                <a:latin typeface="Times New Roman" panose="02020603050405020304" pitchFamily="18" charset="0"/>
+                <a:cs typeface="Times New Roman" panose="02020603050405020304" pitchFamily="18" charset="0"/>
+              </a:rPr>
+              <a:t>s' </a:t>
+            </a:r>
+            <a:r>
+              <a:rPr lang="ru-RU" sz="1400" dirty="0">
+                <a:latin typeface="Times New Roman" panose="02020603050405020304" pitchFamily="18" charset="0"/>
+                <a:cs typeface="Times New Roman" panose="02020603050405020304" pitchFamily="18" charset="0"/>
+              </a:rPr>
+              <a:t>студенту </a:t>
+            </a:r>
+            <a:r>
+              <a:rPr lang="en" sz="1400" dirty="0">
+                <a:latin typeface="Times New Roman" panose="02020603050405020304" pitchFamily="18" charset="0"/>
+                <a:cs typeface="Times New Roman" panose="02020603050405020304" pitchFamily="18" charset="0"/>
+              </a:rPr>
+              <a:t>s,</a:t>
+            </a:r>
+          </a:p>
+          <a:p>
+            <a:pPr marL="0" indent="0">
+              <a:spcBef>
+                <a:spcPts val="400"/>
+              </a:spcBef>
+              <a:buNone/>
+            </a:pPr>
+            <a:r>
+              <a:rPr lang="en" sz="1400" dirty="0">
+                <a:latin typeface="Times New Roman" panose="02020603050405020304" pitchFamily="18" charset="0"/>
+                <a:cs typeface="Times New Roman" panose="02020603050405020304" pitchFamily="18" charset="0"/>
+              </a:rPr>
+              <a:t>•	s </a:t>
+            </a:r>
+            <a:r>
+              <a:rPr lang="ru-RU" sz="1400" dirty="0">
+                <a:latin typeface="Times New Roman" panose="02020603050405020304" pitchFamily="18" charset="0"/>
+                <a:cs typeface="Times New Roman" panose="02020603050405020304" pitchFamily="18" charset="0"/>
+              </a:rPr>
+              <a:t>предпочитает </a:t>
+            </a:r>
+            <a:r>
+              <a:rPr lang="en" sz="1400" dirty="0">
+                <a:latin typeface="Times New Roman" panose="02020603050405020304" pitchFamily="18" charset="0"/>
+                <a:cs typeface="Times New Roman" panose="02020603050405020304" pitchFamily="18" charset="0"/>
+              </a:rPr>
+              <a:t>h </a:t>
+            </a:r>
+            <a:r>
+              <a:rPr lang="ru-RU" sz="1400" dirty="0">
+                <a:latin typeface="Times New Roman" panose="02020603050405020304" pitchFamily="18" charset="0"/>
+                <a:cs typeface="Times New Roman" panose="02020603050405020304" pitchFamily="18" charset="0"/>
+              </a:rPr>
+              <a:t>больнице </a:t>
+            </a:r>
+            <a:r>
+              <a:rPr lang="en" sz="1400" dirty="0">
+                <a:latin typeface="Times New Roman" panose="02020603050405020304" pitchFamily="18" charset="0"/>
+                <a:cs typeface="Times New Roman" panose="02020603050405020304" pitchFamily="18" charset="0"/>
+              </a:rPr>
+              <a:t>h'.</a:t>
+            </a:r>
+          </a:p>
+          <a:p>
+            <a:pPr marL="0" indent="0">
+              <a:spcBef>
+                <a:spcPts val="400"/>
+              </a:spcBef>
+              <a:buNone/>
+            </a:pPr>
+            <a:r>
+              <a:rPr lang="ru-RU" sz="1400" dirty="0">
+                <a:latin typeface="Times New Roman" panose="02020603050405020304" pitchFamily="18" charset="0"/>
+                <a:cs typeface="Times New Roman" panose="02020603050405020304" pitchFamily="18" charset="0"/>
+              </a:rPr>
+              <a:t>Фактически ситуация повторяет задачу устойчивых </a:t>
+            </a:r>
+            <a:r>
+              <a:rPr lang="ru-RU" sz="1400" dirty="0" err="1">
+                <a:latin typeface="Times New Roman" panose="02020603050405020304" pitchFamily="18" charset="0"/>
+                <a:cs typeface="Times New Roman" panose="02020603050405020304" pitchFamily="18" charset="0"/>
+              </a:rPr>
+              <a:t>паросочетания</a:t>
+            </a:r>
+            <a:r>
+              <a:rPr lang="ru-RU" sz="1400" dirty="0">
+                <a:latin typeface="Times New Roman" panose="02020603050405020304" pitchFamily="18" charset="0"/>
+                <a:cs typeface="Times New Roman" panose="02020603050405020304" pitchFamily="18" charset="0"/>
+              </a:rPr>
+              <a:t>, если не считать того, что 1) в больницах обычно открыто более одной вакансии и 2) студентов больше, чем вакансий. </a:t>
+            </a:r>
+          </a:p>
+          <a:p>
+            <a:pPr marL="0" indent="0">
+              <a:spcBef>
+                <a:spcPts val="400"/>
+              </a:spcBef>
+              <a:buNone/>
+            </a:pPr>
+            <a:r>
+              <a:rPr lang="ru-RU" sz="1400" dirty="0">
+                <a:latin typeface="Times New Roman" panose="02020603050405020304" pitchFamily="18" charset="0"/>
+                <a:cs typeface="Times New Roman" panose="02020603050405020304" pitchFamily="18" charset="0"/>
+              </a:rPr>
+              <a:t>Покажите, что всегда существует устойчивое распределение студентов по больницам, и приведите алгоритм поиска такого распределения.</a:t>
+            </a:r>
+          </a:p>
+          <a:p>
+            <a:pPr marL="0" indent="0">
+              <a:spcBef>
+                <a:spcPts val="400"/>
+              </a:spcBef>
+              <a:buNone/>
+            </a:pPr>
+            <a:endParaRPr lang="ru-RU" sz="1400" dirty="0">
+              <a:latin typeface="Times New Roman" panose="02020603050405020304" pitchFamily="18" charset="0"/>
+              <a:cs typeface="Times New Roman" panose="02020603050405020304" pitchFamily="18" charset="0"/>
+            </a:endParaRPr>
+          </a:p>
+          <a:p>
+            <a:pPr marL="0" indent="0">
+              <a:spcBef>
+                <a:spcPts val="400"/>
+              </a:spcBef>
+              <a:buNone/>
+            </a:pPr>
+            <a:endParaRPr lang="ru-RU" sz="1400" dirty="0">
+              <a:latin typeface="Times New Roman" panose="02020603050405020304" pitchFamily="18" charset="0"/>
+              <a:cs typeface="Times New Roman" panose="02020603050405020304" pitchFamily="18" charset="0"/>
+            </a:endParaRPr>
+          </a:p>
+        </p:txBody>
+      </p:sp>
+    </p:spTree>
+    <p:extLst>
+      <p:ext uri="{BB962C8B-B14F-4D97-AF65-F5344CB8AC3E}">
+        <p14:creationId xmlns:p14="http://schemas.microsoft.com/office/powerpoint/2010/main" val="3802085727"/>
+      </p:ext>
+    </p:extLst>
+  </p:cSld>
+  <p:clrMapOvr>
+    <a:masterClrMapping/>
+  </p:clrMapOvr>
+</p:sld>
+</file>
+
+<file path=ppt/slides/slide15.xml><?xml version="1.0" encoding="utf-8"?>
+<p:sld xmlns:a="http://schemas.openxmlformats.org/drawingml/2006/main" xmlns:r="http://schemas.openxmlformats.org/officeDocument/2006/relationships" xmlns:p="http://schemas.openxmlformats.org/presentationml/2006/main">
+  <p:cSld>
+    <p:spTree>
+      <p:nvGrpSpPr>
+        <p:cNvPr id="1" name=""/>
+        <p:cNvGrpSpPr/>
+        <p:nvPr/>
+      </p:nvGrpSpPr>
+      <p:grpSpPr>
+        <a:xfrm>
+          <a:off x="0" y="0"/>
+          <a:ext cx="0" cy="0"/>
+          <a:chOff x="0" y="0"/>
+          <a:chExt cx="0" cy="0"/>
+        </a:xfrm>
+      </p:grpSpPr>
+      <p:sp>
+        <p:nvSpPr>
+          <p:cNvPr id="2" name="Заголовок 1">
+            <a:extLst>
+              <a:ext uri="{FF2B5EF4-FFF2-40B4-BE49-F238E27FC236}">
+                <a16:creationId xmlns:a16="http://schemas.microsoft.com/office/drawing/2014/main" id="{91228C40-A67C-3E41-A13B-587425CB0E5A}"/>
+              </a:ext>
+            </a:extLst>
+          </p:cNvPr>
+          <p:cNvSpPr>
+            <a:spLocks noGrp="1"/>
+          </p:cNvSpPr>
+          <p:nvPr>
+            <p:ph type="title"/>
+          </p:nvPr>
+        </p:nvSpPr>
+        <p:spPr>
+          <a:xfrm>
+            <a:off x="628650" y="365127"/>
+            <a:ext cx="7886700" cy="634334"/>
+          </a:xfrm>
+        </p:spPr>
+        <p:txBody>
+          <a:bodyPr>
+            <a:normAutofit fontScale="90000"/>
+          </a:bodyPr>
+          <a:lstStyle/>
+          <a:p>
+            <a:r>
+              <a:rPr lang="ru-RU" dirty="0"/>
+              <a:t>Упражнение 5</a:t>
+            </a:r>
+          </a:p>
+        </p:txBody>
+      </p:sp>
+      <p:sp>
+        <p:nvSpPr>
+          <p:cNvPr id="3" name="Объект 2">
+            <a:extLst>
+              <a:ext uri="{FF2B5EF4-FFF2-40B4-BE49-F238E27FC236}">
+                <a16:creationId xmlns:a16="http://schemas.microsoft.com/office/drawing/2014/main" id="{1F4FA4D7-AC83-9B4B-A56C-E3EA811ADCBB}"/>
+              </a:ext>
+            </a:extLst>
+          </p:cNvPr>
+          <p:cNvSpPr>
+            <a:spLocks noGrp="1"/>
+          </p:cNvSpPr>
+          <p:nvPr>
+            <p:ph idx="1"/>
+          </p:nvPr>
+        </p:nvSpPr>
+        <p:spPr>
+          <a:xfrm>
+            <a:off x="628650" y="1073889"/>
+            <a:ext cx="7886700" cy="5337544"/>
+          </a:xfrm>
+        </p:spPr>
+        <p:txBody>
+          <a:bodyPr>
+            <a:normAutofit lnSpcReduction="10000"/>
+          </a:bodyPr>
+          <a:lstStyle/>
+          <a:p>
+            <a:pPr marL="0" lvl="0" indent="0">
+              <a:buNone/>
+            </a:pPr>
+            <a:r>
+              <a:rPr lang="ru-RU" sz="1800" dirty="0">
+                <a:latin typeface="Times New Roman" panose="02020603050405020304" pitchFamily="18" charset="0"/>
+                <a:cs typeface="Times New Roman" panose="02020603050405020304" pitchFamily="18" charset="0"/>
+              </a:rPr>
+              <a:t>Могут ли мужчина или женщина улучшить свое положение, солгав относительно своих предпочтений? </a:t>
+            </a:r>
+          </a:p>
+          <a:p>
+            <a:pPr marL="0" lvl="0" indent="0">
+              <a:buNone/>
+            </a:pPr>
+            <a:r>
+              <a:rPr lang="ru-RU" sz="1800" dirty="0">
+                <a:latin typeface="Times New Roman" panose="02020603050405020304" pitchFamily="18" charset="0"/>
+                <a:cs typeface="Times New Roman" panose="02020603050405020304" pitchFamily="18" charset="0"/>
+              </a:rPr>
+              <a:t>Допустим, что у каждого участника имеется истинный порядок предпочтений. Теперь рассмотрим женщину </a:t>
+            </a:r>
+            <a:r>
+              <a:rPr lang="en" sz="1800" i="1" dirty="0">
+                <a:latin typeface="Times New Roman" panose="02020603050405020304" pitchFamily="18" charset="0"/>
+                <a:cs typeface="Times New Roman" panose="02020603050405020304" pitchFamily="18" charset="0"/>
+              </a:rPr>
+              <a:t>w</a:t>
+            </a:r>
+            <a:r>
+              <a:rPr lang="en" sz="1800" dirty="0">
+                <a:latin typeface="Times New Roman" panose="02020603050405020304" pitchFamily="18" charset="0"/>
+                <a:cs typeface="Times New Roman" panose="02020603050405020304" pitchFamily="18" charset="0"/>
+              </a:rPr>
+              <a:t>. </a:t>
+            </a:r>
+            <a:r>
+              <a:rPr lang="ru-RU" sz="1800" dirty="0">
+                <a:latin typeface="Times New Roman" panose="02020603050405020304" pitchFamily="18" charset="0"/>
+                <a:cs typeface="Times New Roman" panose="02020603050405020304" pitchFamily="18" charset="0"/>
+              </a:rPr>
+              <a:t>Предположим, </a:t>
+            </a:r>
+            <a:r>
+              <a:rPr lang="en" sz="1800" i="1" dirty="0">
+                <a:latin typeface="Times New Roman" panose="02020603050405020304" pitchFamily="18" charset="0"/>
+                <a:cs typeface="Times New Roman" panose="02020603050405020304" pitchFamily="18" charset="0"/>
+              </a:rPr>
+              <a:t>w</a:t>
+            </a:r>
+            <a:r>
+              <a:rPr lang="en" sz="1800" dirty="0">
+                <a:latin typeface="Times New Roman" panose="02020603050405020304" pitchFamily="18" charset="0"/>
+                <a:cs typeface="Times New Roman" panose="02020603050405020304" pitchFamily="18" charset="0"/>
+              </a:rPr>
+              <a:t> </a:t>
+            </a:r>
+            <a:r>
+              <a:rPr lang="ru-RU" sz="1800" dirty="0">
+                <a:latin typeface="Times New Roman" panose="02020603050405020304" pitchFamily="18" charset="0"/>
+                <a:cs typeface="Times New Roman" panose="02020603050405020304" pitchFamily="18" charset="0"/>
+              </a:rPr>
+              <a:t>предпочитает мужчину </a:t>
+            </a:r>
+            <a:r>
+              <a:rPr lang="ru-RU" sz="1800" i="1" dirty="0" err="1">
+                <a:latin typeface="Times New Roman" panose="02020603050405020304" pitchFamily="18" charset="0"/>
+                <a:cs typeface="Times New Roman" panose="02020603050405020304" pitchFamily="18" charset="0"/>
+              </a:rPr>
+              <a:t>m</a:t>
+            </a:r>
+            <a:r>
+              <a:rPr lang="ru-RU" sz="1800" dirty="0">
+                <a:latin typeface="Times New Roman" panose="02020603050405020304" pitchFamily="18" charset="0"/>
+                <a:cs typeface="Times New Roman" panose="02020603050405020304" pitchFamily="18" charset="0"/>
+              </a:rPr>
+              <a:t> мужчине </a:t>
+            </a:r>
+            <a:r>
+              <a:rPr lang="en-US" sz="1800" i="1" dirty="0">
+                <a:latin typeface="Times New Roman" panose="02020603050405020304" pitchFamily="18" charset="0"/>
+                <a:cs typeface="Times New Roman" panose="02020603050405020304" pitchFamily="18" charset="0"/>
+              </a:rPr>
+              <a:t>m</a:t>
+            </a:r>
+            <a:r>
+              <a:rPr lang="ru-RU" sz="1800" i="1" dirty="0">
+                <a:latin typeface="Times New Roman" panose="02020603050405020304" pitchFamily="18" charset="0"/>
+                <a:cs typeface="Times New Roman" panose="02020603050405020304" pitchFamily="18" charset="0"/>
+              </a:rPr>
+              <a:t>’</a:t>
+            </a:r>
+            <a:r>
+              <a:rPr lang="en-US" sz="1800" dirty="0">
+                <a:latin typeface="Times New Roman" panose="02020603050405020304" pitchFamily="18" charset="0"/>
+                <a:cs typeface="Times New Roman" panose="02020603050405020304" pitchFamily="18" charset="0"/>
+              </a:rPr>
+              <a:t>, </a:t>
+            </a:r>
+            <a:r>
+              <a:rPr lang="ru-RU" sz="1800" dirty="0">
+                <a:latin typeface="Times New Roman" panose="02020603050405020304" pitchFamily="18" charset="0"/>
+                <a:cs typeface="Times New Roman" panose="02020603050405020304" pitchFamily="18" charset="0"/>
+              </a:rPr>
+              <a:t>но</a:t>
+            </a:r>
+            <a:r>
+              <a:rPr lang="en-US" sz="1800" dirty="0">
+                <a:latin typeface="Times New Roman" panose="02020603050405020304" pitchFamily="18" charset="0"/>
+                <a:cs typeface="Times New Roman" panose="02020603050405020304" pitchFamily="18" charset="0"/>
+              </a:rPr>
+              <a:t> </a:t>
+            </a:r>
+            <a:r>
+              <a:rPr lang="ru-RU" sz="1800" dirty="0">
+                <a:latin typeface="Times New Roman" panose="02020603050405020304" pitchFamily="18" charset="0"/>
+                <a:cs typeface="Times New Roman" panose="02020603050405020304" pitchFamily="18" charset="0"/>
+              </a:rPr>
+              <a:t>и</a:t>
+            </a:r>
+            <a:r>
+              <a:rPr lang="en-US" sz="1800" dirty="0">
+                <a:latin typeface="Times New Roman" panose="02020603050405020304" pitchFamily="18" charset="0"/>
+                <a:cs typeface="Times New Roman" panose="02020603050405020304" pitchFamily="18" charset="0"/>
+              </a:rPr>
+              <a:t> </a:t>
+            </a:r>
+            <a:r>
+              <a:rPr lang="en-US" sz="1800" i="1" dirty="0">
+                <a:latin typeface="Times New Roman" panose="02020603050405020304" pitchFamily="18" charset="0"/>
+                <a:cs typeface="Times New Roman" panose="02020603050405020304" pitchFamily="18" charset="0"/>
+              </a:rPr>
+              <a:t>m</a:t>
+            </a:r>
+            <a:r>
+              <a:rPr lang="en-US" sz="1800" dirty="0">
+                <a:latin typeface="Times New Roman" panose="02020603050405020304" pitchFamily="18" charset="0"/>
+                <a:cs typeface="Times New Roman" panose="02020603050405020304" pitchFamily="18" charset="0"/>
+              </a:rPr>
+              <a:t> </a:t>
+            </a:r>
+            <a:r>
+              <a:rPr lang="ru-RU" sz="1800" dirty="0">
+                <a:latin typeface="Times New Roman" panose="02020603050405020304" pitchFamily="18" charset="0"/>
+                <a:cs typeface="Times New Roman" panose="02020603050405020304" pitchFamily="18" charset="0"/>
+              </a:rPr>
+              <a:t>и</a:t>
+            </a:r>
+            <a:r>
+              <a:rPr lang="en-US" sz="1800" dirty="0">
+                <a:latin typeface="Times New Roman" panose="02020603050405020304" pitchFamily="18" charset="0"/>
+                <a:cs typeface="Times New Roman" panose="02020603050405020304" pitchFamily="18" charset="0"/>
+              </a:rPr>
+              <a:t> </a:t>
+            </a:r>
+            <a:r>
+              <a:rPr lang="en-US" sz="1800" i="1" dirty="0">
+                <a:latin typeface="Times New Roman" panose="02020603050405020304" pitchFamily="18" charset="0"/>
+                <a:cs typeface="Times New Roman" panose="02020603050405020304" pitchFamily="18" charset="0"/>
+              </a:rPr>
+              <a:t>m</a:t>
+            </a:r>
+            <a:r>
+              <a:rPr lang="ru-RU" sz="1800" i="1" dirty="0">
+                <a:latin typeface="Times New Roman" panose="02020603050405020304" pitchFamily="18" charset="0"/>
+                <a:cs typeface="Times New Roman" panose="02020603050405020304" pitchFamily="18" charset="0"/>
+              </a:rPr>
+              <a:t>'</a:t>
+            </a:r>
+            <a:r>
+              <a:rPr lang="ru-RU" sz="1800" dirty="0">
+                <a:latin typeface="Times New Roman" panose="02020603050405020304" pitchFamily="18" charset="0"/>
+                <a:cs typeface="Times New Roman" panose="02020603050405020304" pitchFamily="18" charset="0"/>
+              </a:rPr>
+              <a:t> находятся на нижних позициях ее списка предпочтений. Может ли случиться так, что переключение порядка </a:t>
+            </a:r>
+            <a:r>
+              <a:rPr lang="en-US" sz="1800" i="1" dirty="0">
+                <a:latin typeface="Times New Roman" panose="02020603050405020304" pitchFamily="18" charset="0"/>
+                <a:cs typeface="Times New Roman" panose="02020603050405020304" pitchFamily="18" charset="0"/>
+              </a:rPr>
+              <a:t>m</a:t>
+            </a:r>
+            <a:r>
+              <a:rPr lang="en-US" sz="1800" dirty="0">
+                <a:latin typeface="Times New Roman" panose="02020603050405020304" pitchFamily="18" charset="0"/>
+                <a:cs typeface="Times New Roman" panose="02020603050405020304" pitchFamily="18" charset="0"/>
+              </a:rPr>
+              <a:t> </a:t>
+            </a:r>
+            <a:r>
+              <a:rPr lang="ru-RU" sz="1800" dirty="0">
+                <a:latin typeface="Times New Roman" panose="02020603050405020304" pitchFamily="18" charset="0"/>
+                <a:cs typeface="Times New Roman" panose="02020603050405020304" pitchFamily="18" charset="0"/>
+              </a:rPr>
+              <a:t>и</a:t>
+            </a:r>
+            <a:r>
+              <a:rPr lang="en-US" sz="1800" dirty="0">
+                <a:latin typeface="Times New Roman" panose="02020603050405020304" pitchFamily="18" charset="0"/>
+                <a:cs typeface="Times New Roman" panose="02020603050405020304" pitchFamily="18" charset="0"/>
+              </a:rPr>
+              <a:t> </a:t>
+            </a:r>
+            <a:r>
+              <a:rPr lang="en-US" sz="1800" i="1" dirty="0">
+                <a:latin typeface="Times New Roman" panose="02020603050405020304" pitchFamily="18" charset="0"/>
+                <a:cs typeface="Times New Roman" panose="02020603050405020304" pitchFamily="18" charset="0"/>
+              </a:rPr>
+              <a:t>m</a:t>
+            </a:r>
+            <a:r>
+              <a:rPr lang="ru-RU" sz="1800" i="1" dirty="0">
+                <a:latin typeface="Times New Roman" panose="02020603050405020304" pitchFamily="18" charset="0"/>
+                <a:cs typeface="Times New Roman" panose="02020603050405020304" pitchFamily="18" charset="0"/>
+              </a:rPr>
+              <a:t>'</a:t>
+            </a:r>
+            <a:r>
+              <a:rPr lang="en-US" sz="1800" dirty="0">
+                <a:latin typeface="Times New Roman" panose="02020603050405020304" pitchFamily="18" charset="0"/>
+                <a:cs typeface="Times New Roman" panose="02020603050405020304" pitchFamily="18" charset="0"/>
+              </a:rPr>
+              <a:t> </a:t>
+            </a:r>
+            <a:r>
+              <a:rPr lang="ru-RU" sz="1800" dirty="0">
+                <a:latin typeface="Times New Roman" panose="02020603050405020304" pitchFamily="18" charset="0"/>
+                <a:cs typeface="Times New Roman" panose="02020603050405020304" pitchFamily="18" charset="0"/>
+              </a:rPr>
+              <a:t>в списке предпочтений (например, ложным утверждением о том, что она предпочитает</a:t>
+            </a:r>
+            <a:r>
+              <a:rPr lang="en-US" sz="1800" dirty="0">
+                <a:latin typeface="Times New Roman" panose="02020603050405020304" pitchFamily="18" charset="0"/>
+                <a:cs typeface="Times New Roman" panose="02020603050405020304" pitchFamily="18" charset="0"/>
+              </a:rPr>
+              <a:t> </a:t>
+            </a:r>
+            <a:r>
+              <a:rPr lang="en-US" sz="1800" i="1" dirty="0">
+                <a:latin typeface="Times New Roman" panose="02020603050405020304" pitchFamily="18" charset="0"/>
+                <a:cs typeface="Times New Roman" panose="02020603050405020304" pitchFamily="18" charset="0"/>
+              </a:rPr>
+              <a:t>m</a:t>
+            </a:r>
+            <a:r>
+              <a:rPr lang="ru-RU" sz="1800" i="1" dirty="0">
+                <a:latin typeface="Times New Roman" panose="02020603050405020304" pitchFamily="18" charset="0"/>
+                <a:cs typeface="Times New Roman" panose="02020603050405020304" pitchFamily="18" charset="0"/>
+              </a:rPr>
+              <a:t>'</a:t>
+            </a:r>
+            <a:r>
+              <a:rPr lang="ru-RU" sz="1800" dirty="0">
+                <a:latin typeface="Times New Roman" panose="02020603050405020304" pitchFamily="18" charset="0"/>
+                <a:cs typeface="Times New Roman" panose="02020603050405020304" pitchFamily="18" charset="0"/>
+              </a:rPr>
+              <a:t> мужчине </a:t>
+            </a:r>
+            <a:r>
+              <a:rPr lang="en-US" sz="1800" i="1" dirty="0">
+                <a:latin typeface="Times New Roman" panose="02020603050405020304" pitchFamily="18" charset="0"/>
+                <a:cs typeface="Times New Roman" panose="02020603050405020304" pitchFamily="18" charset="0"/>
+              </a:rPr>
+              <a:t>m</a:t>
+            </a:r>
+            <a:r>
+              <a:rPr lang="ru-RU" sz="1800" dirty="0">
+                <a:latin typeface="Times New Roman" panose="02020603050405020304" pitchFamily="18" charset="0"/>
+                <a:cs typeface="Times New Roman" panose="02020603050405020304" pitchFamily="18" charset="0"/>
+              </a:rPr>
+              <a:t>) и выполнением алгоритма с ложным списком предпочтений </a:t>
+            </a:r>
+            <a:r>
+              <a:rPr lang="en" sz="1800" i="1" dirty="0">
+                <a:latin typeface="Times New Roman" panose="02020603050405020304" pitchFamily="18" charset="0"/>
+                <a:cs typeface="Times New Roman" panose="02020603050405020304" pitchFamily="18" charset="0"/>
+              </a:rPr>
+              <a:t>w</a:t>
+            </a:r>
+            <a:r>
+              <a:rPr lang="en" sz="1800" dirty="0">
+                <a:latin typeface="Times New Roman" panose="02020603050405020304" pitchFamily="18" charset="0"/>
+                <a:cs typeface="Times New Roman" panose="02020603050405020304" pitchFamily="18" charset="0"/>
+              </a:rPr>
+              <a:t> </a:t>
+            </a:r>
+            <a:r>
+              <a:rPr lang="ru-RU" sz="1800" dirty="0">
+                <a:latin typeface="Times New Roman" panose="02020603050405020304" pitchFamily="18" charset="0"/>
+                <a:cs typeface="Times New Roman" panose="02020603050405020304" pitchFamily="18" charset="0"/>
+              </a:rPr>
+              <a:t>окажется в паре с мужчиной </a:t>
+            </a:r>
+            <a:r>
+              <a:rPr lang="en-US" sz="1800" i="1" dirty="0">
+                <a:latin typeface="Times New Roman" panose="02020603050405020304" pitchFamily="18" charset="0"/>
+                <a:cs typeface="Times New Roman" panose="02020603050405020304" pitchFamily="18" charset="0"/>
+              </a:rPr>
+              <a:t>m</a:t>
+            </a:r>
+            <a:r>
+              <a:rPr lang="ru-RU" sz="1800" i="1" dirty="0">
+                <a:latin typeface="Times New Roman" panose="02020603050405020304" pitchFamily="18" charset="0"/>
+                <a:cs typeface="Times New Roman" panose="02020603050405020304" pitchFamily="18" charset="0"/>
+              </a:rPr>
+              <a:t>"</a:t>
+            </a:r>
+            <a:r>
+              <a:rPr lang="ru-RU" sz="1800" dirty="0">
+                <a:latin typeface="Times New Roman" panose="02020603050405020304" pitchFamily="18" charset="0"/>
+                <a:cs typeface="Times New Roman" panose="02020603050405020304" pitchFamily="18" charset="0"/>
+              </a:rPr>
+              <a:t>, которого она в действительности предпочитает как </a:t>
+            </a:r>
+            <a:r>
+              <a:rPr lang="en-US" sz="1800" i="1" dirty="0">
+                <a:latin typeface="Times New Roman" panose="02020603050405020304" pitchFamily="18" charset="0"/>
+                <a:cs typeface="Times New Roman" panose="02020603050405020304" pitchFamily="18" charset="0"/>
+              </a:rPr>
+              <a:t>m</a:t>
+            </a:r>
+            <a:r>
+              <a:rPr lang="ru-RU" sz="1800" dirty="0">
+                <a:latin typeface="Times New Roman" panose="02020603050405020304" pitchFamily="18" charset="0"/>
+                <a:cs typeface="Times New Roman" panose="02020603050405020304" pitchFamily="18" charset="0"/>
+              </a:rPr>
+              <a:t>, так и </a:t>
+            </a:r>
+            <a:r>
+              <a:rPr lang="en" sz="1800" i="1" dirty="0">
+                <a:latin typeface="Times New Roman" panose="02020603050405020304" pitchFamily="18" charset="0"/>
+                <a:cs typeface="Times New Roman" panose="02020603050405020304" pitchFamily="18" charset="0"/>
+              </a:rPr>
+              <a:t>m</a:t>
+            </a:r>
+            <a:r>
+              <a:rPr lang="ru-RU" sz="1800" i="1" dirty="0">
+                <a:latin typeface="Times New Roman" panose="02020603050405020304" pitchFamily="18" charset="0"/>
+                <a:cs typeface="Times New Roman" panose="02020603050405020304" pitchFamily="18" charset="0"/>
+              </a:rPr>
+              <a:t>’</a:t>
+            </a:r>
+            <a:r>
+              <a:rPr lang="en" sz="1800" dirty="0">
+                <a:latin typeface="Times New Roman" panose="02020603050405020304" pitchFamily="18" charset="0"/>
+                <a:cs typeface="Times New Roman" panose="02020603050405020304" pitchFamily="18" charset="0"/>
+              </a:rPr>
+              <a:t> </a:t>
+            </a:r>
+            <a:r>
+              <a:rPr lang="ru-RU" sz="1800" dirty="0">
+                <a:latin typeface="Times New Roman" panose="02020603050405020304" pitchFamily="18" charset="0"/>
+                <a:cs typeface="Times New Roman" panose="02020603050405020304" pitchFamily="18" charset="0"/>
+              </a:rPr>
+              <a:t>?  </a:t>
+            </a:r>
+          </a:p>
+          <a:p>
+            <a:pPr marL="0" lvl="0" indent="0">
+              <a:buNone/>
+            </a:pPr>
+            <a:r>
+              <a:rPr lang="ru-RU" sz="1800" dirty="0">
+                <a:latin typeface="Times New Roman" panose="02020603050405020304" pitchFamily="18" charset="0"/>
+                <a:cs typeface="Times New Roman" panose="02020603050405020304" pitchFamily="18" charset="0"/>
+              </a:rPr>
+              <a:t>Тот же вопрос можно задать и для мужчин, но в контексте нашего упражнения мы ограничимся женщинами. </a:t>
+            </a:r>
+          </a:p>
+          <a:p>
+            <a:pPr marL="0" lvl="0" indent="0">
+              <a:buNone/>
+            </a:pPr>
+            <a:r>
+              <a:rPr lang="ru-RU" sz="1800" dirty="0">
+                <a:latin typeface="Times New Roman" panose="02020603050405020304" pitchFamily="18" charset="0"/>
+                <a:cs typeface="Times New Roman" panose="02020603050405020304" pitchFamily="18" charset="0"/>
+              </a:rPr>
+              <a:t>Чтобы ответить на этот вопрос, сделайте одно из двух:</a:t>
+            </a:r>
+          </a:p>
+          <a:p>
+            <a:pPr marL="0" lvl="0" indent="0">
+              <a:buNone/>
+            </a:pPr>
+            <a:r>
+              <a:rPr lang="ru-RU" sz="1800" dirty="0">
+                <a:latin typeface="Times New Roman" panose="02020603050405020304" pitchFamily="18" charset="0"/>
+                <a:cs typeface="Times New Roman" panose="02020603050405020304" pitchFamily="18" charset="0"/>
+              </a:rPr>
+              <a:t>(а)	приведите доказательство того, что для любого множества списков предпочтений изменение порядка следования пары в списке предпочтений не сможет улучшить статус партнера женщины в алгоритме Гейла-Шепли; </a:t>
+            </a:r>
+          </a:p>
+          <a:p>
+            <a:pPr marL="0" lvl="0" indent="0">
+              <a:buNone/>
+            </a:pPr>
+            <a:r>
+              <a:rPr lang="ru-RU" sz="1800" dirty="0">
+                <a:latin typeface="Times New Roman" panose="02020603050405020304" pitchFamily="18" charset="0"/>
+                <a:cs typeface="Times New Roman" panose="02020603050405020304" pitchFamily="18" charset="0"/>
+              </a:rPr>
+              <a:t>или</a:t>
+            </a:r>
+          </a:p>
+          <a:p>
+            <a:pPr marL="0" lvl="0" indent="0">
+              <a:buNone/>
+            </a:pPr>
+            <a:r>
+              <a:rPr lang="ru-RU" sz="1800" dirty="0">
+                <a:latin typeface="Times New Roman" panose="02020603050405020304" pitchFamily="18" charset="0"/>
+                <a:cs typeface="Times New Roman" panose="02020603050405020304" pitchFamily="18" charset="0"/>
+              </a:rPr>
+              <a:t>(б)	приведите пример множества списков предпочтений, для которых существует изменение порядка следования пары, способное улучшить статус партнера женщины. </a:t>
+            </a:r>
+          </a:p>
+          <a:p>
+            <a:pPr marL="0" lvl="0" indent="0">
+              <a:buNone/>
+            </a:pPr>
+            <a:endParaRPr lang="ru-RU" sz="1800" dirty="0">
+              <a:latin typeface="Times New Roman" panose="02020603050405020304" pitchFamily="18" charset="0"/>
+              <a:cs typeface="Times New Roman" panose="02020603050405020304" pitchFamily="18" charset="0"/>
+            </a:endParaRPr>
+          </a:p>
+        </p:txBody>
+      </p:sp>
+    </p:spTree>
+    <p:extLst>
+      <p:ext uri="{BB962C8B-B14F-4D97-AF65-F5344CB8AC3E}">
+        <p14:creationId xmlns:p14="http://schemas.microsoft.com/office/powerpoint/2010/main" val="12585098"/>
+      </p:ext>
+    </p:extLst>
+  </p:cSld>
+  <p:clrMapOvr>
+    <a:masterClrMapping/>
+  </p:clrMapOvr>
+</p:sld>
+</file>
+
 <file path=ppt/slides/slide2.xml><?xml version="1.0" encoding="utf-8"?>
 <p:sld xmlns:a="http://schemas.openxmlformats.org/drawingml/2006/main" xmlns:r="http://schemas.openxmlformats.org/officeDocument/2006/relationships" xmlns:p="http://schemas.openxmlformats.org/presentationml/2006/main">
   <p:cSld>
@@ -4447,7 +7107,7 @@
           <a:p>
             <a:r>
               <a:rPr lang="ru-RU" dirty="0"/>
-              <a:t>Тест</a:t>
+              <a:t>Тест 1</a:t>
             </a:r>
           </a:p>
         </p:txBody>

--- a/practice.pptx
+++ b/practice.pptx
@@ -20,6 +20,21 @@
     <p:sldId id="572" r:id="rId14"/>
     <p:sldId id="573" r:id="rId15"/>
     <p:sldId id="574" r:id="rId16"/>
+    <p:sldId id="575" r:id="rId17"/>
+    <p:sldId id="576" r:id="rId18"/>
+    <p:sldId id="577" r:id="rId19"/>
+    <p:sldId id="578" r:id="rId20"/>
+    <p:sldId id="579" r:id="rId21"/>
+    <p:sldId id="580" r:id="rId22"/>
+    <p:sldId id="581" r:id="rId23"/>
+    <p:sldId id="582" r:id="rId24"/>
+    <p:sldId id="583" r:id="rId25"/>
+    <p:sldId id="584" r:id="rId26"/>
+    <p:sldId id="585" r:id="rId27"/>
+    <p:sldId id="586" r:id="rId28"/>
+    <p:sldId id="587" r:id="rId29"/>
+    <p:sldId id="588" r:id="rId30"/>
+    <p:sldId id="589" r:id="rId31"/>
   </p:sldIdLst>
   <p:sldSz cx="9144000" cy="6858000" type="screen4x3"/>
   <p:notesSz cx="6858000" cy="9144000"/>
@@ -126,6 +141,3028 @@
 </p:presentation>
 </file>
 
+<file path=ppt/diagrams/colors1.xml><?xml version="1.0" encoding="utf-8"?>
+<dgm:colorsDef xmlns:dgm="http://schemas.openxmlformats.org/drawingml/2006/diagram" xmlns:a="http://schemas.openxmlformats.org/drawingml/2006/main" uniqueId="urn:microsoft.com/office/officeart/2005/8/colors/accent1_2">
+  <dgm:title val=""/>
+  <dgm:desc val=""/>
+  <dgm:catLst>
+    <dgm:cat type="accent1" pri="11200"/>
+  </dgm:catLst>
+  <dgm:styleLbl name="node0">
+    <dgm:fillClrLst meth="repeat">
+      <a:schemeClr val="accent1"/>
+    </dgm:fillClrLst>
+    <dgm:linClrLst meth="repeat">
+      <a:schemeClr val="lt1"/>
+    </dgm:linClrLst>
+    <dgm:effectClrLst/>
+    <dgm:txLinClrLst/>
+    <dgm:txFillClrLst/>
+    <dgm:txEffectClrLst/>
+  </dgm:styleLbl>
+  <dgm:styleLbl name="alignNode1">
+    <dgm:fillClrLst meth="repeat">
+      <a:schemeClr val="accent1"/>
+    </dgm:fillClrLst>
+    <dgm:linClrLst meth="repeat">
+      <a:schemeClr val="accent1"/>
+    </dgm:linClrLst>
+    <dgm:effectClrLst/>
+    <dgm:txLinClrLst/>
+    <dgm:txFillClrLst/>
+    <dgm:txEffectClrLst/>
+  </dgm:styleLbl>
+  <dgm:styleLbl name="node1">
+    <dgm:fillClrLst meth="repeat">
+      <a:schemeClr val="accent1"/>
+    </dgm:fillClrLst>
+    <dgm:linClrLst meth="repeat">
+      <a:schemeClr val="lt1"/>
+    </dgm:linClrLst>
+    <dgm:effectClrLst/>
+    <dgm:txLinClrLst/>
+    <dgm:txFillClrLst/>
+    <dgm:txEffectClrLst/>
+  </dgm:styleLbl>
+  <dgm:styleLbl name="lnNode1">
+    <dgm:fillClrLst meth="repeat">
+      <a:schemeClr val="accent1"/>
+    </dgm:fillClrLst>
+    <dgm:linClrLst meth="repeat">
+      <a:schemeClr val="lt1"/>
+    </dgm:linClrLst>
+    <dgm:effectClrLst/>
+    <dgm:txLinClrLst/>
+    <dgm:txFillClrLst/>
+    <dgm:txEffectClrLst/>
+  </dgm:styleLbl>
+  <dgm:styleLbl name="vennNode1">
+    <dgm:fillClrLst meth="repeat">
+      <a:schemeClr val="accent1">
+        <a:alpha val="50000"/>
+      </a:schemeClr>
+    </dgm:fillClrLst>
+    <dgm:linClrLst meth="repeat">
+      <a:schemeClr val="lt1"/>
+    </dgm:linClrLst>
+    <dgm:effectClrLst/>
+    <dgm:txLinClrLst/>
+    <dgm:txFillClrLst/>
+    <dgm:txEffectClrLst/>
+  </dgm:styleLbl>
+  <dgm:styleLbl name="node2">
+    <dgm:fillClrLst meth="repeat">
+      <a:schemeClr val="accent1"/>
+    </dgm:fillClrLst>
+    <dgm:linClrLst meth="repeat">
+      <a:schemeClr val="lt1"/>
+    </dgm:linClrLst>
+    <dgm:effectClrLst/>
+    <dgm:txLinClrLst/>
+    <dgm:txFillClrLst/>
+    <dgm:txEffectClrLst/>
+  </dgm:styleLbl>
+  <dgm:styleLbl name="node3">
+    <dgm:fillClrLst meth="repeat">
+      <a:schemeClr val="accent1"/>
+    </dgm:fillClrLst>
+    <dgm:linClrLst meth="repeat">
+      <a:schemeClr val="lt1"/>
+    </dgm:linClrLst>
+    <dgm:effectClrLst/>
+    <dgm:txLinClrLst/>
+    <dgm:txFillClrLst/>
+    <dgm:txEffectClrLst/>
+  </dgm:styleLbl>
+  <dgm:styleLbl name="node4">
+    <dgm:fillClrLst meth="repeat">
+      <a:schemeClr val="accent1"/>
+    </dgm:fillClrLst>
+    <dgm:linClrLst meth="repeat">
+      <a:schemeClr val="lt1"/>
+    </dgm:linClrLst>
+    <dgm:effectClrLst/>
+    <dgm:txLinClrLst/>
+    <dgm:txFillClrLst/>
+    <dgm:txEffectClrLst/>
+  </dgm:styleLbl>
+  <dgm:styleLbl name="fgImgPlace1">
+    <dgm:fillClrLst meth="repeat">
+      <a:schemeClr val="accent1">
+        <a:tint val="50000"/>
+      </a:schemeClr>
+    </dgm:fillClrLst>
+    <dgm:linClrLst meth="repeat">
+      <a:schemeClr val="lt1"/>
+    </dgm:linClrLst>
+    <dgm:effectClrLst/>
+    <dgm:txLinClrLst/>
+    <dgm:txFillClrLst meth="repeat">
+      <a:schemeClr val="lt1"/>
+    </dgm:txFillClrLst>
+    <dgm:txEffectClrLst/>
+  </dgm:styleLbl>
+  <dgm:styleLbl name="alignImgPlace1">
+    <dgm:fillClrLst meth="repeat">
+      <a:schemeClr val="accent1">
+        <a:tint val="50000"/>
+      </a:schemeClr>
+    </dgm:fillClrLst>
+    <dgm:linClrLst meth="repeat">
+      <a:schemeClr val="lt1"/>
+    </dgm:linClrLst>
+    <dgm:effectClrLst/>
+    <dgm:txLinClrLst/>
+    <dgm:txFillClrLst meth="repeat">
+      <a:schemeClr val="lt1"/>
+    </dgm:txFillClrLst>
+    <dgm:txEffectClrLst/>
+  </dgm:styleLbl>
+  <dgm:styleLbl name="bgImgPlace1">
+    <dgm:fillClrLst meth="repeat">
+      <a:schemeClr val="accent1">
+        <a:tint val="50000"/>
+      </a:schemeClr>
+    </dgm:fillClrLst>
+    <dgm:linClrLst meth="repeat">
+      <a:schemeClr val="lt1"/>
+    </dgm:linClrLst>
+    <dgm:effectClrLst/>
+    <dgm:txLinClrLst/>
+    <dgm:txFillClrLst meth="repeat">
+      <a:schemeClr val="lt1"/>
+    </dgm:txFillClrLst>
+    <dgm:txEffectClrLst/>
+  </dgm:styleLbl>
+  <dgm:styleLbl name="sibTrans2D1">
+    <dgm:fillClrLst meth="repeat">
+      <a:schemeClr val="accent1">
+        <a:tint val="60000"/>
+      </a:schemeClr>
+    </dgm:fillClrLst>
+    <dgm:linClrLst meth="repeat">
+      <a:schemeClr val="accent1">
+        <a:tint val="60000"/>
+      </a:schemeClr>
+    </dgm:linClrLst>
+    <dgm:effectClrLst/>
+    <dgm:txLinClrLst/>
+    <dgm:txFillClrLst/>
+    <dgm:txEffectClrLst/>
+  </dgm:styleLbl>
+  <dgm:styleLbl name="fgSibTrans2D1">
+    <dgm:fillClrLst meth="repeat">
+      <a:schemeClr val="accent1">
+        <a:tint val="60000"/>
+      </a:schemeClr>
+    </dgm:fillClrLst>
+    <dgm:linClrLst meth="repeat">
+      <a:schemeClr val="accent1">
+        <a:tint val="60000"/>
+      </a:schemeClr>
+    </dgm:linClrLst>
+    <dgm:effectClrLst/>
+    <dgm:txLinClrLst/>
+    <dgm:txFillClrLst/>
+    <dgm:txEffectClrLst/>
+  </dgm:styleLbl>
+  <dgm:styleLbl name="bgSibTrans2D1">
+    <dgm:fillClrLst meth="repeat">
+      <a:schemeClr val="accent1">
+        <a:tint val="60000"/>
+      </a:schemeClr>
+    </dgm:fillClrLst>
+    <dgm:linClrLst meth="repeat">
+      <a:schemeClr val="accent1">
+        <a:tint val="60000"/>
+      </a:schemeClr>
+    </dgm:linClrLst>
+    <dgm:effectClrLst/>
+    <dgm:txLinClrLst/>
+    <dgm:txFillClrLst/>
+    <dgm:txEffectClrLst/>
+  </dgm:styleLbl>
+  <dgm:styleLbl name="sibTrans1D1">
+    <dgm:fillClrLst meth="repeat">
+      <a:schemeClr val="accent1"/>
+    </dgm:fillClrLst>
+    <dgm:linClrLst meth="repeat">
+      <a:schemeClr val="accent1"/>
+    </dgm:linClrLst>
+    <dgm:effectClrLst/>
+    <dgm:txLinClrLst/>
+    <dgm:txFillClrLst meth="repeat">
+      <a:schemeClr val="tx1"/>
+    </dgm:txFillClrLst>
+    <dgm:txEffectClrLst/>
+  </dgm:styleLbl>
+  <dgm:styleLbl name="callout">
+    <dgm:fillClrLst meth="repeat">
+      <a:schemeClr val="accent1"/>
+    </dgm:fillClrLst>
+    <dgm:linClrLst meth="repeat">
+      <a:schemeClr val="accent1">
+        <a:tint val="50000"/>
+      </a:schemeClr>
+    </dgm:linClrLst>
+    <dgm:effectClrLst/>
+    <dgm:txLinClrLst/>
+    <dgm:txFillClrLst meth="repeat">
+      <a:schemeClr val="tx1"/>
+    </dgm:txFillClrLst>
+    <dgm:txEffectClrLst/>
+  </dgm:styleLbl>
+  <dgm:styleLbl name="asst0">
+    <dgm:fillClrLst meth="repeat">
+      <a:schemeClr val="accent1"/>
+    </dgm:fillClrLst>
+    <dgm:linClrLst meth="repeat">
+      <a:schemeClr val="lt1"/>
+    </dgm:linClrLst>
+    <dgm:effectClrLst/>
+    <dgm:txLinClrLst/>
+    <dgm:txFillClrLst/>
+    <dgm:txEffectClrLst/>
+  </dgm:styleLbl>
+  <dgm:styleLbl name="asst1">
+    <dgm:fillClrLst meth="repeat">
+      <a:schemeClr val="accent1"/>
+    </dgm:fillClrLst>
+    <dgm:linClrLst meth="repeat">
+      <a:schemeClr val="lt1"/>
+    </dgm:linClrLst>
+    <dgm:effectClrLst/>
+    <dgm:txLinClrLst/>
+    <dgm:txFillClrLst/>
+    <dgm:txEffectClrLst/>
+  </dgm:styleLbl>
+  <dgm:styleLbl name="asst2">
+    <dgm:fillClrLst meth="repeat">
+      <a:schemeClr val="accent1"/>
+    </dgm:fillClrLst>
+    <dgm:linClrLst meth="repeat">
+      <a:schemeClr val="lt1"/>
+    </dgm:linClrLst>
+    <dgm:effectClrLst/>
+    <dgm:txLinClrLst/>
+    <dgm:txFillClrLst/>
+    <dgm:txEffectClrLst/>
+  </dgm:styleLbl>
+  <dgm:styleLbl name="asst3">
+    <dgm:fillClrLst meth="repeat">
+      <a:schemeClr val="accent1"/>
+    </dgm:fillClrLst>
+    <dgm:linClrLst meth="repeat">
+      <a:schemeClr val="lt1"/>
+    </dgm:linClrLst>
+    <dgm:effectClrLst/>
+    <dgm:txLinClrLst/>
+    <dgm:txFillClrLst/>
+    <dgm:txEffectClrLst/>
+  </dgm:styleLbl>
+  <dgm:styleLbl name="asst4">
+    <dgm:fillClrLst meth="repeat">
+      <a:schemeClr val="accent1"/>
+    </dgm:fillClrLst>
+    <dgm:linClrLst meth="repeat">
+      <a:schemeClr val="lt1"/>
+    </dgm:linClrLst>
+    <dgm:effectClrLst/>
+    <dgm:txLinClrLst/>
+    <dgm:txFillClrLst/>
+    <dgm:txEffectClrLst/>
+  </dgm:styleLbl>
+  <dgm:styleLbl name="parChTrans2D1">
+    <dgm:fillClrLst meth="repeat">
+      <a:schemeClr val="accent1">
+        <a:tint val="60000"/>
+      </a:schemeClr>
+    </dgm:fillClrLst>
+    <dgm:linClrLst meth="repeat">
+      <a:schemeClr val="accent1">
+        <a:tint val="60000"/>
+      </a:schemeClr>
+    </dgm:linClrLst>
+    <dgm:effectClrLst/>
+    <dgm:txLinClrLst/>
+    <dgm:txFillClrLst meth="repeat">
+      <a:schemeClr val="lt1"/>
+    </dgm:txFillClrLst>
+    <dgm:txEffectClrLst/>
+  </dgm:styleLbl>
+  <dgm:styleLbl name="parChTrans2D2">
+    <dgm:fillClrLst meth="repeat">
+      <a:schemeClr val="accent1"/>
+    </dgm:fillClrLst>
+    <dgm:linClrLst meth="repeat">
+      <a:schemeClr val="accent1"/>
+    </dgm:linClrLst>
+    <dgm:effectClrLst/>
+    <dgm:txLinClrLst/>
+    <dgm:txFillClrLst meth="repeat">
+      <a:schemeClr val="lt1"/>
+    </dgm:txFillClrLst>
+    <dgm:txEffectClrLst/>
+  </dgm:styleLbl>
+  <dgm:styleLbl name="parChTrans2D3">
+    <dgm:fillClrLst meth="repeat">
+      <a:schemeClr val="accent1"/>
+    </dgm:fillClrLst>
+    <dgm:linClrLst meth="repeat">
+      <a:schemeClr val="accent1"/>
+    </dgm:linClrLst>
+    <dgm:effectClrLst/>
+    <dgm:txLinClrLst/>
+    <dgm:txFillClrLst meth="repeat">
+      <a:schemeClr val="lt1"/>
+    </dgm:txFillClrLst>
+    <dgm:txEffectClrLst/>
+  </dgm:styleLbl>
+  <dgm:styleLbl name="parChTrans2D4">
+    <dgm:fillClrLst meth="repeat">
+      <a:schemeClr val="accent1"/>
+    </dgm:fillClrLst>
+    <dgm:linClrLst meth="repeat">
+      <a:schemeClr val="accent1"/>
+    </dgm:linClrLst>
+    <dgm:effectClrLst/>
+    <dgm:txLinClrLst/>
+    <dgm:txFillClrLst meth="repeat">
+      <a:schemeClr val="lt1"/>
+    </dgm:txFillClrLst>
+    <dgm:txEffectClrLst/>
+  </dgm:styleLbl>
+  <dgm:styleLbl name="parChTrans1D1">
+    <dgm:fillClrLst meth="repeat">
+      <a:schemeClr val="accent1"/>
+    </dgm:fillClrLst>
+    <dgm:linClrLst meth="repeat">
+      <a:schemeClr val="accent1">
+        <a:shade val="60000"/>
+      </a:schemeClr>
+    </dgm:linClrLst>
+    <dgm:effectClrLst/>
+    <dgm:txLinClrLst/>
+    <dgm:txFillClrLst meth="repeat">
+      <a:schemeClr val="tx1"/>
+    </dgm:txFillClrLst>
+    <dgm:txEffectClrLst/>
+  </dgm:styleLbl>
+  <dgm:styleLbl name="parChTrans1D2">
+    <dgm:fillClrLst meth="repeat">
+      <a:schemeClr val="accent1"/>
+    </dgm:fillClrLst>
+    <dgm:linClrLst meth="repeat">
+      <a:schemeClr val="accent1">
+        <a:shade val="60000"/>
+      </a:schemeClr>
+    </dgm:linClrLst>
+    <dgm:effectClrLst/>
+    <dgm:txLinClrLst/>
+    <dgm:txFillClrLst meth="repeat">
+      <a:schemeClr val="tx1"/>
+    </dgm:txFillClrLst>
+    <dgm:txEffectClrLst/>
+  </dgm:styleLbl>
+  <dgm:styleLbl name="parChTrans1D3">
+    <dgm:fillClrLst meth="repeat">
+      <a:schemeClr val="accent1"/>
+    </dgm:fillClrLst>
+    <dgm:linClrLst meth="repeat">
+      <a:schemeClr val="accent1">
+        <a:shade val="80000"/>
+      </a:schemeClr>
+    </dgm:linClrLst>
+    <dgm:effectClrLst/>
+    <dgm:txLinClrLst/>
+    <dgm:txFillClrLst meth="repeat">
+      <a:schemeClr val="tx1"/>
+    </dgm:txFillClrLst>
+    <dgm:txEffectClrLst/>
+  </dgm:styleLbl>
+  <dgm:styleLbl name="parChTrans1D4">
+    <dgm:fillClrLst meth="repeat">
+      <a:schemeClr val="accent1"/>
+    </dgm:fillClrLst>
+    <dgm:linClrLst meth="repeat">
+      <a:schemeClr val="accent1">
+        <a:shade val="80000"/>
+      </a:schemeClr>
+    </dgm:linClrLst>
+    <dgm:effectClrLst/>
+    <dgm:txLinClrLst/>
+    <dgm:txFillClrLst meth="repeat">
+      <a:schemeClr val="tx1"/>
+    </dgm:txFillClrLst>
+    <dgm:txEffectClrLst/>
+  </dgm:styleLbl>
+  <dgm:styleLbl name="fgAcc1">
+    <dgm:fillClrLst meth="repeat">
+      <a:schemeClr val="lt1">
+        <a:alpha val="90000"/>
+      </a:schemeClr>
+    </dgm:fillClrLst>
+    <dgm:linClrLst meth="repeat">
+      <a:schemeClr val="accent1"/>
+    </dgm:linClrLst>
+    <dgm:effectClrLst/>
+    <dgm:txLinClrLst/>
+    <dgm:txFillClrLst meth="repeat">
+      <a:schemeClr val="dk1"/>
+    </dgm:txFillClrLst>
+    <dgm:txEffectClrLst/>
+  </dgm:styleLbl>
+  <dgm:styleLbl name="conFgAcc1">
+    <dgm:fillClrLst meth="repeat">
+      <a:schemeClr val="lt1">
+        <a:alpha val="90000"/>
+      </a:schemeClr>
+    </dgm:fillClrLst>
+    <dgm:linClrLst meth="repeat">
+      <a:schemeClr val="accent1"/>
+    </dgm:linClrLst>
+    <dgm:effectClrLst/>
+    <dgm:txLinClrLst/>
+    <dgm:txFillClrLst meth="repeat">
+      <a:schemeClr val="dk1"/>
+    </dgm:txFillClrLst>
+    <dgm:txEffectClrLst/>
+  </dgm:styleLbl>
+  <dgm:styleLbl name="alignAcc1">
+    <dgm:fillClrLst meth="repeat">
+      <a:schemeClr val="lt1">
+        <a:alpha val="90000"/>
+      </a:schemeClr>
+    </dgm:fillClrLst>
+    <dgm:linClrLst meth="repeat">
+      <a:schemeClr val="accent1"/>
+    </dgm:linClrLst>
+    <dgm:effectClrLst/>
+    <dgm:txLinClrLst/>
+    <dgm:txFillClrLst meth="repeat">
+      <a:schemeClr val="dk1"/>
+    </dgm:txFillClrLst>
+    <dgm:txEffectClrLst/>
+  </dgm:styleLbl>
+  <dgm:styleLbl name="trAlignAcc1">
+    <dgm:fillClrLst meth="repeat">
+      <a:schemeClr val="lt1">
+        <a:alpha val="40000"/>
+      </a:schemeClr>
+    </dgm:fillClrLst>
+    <dgm:linClrLst meth="repeat">
+      <a:schemeClr val="accent1"/>
+    </dgm:linClrLst>
+    <dgm:effectClrLst/>
+    <dgm:txLinClrLst/>
+    <dgm:txFillClrLst meth="repeat">
+      <a:schemeClr val="dk1"/>
+    </dgm:txFillClrLst>
+    <dgm:txEffectClrLst/>
+  </dgm:styleLbl>
+  <dgm:styleLbl name="bgAcc1">
+    <dgm:fillClrLst meth="repeat">
+      <a:schemeClr val="lt1">
+        <a:alpha val="90000"/>
+      </a:schemeClr>
+    </dgm:fillClrLst>
+    <dgm:linClrLst meth="repeat">
+      <a:schemeClr val="accent1"/>
+    </dgm:linClrLst>
+    <dgm:effectClrLst/>
+    <dgm:txLinClrLst/>
+    <dgm:txFillClrLst meth="repeat">
+      <a:schemeClr val="dk1"/>
+    </dgm:txFillClrLst>
+    <dgm:txEffectClrLst/>
+  </dgm:styleLbl>
+  <dgm:styleLbl name="solidFgAcc1">
+    <dgm:fillClrLst meth="repeat">
+      <a:schemeClr val="lt1"/>
+    </dgm:fillClrLst>
+    <dgm:linClrLst meth="repeat">
+      <a:schemeClr val="accent1"/>
+    </dgm:linClrLst>
+    <dgm:effectClrLst/>
+    <dgm:txLinClrLst/>
+    <dgm:txFillClrLst meth="repeat">
+      <a:schemeClr val="dk1"/>
+    </dgm:txFillClrLst>
+    <dgm:txEffectClrLst/>
+  </dgm:styleLbl>
+  <dgm:styleLbl name="solidAlignAcc1">
+    <dgm:fillClrLst meth="repeat">
+      <a:schemeClr val="lt1"/>
+    </dgm:fillClrLst>
+    <dgm:linClrLst meth="repeat">
+      <a:schemeClr val="accent1"/>
+    </dgm:linClrLst>
+    <dgm:effectClrLst/>
+    <dgm:txLinClrLst/>
+    <dgm:txFillClrLst meth="repeat">
+      <a:schemeClr val="dk1"/>
+    </dgm:txFillClrLst>
+    <dgm:txEffectClrLst/>
+  </dgm:styleLbl>
+  <dgm:styleLbl name="solidBgAcc1">
+    <dgm:fillClrLst meth="repeat">
+      <a:schemeClr val="lt1"/>
+    </dgm:fillClrLst>
+    <dgm:linClrLst meth="repeat">
+      <a:schemeClr val="accent1"/>
+    </dgm:linClrLst>
+    <dgm:effectClrLst/>
+    <dgm:txLinClrLst/>
+    <dgm:txFillClrLst meth="repeat">
+      <a:schemeClr val="dk1"/>
+    </dgm:txFillClrLst>
+    <dgm:txEffectClrLst/>
+  </dgm:styleLbl>
+  <dgm:styleLbl name="fgAccFollowNode1">
+    <dgm:fillClrLst meth="repeat">
+      <a:schemeClr val="accent1">
+        <a:alpha val="90000"/>
+        <a:tint val="40000"/>
+      </a:schemeClr>
+    </dgm:fillClrLst>
+    <dgm:linClrLst meth="repeat">
+      <a:schemeClr val="accent1">
+        <a:alpha val="90000"/>
+        <a:tint val="40000"/>
+      </a:schemeClr>
+    </dgm:linClrLst>
+    <dgm:effectClrLst/>
+    <dgm:txLinClrLst/>
+    <dgm:txFillClrLst meth="repeat">
+      <a:schemeClr val="dk1"/>
+    </dgm:txFillClrLst>
+    <dgm:txEffectClrLst/>
+  </dgm:styleLbl>
+  <dgm:styleLbl name="alignAccFollowNode1">
+    <dgm:fillClrLst meth="repeat">
+      <a:schemeClr val="accent1">
+        <a:alpha val="90000"/>
+        <a:tint val="40000"/>
+      </a:schemeClr>
+    </dgm:fillClrLst>
+    <dgm:linClrLst meth="repeat">
+      <a:schemeClr val="accent1">
+        <a:alpha val="90000"/>
+        <a:tint val="40000"/>
+      </a:schemeClr>
+    </dgm:linClrLst>
+    <dgm:effectClrLst/>
+    <dgm:txLinClrLst/>
+    <dgm:txFillClrLst meth="repeat">
+      <a:schemeClr val="dk1"/>
+    </dgm:txFillClrLst>
+    <dgm:txEffectClrLst/>
+  </dgm:styleLbl>
+  <dgm:styleLbl name="bgAccFollowNode1">
+    <dgm:fillClrLst meth="repeat">
+      <a:schemeClr val="accent1">
+        <a:alpha val="90000"/>
+        <a:tint val="40000"/>
+      </a:schemeClr>
+    </dgm:fillClrLst>
+    <dgm:linClrLst meth="repeat">
+      <a:schemeClr val="accent1">
+        <a:alpha val="90000"/>
+        <a:tint val="40000"/>
+      </a:schemeClr>
+    </dgm:linClrLst>
+    <dgm:effectClrLst/>
+    <dgm:txLinClrLst/>
+    <dgm:txFillClrLst meth="repeat">
+      <a:schemeClr val="dk1"/>
+    </dgm:txFillClrLst>
+    <dgm:txEffectClrLst/>
+  </dgm:styleLbl>
+  <dgm:styleLbl name="fgAcc0">
+    <dgm:fillClrLst meth="repeat">
+      <a:schemeClr val="lt1">
+        <a:alpha val="90000"/>
+      </a:schemeClr>
+    </dgm:fillClrLst>
+    <dgm:linClrLst meth="repeat">
+      <a:schemeClr val="accent1"/>
+    </dgm:linClrLst>
+    <dgm:effectClrLst/>
+    <dgm:txLinClrLst/>
+    <dgm:txFillClrLst meth="repeat">
+      <a:schemeClr val="dk1"/>
+    </dgm:txFillClrLst>
+    <dgm:txEffectClrLst/>
+  </dgm:styleLbl>
+  <dgm:styleLbl name="fgAcc2">
+    <dgm:fillClrLst meth="repeat">
+      <a:schemeClr val="lt1">
+        <a:alpha val="90000"/>
+      </a:schemeClr>
+    </dgm:fillClrLst>
+    <dgm:linClrLst meth="repeat">
+      <a:schemeClr val="accent1"/>
+    </dgm:linClrLst>
+    <dgm:effectClrLst/>
+    <dgm:txLinClrLst/>
+    <dgm:txFillClrLst meth="repeat">
+      <a:schemeClr val="dk1"/>
+    </dgm:txFillClrLst>
+    <dgm:txEffectClrLst/>
+  </dgm:styleLbl>
+  <dgm:styleLbl name="fgAcc3">
+    <dgm:fillClrLst meth="repeat">
+      <a:schemeClr val="lt1">
+        <a:alpha val="90000"/>
+      </a:schemeClr>
+    </dgm:fillClrLst>
+    <dgm:linClrLst meth="repeat">
+      <a:schemeClr val="accent1"/>
+    </dgm:linClrLst>
+    <dgm:effectClrLst/>
+    <dgm:txLinClrLst/>
+    <dgm:txFillClrLst meth="repeat">
+      <a:schemeClr val="dk1"/>
+    </dgm:txFillClrLst>
+    <dgm:txEffectClrLst/>
+  </dgm:styleLbl>
+  <dgm:styleLbl name="fgAcc4">
+    <dgm:fillClrLst meth="repeat">
+      <a:schemeClr val="lt1">
+        <a:alpha val="90000"/>
+      </a:schemeClr>
+    </dgm:fillClrLst>
+    <dgm:linClrLst meth="repeat">
+      <a:schemeClr val="accent1"/>
+    </dgm:linClrLst>
+    <dgm:effectClrLst/>
+    <dgm:txLinClrLst/>
+    <dgm:txFillClrLst meth="repeat">
+      <a:schemeClr val="dk1"/>
+    </dgm:txFillClrLst>
+    <dgm:txEffectClrLst/>
+  </dgm:styleLbl>
+  <dgm:styleLbl name="bgShp">
+    <dgm:fillClrLst meth="repeat">
+      <a:schemeClr val="accent1">
+        <a:tint val="40000"/>
+      </a:schemeClr>
+    </dgm:fillClrLst>
+    <dgm:linClrLst meth="repeat">
+      <a:schemeClr val="accent1"/>
+    </dgm:linClrLst>
+    <dgm:effectClrLst/>
+    <dgm:txLinClrLst/>
+    <dgm:txFillClrLst meth="repeat">
+      <a:schemeClr val="dk1"/>
+    </dgm:txFillClrLst>
+    <dgm:txEffectClrLst/>
+  </dgm:styleLbl>
+  <dgm:styleLbl name="dkBgShp">
+    <dgm:fillClrLst meth="repeat">
+      <a:schemeClr val="accent1">
+        <a:shade val="80000"/>
+      </a:schemeClr>
+    </dgm:fillClrLst>
+    <dgm:linClrLst meth="repeat">
+      <a:schemeClr val="accent1"/>
+    </dgm:linClrLst>
+    <dgm:effectClrLst/>
+    <dgm:txLinClrLst/>
+    <dgm:txFillClrLst meth="repeat">
+      <a:schemeClr val="lt1"/>
+    </dgm:txFillClrLst>
+    <dgm:txEffectClrLst/>
+  </dgm:styleLbl>
+  <dgm:styleLbl name="trBgShp">
+    <dgm:fillClrLst meth="repeat">
+      <a:schemeClr val="accent1">
+        <a:tint val="50000"/>
+        <a:alpha val="40000"/>
+      </a:schemeClr>
+    </dgm:fillClrLst>
+    <dgm:linClrLst meth="repeat">
+      <a:schemeClr val="accent1"/>
+    </dgm:linClrLst>
+    <dgm:effectClrLst/>
+    <dgm:txLinClrLst/>
+    <dgm:txFillClrLst meth="repeat">
+      <a:schemeClr val="lt1"/>
+    </dgm:txFillClrLst>
+    <dgm:txEffectClrLst/>
+  </dgm:styleLbl>
+  <dgm:styleLbl name="fgShp">
+    <dgm:fillClrLst meth="repeat">
+      <a:schemeClr val="accent1">
+        <a:tint val="60000"/>
+      </a:schemeClr>
+    </dgm:fillClrLst>
+    <dgm:linClrLst meth="repeat">
+      <a:schemeClr val="lt1"/>
+    </dgm:linClrLst>
+    <dgm:effectClrLst/>
+    <dgm:txLinClrLst/>
+    <dgm:txFillClrLst meth="repeat">
+      <a:schemeClr val="dk1"/>
+    </dgm:txFillClrLst>
+    <dgm:txEffectClrLst/>
+  </dgm:styleLbl>
+  <dgm:styleLbl name="revTx">
+    <dgm:fillClrLst meth="repeat">
+      <a:schemeClr val="lt1">
+        <a:alpha val="0"/>
+      </a:schemeClr>
+    </dgm:fillClrLst>
+    <dgm:linClrLst meth="repeat">
+      <a:schemeClr val="dk1">
+        <a:alpha val="0"/>
+      </a:schemeClr>
+    </dgm:linClrLst>
+    <dgm:effectClrLst/>
+    <dgm:txLinClrLst/>
+    <dgm:txFillClrLst meth="repeat">
+      <a:schemeClr val="tx1"/>
+    </dgm:txFillClrLst>
+    <dgm:txEffectClrLst/>
+  </dgm:styleLbl>
+</dgm:colorsDef>
+</file>
+
+<file path=ppt/diagrams/data1.xml><?xml version="1.0" encoding="utf-8"?>
+<dgm:dataModel xmlns:dgm="http://schemas.openxmlformats.org/drawingml/2006/diagram" xmlns:a="http://schemas.openxmlformats.org/drawingml/2006/main">
+  <dgm:ptLst>
+    <dgm:pt modelId="{E79C9C68-D856-654E-A289-3DDF2C2FE588}" type="doc">
+      <dgm:prSet loTypeId="urn:microsoft.com/office/officeart/2005/8/layout/vList2" loCatId="list" qsTypeId="urn:microsoft.com/office/officeart/2005/8/quickstyle/simple1" qsCatId="simple" csTypeId="urn:microsoft.com/office/officeart/2005/8/colors/accent1_2" csCatId="accent1"/>
+      <dgm:spPr/>
+      <dgm:t>
+        <a:bodyPr/>
+        <a:lstStyle/>
+        <a:p>
+          <a:endParaRPr lang="ru-RU"/>
+        </a:p>
+      </dgm:t>
+    </dgm:pt>
+    <dgm:pt modelId="{F51F19A3-644E-584F-AE0B-2F6F628EF27C}">
+      <dgm:prSet/>
+      <dgm:spPr/>
+      <dgm:t>
+        <a:bodyPr/>
+        <a:lstStyle/>
+        <a:p>
+          <a:r>
+            <a:rPr lang="ru-RU" dirty="0"/>
+            <a:t>Эффективные алгоритмы для ее решения неизвестны, и есть гипотеза, что такого алгоритма не существует. </a:t>
+          </a:r>
+        </a:p>
+      </dgm:t>
+    </dgm:pt>
+    <dgm:pt modelId="{E99DA5D1-69E1-5445-9788-18A526B93AAC}" type="parTrans" cxnId="{31F11CB4-2BD6-2744-A53C-DE5942A630F8}">
+      <dgm:prSet/>
+      <dgm:spPr/>
+      <dgm:t>
+        <a:bodyPr/>
+        <a:lstStyle/>
+        <a:p>
+          <a:endParaRPr lang="ru-RU"/>
+        </a:p>
+      </dgm:t>
+    </dgm:pt>
+    <dgm:pt modelId="{53E440DE-AE4E-5847-ABF9-55DD0404804F}" type="sibTrans" cxnId="{31F11CB4-2BD6-2744-A53C-DE5942A630F8}">
+      <dgm:prSet/>
+      <dgm:spPr/>
+      <dgm:t>
+        <a:bodyPr/>
+        <a:lstStyle/>
+        <a:p>
+          <a:endParaRPr lang="ru-RU"/>
+        </a:p>
+      </dgm:t>
+    </dgm:pt>
+    <dgm:pt modelId="{AA5F20DE-6F44-774F-9913-D878B268CC70}">
+      <dgm:prSet/>
+      <dgm:spPr/>
+      <dgm:t>
+        <a:bodyPr/>
+        <a:lstStyle/>
+        <a:p>
+          <a:r>
+            <a:rPr lang="ru-RU"/>
+            <a:t>Очевидный алгоритм, действующий методом «грубой силы», перебирает все подмножества узлов, проверяет каждое из них на независимость, после чего запоминает самое большое из обнаруженных подмножеств. </a:t>
+          </a:r>
+        </a:p>
+      </dgm:t>
+    </dgm:pt>
+    <dgm:pt modelId="{A8E0E3C5-0656-1F44-9F04-AA3155368AB4}" type="parTrans" cxnId="{416A31B2-759C-E54F-8F95-2D6784A8A700}">
+      <dgm:prSet/>
+      <dgm:spPr/>
+      <dgm:t>
+        <a:bodyPr/>
+        <a:lstStyle/>
+        <a:p>
+          <a:endParaRPr lang="ru-RU"/>
+        </a:p>
+      </dgm:t>
+    </dgm:pt>
+    <dgm:pt modelId="{A6461645-FB9F-6047-9726-2B475B1F9E9D}" type="sibTrans" cxnId="{416A31B2-759C-E54F-8F95-2D6784A8A700}">
+      <dgm:prSet/>
+      <dgm:spPr/>
+      <dgm:t>
+        <a:bodyPr/>
+        <a:lstStyle/>
+        <a:p>
+          <a:endParaRPr lang="ru-RU"/>
+        </a:p>
+      </dgm:t>
+    </dgm:pt>
+    <dgm:pt modelId="{C13AA11E-51B6-C644-BBD9-7400A52E4B8E}">
+      <dgm:prSet/>
+      <dgm:spPr/>
+      <dgm:t>
+        <a:bodyPr/>
+        <a:lstStyle/>
+        <a:p>
+          <a:r>
+            <a:rPr lang="ru-RU"/>
+            <a:t>Возможно, это решение близко к лучшему из того, что возможно сделать в этой задаче.</a:t>
+          </a:r>
+        </a:p>
+      </dgm:t>
+    </dgm:pt>
+    <dgm:pt modelId="{1C065601-9D2F-2B4B-BA15-104266CE9369}" type="parTrans" cxnId="{55EAFB4F-E332-064C-983B-CBD3F84844BC}">
+      <dgm:prSet/>
+      <dgm:spPr/>
+      <dgm:t>
+        <a:bodyPr/>
+        <a:lstStyle/>
+        <a:p>
+          <a:endParaRPr lang="ru-RU"/>
+        </a:p>
+      </dgm:t>
+    </dgm:pt>
+    <dgm:pt modelId="{74F273A6-FFDE-3F44-BF6C-68D6AB5A0719}" type="sibTrans" cxnId="{55EAFB4F-E332-064C-983B-CBD3F84844BC}">
+      <dgm:prSet/>
+      <dgm:spPr/>
+      <dgm:t>
+        <a:bodyPr/>
+        <a:lstStyle/>
+        <a:p>
+          <a:endParaRPr lang="ru-RU"/>
+        </a:p>
+      </dgm:t>
+    </dgm:pt>
+    <dgm:pt modelId="{601F4473-43E0-CC49-B82E-14DD5575AE5C}">
+      <dgm:prSet/>
+      <dgm:spPr/>
+      <dgm:t>
+        <a:bodyPr/>
+        <a:lstStyle/>
+        <a:p>
+          <a:r>
+            <a:rPr lang="ru-RU"/>
+            <a:t>Задача независимого множества принадлежит к большому классу задач, называемых </a:t>
+          </a:r>
+          <a:r>
+            <a:rPr lang="en-US" i="1"/>
+            <a:t>NP</a:t>
+          </a:r>
+          <a:r>
+            <a:rPr lang="ru-RU" i="1"/>
+            <a:t>-полными.</a:t>
+          </a:r>
+          <a:r>
+            <a:rPr lang="ru-RU"/>
+            <a:t> </a:t>
+          </a:r>
+        </a:p>
+      </dgm:t>
+    </dgm:pt>
+    <dgm:pt modelId="{6ACE6A44-2438-E44C-A03A-B6CCD49984DF}" type="parTrans" cxnId="{017ED055-EE73-FC4C-83DC-325319DCF06F}">
+      <dgm:prSet/>
+      <dgm:spPr/>
+      <dgm:t>
+        <a:bodyPr/>
+        <a:lstStyle/>
+        <a:p>
+          <a:endParaRPr lang="ru-RU"/>
+        </a:p>
+      </dgm:t>
+    </dgm:pt>
+    <dgm:pt modelId="{A3145C6E-12F6-334A-ADD9-AFD8C34C1A06}" type="sibTrans" cxnId="{017ED055-EE73-FC4C-83DC-325319DCF06F}">
+      <dgm:prSet/>
+      <dgm:spPr/>
+      <dgm:t>
+        <a:bodyPr/>
+        <a:lstStyle/>
+        <a:p>
+          <a:endParaRPr lang="ru-RU"/>
+        </a:p>
+      </dgm:t>
+    </dgm:pt>
+    <dgm:pt modelId="{8E6D5A7D-646C-0149-AAE7-38B764A196DE}">
+      <dgm:prSet/>
+      <dgm:spPr/>
+      <dgm:t>
+        <a:bodyPr/>
+        <a:lstStyle/>
+        <a:p>
+          <a:r>
+            <a:rPr lang="ru-RU"/>
+            <a:t>Ни для одной из этих задач не известен эффективный алгоритм решения, но все они эквивалентны в том смысле, что решение любой такой задачи будет точно подразумевать существование такого решения у всех.</a:t>
+          </a:r>
+        </a:p>
+      </dgm:t>
+    </dgm:pt>
+    <dgm:pt modelId="{6E749977-EDDE-3946-9E9F-BD983EC41D4F}" type="parTrans" cxnId="{E1F2C7D0-9409-F946-BA9D-5338795F1B28}">
+      <dgm:prSet/>
+      <dgm:spPr/>
+      <dgm:t>
+        <a:bodyPr/>
+        <a:lstStyle/>
+        <a:p>
+          <a:endParaRPr lang="ru-RU"/>
+        </a:p>
+      </dgm:t>
+    </dgm:pt>
+    <dgm:pt modelId="{132825E2-C26C-9D42-BDEF-C5249987E0D6}" type="sibTrans" cxnId="{E1F2C7D0-9409-F946-BA9D-5338795F1B28}">
+      <dgm:prSet/>
+      <dgm:spPr/>
+      <dgm:t>
+        <a:bodyPr/>
+        <a:lstStyle/>
+        <a:p>
+          <a:endParaRPr lang="ru-RU"/>
+        </a:p>
+      </dgm:t>
+    </dgm:pt>
+    <dgm:pt modelId="{F6649532-7D5E-FD4F-9851-408B6718C51A}">
+      <dgm:prSet/>
+      <dgm:spPr/>
+      <dgm:t>
+        <a:bodyPr/>
+        <a:lstStyle/>
+        <a:p>
+          <a:r>
+            <a:rPr lang="ru-RU"/>
+            <a:t>Можно ли сказать хоть что-нибудь положительное о сложности задачи независимого множества? </a:t>
+          </a:r>
+        </a:p>
+      </dgm:t>
+    </dgm:pt>
+    <dgm:pt modelId="{6EA92996-9D9E-F946-AF19-B1619B051E40}" type="parTrans" cxnId="{FDD361D5-EE7D-3748-B1AC-9320C1BA421E}">
+      <dgm:prSet/>
+      <dgm:spPr/>
+      <dgm:t>
+        <a:bodyPr/>
+        <a:lstStyle/>
+        <a:p>
+          <a:endParaRPr lang="ru-RU"/>
+        </a:p>
+      </dgm:t>
+    </dgm:pt>
+    <dgm:pt modelId="{BF6E4856-64E9-704D-B6B3-630E93401281}" type="sibTrans" cxnId="{FDD361D5-EE7D-3748-B1AC-9320C1BA421E}">
+      <dgm:prSet/>
+      <dgm:spPr/>
+      <dgm:t>
+        <a:bodyPr/>
+        <a:lstStyle/>
+        <a:p>
+          <a:endParaRPr lang="ru-RU"/>
+        </a:p>
+      </dgm:t>
+    </dgm:pt>
+    <dgm:pt modelId="{80982D06-3479-3C4D-9B12-E7ADC0627C38}">
+      <dgm:prSet/>
+      <dgm:spPr/>
+      <dgm:t>
+        <a:bodyPr/>
+        <a:lstStyle/>
+        <a:p>
+          <a:r>
+            <a:rPr lang="ru-RU"/>
+            <a:t>Если имеется граф </a:t>
+          </a:r>
+          <a:r>
+            <a:rPr lang="en-US"/>
+            <a:t>G </a:t>
+          </a:r>
+          <a:r>
+            <a:rPr lang="ru-RU"/>
+            <a:t>из 1000 узлов и мы захотим убедить вас в том, что он содержит независимое множество </a:t>
+          </a:r>
+          <a:r>
+            <a:rPr lang="en-US"/>
+            <a:t>S </a:t>
+          </a:r>
+          <a:r>
+            <a:rPr lang="ru-RU"/>
+            <a:t>с размером 100, сделать это будет несложно. Достаточно показать граф </a:t>
+          </a:r>
+          <a:r>
+            <a:rPr lang="en-US"/>
+            <a:t>G, </a:t>
+          </a:r>
+          <a:r>
+            <a:rPr lang="ru-RU"/>
+            <a:t>выделить узлы </a:t>
+          </a:r>
+          <a:r>
+            <a:rPr lang="en-US"/>
+            <a:t>S </a:t>
+          </a:r>
+          <a:r>
+            <a:rPr lang="ru-RU"/>
+            <a:t>красным цветом и позволить вам убедиться в том, что никакие два узла не соединены ребром. </a:t>
+          </a:r>
+        </a:p>
+      </dgm:t>
+    </dgm:pt>
+    <dgm:pt modelId="{EADA56A8-9135-5542-A3C0-C8FC05996F55}" type="parTrans" cxnId="{F4FE8F55-08FC-E648-8AE3-38B6C909E8F7}">
+      <dgm:prSet/>
+      <dgm:spPr/>
+      <dgm:t>
+        <a:bodyPr/>
+        <a:lstStyle/>
+        <a:p>
+          <a:endParaRPr lang="ru-RU"/>
+        </a:p>
+      </dgm:t>
+    </dgm:pt>
+    <dgm:pt modelId="{A078B3DE-7AAA-A442-80F8-FB79B740BF3A}" type="sibTrans" cxnId="{F4FE8F55-08FC-E648-8AE3-38B6C909E8F7}">
+      <dgm:prSet/>
+      <dgm:spPr/>
+      <dgm:t>
+        <a:bodyPr/>
+        <a:lstStyle/>
+        <a:p>
+          <a:endParaRPr lang="ru-RU"/>
+        </a:p>
+      </dgm:t>
+    </dgm:pt>
+    <dgm:pt modelId="{9908EA2E-876D-284F-A47F-61A8F04A30E4}">
+      <dgm:prSet/>
+      <dgm:spPr/>
+      <dgm:t>
+        <a:bodyPr/>
+        <a:lstStyle/>
+        <a:p>
+          <a:r>
+            <a:rPr lang="ru-RU"/>
+            <a:t>Между проверкой того, что множество действительно является большим независимым, и непосредственным поиском большого независимого множества существует огромная разница.</a:t>
+          </a:r>
+        </a:p>
+      </dgm:t>
+    </dgm:pt>
+    <dgm:pt modelId="{F3FBEDE6-42E5-4849-AA9A-477BCCE191FA}" type="parTrans" cxnId="{2F113552-DB12-CC4E-97D0-A5DD6F619AF8}">
+      <dgm:prSet/>
+      <dgm:spPr/>
+      <dgm:t>
+        <a:bodyPr/>
+        <a:lstStyle/>
+        <a:p>
+          <a:endParaRPr lang="ru-RU"/>
+        </a:p>
+      </dgm:t>
+    </dgm:pt>
+    <dgm:pt modelId="{DE399D05-2E6D-DD4C-945E-F3E1BFF5A1B1}" type="sibTrans" cxnId="{2F113552-DB12-CC4E-97D0-A5DD6F619AF8}">
+      <dgm:prSet/>
+      <dgm:spPr/>
+      <dgm:t>
+        <a:bodyPr/>
+        <a:lstStyle/>
+        <a:p>
+          <a:endParaRPr lang="ru-RU"/>
+        </a:p>
+      </dgm:t>
+    </dgm:pt>
+    <dgm:pt modelId="{8769859C-938C-6945-993E-087A27E0B428}">
+      <dgm:prSet/>
+      <dgm:spPr/>
+      <dgm:t>
+        <a:bodyPr/>
+        <a:lstStyle/>
+        <a:p>
+          <a:r>
+            <a:rPr lang="ru-RU"/>
+            <a:t>В некоторых особо сложных задачах даже может не быть простого способа «проверки» решений в этом смысле </a:t>
+          </a:r>
+        </a:p>
+      </dgm:t>
+    </dgm:pt>
+    <dgm:pt modelId="{7425C90C-F6D9-A245-A9B3-E2E5DE9E803E}" type="parTrans" cxnId="{38528A9D-1236-CD48-BA56-49A84B0A0A53}">
+      <dgm:prSet/>
+      <dgm:spPr/>
+      <dgm:t>
+        <a:bodyPr/>
+        <a:lstStyle/>
+        <a:p>
+          <a:endParaRPr lang="ru-RU"/>
+        </a:p>
+      </dgm:t>
+    </dgm:pt>
+    <dgm:pt modelId="{B719B414-4475-F74F-89FA-4EB3245C0B47}" type="sibTrans" cxnId="{38528A9D-1236-CD48-BA56-49A84B0A0A53}">
+      <dgm:prSet/>
+      <dgm:spPr/>
+      <dgm:t>
+        <a:bodyPr/>
+        <a:lstStyle/>
+        <a:p>
+          <a:endParaRPr lang="ru-RU"/>
+        </a:p>
+      </dgm:t>
+    </dgm:pt>
+    <dgm:pt modelId="{381A8708-EB0A-274A-A859-37247E185B86}" type="pres">
+      <dgm:prSet presAssocID="{E79C9C68-D856-654E-A289-3DDF2C2FE588}" presName="linear" presStyleCnt="0">
+        <dgm:presLayoutVars>
+          <dgm:animLvl val="lvl"/>
+          <dgm:resizeHandles val="exact"/>
+        </dgm:presLayoutVars>
+      </dgm:prSet>
+      <dgm:spPr/>
+    </dgm:pt>
+    <dgm:pt modelId="{566F4873-A7BF-3C41-BC29-F1965046FCB8}" type="pres">
+      <dgm:prSet presAssocID="{F51F19A3-644E-584F-AE0B-2F6F628EF27C}" presName="parentText" presStyleLbl="node1" presStyleIdx="0" presStyleCnt="4">
+        <dgm:presLayoutVars>
+          <dgm:chMax val="0"/>
+          <dgm:bulletEnabled val="1"/>
+        </dgm:presLayoutVars>
+      </dgm:prSet>
+      <dgm:spPr/>
+    </dgm:pt>
+    <dgm:pt modelId="{11F41D0C-508D-B849-BF2C-EA2415EA2C0A}" type="pres">
+      <dgm:prSet presAssocID="{F51F19A3-644E-584F-AE0B-2F6F628EF27C}" presName="childText" presStyleLbl="revTx" presStyleIdx="0" presStyleCnt="3">
+        <dgm:presLayoutVars>
+          <dgm:bulletEnabled val="1"/>
+        </dgm:presLayoutVars>
+      </dgm:prSet>
+      <dgm:spPr/>
+    </dgm:pt>
+    <dgm:pt modelId="{191DA7C7-AC46-224D-A315-3497C5C65521}" type="pres">
+      <dgm:prSet presAssocID="{601F4473-43E0-CC49-B82E-14DD5575AE5C}" presName="parentText" presStyleLbl="node1" presStyleIdx="1" presStyleCnt="4">
+        <dgm:presLayoutVars>
+          <dgm:chMax val="0"/>
+          <dgm:bulletEnabled val="1"/>
+        </dgm:presLayoutVars>
+      </dgm:prSet>
+      <dgm:spPr/>
+    </dgm:pt>
+    <dgm:pt modelId="{E5B0A4A8-CC1C-9843-B1B0-4348E81FCA04}" type="pres">
+      <dgm:prSet presAssocID="{601F4473-43E0-CC49-B82E-14DD5575AE5C}" presName="childText" presStyleLbl="revTx" presStyleIdx="1" presStyleCnt="3">
+        <dgm:presLayoutVars>
+          <dgm:bulletEnabled val="1"/>
+        </dgm:presLayoutVars>
+      </dgm:prSet>
+      <dgm:spPr/>
+    </dgm:pt>
+    <dgm:pt modelId="{65DF558C-B8FC-D446-AD17-4BC903895F22}" type="pres">
+      <dgm:prSet presAssocID="{F6649532-7D5E-FD4F-9851-408B6718C51A}" presName="parentText" presStyleLbl="node1" presStyleIdx="2" presStyleCnt="4">
+        <dgm:presLayoutVars>
+          <dgm:chMax val="0"/>
+          <dgm:bulletEnabled val="1"/>
+        </dgm:presLayoutVars>
+      </dgm:prSet>
+      <dgm:spPr/>
+    </dgm:pt>
+    <dgm:pt modelId="{B2393304-7513-244C-9075-C6E93E2B835A}" type="pres">
+      <dgm:prSet presAssocID="{F6649532-7D5E-FD4F-9851-408B6718C51A}" presName="childText" presStyleLbl="revTx" presStyleIdx="2" presStyleCnt="3">
+        <dgm:presLayoutVars>
+          <dgm:bulletEnabled val="1"/>
+        </dgm:presLayoutVars>
+      </dgm:prSet>
+      <dgm:spPr/>
+    </dgm:pt>
+    <dgm:pt modelId="{246A149A-603E-2C45-A1FE-7331CB627121}" type="pres">
+      <dgm:prSet presAssocID="{8769859C-938C-6945-993E-087A27E0B428}" presName="parentText" presStyleLbl="node1" presStyleIdx="3" presStyleCnt="4">
+        <dgm:presLayoutVars>
+          <dgm:chMax val="0"/>
+          <dgm:bulletEnabled val="1"/>
+        </dgm:presLayoutVars>
+      </dgm:prSet>
+      <dgm:spPr/>
+    </dgm:pt>
+  </dgm:ptLst>
+  <dgm:cxnLst>
+    <dgm:cxn modelId="{FB9ED213-B777-1445-AF8B-A7A810FED6AC}" type="presOf" srcId="{F51F19A3-644E-584F-AE0B-2F6F628EF27C}" destId="{566F4873-A7BF-3C41-BC29-F1965046FCB8}" srcOrd="0" destOrd="0" presId="urn:microsoft.com/office/officeart/2005/8/layout/vList2"/>
+    <dgm:cxn modelId="{A3F36E16-5EFA-C445-B074-D42CD6404369}" type="presOf" srcId="{601F4473-43E0-CC49-B82E-14DD5575AE5C}" destId="{191DA7C7-AC46-224D-A315-3497C5C65521}" srcOrd="0" destOrd="0" presId="urn:microsoft.com/office/officeart/2005/8/layout/vList2"/>
+    <dgm:cxn modelId="{AB561E1A-598D-034C-BBDD-513230DF3C68}" type="presOf" srcId="{E79C9C68-D856-654E-A289-3DDF2C2FE588}" destId="{381A8708-EB0A-274A-A859-37247E185B86}" srcOrd="0" destOrd="0" presId="urn:microsoft.com/office/officeart/2005/8/layout/vList2"/>
+    <dgm:cxn modelId="{58EEFB45-DB93-3842-BFC0-D66AAE5F2FF3}" type="presOf" srcId="{8E6D5A7D-646C-0149-AAE7-38B764A196DE}" destId="{E5B0A4A8-CC1C-9843-B1B0-4348E81FCA04}" srcOrd="0" destOrd="0" presId="urn:microsoft.com/office/officeart/2005/8/layout/vList2"/>
+    <dgm:cxn modelId="{55EAFB4F-E332-064C-983B-CBD3F84844BC}" srcId="{F51F19A3-644E-584F-AE0B-2F6F628EF27C}" destId="{C13AA11E-51B6-C644-BBD9-7400A52E4B8E}" srcOrd="1" destOrd="0" parTransId="{1C065601-9D2F-2B4B-BA15-104266CE9369}" sibTransId="{74F273A6-FFDE-3F44-BF6C-68D6AB5A0719}"/>
+    <dgm:cxn modelId="{2F113552-DB12-CC4E-97D0-A5DD6F619AF8}" srcId="{F6649532-7D5E-FD4F-9851-408B6718C51A}" destId="{9908EA2E-876D-284F-A47F-61A8F04A30E4}" srcOrd="1" destOrd="0" parTransId="{F3FBEDE6-42E5-4849-AA9A-477BCCE191FA}" sibTransId="{DE399D05-2E6D-DD4C-945E-F3E1BFF5A1B1}"/>
+    <dgm:cxn modelId="{F4FE8F55-08FC-E648-8AE3-38B6C909E8F7}" srcId="{F6649532-7D5E-FD4F-9851-408B6718C51A}" destId="{80982D06-3479-3C4D-9B12-E7ADC0627C38}" srcOrd="0" destOrd="0" parTransId="{EADA56A8-9135-5542-A3C0-C8FC05996F55}" sibTransId="{A078B3DE-7AAA-A442-80F8-FB79B740BF3A}"/>
+    <dgm:cxn modelId="{017ED055-EE73-FC4C-83DC-325319DCF06F}" srcId="{E79C9C68-D856-654E-A289-3DDF2C2FE588}" destId="{601F4473-43E0-CC49-B82E-14DD5575AE5C}" srcOrd="1" destOrd="0" parTransId="{6ACE6A44-2438-E44C-A03A-B6CCD49984DF}" sibTransId="{A3145C6E-12F6-334A-ADD9-AFD8C34C1A06}"/>
+    <dgm:cxn modelId="{E9995763-58F5-6749-807D-00FDA4523C0E}" type="presOf" srcId="{F6649532-7D5E-FD4F-9851-408B6718C51A}" destId="{65DF558C-B8FC-D446-AD17-4BC903895F22}" srcOrd="0" destOrd="0" presId="urn:microsoft.com/office/officeart/2005/8/layout/vList2"/>
+    <dgm:cxn modelId="{CB061F70-9E47-A24F-BAE7-AEEE2F345084}" type="presOf" srcId="{AA5F20DE-6F44-774F-9913-D878B268CC70}" destId="{11F41D0C-508D-B849-BF2C-EA2415EA2C0A}" srcOrd="0" destOrd="0" presId="urn:microsoft.com/office/officeart/2005/8/layout/vList2"/>
+    <dgm:cxn modelId="{CAE5387C-03D8-1E42-B2EC-0159CB98CC97}" type="presOf" srcId="{9908EA2E-876D-284F-A47F-61A8F04A30E4}" destId="{B2393304-7513-244C-9075-C6E93E2B835A}" srcOrd="0" destOrd="1" presId="urn:microsoft.com/office/officeart/2005/8/layout/vList2"/>
+    <dgm:cxn modelId="{38528A9D-1236-CD48-BA56-49A84B0A0A53}" srcId="{E79C9C68-D856-654E-A289-3DDF2C2FE588}" destId="{8769859C-938C-6945-993E-087A27E0B428}" srcOrd="3" destOrd="0" parTransId="{7425C90C-F6D9-A245-A9B3-E2E5DE9E803E}" sibTransId="{B719B414-4475-F74F-89FA-4EB3245C0B47}"/>
+    <dgm:cxn modelId="{416A31B2-759C-E54F-8F95-2D6784A8A700}" srcId="{F51F19A3-644E-584F-AE0B-2F6F628EF27C}" destId="{AA5F20DE-6F44-774F-9913-D878B268CC70}" srcOrd="0" destOrd="0" parTransId="{A8E0E3C5-0656-1F44-9F04-AA3155368AB4}" sibTransId="{A6461645-FB9F-6047-9726-2B475B1F9E9D}"/>
+    <dgm:cxn modelId="{31F11CB4-2BD6-2744-A53C-DE5942A630F8}" srcId="{E79C9C68-D856-654E-A289-3DDF2C2FE588}" destId="{F51F19A3-644E-584F-AE0B-2F6F628EF27C}" srcOrd="0" destOrd="0" parTransId="{E99DA5D1-69E1-5445-9788-18A526B93AAC}" sibTransId="{53E440DE-AE4E-5847-ABF9-55DD0404804F}"/>
+    <dgm:cxn modelId="{AF6EA4C9-1E71-2140-A1B7-5009C8532DBD}" type="presOf" srcId="{C13AA11E-51B6-C644-BBD9-7400A52E4B8E}" destId="{11F41D0C-508D-B849-BF2C-EA2415EA2C0A}" srcOrd="0" destOrd="1" presId="urn:microsoft.com/office/officeart/2005/8/layout/vList2"/>
+    <dgm:cxn modelId="{E799A6CC-2905-FE4C-B1C1-C887E7E0661E}" type="presOf" srcId="{80982D06-3479-3C4D-9B12-E7ADC0627C38}" destId="{B2393304-7513-244C-9075-C6E93E2B835A}" srcOrd="0" destOrd="0" presId="urn:microsoft.com/office/officeart/2005/8/layout/vList2"/>
+    <dgm:cxn modelId="{E1F2C7D0-9409-F946-BA9D-5338795F1B28}" srcId="{601F4473-43E0-CC49-B82E-14DD5575AE5C}" destId="{8E6D5A7D-646C-0149-AAE7-38B764A196DE}" srcOrd="0" destOrd="0" parTransId="{6E749977-EDDE-3946-9E9F-BD983EC41D4F}" sibTransId="{132825E2-C26C-9D42-BDEF-C5249987E0D6}"/>
+    <dgm:cxn modelId="{FDD361D5-EE7D-3748-B1AC-9320C1BA421E}" srcId="{E79C9C68-D856-654E-A289-3DDF2C2FE588}" destId="{F6649532-7D5E-FD4F-9851-408B6718C51A}" srcOrd="2" destOrd="0" parTransId="{6EA92996-9D9E-F946-AF19-B1619B051E40}" sibTransId="{BF6E4856-64E9-704D-B6B3-630E93401281}"/>
+    <dgm:cxn modelId="{455DD3E8-313A-8840-9B7B-365E8B304139}" type="presOf" srcId="{8769859C-938C-6945-993E-087A27E0B428}" destId="{246A149A-603E-2C45-A1FE-7331CB627121}" srcOrd="0" destOrd="0" presId="urn:microsoft.com/office/officeart/2005/8/layout/vList2"/>
+    <dgm:cxn modelId="{BA5A9BB7-B562-0449-884F-CD7CD29D8C34}" type="presParOf" srcId="{381A8708-EB0A-274A-A859-37247E185B86}" destId="{566F4873-A7BF-3C41-BC29-F1965046FCB8}" srcOrd="0" destOrd="0" presId="urn:microsoft.com/office/officeart/2005/8/layout/vList2"/>
+    <dgm:cxn modelId="{0705CE9B-6E2E-8748-9A08-0C332554400D}" type="presParOf" srcId="{381A8708-EB0A-274A-A859-37247E185B86}" destId="{11F41D0C-508D-B849-BF2C-EA2415EA2C0A}" srcOrd="1" destOrd="0" presId="urn:microsoft.com/office/officeart/2005/8/layout/vList2"/>
+    <dgm:cxn modelId="{AD7A1296-6D4A-F849-8FC0-571067B0B947}" type="presParOf" srcId="{381A8708-EB0A-274A-A859-37247E185B86}" destId="{191DA7C7-AC46-224D-A315-3497C5C65521}" srcOrd="2" destOrd="0" presId="urn:microsoft.com/office/officeart/2005/8/layout/vList2"/>
+    <dgm:cxn modelId="{EBFC87D1-A9CA-EA43-9825-7DDC4D124976}" type="presParOf" srcId="{381A8708-EB0A-274A-A859-37247E185B86}" destId="{E5B0A4A8-CC1C-9843-B1B0-4348E81FCA04}" srcOrd="3" destOrd="0" presId="urn:microsoft.com/office/officeart/2005/8/layout/vList2"/>
+    <dgm:cxn modelId="{FE1FB170-DCDF-8848-97F2-3DBBD1B4F2FE}" type="presParOf" srcId="{381A8708-EB0A-274A-A859-37247E185B86}" destId="{65DF558C-B8FC-D446-AD17-4BC903895F22}" srcOrd="4" destOrd="0" presId="urn:microsoft.com/office/officeart/2005/8/layout/vList2"/>
+    <dgm:cxn modelId="{93D160A2-4994-FF44-869E-C2C5DE5FD4F7}" type="presParOf" srcId="{381A8708-EB0A-274A-A859-37247E185B86}" destId="{B2393304-7513-244C-9075-C6E93E2B835A}" srcOrd="5" destOrd="0" presId="urn:microsoft.com/office/officeart/2005/8/layout/vList2"/>
+    <dgm:cxn modelId="{7FBACB32-8210-8E49-8D0E-8F5ED1AB0576}" type="presParOf" srcId="{381A8708-EB0A-274A-A859-37247E185B86}" destId="{246A149A-603E-2C45-A1FE-7331CB627121}" srcOrd="6" destOrd="0" presId="urn:microsoft.com/office/officeart/2005/8/layout/vList2"/>
+  </dgm:cxnLst>
+  <dgm:bg/>
+  <dgm:whole/>
+  <dgm:extLst>
+    <a:ext uri="http://schemas.microsoft.com/office/drawing/2008/diagram">
+      <dsp:dataModelExt xmlns:dsp="http://schemas.microsoft.com/office/drawing/2008/diagram" relId="rId6" minVer="http://schemas.openxmlformats.org/drawingml/2006/diagram"/>
+    </a:ext>
+  </dgm:extLst>
+</dgm:dataModel>
+</file>
+
+<file path=ppt/diagrams/drawing1.xml><?xml version="1.0" encoding="utf-8"?>
+<dsp:drawing xmlns:dgm="http://schemas.openxmlformats.org/drawingml/2006/diagram" xmlns:dsp="http://schemas.microsoft.com/office/drawing/2008/diagram" xmlns:a="http://schemas.openxmlformats.org/drawingml/2006/main">
+  <dsp:spTree>
+    <dsp:nvGrpSpPr>
+      <dsp:cNvPr id="0" name=""/>
+      <dsp:cNvGrpSpPr/>
+    </dsp:nvGrpSpPr>
+    <dsp:grpSpPr/>
+    <dsp:sp modelId="{566F4873-A7BF-3C41-BC29-F1965046FCB8}">
+      <dsp:nvSpPr>
+        <dsp:cNvPr id="0" name=""/>
+        <dsp:cNvSpPr/>
+      </dsp:nvSpPr>
+      <dsp:spPr>
+        <a:xfrm>
+          <a:off x="0" y="238585"/>
+          <a:ext cx="8047517" cy="676260"/>
+        </a:xfrm>
+        <a:prstGeom prst="roundRect">
+          <a:avLst/>
+        </a:prstGeom>
+        <a:solidFill>
+          <a:schemeClr val="accent1">
+            <a:hueOff val="0"/>
+            <a:satOff val="0"/>
+            <a:lumOff val="0"/>
+            <a:alphaOff val="0"/>
+          </a:schemeClr>
+        </a:solidFill>
+        <a:ln w="12700" cap="flat" cmpd="sng" algn="ctr">
+          <a:solidFill>
+            <a:schemeClr val="lt1">
+              <a:hueOff val="0"/>
+              <a:satOff val="0"/>
+              <a:lumOff val="0"/>
+              <a:alphaOff val="0"/>
+            </a:schemeClr>
+          </a:solidFill>
+          <a:prstDash val="solid"/>
+          <a:miter lim="800000"/>
+        </a:ln>
+        <a:effectLst/>
+      </dsp:spPr>
+      <dsp:style>
+        <a:lnRef idx="2">
+          <a:scrgbClr r="0" g="0" b="0"/>
+        </a:lnRef>
+        <a:fillRef idx="1">
+          <a:scrgbClr r="0" g="0" b="0"/>
+        </a:fillRef>
+        <a:effectRef idx="0">
+          <a:scrgbClr r="0" g="0" b="0"/>
+        </a:effectRef>
+        <a:fontRef idx="minor">
+          <a:schemeClr val="lt1"/>
+        </a:fontRef>
+      </dsp:style>
+      <dsp:txBody>
+        <a:bodyPr spcFirstLastPara="0" vert="horz" wrap="square" lIns="64770" tIns="64770" rIns="64770" bIns="64770" numCol="1" spcCol="1270" anchor="ctr" anchorCtr="0">
+          <a:noAutofit/>
+        </a:bodyPr>
+        <a:lstStyle/>
+        <a:p>
+          <a:pPr marL="0" lvl="0" indent="0" algn="l" defTabSz="755650">
+            <a:lnSpc>
+              <a:spcPct val="90000"/>
+            </a:lnSpc>
+            <a:spcBef>
+              <a:spcPct val="0"/>
+            </a:spcBef>
+            <a:spcAft>
+              <a:spcPct val="35000"/>
+            </a:spcAft>
+            <a:buNone/>
+          </a:pPr>
+          <a:r>
+            <a:rPr lang="ru-RU" sz="1700" kern="1200" dirty="0"/>
+            <a:t>Эффективные алгоритмы для ее решения неизвестны, и есть гипотеза, что такого алгоритма не существует. </a:t>
+          </a:r>
+        </a:p>
+      </dsp:txBody>
+      <dsp:txXfrm>
+        <a:off x="33012" y="271597"/>
+        <a:ext cx="7981493" cy="610236"/>
+      </dsp:txXfrm>
+    </dsp:sp>
+    <dsp:sp modelId="{11F41D0C-508D-B849-BF2C-EA2415EA2C0A}">
+      <dsp:nvSpPr>
+        <dsp:cNvPr id="0" name=""/>
+        <dsp:cNvSpPr/>
+      </dsp:nvSpPr>
+      <dsp:spPr>
+        <a:xfrm>
+          <a:off x="0" y="914845"/>
+          <a:ext cx="8047517" cy="809370"/>
+        </a:xfrm>
+        <a:prstGeom prst="rect">
+          <a:avLst/>
+        </a:prstGeom>
+        <a:noFill/>
+        <a:ln>
+          <a:noFill/>
+        </a:ln>
+        <a:effectLst/>
+      </dsp:spPr>
+      <dsp:style>
+        <a:lnRef idx="0">
+          <a:scrgbClr r="0" g="0" b="0"/>
+        </a:lnRef>
+        <a:fillRef idx="0">
+          <a:scrgbClr r="0" g="0" b="0"/>
+        </a:fillRef>
+        <a:effectRef idx="0">
+          <a:scrgbClr r="0" g="0" b="0"/>
+        </a:effectRef>
+        <a:fontRef idx="minor"/>
+      </dsp:style>
+      <dsp:txBody>
+        <a:bodyPr spcFirstLastPara="0" vert="horz" wrap="square" lIns="255509" tIns="21590" rIns="120904" bIns="21590" numCol="1" spcCol="1270" anchor="t" anchorCtr="0">
+          <a:noAutofit/>
+        </a:bodyPr>
+        <a:lstStyle/>
+        <a:p>
+          <a:pPr marL="114300" lvl="1" indent="-114300" algn="l" defTabSz="577850">
+            <a:lnSpc>
+              <a:spcPct val="90000"/>
+            </a:lnSpc>
+            <a:spcBef>
+              <a:spcPct val="0"/>
+            </a:spcBef>
+            <a:spcAft>
+              <a:spcPct val="20000"/>
+            </a:spcAft>
+            <a:buChar char="•"/>
+          </a:pPr>
+          <a:r>
+            <a:rPr lang="ru-RU" sz="1300" kern="1200"/>
+            <a:t>Очевидный алгоритм, действующий методом «грубой силы», перебирает все подмножества узлов, проверяет каждое из них на независимость, после чего запоминает самое большое из обнаруженных подмножеств. </a:t>
+          </a:r>
+        </a:p>
+        <a:p>
+          <a:pPr marL="114300" lvl="1" indent="-114300" algn="l" defTabSz="577850">
+            <a:lnSpc>
+              <a:spcPct val="90000"/>
+            </a:lnSpc>
+            <a:spcBef>
+              <a:spcPct val="0"/>
+            </a:spcBef>
+            <a:spcAft>
+              <a:spcPct val="20000"/>
+            </a:spcAft>
+            <a:buChar char="•"/>
+          </a:pPr>
+          <a:r>
+            <a:rPr lang="ru-RU" sz="1300" kern="1200"/>
+            <a:t>Возможно, это решение близко к лучшему из того, что возможно сделать в этой задаче.</a:t>
+          </a:r>
+        </a:p>
+      </dsp:txBody>
+      <dsp:txXfrm>
+        <a:off x="0" y="914845"/>
+        <a:ext cx="8047517" cy="809370"/>
+      </dsp:txXfrm>
+    </dsp:sp>
+    <dsp:sp modelId="{191DA7C7-AC46-224D-A315-3497C5C65521}">
+      <dsp:nvSpPr>
+        <dsp:cNvPr id="0" name=""/>
+        <dsp:cNvSpPr/>
+      </dsp:nvSpPr>
+      <dsp:spPr>
+        <a:xfrm>
+          <a:off x="0" y="1724215"/>
+          <a:ext cx="8047517" cy="676260"/>
+        </a:xfrm>
+        <a:prstGeom prst="roundRect">
+          <a:avLst/>
+        </a:prstGeom>
+        <a:solidFill>
+          <a:schemeClr val="accent1">
+            <a:hueOff val="0"/>
+            <a:satOff val="0"/>
+            <a:lumOff val="0"/>
+            <a:alphaOff val="0"/>
+          </a:schemeClr>
+        </a:solidFill>
+        <a:ln w="12700" cap="flat" cmpd="sng" algn="ctr">
+          <a:solidFill>
+            <a:schemeClr val="lt1">
+              <a:hueOff val="0"/>
+              <a:satOff val="0"/>
+              <a:lumOff val="0"/>
+              <a:alphaOff val="0"/>
+            </a:schemeClr>
+          </a:solidFill>
+          <a:prstDash val="solid"/>
+          <a:miter lim="800000"/>
+        </a:ln>
+        <a:effectLst/>
+      </dsp:spPr>
+      <dsp:style>
+        <a:lnRef idx="2">
+          <a:scrgbClr r="0" g="0" b="0"/>
+        </a:lnRef>
+        <a:fillRef idx="1">
+          <a:scrgbClr r="0" g="0" b="0"/>
+        </a:fillRef>
+        <a:effectRef idx="0">
+          <a:scrgbClr r="0" g="0" b="0"/>
+        </a:effectRef>
+        <a:fontRef idx="minor">
+          <a:schemeClr val="lt1"/>
+        </a:fontRef>
+      </dsp:style>
+      <dsp:txBody>
+        <a:bodyPr spcFirstLastPara="0" vert="horz" wrap="square" lIns="64770" tIns="64770" rIns="64770" bIns="64770" numCol="1" spcCol="1270" anchor="ctr" anchorCtr="0">
+          <a:noAutofit/>
+        </a:bodyPr>
+        <a:lstStyle/>
+        <a:p>
+          <a:pPr marL="0" lvl="0" indent="0" algn="l" defTabSz="755650">
+            <a:lnSpc>
+              <a:spcPct val="90000"/>
+            </a:lnSpc>
+            <a:spcBef>
+              <a:spcPct val="0"/>
+            </a:spcBef>
+            <a:spcAft>
+              <a:spcPct val="35000"/>
+            </a:spcAft>
+            <a:buNone/>
+          </a:pPr>
+          <a:r>
+            <a:rPr lang="ru-RU" sz="1700" kern="1200"/>
+            <a:t>Задача независимого множества принадлежит к большому классу задач, называемых </a:t>
+          </a:r>
+          <a:r>
+            <a:rPr lang="en-US" sz="1700" i="1" kern="1200"/>
+            <a:t>NP</a:t>
+          </a:r>
+          <a:r>
+            <a:rPr lang="ru-RU" sz="1700" i="1" kern="1200"/>
+            <a:t>-полными.</a:t>
+          </a:r>
+          <a:r>
+            <a:rPr lang="ru-RU" sz="1700" kern="1200"/>
+            <a:t> </a:t>
+          </a:r>
+        </a:p>
+      </dsp:txBody>
+      <dsp:txXfrm>
+        <a:off x="33012" y="1757227"/>
+        <a:ext cx="7981493" cy="610236"/>
+      </dsp:txXfrm>
+    </dsp:sp>
+    <dsp:sp modelId="{E5B0A4A8-CC1C-9843-B1B0-4348E81FCA04}">
+      <dsp:nvSpPr>
+        <dsp:cNvPr id="0" name=""/>
+        <dsp:cNvSpPr/>
+      </dsp:nvSpPr>
+      <dsp:spPr>
+        <a:xfrm>
+          <a:off x="0" y="2400475"/>
+          <a:ext cx="8047517" cy="598230"/>
+        </a:xfrm>
+        <a:prstGeom prst="rect">
+          <a:avLst/>
+        </a:prstGeom>
+        <a:noFill/>
+        <a:ln>
+          <a:noFill/>
+        </a:ln>
+        <a:effectLst/>
+      </dsp:spPr>
+      <dsp:style>
+        <a:lnRef idx="0">
+          <a:scrgbClr r="0" g="0" b="0"/>
+        </a:lnRef>
+        <a:fillRef idx="0">
+          <a:scrgbClr r="0" g="0" b="0"/>
+        </a:fillRef>
+        <a:effectRef idx="0">
+          <a:scrgbClr r="0" g="0" b="0"/>
+        </a:effectRef>
+        <a:fontRef idx="minor"/>
+      </dsp:style>
+      <dsp:txBody>
+        <a:bodyPr spcFirstLastPara="0" vert="horz" wrap="square" lIns="255509" tIns="21590" rIns="120904" bIns="21590" numCol="1" spcCol="1270" anchor="t" anchorCtr="0">
+          <a:noAutofit/>
+        </a:bodyPr>
+        <a:lstStyle/>
+        <a:p>
+          <a:pPr marL="114300" lvl="1" indent="-114300" algn="l" defTabSz="577850">
+            <a:lnSpc>
+              <a:spcPct val="90000"/>
+            </a:lnSpc>
+            <a:spcBef>
+              <a:spcPct val="0"/>
+            </a:spcBef>
+            <a:spcAft>
+              <a:spcPct val="20000"/>
+            </a:spcAft>
+            <a:buChar char="•"/>
+          </a:pPr>
+          <a:r>
+            <a:rPr lang="ru-RU" sz="1300" kern="1200"/>
+            <a:t>Ни для одной из этих задач не известен эффективный алгоритм решения, но все они эквивалентны в том смысле, что решение любой такой задачи будет точно подразумевать существование такого решения у всех.</a:t>
+          </a:r>
+        </a:p>
+      </dsp:txBody>
+      <dsp:txXfrm>
+        <a:off x="0" y="2400475"/>
+        <a:ext cx="8047517" cy="598230"/>
+      </dsp:txXfrm>
+    </dsp:sp>
+    <dsp:sp modelId="{65DF558C-B8FC-D446-AD17-4BC903895F22}">
+      <dsp:nvSpPr>
+        <dsp:cNvPr id="0" name=""/>
+        <dsp:cNvSpPr/>
+      </dsp:nvSpPr>
+      <dsp:spPr>
+        <a:xfrm>
+          <a:off x="0" y="2998704"/>
+          <a:ext cx="8047517" cy="676260"/>
+        </a:xfrm>
+        <a:prstGeom prst="roundRect">
+          <a:avLst/>
+        </a:prstGeom>
+        <a:solidFill>
+          <a:schemeClr val="accent1">
+            <a:hueOff val="0"/>
+            <a:satOff val="0"/>
+            <a:lumOff val="0"/>
+            <a:alphaOff val="0"/>
+          </a:schemeClr>
+        </a:solidFill>
+        <a:ln w="12700" cap="flat" cmpd="sng" algn="ctr">
+          <a:solidFill>
+            <a:schemeClr val="lt1">
+              <a:hueOff val="0"/>
+              <a:satOff val="0"/>
+              <a:lumOff val="0"/>
+              <a:alphaOff val="0"/>
+            </a:schemeClr>
+          </a:solidFill>
+          <a:prstDash val="solid"/>
+          <a:miter lim="800000"/>
+        </a:ln>
+        <a:effectLst/>
+      </dsp:spPr>
+      <dsp:style>
+        <a:lnRef idx="2">
+          <a:scrgbClr r="0" g="0" b="0"/>
+        </a:lnRef>
+        <a:fillRef idx="1">
+          <a:scrgbClr r="0" g="0" b="0"/>
+        </a:fillRef>
+        <a:effectRef idx="0">
+          <a:scrgbClr r="0" g="0" b="0"/>
+        </a:effectRef>
+        <a:fontRef idx="minor">
+          <a:schemeClr val="lt1"/>
+        </a:fontRef>
+      </dsp:style>
+      <dsp:txBody>
+        <a:bodyPr spcFirstLastPara="0" vert="horz" wrap="square" lIns="64770" tIns="64770" rIns="64770" bIns="64770" numCol="1" spcCol="1270" anchor="ctr" anchorCtr="0">
+          <a:noAutofit/>
+        </a:bodyPr>
+        <a:lstStyle/>
+        <a:p>
+          <a:pPr marL="0" lvl="0" indent="0" algn="l" defTabSz="755650">
+            <a:lnSpc>
+              <a:spcPct val="90000"/>
+            </a:lnSpc>
+            <a:spcBef>
+              <a:spcPct val="0"/>
+            </a:spcBef>
+            <a:spcAft>
+              <a:spcPct val="35000"/>
+            </a:spcAft>
+            <a:buNone/>
+          </a:pPr>
+          <a:r>
+            <a:rPr lang="ru-RU" sz="1700" kern="1200"/>
+            <a:t>Можно ли сказать хоть что-нибудь положительное о сложности задачи независимого множества? </a:t>
+          </a:r>
+        </a:p>
+      </dsp:txBody>
+      <dsp:txXfrm>
+        <a:off x="33012" y="3031716"/>
+        <a:ext cx="7981493" cy="610236"/>
+      </dsp:txXfrm>
+    </dsp:sp>
+    <dsp:sp modelId="{B2393304-7513-244C-9075-C6E93E2B835A}">
+      <dsp:nvSpPr>
+        <dsp:cNvPr id="0" name=""/>
+        <dsp:cNvSpPr/>
+      </dsp:nvSpPr>
+      <dsp:spPr>
+        <a:xfrm>
+          <a:off x="0" y="3674964"/>
+          <a:ext cx="8047517" cy="1002915"/>
+        </a:xfrm>
+        <a:prstGeom prst="rect">
+          <a:avLst/>
+        </a:prstGeom>
+        <a:noFill/>
+        <a:ln>
+          <a:noFill/>
+        </a:ln>
+        <a:effectLst/>
+      </dsp:spPr>
+      <dsp:style>
+        <a:lnRef idx="0">
+          <a:scrgbClr r="0" g="0" b="0"/>
+        </a:lnRef>
+        <a:fillRef idx="0">
+          <a:scrgbClr r="0" g="0" b="0"/>
+        </a:fillRef>
+        <a:effectRef idx="0">
+          <a:scrgbClr r="0" g="0" b="0"/>
+        </a:effectRef>
+        <a:fontRef idx="minor"/>
+      </dsp:style>
+      <dsp:txBody>
+        <a:bodyPr spcFirstLastPara="0" vert="horz" wrap="square" lIns="255509" tIns="21590" rIns="120904" bIns="21590" numCol="1" spcCol="1270" anchor="t" anchorCtr="0">
+          <a:noAutofit/>
+        </a:bodyPr>
+        <a:lstStyle/>
+        <a:p>
+          <a:pPr marL="114300" lvl="1" indent="-114300" algn="l" defTabSz="577850">
+            <a:lnSpc>
+              <a:spcPct val="90000"/>
+            </a:lnSpc>
+            <a:spcBef>
+              <a:spcPct val="0"/>
+            </a:spcBef>
+            <a:spcAft>
+              <a:spcPct val="20000"/>
+            </a:spcAft>
+            <a:buChar char="•"/>
+          </a:pPr>
+          <a:r>
+            <a:rPr lang="ru-RU" sz="1300" kern="1200"/>
+            <a:t>Если имеется граф </a:t>
+          </a:r>
+          <a:r>
+            <a:rPr lang="en-US" sz="1300" kern="1200"/>
+            <a:t>G </a:t>
+          </a:r>
+          <a:r>
+            <a:rPr lang="ru-RU" sz="1300" kern="1200"/>
+            <a:t>из 1000 узлов и мы захотим убедить вас в том, что он содержит независимое множество </a:t>
+          </a:r>
+          <a:r>
+            <a:rPr lang="en-US" sz="1300" kern="1200"/>
+            <a:t>S </a:t>
+          </a:r>
+          <a:r>
+            <a:rPr lang="ru-RU" sz="1300" kern="1200"/>
+            <a:t>с размером 100, сделать это будет несложно. Достаточно показать граф </a:t>
+          </a:r>
+          <a:r>
+            <a:rPr lang="en-US" sz="1300" kern="1200"/>
+            <a:t>G, </a:t>
+          </a:r>
+          <a:r>
+            <a:rPr lang="ru-RU" sz="1300" kern="1200"/>
+            <a:t>выделить узлы </a:t>
+          </a:r>
+          <a:r>
+            <a:rPr lang="en-US" sz="1300" kern="1200"/>
+            <a:t>S </a:t>
+          </a:r>
+          <a:r>
+            <a:rPr lang="ru-RU" sz="1300" kern="1200"/>
+            <a:t>красным цветом и позволить вам убедиться в том, что никакие два узла не соединены ребром. </a:t>
+          </a:r>
+        </a:p>
+        <a:p>
+          <a:pPr marL="114300" lvl="1" indent="-114300" algn="l" defTabSz="577850">
+            <a:lnSpc>
+              <a:spcPct val="90000"/>
+            </a:lnSpc>
+            <a:spcBef>
+              <a:spcPct val="0"/>
+            </a:spcBef>
+            <a:spcAft>
+              <a:spcPct val="20000"/>
+            </a:spcAft>
+            <a:buChar char="•"/>
+          </a:pPr>
+          <a:r>
+            <a:rPr lang="ru-RU" sz="1300" kern="1200"/>
+            <a:t>Между проверкой того, что множество действительно является большим независимым, и непосредственным поиском большого независимого множества существует огромная разница.</a:t>
+          </a:r>
+        </a:p>
+      </dsp:txBody>
+      <dsp:txXfrm>
+        <a:off x="0" y="3674964"/>
+        <a:ext cx="8047517" cy="1002915"/>
+      </dsp:txXfrm>
+    </dsp:sp>
+    <dsp:sp modelId="{246A149A-603E-2C45-A1FE-7331CB627121}">
+      <dsp:nvSpPr>
+        <dsp:cNvPr id="0" name=""/>
+        <dsp:cNvSpPr/>
+      </dsp:nvSpPr>
+      <dsp:spPr>
+        <a:xfrm>
+          <a:off x="0" y="4677879"/>
+          <a:ext cx="8047517" cy="676260"/>
+        </a:xfrm>
+        <a:prstGeom prst="roundRect">
+          <a:avLst/>
+        </a:prstGeom>
+        <a:solidFill>
+          <a:schemeClr val="accent1">
+            <a:hueOff val="0"/>
+            <a:satOff val="0"/>
+            <a:lumOff val="0"/>
+            <a:alphaOff val="0"/>
+          </a:schemeClr>
+        </a:solidFill>
+        <a:ln w="12700" cap="flat" cmpd="sng" algn="ctr">
+          <a:solidFill>
+            <a:schemeClr val="lt1">
+              <a:hueOff val="0"/>
+              <a:satOff val="0"/>
+              <a:lumOff val="0"/>
+              <a:alphaOff val="0"/>
+            </a:schemeClr>
+          </a:solidFill>
+          <a:prstDash val="solid"/>
+          <a:miter lim="800000"/>
+        </a:ln>
+        <a:effectLst/>
+      </dsp:spPr>
+      <dsp:style>
+        <a:lnRef idx="2">
+          <a:scrgbClr r="0" g="0" b="0"/>
+        </a:lnRef>
+        <a:fillRef idx="1">
+          <a:scrgbClr r="0" g="0" b="0"/>
+        </a:fillRef>
+        <a:effectRef idx="0">
+          <a:scrgbClr r="0" g="0" b="0"/>
+        </a:effectRef>
+        <a:fontRef idx="minor">
+          <a:schemeClr val="lt1"/>
+        </a:fontRef>
+      </dsp:style>
+      <dsp:txBody>
+        <a:bodyPr spcFirstLastPara="0" vert="horz" wrap="square" lIns="64770" tIns="64770" rIns="64770" bIns="64770" numCol="1" spcCol="1270" anchor="ctr" anchorCtr="0">
+          <a:noAutofit/>
+        </a:bodyPr>
+        <a:lstStyle/>
+        <a:p>
+          <a:pPr marL="0" lvl="0" indent="0" algn="l" defTabSz="755650">
+            <a:lnSpc>
+              <a:spcPct val="90000"/>
+            </a:lnSpc>
+            <a:spcBef>
+              <a:spcPct val="0"/>
+            </a:spcBef>
+            <a:spcAft>
+              <a:spcPct val="35000"/>
+            </a:spcAft>
+            <a:buNone/>
+          </a:pPr>
+          <a:r>
+            <a:rPr lang="ru-RU" sz="1700" kern="1200"/>
+            <a:t>В некоторых особо сложных задачах даже может не быть простого способа «проверки» решений в этом смысле </a:t>
+          </a:r>
+        </a:p>
+      </dsp:txBody>
+      <dsp:txXfrm>
+        <a:off x="33012" y="4710891"/>
+        <a:ext cx="7981493" cy="610236"/>
+      </dsp:txXfrm>
+    </dsp:sp>
+  </dsp:spTree>
+</dsp:drawing>
+</file>
+
+<file path=ppt/diagrams/layout1.xml><?xml version="1.0" encoding="utf-8"?>
+<dgm:layoutDef xmlns:dgm="http://schemas.openxmlformats.org/drawingml/2006/diagram" xmlns:a="http://schemas.openxmlformats.org/drawingml/2006/main" uniqueId="urn:microsoft.com/office/officeart/2005/8/layout/vList2">
+  <dgm:title val=""/>
+  <dgm:desc val=""/>
+  <dgm:catLst>
+    <dgm:cat type="list" pri="3000"/>
+    <dgm:cat type="convert" pri="1000"/>
+  </dgm:catLst>
+  <dgm:sampData>
+    <dgm:dataModel>
+      <dgm:ptLst>
+        <dgm:pt modelId="0" type="doc"/>
+        <dgm:pt modelId="1">
+          <dgm:prSet phldr="1"/>
+        </dgm:pt>
+        <dgm:pt modelId="11">
+          <dgm:prSet phldr="1"/>
+        </dgm:pt>
+        <dgm:pt modelId="2">
+          <dgm:prSet phldr="1"/>
+        </dgm:pt>
+        <dgm:pt modelId="21">
+          <dgm:prSet phldr="1"/>
+        </dgm:pt>
+      </dgm:ptLst>
+      <dgm:cxnLst>
+        <dgm:cxn modelId="4" srcId="0" destId="1" srcOrd="0" destOrd="0"/>
+        <dgm:cxn modelId="5" srcId="0" destId="2" srcOrd="1" destOrd="0"/>
+        <dgm:cxn modelId="12" srcId="1" destId="11" srcOrd="0" destOrd="0"/>
+        <dgm:cxn modelId="23" srcId="2" destId="21" srcOrd="0" destOrd="0"/>
+      </dgm:cxnLst>
+      <dgm:bg/>
+      <dgm:whole/>
+    </dgm:dataModel>
+  </dgm:sampData>
+  <dgm:styleData>
+    <dgm:dataModel>
+      <dgm:ptLst>
+        <dgm:pt modelId="0" type="doc"/>
+        <dgm:pt modelId="1"/>
+        <dgm:pt modelId="2"/>
+      </dgm:ptLst>
+      <dgm:cxnLst>
+        <dgm:cxn modelId="3" srcId="0" destId="1" srcOrd="0" destOrd="0"/>
+        <dgm:cxn modelId="4" srcId="0" destId="2" srcOrd="1" destOrd="0"/>
+      </dgm:cxnLst>
+      <dgm:bg/>
+      <dgm:whole/>
+    </dgm:dataModel>
+  </dgm:styleData>
+  <dgm:clrData>
+    <dgm:dataModel>
+      <dgm:ptLst>
+        <dgm:pt modelId="0" type="doc"/>
+        <dgm:pt modelId="1"/>
+        <dgm:pt modelId="2"/>
+        <dgm:pt modelId="3"/>
+        <dgm:pt modelId="4"/>
+      </dgm:ptLst>
+      <dgm:cxnLst>
+        <dgm:cxn modelId="5" srcId="0" destId="1" srcOrd="0" destOrd="0"/>
+        <dgm:cxn modelId="6" srcId="0" destId="2" srcOrd="1" destOrd="0"/>
+        <dgm:cxn modelId="7" srcId="0" destId="3" srcOrd="2" destOrd="0"/>
+        <dgm:cxn modelId="8" srcId="0" destId="4" srcOrd="3" destOrd="0"/>
+      </dgm:cxnLst>
+      <dgm:bg/>
+      <dgm:whole/>
+    </dgm:dataModel>
+  </dgm:clrData>
+  <dgm:layoutNode name="linear">
+    <dgm:varLst>
+      <dgm:animLvl val="lvl"/>
+      <dgm:resizeHandles val="exact"/>
+    </dgm:varLst>
+    <dgm:alg type="lin">
+      <dgm:param type="linDir" val="fromT"/>
+      <dgm:param type="vertAlign" val="mid"/>
+    </dgm:alg>
+    <dgm:shape xmlns:r="http://schemas.openxmlformats.org/officeDocument/2006/relationships" r:blip="">
+      <dgm:adjLst/>
+    </dgm:shape>
+    <dgm:presOf/>
+    <dgm:constrLst>
+      <dgm:constr type="w" for="ch" forName="parentText" refType="w"/>
+      <dgm:constr type="h" for="ch" forName="parentText" refType="primFontSz" refFor="ch" refForName="parentText" fact="0.52"/>
+      <dgm:constr type="w" for="ch" forName="childText" refType="w"/>
+      <dgm:constr type="h" for="ch" forName="childText" refType="primFontSz" refFor="ch" refForName="parentText" fact="0.46"/>
+      <dgm:constr type="h" for="ch" forName="parentText" op="equ"/>
+      <dgm:constr type="primFontSz" for="ch" forName="parentText" op="equ" val="65"/>
+      <dgm:constr type="primFontSz" for="ch" forName="childText" refType="primFontSz" refFor="ch" refForName="parentText" op="equ"/>
+      <dgm:constr type="h" for="ch" forName="spacer" refType="primFontSz" refFor="ch" refForName="parentText" fact="0.08"/>
+    </dgm:constrLst>
+    <dgm:ruleLst>
+      <dgm:rule type="primFontSz" for="ch" forName="parentText" val="5" fact="NaN" max="NaN"/>
+    </dgm:ruleLst>
+    <dgm:forEach name="Name0" axis="ch" ptType="node">
+      <dgm:layoutNode name="parentText" styleLbl="node1">
+        <dgm:varLst>
+          <dgm:chMax val="0"/>
+          <dgm:bulletEnabled val="1"/>
+        </dgm:varLst>
+        <dgm:alg type="tx">
+          <dgm:param type="parTxLTRAlign" val="l"/>
+          <dgm:param type="parTxRTLAlign" val="r"/>
+        </dgm:alg>
+        <dgm:shape xmlns:r="http://schemas.openxmlformats.org/officeDocument/2006/relationships" type="roundRect" r:blip="">
+          <dgm:adjLst/>
+        </dgm:shape>
+        <dgm:presOf axis="self"/>
+        <dgm:constrLst>
+          <dgm:constr type="tMarg" refType="primFontSz" fact="0.3"/>
+          <dgm:constr type="bMarg" refType="primFontSz" fact="0.3"/>
+          <dgm:constr type="lMarg" refType="primFontSz" fact="0.3"/>
+          <dgm:constr type="rMarg" refType="primFontSz" fact="0.3"/>
+        </dgm:constrLst>
+        <dgm:ruleLst>
+          <dgm:rule type="h" val="INF" fact="NaN" max="NaN"/>
+        </dgm:ruleLst>
+      </dgm:layoutNode>
+      <dgm:choose name="Name1">
+        <dgm:if name="Name2" axis="ch" ptType="node" func="cnt" op="gte" val="1">
+          <dgm:layoutNode name="childText" styleLbl="revTx">
+            <dgm:varLst>
+              <dgm:bulletEnabled val="1"/>
+            </dgm:varLst>
+            <dgm:alg type="tx">
+              <dgm:param type="stBulletLvl" val="1"/>
+              <dgm:param type="lnSpAfChP" val="20"/>
+            </dgm:alg>
+            <dgm:shape xmlns:r="http://schemas.openxmlformats.org/officeDocument/2006/relationships" type="rect" r:blip="">
+              <dgm:adjLst/>
+            </dgm:shape>
+            <dgm:presOf axis="des" ptType="node"/>
+            <dgm:constrLst>
+              <dgm:constr type="tMarg" refType="primFontSz" fact="0.1"/>
+              <dgm:constr type="bMarg" refType="primFontSz" fact="0.1"/>
+              <dgm:constr type="lMarg" refType="w" fact="0.09"/>
+            </dgm:constrLst>
+            <dgm:ruleLst>
+              <dgm:rule type="h" val="INF" fact="NaN" max="NaN"/>
+            </dgm:ruleLst>
+          </dgm:layoutNode>
+        </dgm:if>
+        <dgm:else name="Name3">
+          <dgm:choose name="Name4">
+            <dgm:if name="Name5" axis="par ch" ptType="doc node" func="cnt" op="gte" val="2">
+              <dgm:forEach name="Name6" axis="followSib" ptType="sibTrans" cnt="1">
+                <dgm:layoutNode name="spacer">
+                  <dgm:alg type="sp"/>
+                  <dgm:shape xmlns:r="http://schemas.openxmlformats.org/officeDocument/2006/relationships" r:blip="">
+                    <dgm:adjLst/>
+                  </dgm:shape>
+                  <dgm:presOf/>
+                  <dgm:constrLst/>
+                  <dgm:ruleLst/>
+                </dgm:layoutNode>
+              </dgm:forEach>
+            </dgm:if>
+            <dgm:else name="Name7"/>
+          </dgm:choose>
+        </dgm:else>
+      </dgm:choose>
+    </dgm:forEach>
+  </dgm:layoutNode>
+</dgm:layoutDef>
+</file>
+
+<file path=ppt/diagrams/quickStyle1.xml><?xml version="1.0" encoding="utf-8"?>
+<dgm:styleDef xmlns:dgm="http://schemas.openxmlformats.org/drawingml/2006/diagram" xmlns:a="http://schemas.openxmlformats.org/drawingml/2006/main" uniqueId="urn:microsoft.com/office/officeart/2005/8/quickstyle/simple1">
+  <dgm:title val=""/>
+  <dgm:desc val=""/>
+  <dgm:catLst>
+    <dgm:cat type="simple" pri="10100"/>
+  </dgm:catLst>
+  <dgm:scene3d>
+    <a:camera prst="orthographicFront"/>
+    <a:lightRig rig="threePt" dir="t"/>
+  </dgm:scene3d>
+  <dgm:styleLbl name="node0">
+    <dgm:scene3d>
+      <a:camera prst="orthographicFront"/>
+      <a:lightRig rig="threePt" dir="t"/>
+    </dgm:scene3d>
+    <dgm:sp3d/>
+    <dgm:txPr/>
+    <dgm:style>
+      <a:lnRef idx="2">
+        <a:scrgbClr r="0" g="0" b="0"/>
+      </a:lnRef>
+      <a:fillRef idx="1">
+        <a:scrgbClr r="0" g="0" b="0"/>
+      </a:fillRef>
+      <a:effectRef idx="0">
+        <a:scrgbClr r="0" g="0" b="0"/>
+      </a:effectRef>
+      <a:fontRef idx="minor">
+        <a:schemeClr val="lt1"/>
+      </a:fontRef>
+    </dgm:style>
+  </dgm:styleLbl>
+  <dgm:styleLbl name="lnNode1">
+    <dgm:scene3d>
+      <a:camera prst="orthographicFront"/>
+      <a:lightRig rig="threePt" dir="t"/>
+    </dgm:scene3d>
+    <dgm:sp3d/>
+    <dgm:txPr/>
+    <dgm:style>
+      <a:lnRef idx="2">
+        <a:scrgbClr r="0" g="0" b="0"/>
+      </a:lnRef>
+      <a:fillRef idx="1">
+        <a:scrgbClr r="0" g="0" b="0"/>
+      </a:fillRef>
+      <a:effectRef idx="0">
+        <a:scrgbClr r="0" g="0" b="0"/>
+      </a:effectRef>
+      <a:fontRef idx="minor">
+        <a:schemeClr val="lt1"/>
+      </a:fontRef>
+    </dgm:style>
+  </dgm:styleLbl>
+  <dgm:styleLbl name="vennNode1">
+    <dgm:scene3d>
+      <a:camera prst="orthographicFront"/>
+      <a:lightRig rig="threePt" dir="t"/>
+    </dgm:scene3d>
+    <dgm:sp3d/>
+    <dgm:txPr/>
+    <dgm:style>
+      <a:lnRef idx="2">
+        <a:scrgbClr r="0" g="0" b="0"/>
+      </a:lnRef>
+      <a:fillRef idx="1">
+        <a:scrgbClr r="0" g="0" b="0"/>
+      </a:fillRef>
+      <a:effectRef idx="0">
+        <a:scrgbClr r="0" g="0" b="0"/>
+      </a:effectRef>
+      <a:fontRef idx="minor">
+        <a:schemeClr val="tx1"/>
+      </a:fontRef>
+    </dgm:style>
+  </dgm:styleLbl>
+  <dgm:styleLbl name="alignNode1">
+    <dgm:scene3d>
+      <a:camera prst="orthographicFront"/>
+      <a:lightRig rig="threePt" dir="t"/>
+    </dgm:scene3d>
+    <dgm:sp3d/>
+    <dgm:txPr/>
+    <dgm:style>
+      <a:lnRef idx="2">
+        <a:scrgbClr r="0" g="0" b="0"/>
+      </a:lnRef>
+      <a:fillRef idx="1">
+        <a:scrgbClr r="0" g="0" b="0"/>
+      </a:fillRef>
+      <a:effectRef idx="0">
+        <a:scrgbClr r="0" g="0" b="0"/>
+      </a:effectRef>
+      <a:fontRef idx="minor">
+        <a:schemeClr val="lt1"/>
+      </a:fontRef>
+    </dgm:style>
+  </dgm:styleLbl>
+  <dgm:styleLbl name="node1">
+    <dgm:scene3d>
+      <a:camera prst="orthographicFront"/>
+      <a:lightRig rig="threePt" dir="t"/>
+    </dgm:scene3d>
+    <dgm:sp3d/>
+    <dgm:txPr/>
+    <dgm:style>
+      <a:lnRef idx="2">
+        <a:scrgbClr r="0" g="0" b="0"/>
+      </a:lnRef>
+      <a:fillRef idx="1">
+        <a:scrgbClr r="0" g="0" b="0"/>
+      </a:fillRef>
+      <a:effectRef idx="0">
+        <a:scrgbClr r="0" g="0" b="0"/>
+      </a:effectRef>
+      <a:fontRef idx="minor">
+        <a:schemeClr val="lt1"/>
+      </a:fontRef>
+    </dgm:style>
+  </dgm:styleLbl>
+  <dgm:styleLbl name="node2">
+    <dgm:scene3d>
+      <a:camera prst="orthographicFront"/>
+      <a:lightRig rig="threePt" dir="t"/>
+    </dgm:scene3d>
+    <dgm:sp3d/>
+    <dgm:txPr/>
+    <dgm:style>
+      <a:lnRef idx="2">
+        <a:scrgbClr r="0" g="0" b="0"/>
+      </a:lnRef>
+      <a:fillRef idx="1">
+        <a:scrgbClr r="0" g="0" b="0"/>
+      </a:fillRef>
+      <a:effectRef idx="0">
+        <a:scrgbClr r="0" g="0" b="0"/>
+      </a:effectRef>
+      <a:fontRef idx="minor">
+        <a:schemeClr val="lt1"/>
+      </a:fontRef>
+    </dgm:style>
+  </dgm:styleLbl>
+  <dgm:styleLbl name="node3">
+    <dgm:scene3d>
+      <a:camera prst="orthographicFront"/>
+      <a:lightRig rig="threePt" dir="t"/>
+    </dgm:scene3d>
+    <dgm:sp3d/>
+    <dgm:txPr/>
+    <dgm:style>
+      <a:lnRef idx="2">
+        <a:scrgbClr r="0" g="0" b="0"/>
+      </a:lnRef>
+      <a:fillRef idx="1">
+        <a:scrgbClr r="0" g="0" b="0"/>
+      </a:fillRef>
+      <a:effectRef idx="0">
+        <a:scrgbClr r="0" g="0" b="0"/>
+      </a:effectRef>
+      <a:fontRef idx="minor">
+        <a:schemeClr val="lt1"/>
+      </a:fontRef>
+    </dgm:style>
+  </dgm:styleLbl>
+  <dgm:styleLbl name="node4">
+    <dgm:scene3d>
+      <a:camera prst="orthographicFront"/>
+      <a:lightRig rig="threePt" dir="t"/>
+    </dgm:scene3d>
+    <dgm:sp3d/>
+    <dgm:txPr/>
+    <dgm:style>
+      <a:lnRef idx="2">
+        <a:scrgbClr r="0" g="0" b="0"/>
+      </a:lnRef>
+      <a:fillRef idx="1">
+        <a:scrgbClr r="0" g="0" b="0"/>
+      </a:fillRef>
+      <a:effectRef idx="0">
+        <a:scrgbClr r="0" g="0" b="0"/>
+      </a:effectRef>
+      <a:fontRef idx="minor">
+        <a:schemeClr val="lt1"/>
+      </a:fontRef>
+    </dgm:style>
+  </dgm:styleLbl>
+  <dgm:styleLbl name="fgImgPlace1">
+    <dgm:scene3d>
+      <a:camera prst="orthographicFront"/>
+      <a:lightRig rig="threePt" dir="t"/>
+    </dgm:scene3d>
+    <dgm:sp3d/>
+    <dgm:txPr/>
+    <dgm:style>
+      <a:lnRef idx="2">
+        <a:scrgbClr r="0" g="0" b="0"/>
+      </a:lnRef>
+      <a:fillRef idx="1">
+        <a:scrgbClr r="0" g="0" b="0"/>
+      </a:fillRef>
+      <a:effectRef idx="0">
+        <a:scrgbClr r="0" g="0" b="0"/>
+      </a:effectRef>
+      <a:fontRef idx="minor"/>
+    </dgm:style>
+  </dgm:styleLbl>
+  <dgm:styleLbl name="alignImgPlace1">
+    <dgm:scene3d>
+      <a:camera prst="orthographicFront"/>
+      <a:lightRig rig="threePt" dir="t"/>
+    </dgm:scene3d>
+    <dgm:sp3d/>
+    <dgm:txPr/>
+    <dgm:style>
+      <a:lnRef idx="2">
+        <a:scrgbClr r="0" g="0" b="0"/>
+      </a:lnRef>
+      <a:fillRef idx="1">
+        <a:scrgbClr r="0" g="0" b="0"/>
+      </a:fillRef>
+      <a:effectRef idx="0">
+        <a:scrgbClr r="0" g="0" b="0"/>
+      </a:effectRef>
+      <a:fontRef idx="minor"/>
+    </dgm:style>
+  </dgm:styleLbl>
+  <dgm:styleLbl name="bgImgPlace1">
+    <dgm:scene3d>
+      <a:camera prst="orthographicFront"/>
+      <a:lightRig rig="threePt" dir="t"/>
+    </dgm:scene3d>
+    <dgm:sp3d/>
+    <dgm:txPr/>
+    <dgm:style>
+      <a:lnRef idx="2">
+        <a:scrgbClr r="0" g="0" b="0"/>
+      </a:lnRef>
+      <a:fillRef idx="1">
+        <a:scrgbClr r="0" g="0" b="0"/>
+      </a:fillRef>
+      <a:effectRef idx="0">
+        <a:scrgbClr r="0" g="0" b="0"/>
+      </a:effectRef>
+      <a:fontRef idx="minor"/>
+    </dgm:style>
+  </dgm:styleLbl>
+  <dgm:styleLbl name="sibTrans2D1">
+    <dgm:scene3d>
+      <a:camera prst="orthographicFront"/>
+      <a:lightRig rig="threePt" dir="t"/>
+    </dgm:scene3d>
+    <dgm:sp3d/>
+    <dgm:txPr/>
+    <dgm:style>
+      <a:lnRef idx="0">
+        <a:scrgbClr r="0" g="0" b="0"/>
+      </a:lnRef>
+      <a:fillRef idx="1">
+        <a:scrgbClr r="0" g="0" b="0"/>
+      </a:fillRef>
+      <a:effectRef idx="0">
+        <a:scrgbClr r="0" g="0" b="0"/>
+      </a:effectRef>
+      <a:fontRef idx="minor">
+        <a:schemeClr val="lt1"/>
+      </a:fontRef>
+    </dgm:style>
+  </dgm:styleLbl>
+  <dgm:styleLbl name="fgSibTrans2D1">
+    <dgm:scene3d>
+      <a:camera prst="orthographicFront"/>
+      <a:lightRig rig="threePt" dir="t"/>
+    </dgm:scene3d>
+    <dgm:sp3d/>
+    <dgm:txPr/>
+    <dgm:style>
+      <a:lnRef idx="0">
+        <a:scrgbClr r="0" g="0" b="0"/>
+      </a:lnRef>
+      <a:fillRef idx="1">
+        <a:scrgbClr r="0" g="0" b="0"/>
+      </a:fillRef>
+      <a:effectRef idx="0">
+        <a:scrgbClr r="0" g="0" b="0"/>
+      </a:effectRef>
+      <a:fontRef idx="minor">
+        <a:schemeClr val="lt1"/>
+      </a:fontRef>
+    </dgm:style>
+  </dgm:styleLbl>
+  <dgm:styleLbl name="bgSibTrans2D1">
+    <dgm:scene3d>
+      <a:camera prst="orthographicFront"/>
+      <a:lightRig rig="threePt" dir="t"/>
+    </dgm:scene3d>
+    <dgm:sp3d/>
+    <dgm:txPr/>
+    <dgm:style>
+      <a:lnRef idx="0">
+        <a:scrgbClr r="0" g="0" b="0"/>
+      </a:lnRef>
+      <a:fillRef idx="1">
+        <a:scrgbClr r="0" g="0" b="0"/>
+      </a:fillRef>
+      <a:effectRef idx="0">
+        <a:scrgbClr r="0" g="0" b="0"/>
+      </a:effectRef>
+      <a:fontRef idx="minor">
+        <a:schemeClr val="lt1"/>
+      </a:fontRef>
+    </dgm:style>
+  </dgm:styleLbl>
+  <dgm:styleLbl name="sibTrans1D1">
+    <dgm:scene3d>
+      <a:camera prst="orthographicFront"/>
+      <a:lightRig rig="threePt" dir="t"/>
+    </dgm:scene3d>
+    <dgm:sp3d/>
+    <dgm:txPr/>
+    <dgm:style>
+      <a:lnRef idx="1">
+        <a:scrgbClr r="0" g="0" b="0"/>
+      </a:lnRef>
+      <a:fillRef idx="0">
+        <a:scrgbClr r="0" g="0" b="0"/>
+      </a:fillRef>
+      <a:effectRef idx="0">
+        <a:scrgbClr r="0" g="0" b="0"/>
+      </a:effectRef>
+      <a:fontRef idx="minor"/>
+    </dgm:style>
+  </dgm:styleLbl>
+  <dgm:styleLbl name="callout">
+    <dgm:scene3d>
+      <a:camera prst="orthographicFront"/>
+      <a:lightRig rig="threePt" dir="t"/>
+    </dgm:scene3d>
+    <dgm:sp3d/>
+    <dgm:txPr/>
+    <dgm:style>
+      <a:lnRef idx="2">
+        <a:scrgbClr r="0" g="0" b="0"/>
+      </a:lnRef>
+      <a:fillRef idx="1">
+        <a:scrgbClr r="0" g="0" b="0"/>
+      </a:fillRef>
+      <a:effectRef idx="0">
+        <a:scrgbClr r="0" g="0" b="0"/>
+      </a:effectRef>
+      <a:fontRef idx="minor"/>
+    </dgm:style>
+  </dgm:styleLbl>
+  <dgm:styleLbl name="asst0">
+    <dgm:scene3d>
+      <a:camera prst="orthographicFront"/>
+      <a:lightRig rig="threePt" dir="t"/>
+    </dgm:scene3d>
+    <dgm:sp3d/>
+    <dgm:txPr/>
+    <dgm:style>
+      <a:lnRef idx="2">
+        <a:scrgbClr r="0" g="0" b="0"/>
+      </a:lnRef>
+      <a:fillRef idx="1">
+        <a:scrgbClr r="0" g="0" b="0"/>
+      </a:fillRef>
+      <a:effectRef idx="0">
+        <a:scrgbClr r="0" g="0" b="0"/>
+      </a:effectRef>
+      <a:fontRef idx="minor">
+        <a:schemeClr val="lt1"/>
+      </a:fontRef>
+    </dgm:style>
+  </dgm:styleLbl>
+  <dgm:styleLbl name="asst1">
+    <dgm:scene3d>
+      <a:camera prst="orthographicFront"/>
+      <a:lightRig rig="threePt" dir="t"/>
+    </dgm:scene3d>
+    <dgm:sp3d/>
+    <dgm:txPr/>
+    <dgm:style>
+      <a:lnRef idx="2">
+        <a:scrgbClr r="0" g="0" b="0"/>
+      </a:lnRef>
+      <a:fillRef idx="1">
+        <a:scrgbClr r="0" g="0" b="0"/>
+      </a:fillRef>
+      <a:effectRef idx="0">
+        <a:scrgbClr r="0" g="0" b="0"/>
+      </a:effectRef>
+      <a:fontRef idx="minor">
+        <a:schemeClr val="lt1"/>
+      </a:fontRef>
+    </dgm:style>
+  </dgm:styleLbl>
+  <dgm:styleLbl name="asst2">
+    <dgm:scene3d>
+      <a:camera prst="orthographicFront"/>
+      <a:lightRig rig="threePt" dir="t"/>
+    </dgm:scene3d>
+    <dgm:sp3d/>
+    <dgm:txPr/>
+    <dgm:style>
+      <a:lnRef idx="2">
+        <a:scrgbClr r="0" g="0" b="0"/>
+      </a:lnRef>
+      <a:fillRef idx="1">
+        <a:scrgbClr r="0" g="0" b="0"/>
+      </a:fillRef>
+      <a:effectRef idx="0">
+        <a:scrgbClr r="0" g="0" b="0"/>
+      </a:effectRef>
+      <a:fontRef idx="minor">
+        <a:schemeClr val="lt1"/>
+      </a:fontRef>
+    </dgm:style>
+  </dgm:styleLbl>
+  <dgm:styleLbl name="asst3">
+    <dgm:scene3d>
+      <a:camera prst="orthographicFront"/>
+      <a:lightRig rig="threePt" dir="t"/>
+    </dgm:scene3d>
+    <dgm:sp3d/>
+    <dgm:txPr/>
+    <dgm:style>
+      <a:lnRef idx="2">
+        <a:scrgbClr r="0" g="0" b="0"/>
+      </a:lnRef>
+      <a:fillRef idx="1">
+        <a:scrgbClr r="0" g="0" b="0"/>
+      </a:fillRef>
+      <a:effectRef idx="0">
+        <a:scrgbClr r="0" g="0" b="0"/>
+      </a:effectRef>
+      <a:fontRef idx="minor">
+        <a:schemeClr val="lt1"/>
+      </a:fontRef>
+    </dgm:style>
+  </dgm:styleLbl>
+  <dgm:styleLbl name="asst4">
+    <dgm:scene3d>
+      <a:camera prst="orthographicFront"/>
+      <a:lightRig rig="threePt" dir="t"/>
+    </dgm:scene3d>
+    <dgm:sp3d/>
+    <dgm:txPr/>
+    <dgm:style>
+      <a:lnRef idx="2">
+        <a:scrgbClr r="0" g="0" b="0"/>
+      </a:lnRef>
+      <a:fillRef idx="1">
+        <a:scrgbClr r="0" g="0" b="0"/>
+      </a:fillRef>
+      <a:effectRef idx="0">
+        <a:scrgbClr r="0" g="0" b="0"/>
+      </a:effectRef>
+      <a:fontRef idx="minor">
+        <a:schemeClr val="lt1"/>
+      </a:fontRef>
+    </dgm:style>
+  </dgm:styleLbl>
+  <dgm:styleLbl name="parChTrans2D1">
+    <dgm:scene3d>
+      <a:camera prst="orthographicFront"/>
+      <a:lightRig rig="threePt" dir="t"/>
+    </dgm:scene3d>
+    <dgm:sp3d/>
+    <dgm:txPr/>
+    <dgm:style>
+      <a:lnRef idx="2">
+        <a:scrgbClr r="0" g="0" b="0"/>
+      </a:lnRef>
+      <a:fillRef idx="1">
+        <a:scrgbClr r="0" g="0" b="0"/>
+      </a:fillRef>
+      <a:effectRef idx="0">
+        <a:scrgbClr r="0" g="0" b="0"/>
+      </a:effectRef>
+      <a:fontRef idx="minor">
+        <a:schemeClr val="lt1"/>
+      </a:fontRef>
+    </dgm:style>
+  </dgm:styleLbl>
+  <dgm:styleLbl name="parChTrans2D2">
+    <dgm:scene3d>
+      <a:camera prst="orthographicFront"/>
+      <a:lightRig rig="threePt" dir="t"/>
+    </dgm:scene3d>
+    <dgm:sp3d/>
+    <dgm:txPr/>
+    <dgm:style>
+      <a:lnRef idx="2">
+        <a:scrgbClr r="0" g="0" b="0"/>
+      </a:lnRef>
+      <a:fillRef idx="1">
+        <a:scrgbClr r="0" g="0" b="0"/>
+      </a:fillRef>
+      <a:effectRef idx="0">
+        <a:scrgbClr r="0" g="0" b="0"/>
+      </a:effectRef>
+      <a:fontRef idx="minor">
+        <a:schemeClr val="lt1"/>
+      </a:fontRef>
+    </dgm:style>
+  </dgm:styleLbl>
+  <dgm:styleLbl name="parChTrans2D3">
+    <dgm:scene3d>
+      <a:camera prst="orthographicFront"/>
+      <a:lightRig rig="threePt" dir="t"/>
+    </dgm:scene3d>
+    <dgm:sp3d/>
+    <dgm:txPr/>
+    <dgm:style>
+      <a:lnRef idx="2">
+        <a:scrgbClr r="0" g="0" b="0"/>
+      </a:lnRef>
+      <a:fillRef idx="1">
+        <a:scrgbClr r="0" g="0" b="0"/>
+      </a:fillRef>
+      <a:effectRef idx="0">
+        <a:scrgbClr r="0" g="0" b="0"/>
+      </a:effectRef>
+      <a:fontRef idx="minor">
+        <a:schemeClr val="lt1"/>
+      </a:fontRef>
+    </dgm:style>
+  </dgm:styleLbl>
+  <dgm:styleLbl name="parChTrans2D4">
+    <dgm:scene3d>
+      <a:camera prst="orthographicFront"/>
+      <a:lightRig rig="threePt" dir="t"/>
+    </dgm:scene3d>
+    <dgm:sp3d/>
+    <dgm:txPr/>
+    <dgm:style>
+      <a:lnRef idx="2">
+        <a:scrgbClr r="0" g="0" b="0"/>
+      </a:lnRef>
+      <a:fillRef idx="1">
+        <a:scrgbClr r="0" g="0" b="0"/>
+      </a:fillRef>
+      <a:effectRef idx="0">
+        <a:scrgbClr r="0" g="0" b="0"/>
+      </a:effectRef>
+      <a:fontRef idx="minor">
+        <a:schemeClr val="lt1"/>
+      </a:fontRef>
+    </dgm:style>
+  </dgm:styleLbl>
+  <dgm:styleLbl name="parChTrans1D1">
+    <dgm:scene3d>
+      <a:camera prst="orthographicFront"/>
+      <a:lightRig rig="threePt" dir="t"/>
+    </dgm:scene3d>
+    <dgm:sp3d/>
+    <dgm:txPr/>
+    <dgm:style>
+      <a:lnRef idx="2">
+        <a:scrgbClr r="0" g="0" b="0"/>
+      </a:lnRef>
+      <a:fillRef idx="0">
+        <a:scrgbClr r="0" g="0" b="0"/>
+      </a:fillRef>
+      <a:effectRef idx="0">
+        <a:scrgbClr r="0" g="0" b="0"/>
+      </a:effectRef>
+      <a:fontRef idx="minor"/>
+    </dgm:style>
+  </dgm:styleLbl>
+  <dgm:styleLbl name="parChTrans1D2">
+    <dgm:scene3d>
+      <a:camera prst="orthographicFront"/>
+      <a:lightRig rig="threePt" dir="t"/>
+    </dgm:scene3d>
+    <dgm:sp3d/>
+    <dgm:txPr/>
+    <dgm:style>
+      <a:lnRef idx="2">
+        <a:scrgbClr r="0" g="0" b="0"/>
+      </a:lnRef>
+      <a:fillRef idx="0">
+        <a:scrgbClr r="0" g="0" b="0"/>
+      </a:fillRef>
+      <a:effectRef idx="0">
+        <a:scrgbClr r="0" g="0" b="0"/>
+      </a:effectRef>
+      <a:fontRef idx="minor"/>
+    </dgm:style>
+  </dgm:styleLbl>
+  <dgm:styleLbl name="parChTrans1D3">
+    <dgm:scene3d>
+      <a:camera prst="orthographicFront"/>
+      <a:lightRig rig="threePt" dir="t"/>
+    </dgm:scene3d>
+    <dgm:sp3d/>
+    <dgm:txPr/>
+    <dgm:style>
+      <a:lnRef idx="2">
+        <a:scrgbClr r="0" g="0" b="0"/>
+      </a:lnRef>
+      <a:fillRef idx="0">
+        <a:scrgbClr r="0" g="0" b="0"/>
+      </a:fillRef>
+      <a:effectRef idx="0">
+        <a:scrgbClr r="0" g="0" b="0"/>
+      </a:effectRef>
+      <a:fontRef idx="minor"/>
+    </dgm:style>
+  </dgm:styleLbl>
+  <dgm:styleLbl name="parChTrans1D4">
+    <dgm:scene3d>
+      <a:camera prst="orthographicFront"/>
+      <a:lightRig rig="threePt" dir="t"/>
+    </dgm:scene3d>
+    <dgm:sp3d/>
+    <dgm:txPr/>
+    <dgm:style>
+      <a:lnRef idx="2">
+        <a:scrgbClr r="0" g="0" b="0"/>
+      </a:lnRef>
+      <a:fillRef idx="0">
+        <a:scrgbClr r="0" g="0" b="0"/>
+      </a:fillRef>
+      <a:effectRef idx="0">
+        <a:scrgbClr r="0" g="0" b="0"/>
+      </a:effectRef>
+      <a:fontRef idx="minor"/>
+    </dgm:style>
+  </dgm:styleLbl>
+  <dgm:styleLbl name="fgAcc1">
+    <dgm:scene3d>
+      <a:camera prst="orthographicFront"/>
+      <a:lightRig rig="threePt" dir="t"/>
+    </dgm:scene3d>
+    <dgm:sp3d/>
+    <dgm:txPr/>
+    <dgm:style>
+      <a:lnRef idx="2">
+        <a:scrgbClr r="0" g="0" b="0"/>
+      </a:lnRef>
+      <a:fillRef idx="1">
+        <a:scrgbClr r="0" g="0" b="0"/>
+      </a:fillRef>
+      <a:effectRef idx="0">
+        <a:scrgbClr r="0" g="0" b="0"/>
+      </a:effectRef>
+      <a:fontRef idx="minor"/>
+    </dgm:style>
+  </dgm:styleLbl>
+  <dgm:styleLbl name="conFgAcc1">
+    <dgm:scene3d>
+      <a:camera prst="orthographicFront"/>
+      <a:lightRig rig="threePt" dir="t"/>
+    </dgm:scene3d>
+    <dgm:sp3d/>
+    <dgm:txPr/>
+    <dgm:style>
+      <a:lnRef idx="2">
+        <a:scrgbClr r="0" g="0" b="0"/>
+      </a:lnRef>
+      <a:fillRef idx="1">
+        <a:scrgbClr r="0" g="0" b="0"/>
+      </a:fillRef>
+      <a:effectRef idx="0">
+        <a:scrgbClr r="0" g="0" b="0"/>
+      </a:effectRef>
+      <a:fontRef idx="minor"/>
+    </dgm:style>
+  </dgm:styleLbl>
+  <dgm:styleLbl name="alignAcc1">
+    <dgm:scene3d>
+      <a:camera prst="orthographicFront"/>
+      <a:lightRig rig="threePt" dir="t"/>
+    </dgm:scene3d>
+    <dgm:sp3d/>
+    <dgm:txPr/>
+    <dgm:style>
+      <a:lnRef idx="2">
+        <a:scrgbClr r="0" g="0" b="0"/>
+      </a:lnRef>
+      <a:fillRef idx="1">
+        <a:scrgbClr r="0" g="0" b="0"/>
+      </a:fillRef>
+      <a:effectRef idx="0">
+        <a:scrgbClr r="0" g="0" b="0"/>
+      </a:effectRef>
+      <a:fontRef idx="minor"/>
+    </dgm:style>
+  </dgm:styleLbl>
+  <dgm:styleLbl name="trAlignAcc1">
+    <dgm:scene3d>
+      <a:camera prst="orthographicFront"/>
+      <a:lightRig rig="threePt" dir="t"/>
+    </dgm:scene3d>
+    <dgm:sp3d/>
+    <dgm:txPr/>
+    <dgm:style>
+      <a:lnRef idx="1">
+        <a:scrgbClr r="0" g="0" b="0"/>
+      </a:lnRef>
+      <a:fillRef idx="1">
+        <a:scrgbClr r="0" g="0" b="0"/>
+      </a:fillRef>
+      <a:effectRef idx="0">
+        <a:scrgbClr r="0" g="0" b="0"/>
+      </a:effectRef>
+      <a:fontRef idx="minor"/>
+    </dgm:style>
+  </dgm:styleLbl>
+  <dgm:styleLbl name="bgAcc1">
+    <dgm:scene3d>
+      <a:camera prst="orthographicFront"/>
+      <a:lightRig rig="threePt" dir="t"/>
+    </dgm:scene3d>
+    <dgm:sp3d/>
+    <dgm:txPr/>
+    <dgm:style>
+      <a:lnRef idx="2">
+        <a:scrgbClr r="0" g="0" b="0"/>
+      </a:lnRef>
+      <a:fillRef idx="1">
+        <a:scrgbClr r="0" g="0" b="0"/>
+      </a:fillRef>
+      <a:effectRef idx="0">
+        <a:scrgbClr r="0" g="0" b="0"/>
+      </a:effectRef>
+      <a:fontRef idx="minor"/>
+    </dgm:style>
+  </dgm:styleLbl>
+  <dgm:styleLbl name="solidFgAcc1">
+    <dgm:scene3d>
+      <a:camera prst="orthographicFront"/>
+      <a:lightRig rig="threePt" dir="t"/>
+    </dgm:scene3d>
+    <dgm:sp3d/>
+    <dgm:txPr/>
+    <dgm:style>
+      <a:lnRef idx="2">
+        <a:scrgbClr r="0" g="0" b="0"/>
+      </a:lnRef>
+      <a:fillRef idx="1">
+        <a:scrgbClr r="0" g="0" b="0"/>
+      </a:fillRef>
+      <a:effectRef idx="0">
+        <a:scrgbClr r="0" g="0" b="0"/>
+      </a:effectRef>
+      <a:fontRef idx="minor"/>
+    </dgm:style>
+  </dgm:styleLbl>
+  <dgm:styleLbl name="solidAlignAcc1">
+    <dgm:scene3d>
+      <a:camera prst="orthographicFront"/>
+      <a:lightRig rig="threePt" dir="t"/>
+    </dgm:scene3d>
+    <dgm:sp3d/>
+    <dgm:txPr/>
+    <dgm:style>
+      <a:lnRef idx="2">
+        <a:scrgbClr r="0" g="0" b="0"/>
+      </a:lnRef>
+      <a:fillRef idx="1">
+        <a:scrgbClr r="0" g="0" b="0"/>
+      </a:fillRef>
+      <a:effectRef idx="0">
+        <a:scrgbClr r="0" g="0" b="0"/>
+      </a:effectRef>
+      <a:fontRef idx="minor"/>
+    </dgm:style>
+  </dgm:styleLbl>
+  <dgm:styleLbl name="solidBgAcc1">
+    <dgm:scene3d>
+      <a:camera prst="orthographicFront"/>
+      <a:lightRig rig="threePt" dir="t"/>
+    </dgm:scene3d>
+    <dgm:sp3d/>
+    <dgm:txPr/>
+    <dgm:style>
+      <a:lnRef idx="2">
+        <a:scrgbClr r="0" g="0" b="0"/>
+      </a:lnRef>
+      <a:fillRef idx="1">
+        <a:scrgbClr r="0" g="0" b="0"/>
+      </a:fillRef>
+      <a:effectRef idx="0">
+        <a:scrgbClr r="0" g="0" b="0"/>
+      </a:effectRef>
+      <a:fontRef idx="minor"/>
+    </dgm:style>
+  </dgm:styleLbl>
+  <dgm:styleLbl name="fgAccFollowNode1">
+    <dgm:scene3d>
+      <a:camera prst="orthographicFront"/>
+      <a:lightRig rig="threePt" dir="t"/>
+    </dgm:scene3d>
+    <dgm:sp3d/>
+    <dgm:txPr/>
+    <dgm:style>
+      <a:lnRef idx="2">
+        <a:scrgbClr r="0" g="0" b="0"/>
+      </a:lnRef>
+      <a:fillRef idx="1">
+        <a:scrgbClr r="0" g="0" b="0"/>
+      </a:fillRef>
+      <a:effectRef idx="0">
+        <a:scrgbClr r="0" g="0" b="0"/>
+      </a:effectRef>
+      <a:fontRef idx="minor"/>
+    </dgm:style>
+  </dgm:styleLbl>
+  <dgm:styleLbl name="alignAccFollowNode1">
+    <dgm:scene3d>
+      <a:camera prst="orthographicFront"/>
+      <a:lightRig rig="threePt" dir="t"/>
+    </dgm:scene3d>
+    <dgm:sp3d/>
+    <dgm:txPr/>
+    <dgm:style>
+      <a:lnRef idx="2">
+        <a:scrgbClr r="0" g="0" b="0"/>
+      </a:lnRef>
+      <a:fillRef idx="1">
+        <a:scrgbClr r="0" g="0" b="0"/>
+      </a:fillRef>
+      <a:effectRef idx="0">
+        <a:scrgbClr r="0" g="0" b="0"/>
+      </a:effectRef>
+      <a:fontRef idx="minor"/>
+    </dgm:style>
+  </dgm:styleLbl>
+  <dgm:styleLbl name="bgAccFollowNode1">
+    <dgm:scene3d>
+      <a:camera prst="orthographicFront"/>
+      <a:lightRig rig="threePt" dir="t"/>
+    </dgm:scene3d>
+    <dgm:sp3d/>
+    <dgm:txPr/>
+    <dgm:style>
+      <a:lnRef idx="2">
+        <a:scrgbClr r="0" g="0" b="0"/>
+      </a:lnRef>
+      <a:fillRef idx="1">
+        <a:scrgbClr r="0" g="0" b="0"/>
+      </a:fillRef>
+      <a:effectRef idx="0">
+        <a:scrgbClr r="0" g="0" b="0"/>
+      </a:effectRef>
+      <a:fontRef idx="minor"/>
+    </dgm:style>
+  </dgm:styleLbl>
+  <dgm:styleLbl name="fgAcc0">
+    <dgm:scene3d>
+      <a:camera prst="orthographicFront"/>
+      <a:lightRig rig="threePt" dir="t"/>
+    </dgm:scene3d>
+    <dgm:sp3d/>
+    <dgm:txPr/>
+    <dgm:style>
+      <a:lnRef idx="2">
+        <a:scrgbClr r="0" g="0" b="0"/>
+      </a:lnRef>
+      <a:fillRef idx="1">
+        <a:scrgbClr r="0" g="0" b="0"/>
+      </a:fillRef>
+      <a:effectRef idx="0">
+        <a:scrgbClr r="0" g="0" b="0"/>
+      </a:effectRef>
+      <a:fontRef idx="minor"/>
+    </dgm:style>
+  </dgm:styleLbl>
+  <dgm:styleLbl name="fgAcc2">
+    <dgm:scene3d>
+      <a:camera prst="orthographicFront"/>
+      <a:lightRig rig="threePt" dir="t"/>
+    </dgm:scene3d>
+    <dgm:sp3d/>
+    <dgm:txPr/>
+    <dgm:style>
+      <a:lnRef idx="2">
+        <a:scrgbClr r="0" g="0" b="0"/>
+      </a:lnRef>
+      <a:fillRef idx="1">
+        <a:scrgbClr r="0" g="0" b="0"/>
+      </a:fillRef>
+      <a:effectRef idx="0">
+        <a:scrgbClr r="0" g="0" b="0"/>
+      </a:effectRef>
+      <a:fontRef idx="minor"/>
+    </dgm:style>
+  </dgm:styleLbl>
+  <dgm:styleLbl name="fgAcc3">
+    <dgm:scene3d>
+      <a:camera prst="orthographicFront"/>
+      <a:lightRig rig="threePt" dir="t"/>
+    </dgm:scene3d>
+    <dgm:sp3d/>
+    <dgm:txPr/>
+    <dgm:style>
+      <a:lnRef idx="2">
+        <a:scrgbClr r="0" g="0" b="0"/>
+      </a:lnRef>
+      <a:fillRef idx="1">
+        <a:scrgbClr r="0" g="0" b="0"/>
+      </a:fillRef>
+      <a:effectRef idx="0">
+        <a:scrgbClr r="0" g="0" b="0"/>
+      </a:effectRef>
+      <a:fontRef idx="minor"/>
+    </dgm:style>
+  </dgm:styleLbl>
+  <dgm:styleLbl name="fgAcc4">
+    <dgm:scene3d>
+      <a:camera prst="orthographicFront"/>
+      <a:lightRig rig="threePt" dir="t"/>
+    </dgm:scene3d>
+    <dgm:sp3d/>
+    <dgm:txPr/>
+    <dgm:style>
+      <a:lnRef idx="2">
+        <a:scrgbClr r="0" g="0" b="0"/>
+      </a:lnRef>
+      <a:fillRef idx="1">
+        <a:scrgbClr r="0" g="0" b="0"/>
+      </a:fillRef>
+      <a:effectRef idx="0">
+        <a:scrgbClr r="0" g="0" b="0"/>
+      </a:effectRef>
+      <a:fontRef idx="minor"/>
+    </dgm:style>
+  </dgm:styleLbl>
+  <dgm:styleLbl name="bgShp">
+    <dgm:scene3d>
+      <a:camera prst="orthographicFront"/>
+      <a:lightRig rig="threePt" dir="t"/>
+    </dgm:scene3d>
+    <dgm:sp3d/>
+    <dgm:txPr/>
+    <dgm:style>
+      <a:lnRef idx="0">
+        <a:scrgbClr r="0" g="0" b="0"/>
+      </a:lnRef>
+      <a:fillRef idx="1">
+        <a:scrgbClr r="0" g="0" b="0"/>
+      </a:fillRef>
+      <a:effectRef idx="0">
+        <a:scrgbClr r="0" g="0" b="0"/>
+      </a:effectRef>
+      <a:fontRef idx="minor"/>
+    </dgm:style>
+  </dgm:styleLbl>
+  <dgm:styleLbl name="dkBgShp">
+    <dgm:scene3d>
+      <a:camera prst="orthographicFront"/>
+      <a:lightRig rig="threePt" dir="t"/>
+    </dgm:scene3d>
+    <dgm:sp3d/>
+    <dgm:txPr/>
+    <dgm:style>
+      <a:lnRef idx="0">
+        <a:scrgbClr r="0" g="0" b="0"/>
+      </a:lnRef>
+      <a:fillRef idx="1">
+        <a:scrgbClr r="0" g="0" b="0"/>
+      </a:fillRef>
+      <a:effectRef idx="0">
+        <a:scrgbClr r="0" g="0" b="0"/>
+      </a:effectRef>
+      <a:fontRef idx="minor"/>
+    </dgm:style>
+  </dgm:styleLbl>
+  <dgm:styleLbl name="trBgShp">
+    <dgm:scene3d>
+      <a:camera prst="orthographicFront"/>
+      <a:lightRig rig="threePt" dir="t"/>
+    </dgm:scene3d>
+    <dgm:sp3d/>
+    <dgm:txPr/>
+    <dgm:style>
+      <a:lnRef idx="0">
+        <a:scrgbClr r="0" g="0" b="0"/>
+      </a:lnRef>
+      <a:fillRef idx="1">
+        <a:scrgbClr r="0" g="0" b="0"/>
+      </a:fillRef>
+      <a:effectRef idx="0">
+        <a:scrgbClr r="0" g="0" b="0"/>
+      </a:effectRef>
+      <a:fontRef idx="minor"/>
+    </dgm:style>
+  </dgm:styleLbl>
+  <dgm:styleLbl name="fgShp">
+    <dgm:scene3d>
+      <a:camera prst="orthographicFront"/>
+      <a:lightRig rig="threePt" dir="t"/>
+    </dgm:scene3d>
+    <dgm:sp3d/>
+    <dgm:txPr/>
+    <dgm:style>
+      <a:lnRef idx="2">
+        <a:scrgbClr r="0" g="0" b="0"/>
+      </a:lnRef>
+      <a:fillRef idx="1">
+        <a:scrgbClr r="0" g="0" b="0"/>
+      </a:fillRef>
+      <a:effectRef idx="0">
+        <a:scrgbClr r="0" g="0" b="0"/>
+      </a:effectRef>
+      <a:fontRef idx="minor"/>
+    </dgm:style>
+  </dgm:styleLbl>
+  <dgm:styleLbl name="revTx">
+    <dgm:scene3d>
+      <a:camera prst="orthographicFront"/>
+      <a:lightRig rig="threePt" dir="t"/>
+    </dgm:scene3d>
+    <dgm:sp3d/>
+    <dgm:txPr/>
+    <dgm:style>
+      <a:lnRef idx="0">
+        <a:scrgbClr r="0" g="0" b="0"/>
+      </a:lnRef>
+      <a:fillRef idx="0">
+        <a:scrgbClr r="0" g="0" b="0"/>
+      </a:fillRef>
+      <a:effectRef idx="0">
+        <a:scrgbClr r="0" g="0" b="0"/>
+      </a:effectRef>
+      <a:fontRef idx="minor"/>
+    </dgm:style>
+  </dgm:styleLbl>
+</dgm:styleDef>
+</file>
+
 <file path=ppt/slideLayouts/slideLayout1.xml><?xml version="1.0" encoding="utf-8"?>
 <p:sldLayout xmlns:a="http://schemas.openxmlformats.org/drawingml/2006/main" xmlns:r="http://schemas.openxmlformats.org/officeDocument/2006/relationships" xmlns:p="http://schemas.openxmlformats.org/presentationml/2006/main" type="title" preserve="1">
   <p:cSld name="Титульный слайд">
@@ -257,7 +3294,7 @@
           <a:p>
             <a:fld id="{0F351541-4E41-5244-B337-927E1F15D341}" type="datetimeFigureOut">
               <a:rPr lang="ru-RU" smtClean="0"/>
-              <a:t>17.02.2026</a:t>
+              <a:t>24.02.2026</a:t>
             </a:fld>
             <a:endParaRPr lang="ru-RU"/>
           </a:p>
@@ -427,7 +3464,7 @@
           <a:p>
             <a:fld id="{0F351541-4E41-5244-B337-927E1F15D341}" type="datetimeFigureOut">
               <a:rPr lang="ru-RU" smtClean="0"/>
-              <a:t>17.02.2026</a:t>
+              <a:t>24.02.2026</a:t>
             </a:fld>
             <a:endParaRPr lang="ru-RU"/>
           </a:p>
@@ -607,7 +3644,7 @@
           <a:p>
             <a:fld id="{0F351541-4E41-5244-B337-927E1F15D341}" type="datetimeFigureOut">
               <a:rPr lang="ru-RU" smtClean="0"/>
-              <a:t>17.02.2026</a:t>
+              <a:t>24.02.2026</a:t>
             </a:fld>
             <a:endParaRPr lang="ru-RU"/>
           </a:p>
@@ -777,7 +3814,7 @@
           <a:p>
             <a:fld id="{0F351541-4E41-5244-B337-927E1F15D341}" type="datetimeFigureOut">
               <a:rPr lang="ru-RU" smtClean="0"/>
-              <a:t>17.02.2026</a:t>
+              <a:t>24.02.2026</a:t>
             </a:fld>
             <a:endParaRPr lang="ru-RU"/>
           </a:p>
@@ -1021,7 +4058,7 @@
           <a:p>
             <a:fld id="{0F351541-4E41-5244-B337-927E1F15D341}" type="datetimeFigureOut">
               <a:rPr lang="ru-RU" smtClean="0"/>
-              <a:t>17.02.2026</a:t>
+              <a:t>24.02.2026</a:t>
             </a:fld>
             <a:endParaRPr lang="ru-RU"/>
           </a:p>
@@ -1253,7 +4290,7 @@
           <a:p>
             <a:fld id="{0F351541-4E41-5244-B337-927E1F15D341}" type="datetimeFigureOut">
               <a:rPr lang="ru-RU" smtClean="0"/>
-              <a:t>17.02.2026</a:t>
+              <a:t>24.02.2026</a:t>
             </a:fld>
             <a:endParaRPr lang="ru-RU"/>
           </a:p>
@@ -1620,7 +4657,7 @@
           <a:p>
             <a:fld id="{0F351541-4E41-5244-B337-927E1F15D341}" type="datetimeFigureOut">
               <a:rPr lang="ru-RU" smtClean="0"/>
-              <a:t>17.02.2026</a:t>
+              <a:t>24.02.2026</a:t>
             </a:fld>
             <a:endParaRPr lang="ru-RU"/>
           </a:p>
@@ -1738,7 +4775,7 @@
           <a:p>
             <a:fld id="{0F351541-4E41-5244-B337-927E1F15D341}" type="datetimeFigureOut">
               <a:rPr lang="ru-RU" smtClean="0"/>
-              <a:t>17.02.2026</a:t>
+              <a:t>24.02.2026</a:t>
             </a:fld>
             <a:endParaRPr lang="ru-RU"/>
           </a:p>
@@ -1833,7 +4870,7 @@
           <a:p>
             <a:fld id="{0F351541-4E41-5244-B337-927E1F15D341}" type="datetimeFigureOut">
               <a:rPr lang="ru-RU" smtClean="0"/>
-              <a:t>17.02.2026</a:t>
+              <a:t>24.02.2026</a:t>
             </a:fld>
             <a:endParaRPr lang="ru-RU"/>
           </a:p>
@@ -2110,7 +5147,7 @@
           <a:p>
             <a:fld id="{0F351541-4E41-5244-B337-927E1F15D341}" type="datetimeFigureOut">
               <a:rPr lang="ru-RU" smtClean="0"/>
-              <a:t>17.02.2026</a:t>
+              <a:t>24.02.2026</a:t>
             </a:fld>
             <a:endParaRPr lang="ru-RU"/>
           </a:p>
@@ -2367,7 +5404,7 @@
           <a:p>
             <a:fld id="{0F351541-4E41-5244-B337-927E1F15D341}" type="datetimeFigureOut">
               <a:rPr lang="ru-RU" smtClean="0"/>
-              <a:t>17.02.2026</a:t>
+              <a:t>24.02.2026</a:t>
             </a:fld>
             <a:endParaRPr lang="ru-RU"/>
           </a:p>
@@ -2580,7 +5617,7 @@
           <a:p>
             <a:fld id="{0F351541-4E41-5244-B337-927E1F15D341}" type="datetimeFigureOut">
               <a:rPr lang="ru-RU" smtClean="0"/>
-              <a:t>17.02.2026</a:t>
+              <a:t>24.02.2026</a:t>
             </a:fld>
             <a:endParaRPr lang="ru-RU"/>
           </a:p>
@@ -3241,8 +6278,8 @@
           </a:p>
         </p:txBody>
       </p:sp>
-      <mc:AlternateContent xmlns:mc="http://schemas.openxmlformats.org/markup-compatibility/2006">
-        <mc:Choice xmlns:a14="http://schemas.microsoft.com/office/drawing/2010/main" Requires="a14">
+      <mc:AlternateContent xmlns:mc="http://schemas.openxmlformats.org/markup-compatibility/2006" xmlns:a14="http://schemas.microsoft.com/office/drawing/2010/main">
+        <mc:Choice Requires="a14">
           <p:sp>
             <p:nvSpPr>
               <p:cNvPr id="3" name="Объект 2">
@@ -3589,7 +6626,7 @@
             </p:txBody>
           </p:sp>
         </mc:Choice>
-        <mc:Fallback>
+        <mc:Fallback xmlns="">
           <p:sp>
             <p:nvSpPr>
               <p:cNvPr id="3" name="Объект 2">
@@ -4807,7 +7844,28 @@
                 <a:latin typeface="Times New Roman" panose="02020603050405020304" pitchFamily="18" charset="0"/>
                 <a:cs typeface="Times New Roman" panose="02020603050405020304" pitchFamily="18" charset="0"/>
               </a:rPr>
-              <a:t> в 1962 году; однако разновидность их алгоритма к тому времени уже почти 10 лет использовалась Национальной программой распределения студентов- медиков по больницам. По сути, ситуация выглядела так: было т больниц, в каждой из которых имелось некоторое количество вакансий. Также было п студентов-медиков, которые получали диплом и были заинтересованы в поступлении в одну из больниц. Каждая больница строила оценки студентов в порядке предпочтения, и каждый студент строил оценки больниц в порядке предпочтения. Будем считать, что количество выпускников превышает количество доступных вакансий в т больницах. Естественно, задача заключалась в поиске способа связывания каждого студента не более чем с одной больницей, при котором были бы заполнены все вакансии во всех больницах. (Так как предполагается, что количество студентов превышает количество вакансий, некоторые студенты не будут приняты ни в одну из больниц.)</a:t>
+              <a:t> в 1962 году; однако разновидность их алгоритма к тому времени уже почти 10 лет использовалась Национальной программой распределения студентов- медиков по больницам. По сути, ситуация выглядела так: было т больниц, в каждой из которых имелось некоторое количество вакансий. Также было п студентов-медиков, которые получали диплом и были заинтересованы в поступлении в одну из больниц. Каждая больница строила оценки студентов в порядке предпочтения, и каждый студент строил оценки больниц в порядке предпочтения. Будем считать, что количество выпускников превышает количество доступных вакансий в</a:t>
+            </a:r>
+            <a:r>
+              <a:rPr lang="en-US" sz="1400" dirty="0">
+                <a:latin typeface="Times New Roman" panose="02020603050405020304" pitchFamily="18" charset="0"/>
+                <a:cs typeface="Times New Roman" panose="02020603050405020304" pitchFamily="18" charset="0"/>
+              </a:rPr>
+              <a:t> </a:t>
+            </a:r>
+            <a:r>
+              <a:rPr lang="en-US" sz="1400" i="1" dirty="0">
+                <a:latin typeface="Times New Roman" panose="02020603050405020304" pitchFamily="18" charset="0"/>
+                <a:cs typeface="Times New Roman" panose="02020603050405020304" pitchFamily="18" charset="0"/>
+              </a:rPr>
+              <a:t>m</a:t>
+            </a:r>
+            <a:r>
+              <a:rPr lang="ru-RU" sz="1400" dirty="0">
+                <a:latin typeface="Times New Roman" panose="02020603050405020304" pitchFamily="18" charset="0"/>
+                <a:cs typeface="Times New Roman" panose="02020603050405020304" pitchFamily="18" charset="0"/>
+              </a:rPr>
+              <a:t> больницах. Естественно, задача заключалась в поиске способа связывания каждого студента не более чем с одной больницей, при котором были бы заполнены все вакансии во всех больницах. (Так как предполагается, что количество студентов превышает количество вакансий, некоторые студенты не будут приняты ни в одну из больниц.)</a:t>
             </a:r>
           </a:p>
           <a:p>
@@ -5846,6 +8904,1177 @@
 </p:sld>
 </file>
 
+<file path=ppt/slides/slide16.xml><?xml version="1.0" encoding="utf-8"?>
+<p:sld xmlns:a="http://schemas.openxmlformats.org/drawingml/2006/main" xmlns:r="http://schemas.openxmlformats.org/officeDocument/2006/relationships" xmlns:p="http://schemas.openxmlformats.org/presentationml/2006/main">
+  <p:cSld>
+    <p:spTree>
+      <p:nvGrpSpPr>
+        <p:cNvPr id="1" name=""/>
+        <p:cNvGrpSpPr/>
+        <p:nvPr/>
+      </p:nvGrpSpPr>
+      <p:grpSpPr>
+        <a:xfrm>
+          <a:off x="0" y="0"/>
+          <a:ext cx="0" cy="0"/>
+          <a:chOff x="0" y="0"/>
+          <a:chExt cx="0" cy="0"/>
+        </a:xfrm>
+      </p:grpSpPr>
+      <p:sp>
+        <p:nvSpPr>
+          <p:cNvPr id="2" name="Заголовок 1">
+            <a:extLst>
+              <a:ext uri="{FF2B5EF4-FFF2-40B4-BE49-F238E27FC236}">
+                <a16:creationId xmlns:a16="http://schemas.microsoft.com/office/drawing/2014/main" id="{62C96F3D-2098-6549-92E3-CADEF92F82BC}"/>
+              </a:ext>
+            </a:extLst>
+          </p:cNvPr>
+          <p:cNvSpPr>
+            <a:spLocks noGrp="1"/>
+          </p:cNvSpPr>
+          <p:nvPr>
+            <p:ph type="title"/>
+          </p:nvPr>
+        </p:nvSpPr>
+        <p:spPr/>
+        <p:txBody>
+          <a:bodyPr/>
+          <a:lstStyle/>
+          <a:p>
+            <a:r>
+              <a:rPr lang="ru-RU" dirty="0"/>
+              <a:t>Интервальное планирование </a:t>
+            </a:r>
+          </a:p>
+        </p:txBody>
+      </p:sp>
+      <p:sp>
+        <p:nvSpPr>
+          <p:cNvPr id="3" name="Объект 2">
+            <a:extLst>
+              <a:ext uri="{FF2B5EF4-FFF2-40B4-BE49-F238E27FC236}">
+                <a16:creationId xmlns:a16="http://schemas.microsoft.com/office/drawing/2014/main" id="{2EE6E5D1-EC35-9F4D-8E1E-8A175E320BBB}"/>
+              </a:ext>
+            </a:extLst>
+          </p:cNvPr>
+          <p:cNvSpPr>
+            <a:spLocks noGrp="1"/>
+          </p:cNvSpPr>
+          <p:nvPr>
+            <p:ph idx="1"/>
+          </p:nvPr>
+        </p:nvSpPr>
+        <p:spPr>
+          <a:xfrm>
+            <a:off x="628650" y="1825625"/>
+            <a:ext cx="7886700" cy="2002096"/>
+          </a:xfrm>
+        </p:spPr>
+        <p:txBody>
+          <a:bodyPr>
+            <a:normAutofit fontScale="62500" lnSpcReduction="20000"/>
+          </a:bodyPr>
+          <a:lstStyle/>
+          <a:p>
+            <a:pPr marL="0" indent="0">
+              <a:buNone/>
+            </a:pPr>
+            <a:r>
+              <a:rPr lang="ru-RU" dirty="0"/>
+              <a:t>Имеется некий ресурс — аудитория, суперкомпьютер, электронный микроскоп и т. д.; множество людей обращается с заявками на использование ресурса в течение периода времени. Заявка имеет вид: «Можно ли зарезервировать ресурс, начиная с времени </a:t>
+            </a:r>
+            <a:r>
+              <a:rPr lang="en" dirty="0"/>
+              <a:t>s </a:t>
+            </a:r>
+            <a:r>
+              <a:rPr lang="ru-RU" dirty="0"/>
+              <a:t>и до времени </a:t>
+            </a:r>
+            <a:r>
+              <a:rPr lang="en" dirty="0"/>
+              <a:t>f?» </a:t>
+            </a:r>
+            <a:r>
+              <a:rPr lang="ru-RU" dirty="0"/>
+              <a:t>Будем считать, что ресурс в любой момент времени может использоваться только одним человеком. Планировщик выбирает подмножество заявок, отклоняя все остальные, чтобы принятые заявки не перекрывались по времени. Целью планирования является максимизация количества принятых заявок. </a:t>
+            </a:r>
+          </a:p>
+        </p:txBody>
+      </p:sp>
+      <p:pic>
+        <p:nvPicPr>
+          <p:cNvPr id="4" name="Рисунок 3">
+            <a:extLst>
+              <a:ext uri="{FF2B5EF4-FFF2-40B4-BE49-F238E27FC236}">
+                <a16:creationId xmlns:a16="http://schemas.microsoft.com/office/drawing/2014/main" id="{29131E42-62D5-314D-8CF0-581CBA7A6394}"/>
+              </a:ext>
+            </a:extLst>
+          </p:cNvPr>
+          <p:cNvPicPr>
+            <a:picLocks noChangeAspect="1"/>
+          </p:cNvPicPr>
+          <p:nvPr/>
+        </p:nvPicPr>
+        <p:blipFill>
+          <a:blip r:embed="rId2"/>
+          <a:stretch>
+            <a:fillRect/>
+          </a:stretch>
+        </p:blipFill>
+        <p:spPr>
+          <a:xfrm>
+            <a:off x="903914" y="4130897"/>
+            <a:ext cx="6857227" cy="1802070"/>
+          </a:xfrm>
+          <a:prstGeom prst="rect">
+            <a:avLst/>
+          </a:prstGeom>
+        </p:spPr>
+      </p:pic>
+    </p:spTree>
+    <p:extLst>
+      <p:ext uri="{BB962C8B-B14F-4D97-AF65-F5344CB8AC3E}">
+        <p14:creationId xmlns:p14="http://schemas.microsoft.com/office/powerpoint/2010/main" val="2256403686"/>
+      </p:ext>
+    </p:extLst>
+  </p:cSld>
+  <p:clrMapOvr>
+    <a:masterClrMapping/>
+  </p:clrMapOvr>
+</p:sld>
+</file>
+
+<file path=ppt/slides/slide17.xml><?xml version="1.0" encoding="utf-8"?>
+<p:sld xmlns:a="http://schemas.openxmlformats.org/drawingml/2006/main" xmlns:r="http://schemas.openxmlformats.org/officeDocument/2006/relationships" xmlns:p="http://schemas.openxmlformats.org/presentationml/2006/main">
+  <p:cSld>
+    <p:spTree>
+      <p:nvGrpSpPr>
+        <p:cNvPr id="1" name=""/>
+        <p:cNvGrpSpPr/>
+        <p:nvPr/>
+      </p:nvGrpSpPr>
+      <p:grpSpPr>
+        <a:xfrm>
+          <a:off x="0" y="0"/>
+          <a:ext cx="0" cy="0"/>
+          <a:chOff x="0" y="0"/>
+          <a:chExt cx="0" cy="0"/>
+        </a:xfrm>
+      </p:grpSpPr>
+      <p:sp>
+        <p:nvSpPr>
+          <p:cNvPr id="2" name="Заголовок 1">
+            <a:extLst>
+              <a:ext uri="{FF2B5EF4-FFF2-40B4-BE49-F238E27FC236}">
+                <a16:creationId xmlns:a16="http://schemas.microsoft.com/office/drawing/2014/main" id="{0AA5960B-69E6-6A4F-A53D-C17293BCDDE4}"/>
+              </a:ext>
+            </a:extLst>
+          </p:cNvPr>
+          <p:cNvSpPr>
+            <a:spLocks noGrp="1"/>
+          </p:cNvSpPr>
+          <p:nvPr>
+            <p:ph type="title"/>
+          </p:nvPr>
+        </p:nvSpPr>
+        <p:spPr/>
+        <p:txBody>
+          <a:bodyPr/>
+          <a:lstStyle/>
+          <a:p>
+            <a:r>
+              <a:rPr lang="ru-RU" dirty="0"/>
+              <a:t>Взвешенное интервальное планирование </a:t>
+            </a:r>
+          </a:p>
+        </p:txBody>
+      </p:sp>
+      <p:sp>
+        <p:nvSpPr>
+          <p:cNvPr id="3" name="Объект 2">
+            <a:extLst>
+              <a:ext uri="{FF2B5EF4-FFF2-40B4-BE49-F238E27FC236}">
+                <a16:creationId xmlns:a16="http://schemas.microsoft.com/office/drawing/2014/main" id="{E9EF902A-ED9A-EF47-80BD-581C03DE62A0}"/>
+              </a:ext>
+            </a:extLst>
+          </p:cNvPr>
+          <p:cNvSpPr>
+            <a:spLocks noGrp="1"/>
+          </p:cNvSpPr>
+          <p:nvPr>
+            <p:ph idx="1"/>
+          </p:nvPr>
+        </p:nvSpPr>
+        <p:spPr/>
+        <p:txBody>
+          <a:bodyPr/>
+          <a:lstStyle/>
+          <a:p>
+            <a:pPr marL="0" indent="0">
+              <a:buNone/>
+            </a:pPr>
+            <a:r>
+              <a:rPr lang="ru-RU" sz="1800" dirty="0">
+                <a:solidFill>
+                  <a:srgbClr val="000000"/>
+                </a:solidFill>
+                <a:effectLst/>
+                <a:latin typeface="Special#Default Metrics Font"/>
+                <a:ea typeface="Special#Default Metrics Font"/>
+                <a:cs typeface="Special#Default Metrics Font"/>
+              </a:rPr>
+              <a:t>Интервалу каждой заявки </a:t>
+            </a:r>
+            <a:r>
+              <a:rPr lang="en-US" sz="1800" dirty="0" err="1">
+                <a:solidFill>
+                  <a:srgbClr val="000000"/>
+                </a:solidFill>
+                <a:latin typeface="Special#Default Metrics Font"/>
+                <a:ea typeface="Special#Default Metrics Font"/>
+                <a:cs typeface="Special#Default Metrics Font"/>
+              </a:rPr>
+              <a:t>i</a:t>
+            </a:r>
+            <a:r>
+              <a:rPr lang="en-US" sz="1800" dirty="0">
+                <a:solidFill>
+                  <a:srgbClr val="000000"/>
+                </a:solidFill>
+                <a:latin typeface="Special#Default Metrics Font"/>
+                <a:ea typeface="Special#Default Metrics Font"/>
+                <a:cs typeface="Special#Default Metrics Font"/>
+              </a:rPr>
+              <a:t> </a:t>
+            </a:r>
+            <a:r>
+              <a:rPr lang="ru-RU" sz="1800" dirty="0">
+                <a:solidFill>
+                  <a:srgbClr val="000000"/>
+                </a:solidFill>
+                <a:effectLst/>
+                <a:latin typeface="Special#Default Metrics Font"/>
+                <a:ea typeface="Special#Default Metrics Font"/>
+                <a:cs typeface="Special#Default Metrics Font"/>
+              </a:rPr>
+              <a:t>присваивается соответствующий коэффициент </a:t>
+            </a:r>
+            <a:r>
+              <a:rPr lang="ru-RU" sz="1800" i="1" spc="0" dirty="0">
+                <a:solidFill>
+                  <a:srgbClr val="000000"/>
+                </a:solidFill>
+                <a:effectLst/>
+                <a:latin typeface="Special#Default Metrics Font"/>
+                <a:ea typeface="Special#Default Metrics Font"/>
+                <a:cs typeface="Special#Default Metrics Font"/>
+              </a:rPr>
+              <a:t>(вес)</a:t>
+            </a:r>
+            <a:r>
+              <a:rPr lang="ru-RU" sz="1800" dirty="0">
+                <a:solidFill>
+                  <a:srgbClr val="000000"/>
+                </a:solidFill>
+                <a:effectLst/>
+                <a:latin typeface="Special#Default Metrics Font"/>
+                <a:ea typeface="Special#Default Metrics Font"/>
+                <a:cs typeface="Special#Default Metrics Font"/>
+              </a:rPr>
+              <a:t> </a:t>
+            </a:r>
+            <a:r>
+              <a:rPr lang="en-US" sz="1800" dirty="0">
+                <a:solidFill>
+                  <a:srgbClr val="000000"/>
+                </a:solidFill>
+                <a:effectLst/>
+                <a:latin typeface="Special#Default Metrics Font"/>
+                <a:ea typeface="Special#Default Metrics Font"/>
+                <a:cs typeface="Special#Default Metrics Font"/>
+              </a:rPr>
+              <a:t>v</a:t>
+            </a:r>
+            <a:r>
+              <a:rPr lang="en-US" sz="1800" baseline="-25000" dirty="0">
+                <a:solidFill>
+                  <a:srgbClr val="000000"/>
+                </a:solidFill>
+                <a:latin typeface="Special#Default Metrics Font"/>
+                <a:ea typeface="Special#Default Metrics Font"/>
+                <a:cs typeface="Special#Default Metrics Font"/>
+              </a:rPr>
+              <a:t>i</a:t>
+            </a:r>
+            <a:r>
+              <a:rPr lang="ru-RU" sz="1800" dirty="0">
+                <a:solidFill>
+                  <a:srgbClr val="000000"/>
+                </a:solidFill>
+                <a:effectLst/>
+                <a:latin typeface="Special#Default Metrics Font"/>
+                <a:ea typeface="Special#Default Metrics Font"/>
+                <a:cs typeface="Special#Default Metrics Font"/>
+              </a:rPr>
+              <a:t> &gt; 0; можно рассматривать его как оплату, которую владелец ресурса получит от </a:t>
+            </a:r>
+            <a:r>
+              <a:rPr lang="en-US" sz="1800" dirty="0" err="1">
+                <a:solidFill>
+                  <a:srgbClr val="000000"/>
+                </a:solidFill>
+                <a:effectLst/>
+                <a:latin typeface="Special#Default Metrics Font"/>
+                <a:ea typeface="Special#Default Metrics Font"/>
+                <a:cs typeface="Special#Default Metrics Font"/>
+              </a:rPr>
+              <a:t>i</a:t>
+            </a:r>
+            <a:r>
+              <a:rPr lang="ru-RU" sz="1800" dirty="0">
+                <a:solidFill>
+                  <a:srgbClr val="000000"/>
+                </a:solidFill>
+                <a:effectLst/>
+                <a:latin typeface="Special#Default Metrics Font"/>
+                <a:ea typeface="Special#Default Metrics Font"/>
+                <a:cs typeface="Special#Default Metrics Font"/>
+              </a:rPr>
+              <a:t>-го претендента при удовлетворении его заявки. Наша цель — найти совместимое подмножество интервалов с максимальным общим весом.</a:t>
+            </a:r>
+            <a:endParaRPr lang="ru-RU" sz="1800" dirty="0">
+              <a:effectLst/>
+              <a:latin typeface="Special#Default Metrics Font"/>
+              <a:ea typeface="Special#Default Metrics Font"/>
+              <a:cs typeface="Special#Default Metrics Font"/>
+            </a:endParaRPr>
+          </a:p>
+        </p:txBody>
+      </p:sp>
+    </p:spTree>
+    <p:extLst>
+      <p:ext uri="{BB962C8B-B14F-4D97-AF65-F5344CB8AC3E}">
+        <p14:creationId xmlns:p14="http://schemas.microsoft.com/office/powerpoint/2010/main" val="67040296"/>
+      </p:ext>
+    </p:extLst>
+  </p:cSld>
+  <p:clrMapOvr>
+    <a:masterClrMapping/>
+  </p:clrMapOvr>
+</p:sld>
+</file>
+
+<file path=ppt/slides/slide18.xml><?xml version="1.0" encoding="utf-8"?>
+<p:sld xmlns:a="http://schemas.openxmlformats.org/drawingml/2006/main" xmlns:r="http://schemas.openxmlformats.org/officeDocument/2006/relationships" xmlns:p="http://schemas.openxmlformats.org/presentationml/2006/main">
+  <p:cSld>
+    <p:spTree>
+      <p:nvGrpSpPr>
+        <p:cNvPr id="1" name=""/>
+        <p:cNvGrpSpPr/>
+        <p:nvPr/>
+      </p:nvGrpSpPr>
+      <p:grpSpPr>
+        <a:xfrm>
+          <a:off x="0" y="0"/>
+          <a:ext cx="0" cy="0"/>
+          <a:chOff x="0" y="0"/>
+          <a:chExt cx="0" cy="0"/>
+        </a:xfrm>
+      </p:grpSpPr>
+      <p:sp>
+        <p:nvSpPr>
+          <p:cNvPr id="2" name="Заголовок 1">
+            <a:extLst>
+              <a:ext uri="{FF2B5EF4-FFF2-40B4-BE49-F238E27FC236}">
+                <a16:creationId xmlns:a16="http://schemas.microsoft.com/office/drawing/2014/main" id="{7E7E7F77-0FC0-7045-A438-A322FD5E95F2}"/>
+              </a:ext>
+            </a:extLst>
+          </p:cNvPr>
+          <p:cNvSpPr>
+            <a:spLocks noGrp="1"/>
+          </p:cNvSpPr>
+          <p:nvPr>
+            <p:ph type="title"/>
+          </p:nvPr>
+        </p:nvSpPr>
+        <p:spPr>
+          <a:xfrm>
+            <a:off x="628650" y="116958"/>
+            <a:ext cx="7886700" cy="644966"/>
+          </a:xfrm>
+        </p:spPr>
+        <p:txBody>
+          <a:bodyPr>
+            <a:normAutofit fontScale="90000"/>
+          </a:bodyPr>
+          <a:lstStyle/>
+          <a:p>
+            <a:r>
+              <a:rPr lang="ru-RU" dirty="0"/>
+              <a:t>Двудольные </a:t>
+            </a:r>
+            <a:r>
+              <a:rPr lang="ru-RU" dirty="0" err="1"/>
+              <a:t>паросочетания</a:t>
+            </a:r>
+            <a:r>
+              <a:rPr lang="ru-RU" dirty="0"/>
+              <a:t> </a:t>
+            </a:r>
+          </a:p>
+        </p:txBody>
+      </p:sp>
+      <p:sp>
+        <p:nvSpPr>
+          <p:cNvPr id="3" name="Объект 2">
+            <a:extLst>
+              <a:ext uri="{FF2B5EF4-FFF2-40B4-BE49-F238E27FC236}">
+                <a16:creationId xmlns:a16="http://schemas.microsoft.com/office/drawing/2014/main" id="{A7EF0A85-409C-B84B-BEA1-B22EB16A659E}"/>
+              </a:ext>
+            </a:extLst>
+          </p:cNvPr>
+          <p:cNvSpPr>
+            <a:spLocks noGrp="1"/>
+          </p:cNvSpPr>
+          <p:nvPr>
+            <p:ph idx="1"/>
+          </p:nvPr>
+        </p:nvSpPr>
+        <p:spPr>
+          <a:xfrm>
+            <a:off x="628650" y="761924"/>
+            <a:ext cx="7886700" cy="5979118"/>
+          </a:xfrm>
+        </p:spPr>
+        <p:txBody>
+          <a:bodyPr>
+            <a:normAutofit fontScale="92500" lnSpcReduction="20000"/>
+          </a:bodyPr>
+          <a:lstStyle/>
+          <a:p>
+            <a:pPr marL="0" indent="0">
+              <a:buNone/>
+            </a:pPr>
+            <a:r>
+              <a:rPr lang="ru-RU" dirty="0"/>
+              <a:t>Граф </a:t>
+            </a:r>
+            <a:r>
+              <a:rPr lang="en" dirty="0"/>
+              <a:t>G = (V,E) </a:t>
+            </a:r>
+            <a:r>
+              <a:rPr lang="ru-RU" dirty="0"/>
+              <a:t>называется двудольным (</a:t>
+            </a:r>
+            <a:r>
+              <a:rPr lang="en" dirty="0"/>
+              <a:t>bipartite), </a:t>
+            </a:r>
+            <a:r>
+              <a:rPr lang="ru-RU" dirty="0"/>
+              <a:t>если множество узлов </a:t>
+            </a:r>
+            <a:r>
+              <a:rPr lang="en" dirty="0"/>
+              <a:t>V</a:t>
+            </a:r>
+            <a:r>
+              <a:rPr lang="ru-RU" dirty="0"/>
+              <a:t> может быть разбито на множествами таким способом, что у каждого ребра один конец принадлежит </a:t>
+            </a:r>
+            <a:r>
+              <a:rPr lang="en" dirty="0"/>
+              <a:t>X, </a:t>
+            </a:r>
+            <a:r>
+              <a:rPr lang="ru-RU" dirty="0"/>
+              <a:t>а другой конец — </a:t>
+            </a:r>
+            <a:r>
+              <a:rPr lang="en" dirty="0"/>
+              <a:t>Y. </a:t>
+            </a:r>
+            <a:endParaRPr lang="ru-RU" dirty="0"/>
+          </a:p>
+          <a:p>
+            <a:endParaRPr lang="ru-RU" dirty="0"/>
+          </a:p>
+          <a:p>
+            <a:endParaRPr lang="ru-RU" dirty="0"/>
+          </a:p>
+          <a:p>
+            <a:endParaRPr lang="ru-RU" dirty="0"/>
+          </a:p>
+          <a:p>
+            <a:pPr marL="0" indent="0">
+              <a:buNone/>
+            </a:pPr>
+            <a:endParaRPr lang="ru-RU" dirty="0"/>
+          </a:p>
+          <a:p>
+            <a:pPr marL="0" indent="0">
+              <a:buNone/>
+            </a:pPr>
+            <a:endParaRPr lang="ru-RU" dirty="0"/>
+          </a:p>
+          <a:p>
+            <a:pPr marL="0" indent="0">
+              <a:buNone/>
+            </a:pPr>
+            <a:r>
+              <a:rPr lang="ru-RU" dirty="0"/>
+              <a:t>В задаче поиска устойчивых </a:t>
+            </a:r>
+            <a:r>
+              <a:rPr lang="ru-RU" dirty="0" err="1"/>
+              <a:t>паросочетаний</a:t>
+            </a:r>
+            <a:r>
+              <a:rPr lang="ru-RU" dirty="0"/>
+              <a:t> результат строился из пар мужчин и женщин. В случае двудольных графов ребра представляются парами узлов, поэтому мы можем сказать, что </a:t>
+            </a:r>
+            <a:r>
+              <a:rPr lang="ru-RU" dirty="0" err="1"/>
+              <a:t>паросочетание</a:t>
+            </a:r>
+            <a:r>
+              <a:rPr lang="ru-RU" dirty="0"/>
+              <a:t> в графе </a:t>
+            </a:r>
+            <a:r>
+              <a:rPr lang="en" dirty="0"/>
+              <a:t>G = (V,E) </a:t>
+            </a:r>
+            <a:r>
+              <a:rPr lang="ru-RU" dirty="0"/>
+              <a:t>представляет собой множество </a:t>
+            </a:r>
+            <a:r>
+              <a:rPr lang="ru-RU" dirty="0" err="1"/>
+              <a:t>M</a:t>
+            </a:r>
+            <a:r>
+              <a:rPr lang="ru-RU" dirty="0"/>
+              <a:t> ребер Е с тем свойством, что каждый узел входит не более чем в одно ребро. </a:t>
+            </a:r>
+            <a:r>
+              <a:rPr lang="ru-RU" dirty="0" err="1"/>
+              <a:t>Паросочетание</a:t>
+            </a:r>
+            <a:r>
+              <a:rPr lang="ru-RU" dirty="0"/>
+              <a:t> М является идеальным, если каждый узел входит ровно в одно ребро.</a:t>
+            </a:r>
+          </a:p>
+        </p:txBody>
+      </p:sp>
+      <p:sp>
+        <p:nvSpPr>
+          <p:cNvPr id="7" name="Rectangle 5">
+            <a:extLst>
+              <a:ext uri="{FF2B5EF4-FFF2-40B4-BE49-F238E27FC236}">
+                <a16:creationId xmlns:a16="http://schemas.microsoft.com/office/drawing/2014/main" id="{6A37E365-3A66-C242-97E5-20ACE0E69F92}"/>
+              </a:ext>
+            </a:extLst>
+          </p:cNvPr>
+          <p:cNvSpPr>
+            <a:spLocks noChangeArrowheads="1"/>
+          </p:cNvSpPr>
+          <p:nvPr/>
+        </p:nvSpPr>
+        <p:spPr bwMode="auto">
+          <a:xfrm>
+            <a:off x="0" y="0"/>
+            <a:ext cx="9144000" cy="0"/>
+          </a:xfrm>
+          <a:prstGeom prst="rect">
+            <a:avLst/>
+          </a:prstGeom>
+          <a:noFill/>
+          <a:ln>
+            <a:noFill/>
+          </a:ln>
+          <a:effectLst/>
+          <a:extLst>
+            <a:ext uri="{909E8E84-426E-40DD-AFC4-6F175D3DCCD1}">
+              <a14:hiddenFill xmlns:a14="http://schemas.microsoft.com/office/drawing/2010/main">
+                <a:solidFill>
+                  <a:schemeClr val="accent1"/>
+                </a:solidFill>
+              </a14:hiddenFill>
+            </a:ext>
+            <a:ext uri="{91240B29-F687-4F45-9708-019B960494DF}">
+              <a14:hiddenLine xmlns:a14="http://schemas.microsoft.com/office/drawing/2010/main" w="9525">
+                <a:solidFill>
+                  <a:schemeClr val="tx1"/>
+                </a:solidFill>
+                <a:miter lim="800000"/>
+                <a:headEnd/>
+                <a:tailEnd/>
+              </a14:hiddenLine>
+            </a:ext>
+            <a:ext uri="{AF507438-7753-43E0-B8FC-AC1667EBCBE1}">
+              <a14:hiddenEffects xmlns:a14="http://schemas.microsoft.com/office/drawing/2010/main">
+                <a:effectLst>
+                  <a:outerShdw dist="35921" dir="2700000" algn="ctr" rotWithShape="0">
+                    <a:schemeClr val="bg2"/>
+                  </a:outerShdw>
+                </a:effectLst>
+              </a14:hiddenEffects>
+            </a:ext>
+          </a:extLst>
+        </p:spPr>
+        <p:txBody>
+          <a:bodyPr vert="horz" wrap="none" lIns="91440" tIns="45720" rIns="91440" bIns="45720" numCol="1" anchor="ctr" anchorCtr="0" compatLnSpc="1">
+            <a:prstTxWarp prst="textNoShape">
+              <a:avLst/>
+            </a:prstTxWarp>
+            <a:spAutoFit/>
+          </a:bodyPr>
+          <a:lstStyle/>
+          <a:p>
+            <a:endParaRPr lang="ru-RU"/>
+          </a:p>
+        </p:txBody>
+      </p:sp>
+      <p:pic>
+        <p:nvPicPr>
+          <p:cNvPr id="1028" name="Picture 4">
+            <a:extLst>
+              <a:ext uri="{FF2B5EF4-FFF2-40B4-BE49-F238E27FC236}">
+                <a16:creationId xmlns:a16="http://schemas.microsoft.com/office/drawing/2014/main" id="{3E86A2DA-46F2-CC4A-A40F-CB0DC6895691}"/>
+              </a:ext>
+            </a:extLst>
+          </p:cNvPr>
+          <p:cNvPicPr>
+            <a:picLocks noChangeAspect="1" noChangeArrowheads="1"/>
+          </p:cNvPicPr>
+          <p:nvPr/>
+        </p:nvPicPr>
+        <p:blipFill>
+          <a:blip r:embed="rId2" r:link="rId3">
+            <a:extLst>
+              <a:ext uri="{28A0092B-C50C-407E-A947-70E740481C1C}">
+                <a14:useLocalDpi xmlns:a14="http://schemas.microsoft.com/office/drawing/2010/main" val="0"/>
+              </a:ext>
+            </a:extLst>
+          </a:blip>
+          <a:srcRect/>
+          <a:stretch>
+            <a:fillRect/>
+          </a:stretch>
+        </p:blipFill>
+        <p:spPr bwMode="auto">
+          <a:xfrm>
+            <a:off x="3732028" y="2113404"/>
+            <a:ext cx="1222744" cy="1753673"/>
+          </a:xfrm>
+          <a:prstGeom prst="rect">
+            <a:avLst/>
+          </a:prstGeom>
+          <a:noFill/>
+          <a:extLst>
+            <a:ext uri="{909E8E84-426E-40DD-AFC4-6F175D3DCCD1}">
+              <a14:hiddenFill xmlns:a14="http://schemas.microsoft.com/office/drawing/2010/main">
+                <a:solidFill>
+                  <a:srgbClr val="FFFFFF"/>
+                </a:solidFill>
+              </a14:hiddenFill>
+            </a:ext>
+          </a:extLst>
+        </p:spPr>
+      </p:pic>
+    </p:spTree>
+    <p:extLst>
+      <p:ext uri="{BB962C8B-B14F-4D97-AF65-F5344CB8AC3E}">
+        <p14:creationId xmlns:p14="http://schemas.microsoft.com/office/powerpoint/2010/main" val="791381841"/>
+      </p:ext>
+    </p:extLst>
+  </p:cSld>
+  <p:clrMapOvr>
+    <a:masterClrMapping/>
+  </p:clrMapOvr>
+</p:sld>
+</file>
+
+<file path=ppt/slides/slide19.xml><?xml version="1.0" encoding="utf-8"?>
+<p:sld xmlns:a="http://schemas.openxmlformats.org/drawingml/2006/main" xmlns:r="http://schemas.openxmlformats.org/officeDocument/2006/relationships" xmlns:p="http://schemas.openxmlformats.org/presentationml/2006/main">
+  <p:cSld>
+    <p:spTree>
+      <p:nvGrpSpPr>
+        <p:cNvPr id="1" name=""/>
+        <p:cNvGrpSpPr/>
+        <p:nvPr/>
+      </p:nvGrpSpPr>
+      <p:grpSpPr>
+        <a:xfrm>
+          <a:off x="0" y="0"/>
+          <a:ext cx="0" cy="0"/>
+          <a:chOff x="0" y="0"/>
+          <a:chExt cx="0" cy="0"/>
+        </a:xfrm>
+      </p:grpSpPr>
+      <p:sp>
+        <p:nvSpPr>
+          <p:cNvPr id="2" name="Заголовок 1">
+            <a:extLst>
+              <a:ext uri="{FF2B5EF4-FFF2-40B4-BE49-F238E27FC236}">
+                <a16:creationId xmlns:a16="http://schemas.microsoft.com/office/drawing/2014/main" id="{2865B5CD-92D6-394B-924A-31F9F01A086F}"/>
+              </a:ext>
+            </a:extLst>
+          </p:cNvPr>
+          <p:cNvSpPr>
+            <a:spLocks noGrp="1"/>
+          </p:cNvSpPr>
+          <p:nvPr>
+            <p:ph type="title"/>
+          </p:nvPr>
+        </p:nvSpPr>
+        <p:spPr/>
+        <p:txBody>
+          <a:bodyPr/>
+          <a:lstStyle/>
+          <a:p>
+            <a:r>
+              <a:rPr lang="ru-RU" dirty="0"/>
+              <a:t>Независимое множество</a:t>
+            </a:r>
+          </a:p>
+        </p:txBody>
+      </p:sp>
+      <p:sp>
+        <p:nvSpPr>
+          <p:cNvPr id="3" name="Объект 2">
+            <a:extLst>
+              <a:ext uri="{FF2B5EF4-FFF2-40B4-BE49-F238E27FC236}">
+                <a16:creationId xmlns:a16="http://schemas.microsoft.com/office/drawing/2014/main" id="{4985F077-8EA1-E24C-91E1-121540CE8B83}"/>
+              </a:ext>
+            </a:extLst>
+          </p:cNvPr>
+          <p:cNvSpPr>
+            <a:spLocks noGrp="1"/>
+          </p:cNvSpPr>
+          <p:nvPr>
+            <p:ph idx="1"/>
+          </p:nvPr>
+        </p:nvSpPr>
+        <p:spPr/>
+        <p:txBody>
+          <a:bodyPr/>
+          <a:lstStyle/>
+          <a:p>
+            <a:r>
+              <a:rPr lang="ru-RU" sz="1800" dirty="0">
+                <a:solidFill>
+                  <a:srgbClr val="000000"/>
+                </a:solidFill>
+                <a:effectLst/>
+                <a:latin typeface="Courier New" panose="02070309020205020404" pitchFamily="49" charset="0"/>
+                <a:ea typeface="Courier New" panose="02070309020205020404" pitchFamily="49" charset="0"/>
+              </a:rPr>
+              <a:t>Для заданного графа </a:t>
+            </a:r>
+            <a:r>
+              <a:rPr lang="en-US" sz="1800" b="0" i="1" u="none" strike="noStrike" spc="0" dirty="0">
+                <a:solidFill>
+                  <a:srgbClr val="000000"/>
+                </a:solidFill>
+                <a:effectLst/>
+                <a:latin typeface="Special#Default Metrics Font"/>
+                <a:ea typeface="Special#Default Metrics Font"/>
+                <a:cs typeface="Special#Default Metrics Font"/>
+              </a:rPr>
+              <a:t>G</a:t>
+            </a:r>
+            <a:r>
+              <a:rPr lang="ru-RU" sz="1800" b="0" i="1" u="none" strike="noStrike" spc="0" dirty="0">
+                <a:solidFill>
+                  <a:srgbClr val="000000"/>
+                </a:solidFill>
+                <a:effectLst/>
+                <a:latin typeface="Special#Default Metrics Font"/>
+                <a:ea typeface="Special#Default Metrics Font"/>
+                <a:cs typeface="Special#Default Metrics Font"/>
+              </a:rPr>
+              <a:t> = (</a:t>
+            </a:r>
+            <a:r>
+              <a:rPr lang="en-US" sz="1800" b="0" i="1" u="none" strike="noStrike" spc="0" dirty="0">
+                <a:solidFill>
+                  <a:srgbClr val="000000"/>
+                </a:solidFill>
+                <a:effectLst/>
+                <a:latin typeface="Special#Default Metrics Font"/>
+                <a:ea typeface="Special#Default Metrics Font"/>
+                <a:cs typeface="Special#Default Metrics Font"/>
+              </a:rPr>
+              <a:t>V</a:t>
+            </a:r>
+            <a:r>
+              <a:rPr lang="ru-RU" sz="1800" b="0" i="1" u="none" strike="noStrike" spc="0" dirty="0">
+                <a:solidFill>
+                  <a:srgbClr val="000000"/>
+                </a:solidFill>
+                <a:effectLst/>
+                <a:latin typeface="Special#Default Metrics Font"/>
+                <a:ea typeface="Special#Default Metrics Font"/>
+                <a:cs typeface="Special#Default Metrics Font"/>
+              </a:rPr>
+              <a:t>,</a:t>
+            </a:r>
+            <a:r>
+              <a:rPr lang="en-US" sz="1800" b="0" i="1" u="none" strike="noStrike" spc="0" dirty="0">
+                <a:solidFill>
+                  <a:srgbClr val="000000"/>
+                </a:solidFill>
+                <a:effectLst/>
+                <a:latin typeface="Special#Default Metrics Font"/>
+                <a:ea typeface="Special#Default Metrics Font"/>
+                <a:cs typeface="Special#Default Metrics Font"/>
+              </a:rPr>
+              <a:t>E</a:t>
+            </a:r>
+            <a:r>
+              <a:rPr lang="ru-RU" sz="1800" b="0" i="1" u="none" strike="noStrike" spc="0" dirty="0">
+                <a:solidFill>
+                  <a:srgbClr val="000000"/>
+                </a:solidFill>
+                <a:effectLst/>
+                <a:latin typeface="Special#Default Metrics Font"/>
+                <a:ea typeface="Special#Default Metrics Font"/>
+                <a:cs typeface="Special#Default Metrics Font"/>
+              </a:rPr>
+              <a:t>)</a:t>
+            </a:r>
+            <a:r>
+              <a:rPr lang="ru-RU" sz="1800" dirty="0">
+                <a:solidFill>
+                  <a:srgbClr val="000000"/>
+                </a:solidFill>
+                <a:effectLst/>
+                <a:latin typeface="Courier New" panose="02070309020205020404" pitchFamily="49" charset="0"/>
+                <a:ea typeface="Courier New" panose="02070309020205020404" pitchFamily="49" charset="0"/>
+              </a:rPr>
+              <a:t> множество узлов </a:t>
+            </a:r>
+            <a:r>
+              <a:rPr lang="en-US" sz="1800" b="0" i="1" u="none" strike="noStrike" spc="0" dirty="0">
+                <a:solidFill>
+                  <a:srgbClr val="000000"/>
+                </a:solidFill>
+                <a:effectLst/>
+                <a:latin typeface="Special#Default Metrics Font"/>
+                <a:ea typeface="Special#Default Metrics Font"/>
+                <a:cs typeface="Special#Default Metrics Font"/>
+              </a:rPr>
+              <a:t>S</a:t>
+            </a:r>
+            <a:r>
+              <a:rPr lang="en-US" sz="1800" dirty="0">
+                <a:solidFill>
+                  <a:srgbClr val="000000"/>
+                </a:solidFill>
+                <a:effectLst/>
+                <a:latin typeface="Courier New" panose="02070309020205020404" pitchFamily="49" charset="0"/>
+                <a:ea typeface="Courier New" panose="02070309020205020404" pitchFamily="49" charset="0"/>
+              </a:rPr>
+              <a:t> </a:t>
+            </a:r>
+            <a:r>
+              <a:rPr lang="ru-RU" sz="1800" dirty="0">
+                <a:solidFill>
+                  <a:srgbClr val="000000"/>
+                </a:solidFill>
+                <a:latin typeface="Courier New" panose="02070309020205020404" pitchFamily="49" charset="0"/>
+                <a:ea typeface="Courier New" panose="02070309020205020404" pitchFamily="49" charset="0"/>
+              </a:rPr>
+              <a:t>из</a:t>
+            </a:r>
+            <a:r>
+              <a:rPr lang="ru-RU" sz="1800" dirty="0">
+                <a:solidFill>
+                  <a:srgbClr val="000000"/>
+                </a:solidFill>
+                <a:effectLst/>
+                <a:latin typeface="Courier New" panose="02070309020205020404" pitchFamily="49" charset="0"/>
+                <a:ea typeface="Courier New" panose="02070309020205020404" pitchFamily="49" charset="0"/>
+              </a:rPr>
+              <a:t> </a:t>
+            </a:r>
+            <a:r>
+              <a:rPr lang="ru-RU" sz="1800" b="0" i="1" u="none" strike="noStrike" spc="0" dirty="0" err="1">
+                <a:solidFill>
+                  <a:srgbClr val="000000"/>
+                </a:solidFill>
+                <a:effectLst/>
+                <a:latin typeface="Special#Default Metrics Font"/>
+                <a:ea typeface="Special#Default Metrics Font"/>
+                <a:cs typeface="Special#Default Metrics Font"/>
+              </a:rPr>
+              <a:t>V</a:t>
+            </a:r>
+            <a:r>
+              <a:rPr lang="ru-RU" sz="1800" dirty="0">
+                <a:solidFill>
+                  <a:srgbClr val="000000"/>
+                </a:solidFill>
+                <a:effectLst/>
+                <a:latin typeface="Courier New" panose="02070309020205020404" pitchFamily="49" charset="0"/>
+                <a:ea typeface="Courier New" panose="02070309020205020404" pitchFamily="49" charset="0"/>
+              </a:rPr>
+              <a:t> называется </a:t>
+            </a:r>
+            <a:r>
+              <a:rPr lang="ru-RU" sz="1800" b="0" i="1" u="none" strike="noStrike" spc="0" dirty="0">
+                <a:solidFill>
+                  <a:srgbClr val="000000"/>
+                </a:solidFill>
+                <a:effectLst/>
+                <a:latin typeface="Special#Default Metrics Font"/>
+                <a:ea typeface="Special#Default Metrics Font"/>
+                <a:cs typeface="Special#Default Metrics Font"/>
+              </a:rPr>
+              <a:t>независимым</a:t>
+            </a:r>
+            <a:r>
+              <a:rPr lang="ru-RU" sz="1800" dirty="0">
+                <a:solidFill>
+                  <a:srgbClr val="000000"/>
+                </a:solidFill>
+                <a:effectLst/>
+                <a:latin typeface="Courier New" panose="02070309020205020404" pitchFamily="49" charset="0"/>
+                <a:ea typeface="Courier New" panose="02070309020205020404" pitchFamily="49" charset="0"/>
+              </a:rPr>
+              <a:t>, если никакие два узла, входящие в </a:t>
+            </a:r>
+            <a:r>
+              <a:rPr lang="en-US" sz="1800" b="0" i="1" u="none" strike="noStrike" spc="0" dirty="0">
+                <a:solidFill>
+                  <a:srgbClr val="000000"/>
+                </a:solidFill>
+                <a:effectLst/>
+                <a:latin typeface="Special#Default Metrics Font"/>
+                <a:ea typeface="Special#Default Metrics Font"/>
+                <a:cs typeface="Special#Default Metrics Font"/>
+              </a:rPr>
+              <a:t>S</a:t>
+            </a:r>
+            <a:r>
+              <a:rPr lang="ru-RU" sz="1800" b="0" i="1" u="none" strike="noStrike" spc="0" dirty="0">
+                <a:solidFill>
+                  <a:srgbClr val="000000"/>
+                </a:solidFill>
+                <a:effectLst/>
+                <a:latin typeface="Special#Default Metrics Font"/>
+                <a:ea typeface="Special#Default Metrics Font"/>
+                <a:cs typeface="Special#Default Metrics Font"/>
+              </a:rPr>
+              <a:t>,</a:t>
+            </a:r>
+            <a:r>
+              <a:rPr lang="ru-RU" sz="1800" dirty="0">
+                <a:solidFill>
+                  <a:srgbClr val="000000"/>
+                </a:solidFill>
+                <a:effectLst/>
+                <a:latin typeface="Courier New" panose="02070309020205020404" pitchFamily="49" charset="0"/>
+                <a:ea typeface="Courier New" panose="02070309020205020404" pitchFamily="49" charset="0"/>
+              </a:rPr>
+              <a:t> не соединяются ребром. </a:t>
+            </a:r>
+          </a:p>
+          <a:p>
+            <a:r>
+              <a:rPr lang="ru-RU" sz="1800" dirty="0">
+                <a:solidFill>
+                  <a:srgbClr val="000000"/>
+                </a:solidFill>
+                <a:latin typeface="Courier New" panose="02070309020205020404" pitchFamily="49" charset="0"/>
+                <a:ea typeface="Courier New" panose="02070309020205020404" pitchFamily="49" charset="0"/>
+              </a:rPr>
+              <a:t>З</a:t>
+            </a:r>
+            <a:r>
+              <a:rPr lang="ru-RU" sz="1800" dirty="0">
+                <a:solidFill>
+                  <a:srgbClr val="000000"/>
+                </a:solidFill>
+                <a:effectLst/>
+                <a:latin typeface="Courier New" panose="02070309020205020404" pitchFamily="49" charset="0"/>
+                <a:ea typeface="Courier New" panose="02070309020205020404" pitchFamily="49" charset="0"/>
+              </a:rPr>
+              <a:t>адача поиска независимого множества формулируется так: для заданного графа </a:t>
+            </a:r>
+            <a:r>
+              <a:rPr lang="en-US" sz="1800" b="0" i="1" u="none" strike="noStrike" spc="0" dirty="0">
+                <a:solidFill>
+                  <a:srgbClr val="000000"/>
+                </a:solidFill>
+                <a:effectLst/>
+                <a:latin typeface="Special#Default Metrics Font"/>
+                <a:ea typeface="Special#Default Metrics Font"/>
+                <a:cs typeface="Special#Default Metrics Font"/>
+              </a:rPr>
+              <a:t>G</a:t>
+            </a:r>
+            <a:r>
+              <a:rPr lang="en-US" sz="1800" dirty="0">
+                <a:solidFill>
+                  <a:srgbClr val="000000"/>
+                </a:solidFill>
+                <a:effectLst/>
+                <a:latin typeface="Courier New" panose="02070309020205020404" pitchFamily="49" charset="0"/>
+                <a:ea typeface="Courier New" panose="02070309020205020404" pitchFamily="49" charset="0"/>
+              </a:rPr>
+              <a:t> </a:t>
+            </a:r>
+            <a:r>
+              <a:rPr lang="ru-RU" sz="1800" dirty="0">
+                <a:solidFill>
+                  <a:srgbClr val="000000"/>
+                </a:solidFill>
+                <a:effectLst/>
+                <a:latin typeface="Courier New" panose="02070309020205020404" pitchFamily="49" charset="0"/>
+                <a:ea typeface="Courier New" panose="02070309020205020404" pitchFamily="49" charset="0"/>
+              </a:rPr>
+              <a:t>найти независимое множество максимально возможного размера. </a:t>
+            </a:r>
+            <a:endParaRPr lang="ru-RU" dirty="0"/>
+          </a:p>
+        </p:txBody>
+      </p:sp>
+      <p:sp>
+        <p:nvSpPr>
+          <p:cNvPr id="4" name="Rectangle 2">
+            <a:extLst>
+              <a:ext uri="{FF2B5EF4-FFF2-40B4-BE49-F238E27FC236}">
+                <a16:creationId xmlns:a16="http://schemas.microsoft.com/office/drawing/2014/main" id="{29A813AA-12FC-1348-9571-57F5769C4F5F}"/>
+              </a:ext>
+            </a:extLst>
+          </p:cNvPr>
+          <p:cNvSpPr>
+            <a:spLocks noChangeArrowheads="1"/>
+          </p:cNvSpPr>
+          <p:nvPr/>
+        </p:nvSpPr>
+        <p:spPr bwMode="auto">
+          <a:xfrm>
+            <a:off x="2913322" y="3748542"/>
+            <a:ext cx="17661234" cy="45719"/>
+          </a:xfrm>
+          <a:prstGeom prst="rect">
+            <a:avLst/>
+          </a:prstGeom>
+          <a:noFill/>
+          <a:ln>
+            <a:noFill/>
+          </a:ln>
+          <a:effectLst/>
+          <a:extLst>
+            <a:ext uri="{909E8E84-426E-40DD-AFC4-6F175D3DCCD1}">
+              <a14:hiddenFill xmlns:a14="http://schemas.microsoft.com/office/drawing/2010/main">
+                <a:solidFill>
+                  <a:schemeClr val="accent1"/>
+                </a:solidFill>
+              </a14:hiddenFill>
+            </a:ext>
+            <a:ext uri="{91240B29-F687-4F45-9708-019B960494DF}">
+              <a14:hiddenLine xmlns:a14="http://schemas.microsoft.com/office/drawing/2010/main" w="9525">
+                <a:solidFill>
+                  <a:schemeClr val="tx1"/>
+                </a:solidFill>
+                <a:miter lim="800000"/>
+                <a:headEnd/>
+                <a:tailEnd/>
+              </a14:hiddenLine>
+            </a:ext>
+            <a:ext uri="{AF507438-7753-43E0-B8FC-AC1667EBCBE1}">
+              <a14:hiddenEffects xmlns:a14="http://schemas.microsoft.com/office/drawing/2010/main">
+                <a:effectLst>
+                  <a:outerShdw dist="35921" dir="2700000" algn="ctr" rotWithShape="0">
+                    <a:schemeClr val="bg2"/>
+                  </a:outerShdw>
+                </a:effectLst>
+              </a14:hiddenEffects>
+            </a:ext>
+          </a:extLst>
+        </p:spPr>
+        <p:txBody>
+          <a:bodyPr vert="horz" wrap="square" lIns="91440" tIns="45720" rIns="91440" bIns="45720" numCol="1" anchor="ctr" anchorCtr="0" compatLnSpc="1">
+            <a:prstTxWarp prst="textNoShape">
+              <a:avLst/>
+            </a:prstTxWarp>
+            <a:spAutoFit/>
+          </a:bodyPr>
+          <a:lstStyle/>
+          <a:p>
+            <a:endParaRPr lang="ru-RU"/>
+          </a:p>
+        </p:txBody>
+      </p:sp>
+      <p:pic>
+        <p:nvPicPr>
+          <p:cNvPr id="2049" name="Picture 1">
+            <a:extLst>
+              <a:ext uri="{FF2B5EF4-FFF2-40B4-BE49-F238E27FC236}">
+                <a16:creationId xmlns:a16="http://schemas.microsoft.com/office/drawing/2014/main" id="{83C53800-8009-CA47-839E-3729614D32D0}"/>
+              </a:ext>
+            </a:extLst>
+          </p:cNvPr>
+          <p:cNvPicPr>
+            <a:picLocks noChangeAspect="1" noChangeArrowheads="1"/>
+          </p:cNvPicPr>
+          <p:nvPr/>
+        </p:nvPicPr>
+        <p:blipFill>
+          <a:blip r:embed="rId2" r:link="rId3">
+            <a:extLst>
+              <a:ext uri="{28A0092B-C50C-407E-A947-70E740481C1C}">
+                <a14:useLocalDpi xmlns:a14="http://schemas.microsoft.com/office/drawing/2010/main" val="0"/>
+              </a:ext>
+            </a:extLst>
+          </a:blip>
+          <a:srcRect/>
+          <a:stretch>
+            <a:fillRect/>
+          </a:stretch>
+        </p:blipFill>
+        <p:spPr bwMode="auto">
+          <a:xfrm>
+            <a:off x="2913322" y="3748543"/>
+            <a:ext cx="2796362" cy="2428420"/>
+          </a:xfrm>
+          <a:prstGeom prst="rect">
+            <a:avLst/>
+          </a:prstGeom>
+          <a:noFill/>
+          <a:extLst>
+            <a:ext uri="{909E8E84-426E-40DD-AFC4-6F175D3DCCD1}">
+              <a14:hiddenFill xmlns:a14="http://schemas.microsoft.com/office/drawing/2010/main">
+                <a:solidFill>
+                  <a:srgbClr val="FFFFFF"/>
+                </a:solidFill>
+              </a14:hiddenFill>
+            </a:ext>
+          </a:extLst>
+        </p:spPr>
+      </p:pic>
+    </p:spTree>
+    <p:extLst>
+      <p:ext uri="{BB962C8B-B14F-4D97-AF65-F5344CB8AC3E}">
+        <p14:creationId xmlns:p14="http://schemas.microsoft.com/office/powerpoint/2010/main" val="1934931484"/>
+      </p:ext>
+    </p:extLst>
+  </p:cSld>
+  <p:clrMapOvr>
+    <a:masterClrMapping/>
+  </p:clrMapOvr>
+</p:sld>
+</file>
+
 <file path=ppt/slides/slide2.xml><?xml version="1.0" encoding="utf-8"?>
 <p:sld xmlns:a="http://schemas.openxmlformats.org/drawingml/2006/main" xmlns:r="http://schemas.openxmlformats.org/officeDocument/2006/relationships" xmlns:p="http://schemas.openxmlformats.org/presentationml/2006/main">
   <p:cSld>
@@ -5982,6 +10211,3250 @@
     <p:extLst>
       <p:ext uri="{BB962C8B-B14F-4D97-AF65-F5344CB8AC3E}">
         <p14:creationId xmlns:p14="http://schemas.microsoft.com/office/powerpoint/2010/main" val="1111265526"/>
+      </p:ext>
+    </p:extLst>
+  </p:cSld>
+  <p:clrMapOvr>
+    <a:masterClrMapping/>
+  </p:clrMapOvr>
+</p:sld>
+</file>
+
+<file path=ppt/slides/slide20.xml><?xml version="1.0" encoding="utf-8"?>
+<p:sld xmlns:a="http://schemas.openxmlformats.org/drawingml/2006/main" xmlns:r="http://schemas.openxmlformats.org/officeDocument/2006/relationships" xmlns:p="http://schemas.openxmlformats.org/presentationml/2006/main">
+  <p:cSld>
+    <p:spTree>
+      <p:nvGrpSpPr>
+        <p:cNvPr id="1" name=""/>
+        <p:cNvGrpSpPr/>
+        <p:nvPr/>
+      </p:nvGrpSpPr>
+      <p:grpSpPr>
+        <a:xfrm>
+          <a:off x="0" y="0"/>
+          <a:ext cx="0" cy="0"/>
+          <a:chOff x="0" y="0"/>
+          <a:chExt cx="0" cy="0"/>
+        </a:xfrm>
+      </p:grpSpPr>
+      <p:sp>
+        <p:nvSpPr>
+          <p:cNvPr id="2" name="Заголовок 1">
+            <a:extLst>
+              <a:ext uri="{FF2B5EF4-FFF2-40B4-BE49-F238E27FC236}">
+                <a16:creationId xmlns:a16="http://schemas.microsoft.com/office/drawing/2014/main" id="{24FCDAB2-B243-434A-88E4-6F7BB500FD5E}"/>
+              </a:ext>
+            </a:extLst>
+          </p:cNvPr>
+          <p:cNvSpPr>
+            <a:spLocks noGrp="1"/>
+          </p:cNvSpPr>
+          <p:nvPr>
+            <p:ph type="title"/>
+          </p:nvPr>
+        </p:nvSpPr>
+        <p:spPr/>
+        <p:txBody>
+          <a:bodyPr/>
+          <a:lstStyle/>
+          <a:p>
+            <a:r>
+              <a:rPr lang="ru-RU" dirty="0"/>
+              <a:t>Сведение задачи</a:t>
+            </a:r>
+          </a:p>
+        </p:txBody>
+      </p:sp>
+      <p:sp>
+        <p:nvSpPr>
+          <p:cNvPr id="3" name="Объект 2">
+            <a:extLst>
+              <a:ext uri="{FF2B5EF4-FFF2-40B4-BE49-F238E27FC236}">
+                <a16:creationId xmlns:a16="http://schemas.microsoft.com/office/drawing/2014/main" id="{AA4ADDCA-FFDE-284B-A164-58804FBEDB2B}"/>
+              </a:ext>
+            </a:extLst>
+          </p:cNvPr>
+          <p:cNvSpPr>
+            <a:spLocks noGrp="1"/>
+          </p:cNvSpPr>
+          <p:nvPr>
+            <p:ph idx="1"/>
+          </p:nvPr>
+        </p:nvSpPr>
+        <p:spPr/>
+        <p:txBody>
+          <a:bodyPr>
+            <a:normAutofit/>
+          </a:bodyPr>
+          <a:lstStyle/>
+          <a:p>
+            <a:r>
+              <a:rPr lang="ru-RU" sz="1800" dirty="0">
+                <a:solidFill>
+                  <a:srgbClr val="000000"/>
+                </a:solidFill>
+                <a:effectLst/>
+                <a:latin typeface="Special#Default Metrics Font"/>
+                <a:ea typeface="Special#Default Metrics Font"/>
+                <a:cs typeface="Special#Default Metrics Font"/>
+              </a:rPr>
+              <a:t>Задачи интервального планирования и </a:t>
+            </a:r>
+            <a:r>
+              <a:rPr lang="ru-RU" sz="1800" dirty="0" err="1">
+                <a:solidFill>
+                  <a:srgbClr val="000000"/>
+                </a:solidFill>
+                <a:effectLst/>
+                <a:latin typeface="Special#Default Metrics Font"/>
+                <a:ea typeface="Special#Default Metrics Font"/>
+                <a:cs typeface="Special#Default Metrics Font"/>
+              </a:rPr>
+              <a:t>паросочетаний</a:t>
+            </a:r>
+            <a:r>
+              <a:rPr lang="ru-RU" sz="1800" dirty="0">
+                <a:solidFill>
+                  <a:srgbClr val="000000"/>
+                </a:solidFill>
+                <a:effectLst/>
+                <a:latin typeface="Special#Default Metrics Font"/>
+                <a:ea typeface="Special#Default Metrics Font"/>
+                <a:cs typeface="Special#Default Metrics Font"/>
+              </a:rPr>
+              <a:t> в двудольном графе могут рассматриваться как особые случаи задачи независимого множества.</a:t>
+            </a:r>
+          </a:p>
+          <a:p>
+            <a:r>
+              <a:rPr lang="ru-RU" sz="1800" dirty="0">
+                <a:solidFill>
+                  <a:srgbClr val="000000"/>
+                </a:solidFill>
+                <a:effectLst/>
+                <a:latin typeface="Special#Default Metrics Font"/>
+                <a:ea typeface="Special#Default Metrics Font"/>
+                <a:cs typeface="Special#Default Metrics Font"/>
+              </a:rPr>
+              <a:t>Для задачи интервального планирования определите граф </a:t>
+            </a:r>
+            <a:r>
+              <a:rPr lang="en-US" sz="1800" dirty="0">
+                <a:solidFill>
+                  <a:srgbClr val="000000"/>
+                </a:solidFill>
+                <a:effectLst/>
+                <a:latin typeface="Special#Default Metrics Font"/>
+                <a:ea typeface="Special#Default Metrics Font"/>
+                <a:cs typeface="Special#Default Metrics Font"/>
+              </a:rPr>
+              <a:t>G </a:t>
+            </a:r>
+            <a:r>
+              <a:rPr lang="ru-RU" sz="1800" dirty="0">
+                <a:solidFill>
+                  <a:srgbClr val="000000"/>
+                </a:solidFill>
+                <a:effectLst/>
+                <a:latin typeface="Special#Default Metrics Font"/>
+                <a:ea typeface="Special#Default Metrics Font"/>
+                <a:cs typeface="Special#Default Metrics Font"/>
+              </a:rPr>
+              <a:t>= (</a:t>
+            </a:r>
+            <a:r>
+              <a:rPr lang="en-US" sz="1800" dirty="0">
+                <a:solidFill>
+                  <a:srgbClr val="000000"/>
+                </a:solidFill>
+                <a:effectLst/>
+                <a:latin typeface="Special#Default Metrics Font"/>
+                <a:ea typeface="Special#Default Metrics Font"/>
+                <a:cs typeface="Special#Default Metrics Font"/>
+              </a:rPr>
+              <a:t>F</a:t>
+            </a:r>
+            <a:r>
+              <a:rPr lang="ru-RU" sz="1800" dirty="0">
+                <a:solidFill>
+                  <a:srgbClr val="000000"/>
+                </a:solidFill>
+                <a:effectLst/>
+                <a:latin typeface="Special#Default Metrics Font"/>
+                <a:ea typeface="Special#Default Metrics Font"/>
+                <a:cs typeface="Special#Default Metrics Font"/>
+              </a:rPr>
+              <a:t>, </a:t>
+            </a:r>
+            <a:r>
+              <a:rPr lang="en-US" sz="1800" i="1" spc="0" dirty="0" err="1">
+                <a:solidFill>
+                  <a:srgbClr val="000000"/>
+                </a:solidFill>
+                <a:effectLst/>
+                <a:latin typeface="Special#Default Metrics Font"/>
+                <a:ea typeface="Special#Default Metrics Font"/>
+                <a:cs typeface="Special#Default Metrics Font"/>
+              </a:rPr>
+              <a:t>Е</a:t>
+            </a:r>
+            <a:r>
+              <a:rPr lang="en-US" sz="1800" i="1" spc="0" dirty="0">
+                <a:solidFill>
+                  <a:srgbClr val="000000"/>
+                </a:solidFill>
+                <a:effectLst/>
+                <a:latin typeface="Special#Default Metrics Font"/>
+                <a:ea typeface="Special#Default Metrics Font"/>
+                <a:cs typeface="Special#Default Metrics Font"/>
+              </a:rPr>
+              <a:t>),</a:t>
+            </a:r>
+            <a:r>
+              <a:rPr lang="ru-RU" sz="1800" dirty="0">
+                <a:solidFill>
+                  <a:srgbClr val="000000"/>
+                </a:solidFill>
+                <a:effectLst/>
+                <a:latin typeface="Special#Default Metrics Font"/>
+                <a:ea typeface="Special#Default Metrics Font"/>
+                <a:cs typeface="Special#Default Metrics Font"/>
+              </a:rPr>
+              <a:t> в котором узлы соответствуют интервалам, а каждая перекрывающаяся пара соединяется ребром; независимые множества в </a:t>
+            </a:r>
+            <a:r>
+              <a:rPr lang="en-US" sz="1800" i="1" spc="0" dirty="0">
+                <a:solidFill>
+                  <a:srgbClr val="000000"/>
+                </a:solidFill>
+                <a:effectLst/>
+                <a:latin typeface="Special#Default Metrics Font"/>
+                <a:ea typeface="Special#Default Metrics Font"/>
+                <a:cs typeface="Special#Default Metrics Font"/>
+              </a:rPr>
+              <a:t>G</a:t>
+            </a:r>
+            <a:r>
+              <a:rPr lang="en-US" sz="1800" dirty="0">
+                <a:solidFill>
+                  <a:srgbClr val="000000"/>
+                </a:solidFill>
+                <a:effectLst/>
+                <a:latin typeface="Special#Default Metrics Font"/>
+                <a:ea typeface="Special#Default Metrics Font"/>
+                <a:cs typeface="Special#Default Metrics Font"/>
+              </a:rPr>
+              <a:t> </a:t>
+            </a:r>
+            <a:r>
+              <a:rPr lang="ru-RU" sz="1800" dirty="0">
+                <a:solidFill>
+                  <a:srgbClr val="000000"/>
+                </a:solidFill>
+                <a:effectLst/>
+                <a:latin typeface="Special#Default Metrics Font"/>
+                <a:ea typeface="Special#Default Metrics Font"/>
+                <a:cs typeface="Special#Default Metrics Font"/>
+              </a:rPr>
+              <a:t>соответствуют совместимым подмножествам интервалов. </a:t>
+            </a:r>
+          </a:p>
+          <a:p>
+            <a:r>
+              <a:rPr lang="ru-RU" sz="1800" dirty="0">
+                <a:solidFill>
+                  <a:srgbClr val="000000"/>
+                </a:solidFill>
+                <a:effectLst/>
+                <a:latin typeface="Special#Default Metrics Font"/>
+                <a:ea typeface="Special#Default Metrics Font"/>
+                <a:cs typeface="Special#Default Metrics Font"/>
+              </a:rPr>
+              <a:t>Для задачи </a:t>
+            </a:r>
+            <a:r>
+              <a:rPr lang="ru-RU" sz="1800" dirty="0" err="1">
+                <a:solidFill>
+                  <a:srgbClr val="000000"/>
+                </a:solidFill>
+                <a:effectLst/>
+                <a:latin typeface="Special#Default Metrics Font"/>
+                <a:ea typeface="Special#Default Metrics Font"/>
+                <a:cs typeface="Special#Default Metrics Font"/>
+              </a:rPr>
+              <a:t>паросочетаний</a:t>
+            </a:r>
+            <a:r>
+              <a:rPr lang="ru-RU" sz="1800" dirty="0">
+                <a:solidFill>
+                  <a:srgbClr val="000000"/>
+                </a:solidFill>
+                <a:effectLst/>
+                <a:latin typeface="Special#Default Metrics Font"/>
+                <a:ea typeface="Special#Default Metrics Font"/>
+                <a:cs typeface="Special#Default Metrics Font"/>
+              </a:rPr>
+              <a:t> в двудольном графе: </a:t>
+            </a:r>
+          </a:p>
+          <a:p>
+            <a:pPr lvl="1"/>
+            <a:r>
+              <a:rPr lang="ru-RU" sz="1400" dirty="0">
+                <a:solidFill>
+                  <a:srgbClr val="000000"/>
+                </a:solidFill>
+                <a:effectLst/>
+                <a:latin typeface="Special#Default Metrics Font"/>
+                <a:ea typeface="Special#Default Metrics Font"/>
+                <a:cs typeface="Special#Default Metrics Font"/>
+              </a:rPr>
+              <a:t>Для заданного двудольного графа </a:t>
+            </a:r>
+            <a:r>
+              <a:rPr lang="en-US" sz="1400" i="1" spc="0" dirty="0">
+                <a:solidFill>
+                  <a:srgbClr val="000000"/>
+                </a:solidFill>
+                <a:effectLst/>
+                <a:latin typeface="Special#Default Metrics Font"/>
+                <a:ea typeface="Special#Default Metrics Font"/>
+                <a:cs typeface="Special#Default Metrics Font"/>
+              </a:rPr>
+              <a:t>G</a:t>
+            </a:r>
+            <a:r>
+              <a:rPr lang="ru-RU" sz="1400" i="1" spc="0" dirty="0">
+                <a:solidFill>
+                  <a:srgbClr val="000000"/>
+                </a:solidFill>
+                <a:effectLst/>
+                <a:latin typeface="Special#Default Metrics Font"/>
+                <a:ea typeface="Special#Default Metrics Font"/>
+                <a:cs typeface="Special#Default Metrics Font"/>
+              </a:rPr>
+              <a:t>’=(</a:t>
+            </a:r>
+            <a:r>
+              <a:rPr lang="en-US" sz="1400" i="1" spc="0" dirty="0">
+                <a:solidFill>
+                  <a:srgbClr val="000000"/>
+                </a:solidFill>
+                <a:effectLst/>
+                <a:latin typeface="Special#Default Metrics Font"/>
+                <a:ea typeface="Special#Default Metrics Font"/>
+                <a:cs typeface="Special#Default Metrics Font"/>
+              </a:rPr>
+              <a:t>V</a:t>
+            </a:r>
+            <a:r>
+              <a:rPr lang="ru-RU" sz="1400" i="1" dirty="0">
+                <a:solidFill>
+                  <a:srgbClr val="000000"/>
+                </a:solidFill>
+                <a:latin typeface="Special#Default Metrics Font"/>
+                <a:ea typeface="Special#Default Metrics Font"/>
+                <a:cs typeface="Special#Default Metrics Font"/>
+              </a:rPr>
+              <a:t>’, </a:t>
+            </a:r>
+            <a:r>
+              <a:rPr lang="en-US" sz="1400" i="1" spc="0" dirty="0">
+                <a:solidFill>
+                  <a:srgbClr val="000000"/>
+                </a:solidFill>
+                <a:effectLst/>
+                <a:latin typeface="Special#Default Metrics Font"/>
+                <a:ea typeface="Special#Default Metrics Font"/>
+                <a:cs typeface="Special#Default Metrics Font"/>
+              </a:rPr>
+              <a:t>E</a:t>
+            </a:r>
+            <a:r>
+              <a:rPr lang="ru-RU" sz="1400" i="1" spc="0" dirty="0">
+                <a:solidFill>
+                  <a:srgbClr val="000000"/>
+                </a:solidFill>
+                <a:effectLst/>
+                <a:latin typeface="Special#Default Metrics Font"/>
+                <a:ea typeface="Special#Default Metrics Font"/>
+                <a:cs typeface="Special#Default Metrics Font"/>
+              </a:rPr>
+              <a:t>')</a:t>
+            </a:r>
+            <a:r>
+              <a:rPr lang="ru-RU" sz="1400" dirty="0">
+                <a:solidFill>
+                  <a:srgbClr val="000000"/>
+                </a:solidFill>
+                <a:effectLst/>
+                <a:latin typeface="Special#Default Metrics Font"/>
+                <a:ea typeface="Special#Default Metrics Font"/>
+                <a:cs typeface="Special#Default Metrics Font"/>
+              </a:rPr>
+              <a:t> выбираемые объекты соответствуют ребрам, а конфликты возникают между двумя ребрами, имеющими общий конец (такие пары ребер не могут принадлежать общему </a:t>
+            </a:r>
+            <a:r>
+              <a:rPr lang="ru-RU" sz="1400" dirty="0" err="1">
+                <a:solidFill>
+                  <a:srgbClr val="000000"/>
+                </a:solidFill>
+                <a:effectLst/>
+                <a:latin typeface="Special#Default Metrics Font"/>
+                <a:ea typeface="Special#Default Metrics Font"/>
+                <a:cs typeface="Special#Default Metrics Font"/>
+              </a:rPr>
+              <a:t>паросочетанию</a:t>
+            </a:r>
+            <a:r>
+              <a:rPr lang="ru-RU" sz="1400" dirty="0">
+                <a:solidFill>
+                  <a:srgbClr val="000000"/>
+                </a:solidFill>
+                <a:effectLst/>
+                <a:latin typeface="Special#Default Metrics Font"/>
+                <a:ea typeface="Special#Default Metrics Font"/>
+                <a:cs typeface="Special#Default Metrics Font"/>
+              </a:rPr>
+              <a:t>). </a:t>
+            </a:r>
+          </a:p>
+          <a:p>
+            <a:pPr lvl="1"/>
+            <a:r>
+              <a:rPr lang="ru-RU" sz="1400" dirty="0">
+                <a:solidFill>
+                  <a:srgbClr val="000000"/>
+                </a:solidFill>
+                <a:effectLst/>
+                <a:latin typeface="Special#Default Metrics Font"/>
+                <a:ea typeface="Special#Default Metrics Font"/>
+                <a:cs typeface="Special#Default Metrics Font"/>
+              </a:rPr>
+              <a:t>Соответственно мы определяем граф </a:t>
+            </a:r>
+            <a:r>
+              <a:rPr lang="en-US" sz="1400" dirty="0">
+                <a:solidFill>
+                  <a:srgbClr val="000000"/>
+                </a:solidFill>
+                <a:effectLst/>
+                <a:latin typeface="Special#Default Metrics Font"/>
+                <a:ea typeface="Special#Default Metrics Font"/>
+                <a:cs typeface="Special#Default Metrics Font"/>
+              </a:rPr>
+              <a:t>G </a:t>
+            </a:r>
+            <a:r>
+              <a:rPr lang="ru-RU" sz="1400" dirty="0">
+                <a:solidFill>
+                  <a:srgbClr val="000000"/>
+                </a:solidFill>
+                <a:effectLst/>
+                <a:latin typeface="Special#Default Metrics Font"/>
+                <a:ea typeface="Special#Default Metrics Font"/>
+                <a:cs typeface="Special#Default Metrics Font"/>
+              </a:rPr>
+              <a:t>= (</a:t>
+            </a:r>
+            <a:r>
+              <a:rPr lang="en-US" sz="1400" dirty="0">
+                <a:solidFill>
+                  <a:srgbClr val="000000"/>
+                </a:solidFill>
+                <a:latin typeface="Special#Default Metrics Font"/>
+                <a:ea typeface="Special#Default Metrics Font"/>
+                <a:cs typeface="Special#Default Metrics Font"/>
+              </a:rPr>
+              <a:t>V</a:t>
+            </a:r>
+            <a:r>
+              <a:rPr lang="ru-RU" sz="1400" dirty="0">
+                <a:solidFill>
+                  <a:srgbClr val="000000"/>
+                </a:solidFill>
+                <a:effectLst/>
+                <a:latin typeface="Special#Default Metrics Font"/>
+                <a:ea typeface="Special#Default Metrics Font"/>
+                <a:cs typeface="Special#Default Metrics Font"/>
+              </a:rPr>
+              <a:t>, </a:t>
+            </a:r>
+            <a:r>
+              <a:rPr lang="en-US" sz="1400" i="1" spc="0" dirty="0" err="1">
+                <a:solidFill>
+                  <a:srgbClr val="000000"/>
+                </a:solidFill>
+                <a:effectLst/>
+                <a:latin typeface="Special#Default Metrics Font"/>
+                <a:ea typeface="Special#Default Metrics Font"/>
+                <a:cs typeface="Special#Default Metrics Font"/>
+              </a:rPr>
+              <a:t>Е</a:t>
+            </a:r>
+            <a:r>
+              <a:rPr lang="en-US" sz="1400" i="1" spc="0" dirty="0">
+                <a:solidFill>
+                  <a:srgbClr val="000000"/>
+                </a:solidFill>
+                <a:effectLst/>
+                <a:latin typeface="Special#Default Metrics Font"/>
+                <a:ea typeface="Special#Default Metrics Font"/>
+                <a:cs typeface="Special#Default Metrics Font"/>
+              </a:rPr>
+              <a:t>),</a:t>
+            </a:r>
+            <a:r>
+              <a:rPr lang="ru-RU" sz="1400" dirty="0">
+                <a:solidFill>
+                  <a:srgbClr val="000000"/>
+                </a:solidFill>
+                <a:effectLst/>
+                <a:latin typeface="Special#Default Metrics Font"/>
+                <a:ea typeface="Special#Default Metrics Font"/>
+                <a:cs typeface="Special#Default Metrics Font"/>
+              </a:rPr>
+              <a:t> в котором множество узлов </a:t>
+            </a:r>
+            <a:r>
+              <a:rPr lang="en-US" sz="1400" i="1" spc="0" dirty="0">
+                <a:solidFill>
+                  <a:srgbClr val="000000"/>
+                </a:solidFill>
+                <a:effectLst/>
+                <a:latin typeface="Special#Default Metrics Font"/>
+                <a:ea typeface="Special#Default Metrics Font"/>
+                <a:cs typeface="Special#Default Metrics Font"/>
+              </a:rPr>
+              <a:t>V</a:t>
+            </a:r>
+            <a:r>
+              <a:rPr lang="ru-RU" sz="1400" i="1" spc="0" dirty="0">
+                <a:solidFill>
+                  <a:srgbClr val="000000"/>
+                </a:solidFill>
+                <a:effectLst/>
+                <a:latin typeface="Special#Default Metrics Font"/>
+                <a:ea typeface="Special#Default Metrics Font"/>
+                <a:cs typeface="Special#Default Metrics Font"/>
+              </a:rPr>
+              <a:t> </a:t>
+            </a:r>
+            <a:r>
+              <a:rPr lang="ru-RU" sz="1400" dirty="0">
+                <a:solidFill>
+                  <a:srgbClr val="000000"/>
+                </a:solidFill>
+                <a:effectLst/>
+                <a:latin typeface="Special#Default Metrics Font"/>
+                <a:ea typeface="Special#Default Metrics Font"/>
+                <a:cs typeface="Special#Default Metrics Font"/>
+              </a:rPr>
+              <a:t>эквивалентно множеству ребер </a:t>
+            </a:r>
+            <a:r>
+              <a:rPr lang="en-US" sz="1400" i="1" cap="small" spc="0" dirty="0">
+                <a:solidFill>
+                  <a:srgbClr val="000000"/>
+                </a:solidFill>
+                <a:effectLst/>
+                <a:latin typeface="Special#Default Metrics Font"/>
+                <a:ea typeface="Special#Default Metrics Font"/>
+                <a:cs typeface="Special#Default Metrics Font"/>
+              </a:rPr>
+              <a:t>E</a:t>
+            </a:r>
+            <a:r>
+              <a:rPr lang="ru-RU" sz="1400" i="1" cap="small" spc="0" dirty="0">
+                <a:solidFill>
+                  <a:srgbClr val="000000"/>
+                </a:solidFill>
+                <a:effectLst/>
+                <a:latin typeface="Special#Default Metrics Font"/>
+                <a:ea typeface="Special#Default Metrics Font"/>
+                <a:cs typeface="Special#Default Metrics Font"/>
+              </a:rPr>
+              <a:t>’ </a:t>
+            </a:r>
+            <a:r>
+              <a:rPr lang="en-US" sz="1400" i="1" cap="small" spc="0" dirty="0">
+                <a:solidFill>
+                  <a:srgbClr val="000000"/>
+                </a:solidFill>
+                <a:effectLst/>
+                <a:latin typeface="Special#Default Metrics Font"/>
+                <a:ea typeface="Special#Default Metrics Font"/>
+                <a:cs typeface="Special#Default Metrics Font"/>
+              </a:rPr>
+              <a:t>b</a:t>
+            </a:r>
+            <a:r>
+              <a:rPr lang="ru-RU" sz="1400" i="1" cap="small" spc="0" dirty="0">
+                <a:solidFill>
+                  <a:srgbClr val="000000"/>
+                </a:solidFill>
+                <a:effectLst/>
+                <a:latin typeface="Special#Default Metrics Font"/>
+                <a:ea typeface="Special#Default Metrics Font"/>
+                <a:cs typeface="Special#Default Metrics Font"/>
+              </a:rPr>
+              <a:t> </a:t>
+            </a:r>
+            <a:r>
+              <a:rPr lang="en-US" sz="1400" i="1" cap="small" spc="0" dirty="0">
+                <a:solidFill>
+                  <a:srgbClr val="000000"/>
+                </a:solidFill>
+                <a:effectLst/>
+                <a:latin typeface="Special#Default Metrics Font"/>
+                <a:ea typeface="Special#Default Metrics Font"/>
+                <a:cs typeface="Special#Default Metrics Font"/>
+              </a:rPr>
+              <a:t>G</a:t>
+            </a:r>
+            <a:r>
+              <a:rPr lang="ru-RU" sz="1400" i="1" cap="small" spc="0" dirty="0">
+                <a:solidFill>
+                  <a:srgbClr val="000000"/>
+                </a:solidFill>
+                <a:effectLst/>
+                <a:latin typeface="Special#Default Metrics Font"/>
+                <a:ea typeface="Special#Default Metrics Font"/>
+                <a:cs typeface="Special#Default Metrics Font"/>
+              </a:rPr>
+              <a:t>'.</a:t>
+            </a:r>
+            <a:r>
+              <a:rPr lang="ru-RU" sz="1400" dirty="0">
+                <a:solidFill>
+                  <a:srgbClr val="000000"/>
+                </a:solidFill>
+                <a:effectLst/>
+                <a:latin typeface="Special#Default Metrics Font"/>
+                <a:ea typeface="Special#Default Metrics Font"/>
+                <a:cs typeface="Special#Default Metrics Font"/>
+              </a:rPr>
+              <a:t> </a:t>
+            </a:r>
+            <a:r>
+              <a:rPr lang="ru-RU" sz="1400" spc="0" dirty="0">
+                <a:solidFill>
+                  <a:srgbClr val="000000"/>
+                </a:solidFill>
+                <a:effectLst/>
+                <a:latin typeface="Special#Default Metrics Font"/>
+                <a:ea typeface="Special#Default Metrics Font"/>
+                <a:cs typeface="Special#Default Metrics Font"/>
+              </a:rPr>
+              <a:t>Мы </a:t>
+            </a:r>
+            <a:r>
+              <a:rPr lang="ru-RU" sz="1400" dirty="0">
+                <a:solidFill>
+                  <a:srgbClr val="000000"/>
+                </a:solidFill>
+                <a:effectLst/>
+                <a:latin typeface="Special#Default Metrics Font"/>
+                <a:ea typeface="Special#Default Metrics Font"/>
+                <a:cs typeface="Special#Default Metrics Font"/>
+              </a:rPr>
+              <a:t>определяем ребро между каждой парой элементов </a:t>
+            </a:r>
+            <a:r>
+              <a:rPr lang="ru-RU" sz="1400" i="1" spc="0" dirty="0" err="1">
+                <a:solidFill>
+                  <a:srgbClr val="000000"/>
+                </a:solidFill>
+                <a:effectLst/>
+                <a:latin typeface="Special#Default Metrics Font"/>
+                <a:ea typeface="Special#Default Metrics Font"/>
+                <a:cs typeface="Special#Default Metrics Font"/>
+              </a:rPr>
+              <a:t>V</a:t>
+            </a:r>
+            <a:r>
+              <a:rPr lang="ru-RU" sz="1400" dirty="0">
+                <a:solidFill>
+                  <a:srgbClr val="000000"/>
+                </a:solidFill>
+                <a:effectLst/>
+                <a:latin typeface="Special#Default Metrics Font"/>
+                <a:ea typeface="Special#Default Metrics Font"/>
+                <a:cs typeface="Special#Default Metrics Font"/>
+              </a:rPr>
+              <a:t>, соответствующих ребрам </a:t>
+            </a:r>
+            <a:r>
+              <a:rPr lang="en-US" sz="1400" dirty="0">
+                <a:solidFill>
+                  <a:srgbClr val="000000"/>
+                </a:solidFill>
+                <a:effectLst/>
+                <a:latin typeface="Special#Default Metrics Font"/>
+                <a:ea typeface="Special#Default Metrics Font"/>
+                <a:cs typeface="Special#Default Metrics Font"/>
+              </a:rPr>
+              <a:t>G</a:t>
+            </a:r>
+            <a:r>
+              <a:rPr lang="ru-RU" sz="1400" dirty="0">
+                <a:solidFill>
+                  <a:srgbClr val="000000"/>
+                </a:solidFill>
+                <a:effectLst/>
+                <a:latin typeface="Special#Default Metrics Font"/>
+                <a:ea typeface="Special#Default Metrics Font"/>
+                <a:cs typeface="Special#Default Metrics Font"/>
+              </a:rPr>
+              <a:t>' с общим концом. </a:t>
+            </a:r>
+          </a:p>
+          <a:p>
+            <a:pPr lvl="1"/>
+            <a:r>
+              <a:rPr lang="ru-RU" sz="1400" dirty="0">
+                <a:solidFill>
+                  <a:srgbClr val="000000"/>
+                </a:solidFill>
+                <a:effectLst/>
+                <a:latin typeface="Special#Default Metrics Font"/>
+                <a:ea typeface="Special#Default Metrics Font"/>
+                <a:cs typeface="Special#Default Metrics Font"/>
+              </a:rPr>
+              <a:t>Теперь можно проверить, что независимые множества </a:t>
+            </a:r>
+            <a:r>
+              <a:rPr lang="en-US" sz="1400" i="1" spc="0" dirty="0">
+                <a:solidFill>
+                  <a:srgbClr val="000000"/>
+                </a:solidFill>
+                <a:effectLst/>
+                <a:latin typeface="Special#Default Metrics Font"/>
+                <a:ea typeface="Special#Default Metrics Font"/>
+                <a:cs typeface="Special#Default Metrics Font"/>
+              </a:rPr>
+              <a:t>G</a:t>
+            </a:r>
+            <a:r>
+              <a:rPr lang="en-US" sz="1400" dirty="0">
+                <a:solidFill>
+                  <a:srgbClr val="000000"/>
+                </a:solidFill>
+                <a:effectLst/>
+                <a:latin typeface="Special#Default Metrics Font"/>
+                <a:ea typeface="Special#Default Metrics Font"/>
+                <a:cs typeface="Special#Default Metrics Font"/>
+              </a:rPr>
+              <a:t> </a:t>
+            </a:r>
+            <a:r>
+              <a:rPr lang="ru-RU" sz="1400" dirty="0">
+                <a:solidFill>
+                  <a:srgbClr val="000000"/>
+                </a:solidFill>
+                <a:effectLst/>
+                <a:latin typeface="Special#Default Metrics Font"/>
+                <a:ea typeface="Special#Default Metrics Font"/>
+                <a:cs typeface="Special#Default Metrics Font"/>
+              </a:rPr>
+              <a:t>точно соответствуют </a:t>
+            </a:r>
+            <a:r>
+              <a:rPr lang="ru-RU" sz="1400" dirty="0" err="1">
+                <a:solidFill>
+                  <a:srgbClr val="000000"/>
+                </a:solidFill>
+                <a:effectLst/>
+                <a:latin typeface="Special#Default Metrics Font"/>
+                <a:ea typeface="Special#Default Metrics Font"/>
+                <a:cs typeface="Special#Default Metrics Font"/>
+              </a:rPr>
+              <a:t>паросочетаниям</a:t>
+            </a:r>
+            <a:r>
+              <a:rPr lang="ru-RU" sz="1400" dirty="0">
+                <a:solidFill>
+                  <a:srgbClr val="000000"/>
+                </a:solidFill>
+                <a:effectLst/>
+                <a:latin typeface="Special#Default Metrics Font"/>
+                <a:ea typeface="Special#Default Metrics Font"/>
+                <a:cs typeface="Special#Default Metrics Font"/>
+              </a:rPr>
+              <a:t> </a:t>
+            </a:r>
+            <a:r>
+              <a:rPr lang="en-US" sz="1400" dirty="0">
+                <a:solidFill>
+                  <a:srgbClr val="000000"/>
+                </a:solidFill>
+                <a:effectLst/>
+                <a:latin typeface="Special#Default Metrics Font"/>
+                <a:ea typeface="Special#Default Metrics Font"/>
+                <a:cs typeface="Special#Default Metrics Font"/>
+              </a:rPr>
+              <a:t>G</a:t>
+            </a:r>
+            <a:r>
+              <a:rPr lang="ru-RU" sz="1400" dirty="0">
+                <a:solidFill>
+                  <a:srgbClr val="000000"/>
+                </a:solidFill>
+                <a:effectLst/>
+                <a:latin typeface="Special#Default Metrics Font"/>
+                <a:ea typeface="Special#Default Metrics Font"/>
+                <a:cs typeface="Special#Default Metrics Font"/>
+              </a:rPr>
+              <a:t>’.</a:t>
+            </a:r>
+            <a:endParaRPr lang="en-US" sz="1400" dirty="0">
+              <a:solidFill>
+                <a:srgbClr val="000000"/>
+              </a:solidFill>
+              <a:effectLst/>
+              <a:latin typeface="Special#Default Metrics Font"/>
+              <a:ea typeface="Special#Default Metrics Font"/>
+              <a:cs typeface="Special#Default Metrics Font"/>
+            </a:endParaRPr>
+          </a:p>
+          <a:p>
+            <a:pPr lvl="1"/>
+            <a:r>
+              <a:rPr lang="ru-RU" sz="1400" dirty="0" err="1">
+                <a:solidFill>
+                  <a:srgbClr val="000000"/>
+                </a:solidFill>
+                <a:effectLst/>
+                <a:latin typeface="Special#Default Metrics Font"/>
+                <a:ea typeface="Special#Default Metrics Font"/>
+                <a:cs typeface="Special#Default Metrics Font"/>
+              </a:rPr>
+              <a:t>Посторим</a:t>
+            </a:r>
+            <a:r>
+              <a:rPr lang="ru-RU" sz="1400" dirty="0">
+                <a:solidFill>
+                  <a:srgbClr val="000000"/>
+                </a:solidFill>
+                <a:effectLst/>
+                <a:latin typeface="Special#Default Metrics Font"/>
+                <a:ea typeface="Special#Default Metrics Font"/>
+                <a:cs typeface="Special#Default Metrics Font"/>
+              </a:rPr>
+              <a:t>?</a:t>
+            </a:r>
+            <a:endParaRPr lang="ru-RU" sz="1400" dirty="0">
+              <a:effectLst/>
+              <a:latin typeface="Special#Default Metrics Font"/>
+              <a:ea typeface="Special#Default Metrics Font"/>
+              <a:cs typeface="Special#Default Metrics Font"/>
+            </a:endParaRPr>
+          </a:p>
+          <a:p>
+            <a:endParaRPr lang="ru-RU" dirty="0"/>
+          </a:p>
+        </p:txBody>
+      </p:sp>
+    </p:spTree>
+    <p:extLst>
+      <p:ext uri="{BB962C8B-B14F-4D97-AF65-F5344CB8AC3E}">
+        <p14:creationId xmlns:p14="http://schemas.microsoft.com/office/powerpoint/2010/main" val="1676186914"/>
+      </p:ext>
+    </p:extLst>
+  </p:cSld>
+  <p:clrMapOvr>
+    <a:masterClrMapping/>
+  </p:clrMapOvr>
+</p:sld>
+</file>
+
+<file path=ppt/slides/slide21.xml><?xml version="1.0" encoding="utf-8"?>
+<p:sld xmlns:a="http://schemas.openxmlformats.org/drawingml/2006/main" xmlns:r="http://schemas.openxmlformats.org/officeDocument/2006/relationships" xmlns:p="http://schemas.openxmlformats.org/presentationml/2006/main">
+  <p:cSld>
+    <p:spTree>
+      <p:nvGrpSpPr>
+        <p:cNvPr id="1" name=""/>
+        <p:cNvGrpSpPr/>
+        <p:nvPr/>
+      </p:nvGrpSpPr>
+      <p:grpSpPr>
+        <a:xfrm>
+          <a:off x="0" y="0"/>
+          <a:ext cx="0" cy="0"/>
+          <a:chOff x="0" y="0"/>
+          <a:chExt cx="0" cy="0"/>
+        </a:xfrm>
+      </p:grpSpPr>
+      <p:sp>
+        <p:nvSpPr>
+          <p:cNvPr id="2" name="Заголовок 1">
+            <a:extLst>
+              <a:ext uri="{FF2B5EF4-FFF2-40B4-BE49-F238E27FC236}">
+                <a16:creationId xmlns:a16="http://schemas.microsoft.com/office/drawing/2014/main" id="{8BF55B26-1890-7B44-B030-BEA92D6E2FCF}"/>
+              </a:ext>
+            </a:extLst>
+          </p:cNvPr>
+          <p:cNvSpPr>
+            <a:spLocks noGrp="1"/>
+          </p:cNvSpPr>
+          <p:nvPr>
+            <p:ph type="title"/>
+          </p:nvPr>
+        </p:nvSpPr>
+        <p:spPr>
+          <a:xfrm>
+            <a:off x="628650" y="95693"/>
+            <a:ext cx="7886700" cy="538641"/>
+          </a:xfrm>
+        </p:spPr>
+        <p:txBody>
+          <a:bodyPr>
+            <a:normAutofit fontScale="90000"/>
+          </a:bodyPr>
+          <a:lstStyle/>
+          <a:p>
+            <a:r>
+              <a:rPr lang="ru-RU" dirty="0"/>
+              <a:t>Поиск независимого множества</a:t>
+            </a:r>
+          </a:p>
+        </p:txBody>
+      </p:sp>
+      <p:graphicFrame>
+        <p:nvGraphicFramePr>
+          <p:cNvPr id="4" name="Объект 3">
+            <a:extLst>
+              <a:ext uri="{FF2B5EF4-FFF2-40B4-BE49-F238E27FC236}">
+                <a16:creationId xmlns:a16="http://schemas.microsoft.com/office/drawing/2014/main" id="{9A23627F-143D-8C44-8CE8-1A8E832A13CA}"/>
+              </a:ext>
+            </a:extLst>
+          </p:cNvPr>
+          <p:cNvGraphicFramePr>
+            <a:graphicFrameLocks noGrp="1"/>
+          </p:cNvGraphicFramePr>
+          <p:nvPr>
+            <p:ph idx="1"/>
+            <p:extLst>
+              <p:ext uri="{D42A27DB-BD31-4B8C-83A1-F6EECF244321}">
+                <p14:modId xmlns:p14="http://schemas.microsoft.com/office/powerpoint/2010/main" val="2366796938"/>
+              </p:ext>
+            </p:extLst>
+          </p:nvPr>
+        </p:nvGraphicFramePr>
+        <p:xfrm>
+          <a:off x="628649" y="754912"/>
+          <a:ext cx="8047517" cy="5592725"/>
+        </p:xfrm>
+        <a:graphic>
+          <a:graphicData uri="http://schemas.openxmlformats.org/drawingml/2006/diagram">
+            <dgm:relIds xmlns:dgm="http://schemas.openxmlformats.org/drawingml/2006/diagram" xmlns:r="http://schemas.openxmlformats.org/officeDocument/2006/relationships" r:dm="rId2" r:lo="rId3" r:qs="rId4" r:cs="rId5"/>
+          </a:graphicData>
+        </a:graphic>
+      </p:graphicFrame>
+    </p:spTree>
+    <p:extLst>
+      <p:ext uri="{BB962C8B-B14F-4D97-AF65-F5344CB8AC3E}">
+        <p14:creationId xmlns:p14="http://schemas.microsoft.com/office/powerpoint/2010/main" val="2699830444"/>
+      </p:ext>
+    </p:extLst>
+  </p:cSld>
+  <p:clrMapOvr>
+    <a:masterClrMapping/>
+  </p:clrMapOvr>
+</p:sld>
+</file>
+
+<file path=ppt/slides/slide22.xml><?xml version="1.0" encoding="utf-8"?>
+<p:sld xmlns:a="http://schemas.openxmlformats.org/drawingml/2006/main" xmlns:r="http://schemas.openxmlformats.org/officeDocument/2006/relationships" xmlns:p="http://schemas.openxmlformats.org/presentationml/2006/main">
+  <p:cSld>
+    <p:spTree>
+      <p:nvGrpSpPr>
+        <p:cNvPr id="1" name=""/>
+        <p:cNvGrpSpPr/>
+        <p:nvPr/>
+      </p:nvGrpSpPr>
+      <p:grpSpPr>
+        <a:xfrm>
+          <a:off x="0" y="0"/>
+          <a:ext cx="0" cy="0"/>
+          <a:chOff x="0" y="0"/>
+          <a:chExt cx="0" cy="0"/>
+        </a:xfrm>
+      </p:grpSpPr>
+      <p:sp>
+        <p:nvSpPr>
+          <p:cNvPr id="2" name="Заголовок 1">
+            <a:extLst>
+              <a:ext uri="{FF2B5EF4-FFF2-40B4-BE49-F238E27FC236}">
+                <a16:creationId xmlns:a16="http://schemas.microsoft.com/office/drawing/2014/main" id="{ECB67A38-BB82-B046-B7D8-BE4A8635F5F8}"/>
+              </a:ext>
+            </a:extLst>
+          </p:cNvPr>
+          <p:cNvSpPr>
+            <a:spLocks noGrp="1"/>
+          </p:cNvSpPr>
+          <p:nvPr>
+            <p:ph type="title"/>
+          </p:nvPr>
+        </p:nvSpPr>
+        <p:spPr/>
+        <p:txBody>
+          <a:bodyPr/>
+          <a:lstStyle/>
+          <a:p>
+            <a:r>
+              <a:rPr lang="ru-RU" dirty="0"/>
+              <a:t>Задача конкурентного размещения </a:t>
+            </a:r>
+          </a:p>
+        </p:txBody>
+      </p:sp>
+      <p:sp>
+        <p:nvSpPr>
+          <p:cNvPr id="3" name="Объект 2">
+            <a:extLst>
+              <a:ext uri="{FF2B5EF4-FFF2-40B4-BE49-F238E27FC236}">
+                <a16:creationId xmlns:a16="http://schemas.microsoft.com/office/drawing/2014/main" id="{637A3A35-34C5-674C-9C5E-961320BE2B73}"/>
+              </a:ext>
+            </a:extLst>
+          </p:cNvPr>
+          <p:cNvSpPr>
+            <a:spLocks noGrp="1"/>
+          </p:cNvSpPr>
+          <p:nvPr>
+            <p:ph idx="1"/>
+          </p:nvPr>
+        </p:nvSpPr>
+        <p:spPr>
+          <a:xfrm>
+            <a:off x="628650" y="1825624"/>
+            <a:ext cx="7886700" cy="4883519"/>
+          </a:xfrm>
+        </p:spPr>
+        <p:txBody>
+          <a:bodyPr>
+            <a:normAutofit fontScale="85000" lnSpcReduction="20000"/>
+          </a:bodyPr>
+          <a:lstStyle/>
+          <a:p>
+            <a:pPr marL="514350" indent="-285750" algn="just">
+              <a:lnSpc>
+                <a:spcPct val="100000"/>
+              </a:lnSpc>
+            </a:pPr>
+            <a:r>
+              <a:rPr lang="ru-RU" sz="1800" dirty="0">
+                <a:solidFill>
+                  <a:srgbClr val="000000"/>
+                </a:solidFill>
+                <a:effectLst/>
+                <a:latin typeface="Special#Default Metrics Font"/>
+                <a:ea typeface="Special#Default Metrics Font"/>
+                <a:cs typeface="Special#Default Metrics Font"/>
+              </a:rPr>
+              <a:t>Допустим, имеются две крупные компании, которые открывают свои сети кофеен по всей стране (назовем их </a:t>
+            </a:r>
+            <a:r>
+              <a:rPr lang="en-US" sz="1800" dirty="0" err="1">
+                <a:solidFill>
+                  <a:srgbClr val="000000"/>
+                </a:solidFill>
+                <a:effectLst/>
+                <a:latin typeface="Special#Default Metrics Font"/>
+                <a:ea typeface="Special#Default Metrics Font"/>
+                <a:cs typeface="Special#Default Metrics Font"/>
+              </a:rPr>
+              <a:t>JavaPlanet</a:t>
+            </a:r>
+            <a:r>
+              <a:rPr lang="en-US" sz="1800" dirty="0">
+                <a:solidFill>
+                  <a:srgbClr val="000000"/>
+                </a:solidFill>
+                <a:effectLst/>
+                <a:latin typeface="Special#Default Metrics Font"/>
+                <a:ea typeface="Special#Default Metrics Font"/>
+                <a:cs typeface="Special#Default Metrics Font"/>
+              </a:rPr>
+              <a:t> </a:t>
+            </a:r>
+            <a:r>
+              <a:rPr lang="ru-RU" sz="1800" dirty="0">
+                <a:solidFill>
+                  <a:srgbClr val="000000"/>
+                </a:solidFill>
+                <a:effectLst/>
+                <a:latin typeface="Special#Default Metrics Font"/>
+                <a:ea typeface="Special#Default Metrics Font"/>
+                <a:cs typeface="Special#Default Metrics Font"/>
+              </a:rPr>
+              <a:t>и </a:t>
+            </a:r>
+            <a:r>
+              <a:rPr lang="en-US" sz="1800" dirty="0" err="1">
+                <a:solidFill>
+                  <a:srgbClr val="000000"/>
+                </a:solidFill>
+                <a:effectLst/>
+                <a:latin typeface="Special#Default Metrics Font"/>
+                <a:ea typeface="Special#Default Metrics Font"/>
+                <a:cs typeface="Special#Default Metrics Font"/>
+              </a:rPr>
+              <a:t>Queequeg</a:t>
+            </a:r>
+            <a:r>
+              <a:rPr lang="ru-RU" sz="1800" dirty="0">
+                <a:solidFill>
+                  <a:srgbClr val="000000"/>
+                </a:solidFill>
+                <a:effectLst/>
+                <a:latin typeface="Special#Default Metrics Font"/>
+                <a:ea typeface="Special#Default Metrics Font"/>
+                <a:cs typeface="Special#Default Metrics Font"/>
+              </a:rPr>
+              <a:t>'</a:t>
+            </a:r>
+            <a:r>
+              <a:rPr lang="en-US" sz="1800" dirty="0">
+                <a:solidFill>
+                  <a:srgbClr val="000000"/>
+                </a:solidFill>
+                <a:effectLst/>
+                <a:latin typeface="Special#Default Metrics Font"/>
+                <a:ea typeface="Special#Default Metrics Font"/>
+                <a:cs typeface="Special#Default Metrics Font"/>
+              </a:rPr>
+              <a:t>s Coffee</a:t>
+            </a:r>
+            <a:r>
+              <a:rPr lang="ru-RU" sz="1800" dirty="0">
+                <a:solidFill>
+                  <a:srgbClr val="000000"/>
+                </a:solidFill>
+                <a:effectLst/>
+                <a:latin typeface="Special#Default Metrics Font"/>
+                <a:ea typeface="Special#Default Metrics Font"/>
+                <a:cs typeface="Special#Default Metrics Font"/>
+              </a:rPr>
+              <a:t>); в настоящее время они соревнуются за свою долю рынка в некотором географическом регионе. Сначала </a:t>
+            </a:r>
+            <a:r>
+              <a:rPr lang="en-US" sz="1800" dirty="0" err="1">
+                <a:solidFill>
+                  <a:srgbClr val="000000"/>
+                </a:solidFill>
+                <a:effectLst/>
+                <a:latin typeface="Special#Default Metrics Font"/>
+                <a:ea typeface="Special#Default Metrics Font"/>
+                <a:cs typeface="Special#Default Metrics Font"/>
+              </a:rPr>
+              <a:t>JavaPlanet</a:t>
+            </a:r>
+            <a:r>
+              <a:rPr lang="en-US" sz="1800" dirty="0">
+                <a:solidFill>
+                  <a:srgbClr val="000000"/>
+                </a:solidFill>
+                <a:effectLst/>
+                <a:latin typeface="Special#Default Metrics Font"/>
+                <a:ea typeface="Special#Default Metrics Font"/>
+                <a:cs typeface="Special#Default Metrics Font"/>
+              </a:rPr>
+              <a:t> </a:t>
+            </a:r>
+            <a:r>
+              <a:rPr lang="ru-RU" sz="1800" dirty="0">
+                <a:solidFill>
+                  <a:srgbClr val="000000"/>
+                </a:solidFill>
+                <a:effectLst/>
+                <a:latin typeface="Special#Default Metrics Font"/>
+                <a:ea typeface="Special#Default Metrics Font"/>
+                <a:cs typeface="Special#Default Metrics Font"/>
+              </a:rPr>
+              <a:t>открывает свое заведение; затем </a:t>
+            </a:r>
+            <a:r>
+              <a:rPr lang="en-US" sz="1800" dirty="0" err="1">
+                <a:solidFill>
+                  <a:srgbClr val="000000"/>
+                </a:solidFill>
+                <a:effectLst/>
+                <a:latin typeface="Special#Default Metrics Font"/>
+                <a:ea typeface="Special#Default Metrics Font"/>
+                <a:cs typeface="Special#Default Metrics Font"/>
+              </a:rPr>
+              <a:t>Queequeg</a:t>
+            </a:r>
+            <a:r>
+              <a:rPr lang="ru-RU" sz="1800" dirty="0">
+                <a:solidFill>
+                  <a:srgbClr val="000000"/>
+                </a:solidFill>
+                <a:effectLst/>
+                <a:latin typeface="Special#Default Metrics Font"/>
+                <a:ea typeface="Special#Default Metrics Font"/>
+                <a:cs typeface="Special#Default Metrics Font"/>
+              </a:rPr>
+              <a:t>’</a:t>
+            </a:r>
+            <a:r>
+              <a:rPr lang="en-US" sz="1800" dirty="0">
+                <a:solidFill>
+                  <a:srgbClr val="000000"/>
+                </a:solidFill>
+                <a:effectLst/>
+                <a:latin typeface="Special#Default Metrics Font"/>
+                <a:ea typeface="Special#Default Metrics Font"/>
+                <a:cs typeface="Special#Default Metrics Font"/>
+              </a:rPr>
+              <a:t>s Coffee </a:t>
+            </a:r>
+            <a:r>
+              <a:rPr lang="ru-RU" sz="1800" dirty="0">
+                <a:solidFill>
+                  <a:srgbClr val="000000"/>
+                </a:solidFill>
+                <a:effectLst/>
+                <a:latin typeface="Special#Default Metrics Font"/>
+                <a:ea typeface="Special#Default Metrics Font"/>
+                <a:cs typeface="Special#Default Metrics Font"/>
+              </a:rPr>
+              <a:t>открывает свое; потом </a:t>
+            </a:r>
+            <a:r>
+              <a:rPr lang="en-US" sz="1800" dirty="0" err="1">
+                <a:solidFill>
+                  <a:srgbClr val="000000"/>
+                </a:solidFill>
+                <a:effectLst/>
+                <a:latin typeface="Special#Default Metrics Font"/>
+                <a:ea typeface="Special#Default Metrics Font"/>
+                <a:cs typeface="Special#Default Metrics Font"/>
+              </a:rPr>
+              <a:t>JavaPlanet</a:t>
+            </a:r>
+            <a:r>
+              <a:rPr lang="ru-RU" sz="1800" dirty="0">
+                <a:solidFill>
+                  <a:srgbClr val="000000"/>
+                </a:solidFill>
+                <a:effectLst/>
+                <a:latin typeface="Special#Default Metrics Font"/>
+                <a:ea typeface="Special#Default Metrics Font"/>
+                <a:cs typeface="Special#Default Metrics Font"/>
+              </a:rPr>
+              <a:t>; снова </a:t>
+            </a:r>
+            <a:r>
+              <a:rPr lang="en-US" sz="1800" dirty="0" err="1">
+                <a:solidFill>
+                  <a:srgbClr val="000000"/>
+                </a:solidFill>
+                <a:effectLst/>
+                <a:latin typeface="Special#Default Metrics Font"/>
+                <a:ea typeface="Special#Default Metrics Font"/>
+                <a:cs typeface="Special#Default Metrics Font"/>
+              </a:rPr>
+              <a:t>Queequeg</a:t>
+            </a:r>
+            <a:r>
+              <a:rPr lang="ru-RU" sz="1800" dirty="0">
+                <a:solidFill>
+                  <a:srgbClr val="000000"/>
+                </a:solidFill>
+                <a:effectLst/>
+                <a:latin typeface="Special#Default Metrics Font"/>
+                <a:ea typeface="Special#Default Metrics Font"/>
+                <a:cs typeface="Special#Default Metrics Font"/>
+              </a:rPr>
+              <a:t>’</a:t>
+            </a:r>
+            <a:r>
+              <a:rPr lang="en-US" sz="1800" dirty="0">
+                <a:solidFill>
+                  <a:srgbClr val="000000"/>
+                </a:solidFill>
+                <a:effectLst/>
+                <a:latin typeface="Special#Default Metrics Font"/>
+                <a:ea typeface="Special#Default Metrics Font"/>
+                <a:cs typeface="Special#Default Metrics Font"/>
+              </a:rPr>
+              <a:t>s</a:t>
+            </a:r>
+            <a:r>
+              <a:rPr lang="ru-RU" sz="1800" dirty="0">
+                <a:solidFill>
+                  <a:srgbClr val="000000"/>
+                </a:solidFill>
+                <a:effectLst/>
+                <a:latin typeface="Special#Default Metrics Font"/>
+                <a:ea typeface="Special#Default Metrics Font"/>
+                <a:cs typeface="Special#Default Metrics Font"/>
+              </a:rPr>
+              <a:t>, и т. д. Допустим, они должны выполнять градостроительные нормы, согласно которым две кофейни не должны располагаться слишком близко друг к другу, и каждая компания пытается разместить свои заведения в самых удобных точках. Кто выиграет?</a:t>
+            </a:r>
+            <a:endParaRPr lang="ru-RU" sz="1800" dirty="0">
+              <a:effectLst/>
+              <a:latin typeface="Special#Default Metrics Font"/>
+              <a:ea typeface="Special#Default Metrics Font"/>
+              <a:cs typeface="Special#Default Metrics Font"/>
+            </a:endParaRPr>
+          </a:p>
+          <a:p>
+            <a:pPr marL="514350" indent="-285750" algn="just">
+              <a:lnSpc>
+                <a:spcPct val="100000"/>
+              </a:lnSpc>
+            </a:pPr>
+            <a:r>
+              <a:rPr lang="ru-RU" sz="1800" dirty="0">
+                <a:solidFill>
+                  <a:srgbClr val="000000"/>
+                </a:solidFill>
+                <a:effectLst/>
+                <a:latin typeface="Special#Default Metrics Font"/>
+                <a:ea typeface="Special#Default Metrics Font"/>
+                <a:cs typeface="Special#Default Metrics Font"/>
+              </a:rPr>
+              <a:t>Сделаем правила «игры» более конкретными. Географический регион, о котором идет речь, разделен на </a:t>
+            </a:r>
+            <a:r>
+              <a:rPr lang="ru-RU" sz="1800" i="1" dirty="0">
+                <a:solidFill>
+                  <a:srgbClr val="000000"/>
+                </a:solidFill>
+                <a:latin typeface="Special#Default Metrics Font"/>
+                <a:ea typeface="Special#Default Metrics Font"/>
+                <a:cs typeface="Special#Default Metrics Font"/>
+              </a:rPr>
+              <a:t>n</a:t>
+            </a:r>
+            <a:r>
+              <a:rPr lang="ru-RU" sz="1800" dirty="0">
+                <a:solidFill>
+                  <a:srgbClr val="000000"/>
+                </a:solidFill>
+                <a:effectLst/>
+                <a:latin typeface="Special#Default Metrics Font"/>
+                <a:ea typeface="Special#Default Metrics Font"/>
+                <a:cs typeface="Special#Default Metrics Font"/>
+              </a:rPr>
+              <a:t> зон с номерами 1, 2,..., </a:t>
+            </a:r>
+            <a:r>
+              <a:rPr lang="en-US" sz="1800" dirty="0">
+                <a:solidFill>
+                  <a:srgbClr val="000000"/>
+                </a:solidFill>
+                <a:effectLst/>
+                <a:latin typeface="Special#Default Metrics Font"/>
+                <a:ea typeface="Special#Default Metrics Font"/>
+                <a:cs typeface="Special#Default Metrics Font"/>
+              </a:rPr>
+              <a:t>n</a:t>
+            </a:r>
+            <a:r>
+              <a:rPr lang="ru-RU" sz="1800" dirty="0">
+                <a:solidFill>
+                  <a:srgbClr val="000000"/>
+                </a:solidFill>
+                <a:effectLst/>
+                <a:latin typeface="Special#Default Metrics Font"/>
+                <a:ea typeface="Special#Default Metrics Font"/>
+                <a:cs typeface="Special#Default Metrics Font"/>
+              </a:rPr>
+              <a:t>. Каждой зоне </a:t>
+            </a:r>
+            <a:r>
+              <a:rPr lang="en-US" sz="1800" dirty="0" err="1">
+                <a:solidFill>
+                  <a:srgbClr val="000000"/>
+                </a:solidFill>
+                <a:effectLst/>
+                <a:latin typeface="Special#Default Metrics Font"/>
+                <a:ea typeface="Special#Default Metrics Font"/>
+                <a:cs typeface="Special#Default Metrics Font"/>
+              </a:rPr>
+              <a:t>i</a:t>
+            </a:r>
+            <a:r>
+              <a:rPr lang="ru-RU" sz="1800" dirty="0">
+                <a:solidFill>
+                  <a:srgbClr val="000000"/>
+                </a:solidFill>
+                <a:effectLst/>
+                <a:latin typeface="Special#Default Metrics Font"/>
+                <a:ea typeface="Special#Default Metrics Font"/>
+                <a:cs typeface="Special#Default Metrics Font"/>
+              </a:rPr>
+              <a:t> присваивается оценка </a:t>
+            </a:r>
+            <a:r>
+              <a:rPr lang="en-US" sz="1800" i="1" spc="0" dirty="0" err="1">
+                <a:solidFill>
+                  <a:srgbClr val="000000"/>
+                </a:solidFill>
+                <a:effectLst/>
+                <a:latin typeface="Special#Default Metrics Font"/>
+                <a:ea typeface="Special#Default Metrics Font"/>
+                <a:cs typeface="Special#Default Metrics Font"/>
+              </a:rPr>
+              <a:t>b</a:t>
+            </a:r>
+            <a:r>
+              <a:rPr lang="en-US" sz="1800" i="1" spc="0" baseline="-25000" dirty="0" err="1">
+                <a:solidFill>
+                  <a:srgbClr val="000000"/>
+                </a:solidFill>
+                <a:effectLst/>
+                <a:latin typeface="Special#Default Metrics Font"/>
+                <a:ea typeface="Special#Default Metrics Font"/>
+                <a:cs typeface="Special#Default Metrics Font"/>
+              </a:rPr>
+              <a:t>j</a:t>
+            </a:r>
+            <a:r>
+              <a:rPr lang="en-US" sz="1800" dirty="0">
+                <a:solidFill>
+                  <a:srgbClr val="000000"/>
+                </a:solidFill>
+                <a:effectLst/>
+                <a:latin typeface="Special#Default Metrics Font"/>
+                <a:ea typeface="Special#Default Metrics Font"/>
+                <a:cs typeface="Special#Default Metrics Font"/>
+              </a:rPr>
+              <a:t> </a:t>
+            </a:r>
+            <a:r>
+              <a:rPr lang="ru-RU" sz="1800" dirty="0">
+                <a:solidFill>
+                  <a:srgbClr val="000000"/>
+                </a:solidFill>
+                <a:effectLst/>
+                <a:latin typeface="Special#Default Metrics Font"/>
+                <a:ea typeface="Special#Default Metrics Font"/>
+                <a:cs typeface="Special#Default Metrics Font"/>
+              </a:rPr>
+              <a:t>— доход, который получит любая из компаний, открывшая кофейню в этой зоне. Наконец, некоторые пары зон (</a:t>
+            </a:r>
+            <a:r>
+              <a:rPr lang="en-US" sz="1800" dirty="0" err="1">
+                <a:solidFill>
+                  <a:srgbClr val="000000"/>
+                </a:solidFill>
+                <a:effectLst/>
+                <a:latin typeface="Special#Default Metrics Font"/>
+                <a:ea typeface="Special#Default Metrics Font"/>
+                <a:cs typeface="Special#Default Metrics Font"/>
+              </a:rPr>
+              <a:t>i</a:t>
+            </a:r>
+            <a:r>
+              <a:rPr lang="ru-RU" sz="1800" dirty="0">
+                <a:solidFill>
+                  <a:srgbClr val="000000"/>
+                </a:solidFill>
+                <a:effectLst/>
+                <a:latin typeface="Special#Default Metrics Font"/>
+                <a:ea typeface="Special#Default Metrics Font"/>
+                <a:cs typeface="Special#Default Metrics Font"/>
+              </a:rPr>
+              <a:t>,</a:t>
+            </a:r>
+            <a:r>
+              <a:rPr lang="en-US" sz="1800" dirty="0">
+                <a:solidFill>
+                  <a:srgbClr val="000000"/>
+                </a:solidFill>
+                <a:effectLst/>
+                <a:latin typeface="Special#Default Metrics Font"/>
+                <a:ea typeface="Special#Default Metrics Font"/>
+                <a:cs typeface="Special#Default Metrics Font"/>
+              </a:rPr>
+              <a:t>j</a:t>
+            </a:r>
+            <a:r>
+              <a:rPr lang="ru-RU" sz="1800" dirty="0">
+                <a:solidFill>
+                  <a:srgbClr val="000000"/>
+                </a:solidFill>
+                <a:effectLst/>
+                <a:latin typeface="Special#Default Metrics Font"/>
+                <a:ea typeface="Special#Default Metrics Font"/>
+                <a:cs typeface="Special#Default Metrics Font"/>
+              </a:rPr>
+              <a:t>) являются смежными, а местные градостроительные нормы запрещают открывать кофейни в двух смежных зонах независимо от того, какой компании они принадлежат (а также запрещают открывать две кофейни в одной зоне). Для моделирования этих конфликтов мы воспользуемся графом </a:t>
+            </a:r>
+            <a:r>
+              <a:rPr lang="en-US" sz="1800" dirty="0">
+                <a:solidFill>
+                  <a:srgbClr val="000000"/>
+                </a:solidFill>
+                <a:effectLst/>
+                <a:latin typeface="Special#Default Metrics Font"/>
+                <a:ea typeface="Special#Default Metrics Font"/>
+                <a:cs typeface="Special#Default Metrics Font"/>
+              </a:rPr>
+              <a:t>G </a:t>
+            </a:r>
+            <a:r>
+              <a:rPr lang="ru-RU" sz="1800" dirty="0">
+                <a:solidFill>
+                  <a:srgbClr val="000000"/>
+                </a:solidFill>
+                <a:effectLst/>
+                <a:latin typeface="Special#Default Metrics Font"/>
+                <a:ea typeface="Special#Default Metrics Font"/>
+                <a:cs typeface="Special#Default Metrics Font"/>
+              </a:rPr>
+              <a:t>= (</a:t>
+            </a:r>
+            <a:r>
+              <a:rPr lang="en-US" sz="1800" dirty="0">
+                <a:solidFill>
+                  <a:srgbClr val="000000"/>
+                </a:solidFill>
+                <a:effectLst/>
+                <a:latin typeface="Special#Default Metrics Font"/>
+                <a:ea typeface="Special#Default Metrics Font"/>
+                <a:cs typeface="Special#Default Metrics Font"/>
+              </a:rPr>
+              <a:t>F</a:t>
+            </a:r>
+            <a:r>
+              <a:rPr lang="ru-RU" sz="1800" dirty="0">
+                <a:solidFill>
+                  <a:srgbClr val="000000"/>
+                </a:solidFill>
+                <a:effectLst/>
+                <a:latin typeface="Special#Default Metrics Font"/>
+                <a:ea typeface="Special#Default Metrics Font"/>
+                <a:cs typeface="Special#Default Metrics Font"/>
+              </a:rPr>
+              <a:t>, </a:t>
+            </a:r>
+            <a:r>
+              <a:rPr lang="ru-RU" sz="1800" i="1" spc="0" dirty="0">
+                <a:solidFill>
+                  <a:srgbClr val="000000"/>
+                </a:solidFill>
+                <a:effectLst/>
+                <a:latin typeface="Special#Default Metrics Font"/>
+                <a:ea typeface="Special#Default Metrics Font"/>
+                <a:cs typeface="Special#Default Metrics Font"/>
+              </a:rPr>
+              <a:t>Е</a:t>
+            </a:r>
+            <a:r>
+              <a:rPr lang="ru-RU" sz="1800" dirty="0">
+                <a:solidFill>
+                  <a:srgbClr val="000000"/>
+                </a:solidFill>
+                <a:effectLst/>
+                <a:latin typeface="Special#Default Metrics Font"/>
+                <a:ea typeface="Special#Default Metrics Font"/>
+                <a:cs typeface="Special#Default Metrics Font"/>
+              </a:rPr>
+              <a:t>), где </a:t>
+            </a:r>
+            <a:r>
+              <a:rPr lang="ru-RU" sz="1800" i="1" spc="0" dirty="0" err="1">
+                <a:solidFill>
+                  <a:srgbClr val="000000"/>
+                </a:solidFill>
+                <a:effectLst/>
+                <a:latin typeface="Special#Default Metrics Font"/>
+                <a:ea typeface="Special#Default Metrics Font"/>
+                <a:cs typeface="Special#Default Metrics Font"/>
+              </a:rPr>
+              <a:t>V</a:t>
+            </a:r>
+            <a:r>
+              <a:rPr lang="ru-RU" sz="1800" i="1" spc="0" dirty="0">
+                <a:solidFill>
+                  <a:srgbClr val="000000"/>
+                </a:solidFill>
+                <a:effectLst/>
+                <a:latin typeface="Special#Default Metrics Font"/>
+                <a:ea typeface="Special#Default Metrics Font"/>
+                <a:cs typeface="Special#Default Metrics Font"/>
+              </a:rPr>
+              <a:t> —</a:t>
+            </a:r>
+            <a:r>
+              <a:rPr lang="ru-RU" sz="1800" dirty="0">
+                <a:solidFill>
+                  <a:srgbClr val="000000"/>
+                </a:solidFill>
+                <a:effectLst/>
+                <a:latin typeface="Special#Default Metrics Font"/>
+                <a:ea typeface="Special#Default Metrics Font"/>
+                <a:cs typeface="Special#Default Metrics Font"/>
+              </a:rPr>
+              <a:t> множество зон, а (</a:t>
+            </a:r>
+            <a:r>
+              <a:rPr lang="en-US" sz="1800" dirty="0" err="1">
+                <a:solidFill>
+                  <a:srgbClr val="000000"/>
+                </a:solidFill>
+                <a:effectLst/>
+                <a:latin typeface="Special#Default Metrics Font"/>
+                <a:ea typeface="Special#Default Metrics Font"/>
+                <a:cs typeface="Special#Default Metrics Font"/>
+              </a:rPr>
+              <a:t>i</a:t>
+            </a:r>
+            <a:r>
+              <a:rPr lang="ru-RU" sz="1800" dirty="0">
+                <a:solidFill>
+                  <a:srgbClr val="000000"/>
+                </a:solidFill>
+                <a:effectLst/>
+                <a:latin typeface="Special#Default Metrics Font"/>
+                <a:ea typeface="Special#Default Metrics Font"/>
+                <a:cs typeface="Special#Default Metrics Font"/>
+              </a:rPr>
+              <a:t>,</a:t>
+            </a:r>
+            <a:r>
+              <a:rPr lang="en-US" sz="1800" dirty="0">
+                <a:solidFill>
+                  <a:srgbClr val="000000"/>
+                </a:solidFill>
+                <a:latin typeface="Special#Default Metrics Font"/>
+                <a:ea typeface="Special#Default Metrics Font"/>
+                <a:cs typeface="Special#Default Metrics Font"/>
+              </a:rPr>
+              <a:t>j</a:t>
+            </a:r>
+            <a:r>
+              <a:rPr lang="ru-RU" sz="1800" dirty="0">
+                <a:solidFill>
+                  <a:srgbClr val="000000"/>
+                </a:solidFill>
+                <a:effectLst/>
+                <a:latin typeface="Special#Default Metrics Font"/>
+                <a:ea typeface="Special#Default Metrics Font"/>
+                <a:cs typeface="Special#Default Metrics Font"/>
+              </a:rPr>
+              <a:t>) — ребро в </a:t>
+            </a:r>
+            <a:r>
+              <a:rPr lang="ru-RU" sz="1800" i="1" spc="0" dirty="0">
+                <a:solidFill>
+                  <a:srgbClr val="000000"/>
+                </a:solidFill>
+                <a:effectLst/>
+                <a:latin typeface="Special#Default Metrics Font"/>
+                <a:ea typeface="Special#Default Metrics Font"/>
+                <a:cs typeface="Special#Default Metrics Font"/>
+              </a:rPr>
+              <a:t>Е</a:t>
+            </a:r>
+            <a:r>
+              <a:rPr lang="ru-RU" sz="1800" dirty="0">
+                <a:solidFill>
+                  <a:srgbClr val="000000"/>
+                </a:solidFill>
+                <a:effectLst/>
+                <a:latin typeface="Special#Default Metrics Font"/>
+                <a:ea typeface="Special#Default Metrics Font"/>
+                <a:cs typeface="Special#Default Metrics Font"/>
+              </a:rPr>
+              <a:t>, если зоны </a:t>
+            </a:r>
+            <a:r>
+              <a:rPr lang="en-US" sz="1800" dirty="0" err="1">
+                <a:solidFill>
+                  <a:srgbClr val="000000"/>
+                </a:solidFill>
+                <a:effectLst/>
+                <a:latin typeface="Special#Default Metrics Font"/>
+                <a:ea typeface="Special#Default Metrics Font"/>
+                <a:cs typeface="Special#Default Metrics Font"/>
+              </a:rPr>
+              <a:t>i</a:t>
+            </a:r>
+            <a:r>
+              <a:rPr lang="ru-RU" sz="1800" dirty="0">
+                <a:solidFill>
+                  <a:srgbClr val="000000"/>
+                </a:solidFill>
+                <a:effectLst/>
+                <a:latin typeface="Special#Default Metrics Font"/>
+                <a:ea typeface="Special#Default Metrics Font"/>
+                <a:cs typeface="Special#Default Metrics Font"/>
+              </a:rPr>
+              <a:t> и </a:t>
+            </a:r>
+            <a:r>
+              <a:rPr lang="en-US" sz="1800" i="1" spc="0" dirty="0">
+                <a:solidFill>
+                  <a:srgbClr val="000000"/>
+                </a:solidFill>
+                <a:effectLst/>
+                <a:latin typeface="Special#Default Metrics Font"/>
+                <a:ea typeface="Special#Default Metrics Font"/>
+                <a:cs typeface="Special#Default Metrics Font"/>
+              </a:rPr>
+              <a:t>j</a:t>
+            </a:r>
+            <a:r>
+              <a:rPr lang="en-US" sz="1800" dirty="0">
+                <a:solidFill>
+                  <a:srgbClr val="000000"/>
+                </a:solidFill>
+                <a:effectLst/>
+                <a:latin typeface="Special#Default Metrics Font"/>
+                <a:ea typeface="Special#Default Metrics Font"/>
+                <a:cs typeface="Special#Default Metrics Font"/>
+              </a:rPr>
+              <a:t> </a:t>
+            </a:r>
+            <a:r>
+              <a:rPr lang="ru-RU" sz="1800" dirty="0">
+                <a:solidFill>
+                  <a:srgbClr val="000000"/>
+                </a:solidFill>
+                <a:effectLst/>
+                <a:latin typeface="Special#Default Metrics Font"/>
+                <a:ea typeface="Special#Default Metrics Font"/>
+                <a:cs typeface="Special#Default Metrics Font"/>
+              </a:rPr>
+              <a:t>являются смежными. Таким образом, градостроительные нормы требуют, чтобы полный набор кофеен образовал независимое множество в </a:t>
+            </a:r>
+            <a:r>
+              <a:rPr lang="en-US" sz="1800" i="1" spc="0" dirty="0">
+                <a:solidFill>
+                  <a:srgbClr val="000000"/>
+                </a:solidFill>
+                <a:effectLst/>
+                <a:latin typeface="Special#Default Metrics Font"/>
+                <a:ea typeface="Special#Default Metrics Font"/>
+                <a:cs typeface="Special#Default Metrics Font"/>
+              </a:rPr>
+              <a:t>G</a:t>
+            </a:r>
+            <a:r>
+              <a:rPr lang="ru-RU" sz="1800" i="1" spc="0" dirty="0">
+                <a:solidFill>
+                  <a:srgbClr val="000000"/>
+                </a:solidFill>
+                <a:effectLst/>
+                <a:latin typeface="Special#Default Metrics Font"/>
+                <a:ea typeface="Special#Default Metrics Font"/>
+                <a:cs typeface="Special#Default Metrics Font"/>
+              </a:rPr>
+              <a:t>.</a:t>
+            </a:r>
+            <a:endParaRPr lang="ru-RU" sz="1800" dirty="0">
+              <a:effectLst/>
+              <a:latin typeface="Special#Default Metrics Font"/>
+              <a:ea typeface="Special#Default Metrics Font"/>
+              <a:cs typeface="Special#Default Metrics Font"/>
+            </a:endParaRPr>
+          </a:p>
+          <a:p>
+            <a:pPr marL="514350" indent="-285750" algn="just">
+              <a:lnSpc>
+                <a:spcPct val="100000"/>
+              </a:lnSpc>
+            </a:pPr>
+            <a:r>
+              <a:rPr lang="ru-RU" sz="1800" dirty="0">
+                <a:solidFill>
+                  <a:srgbClr val="000000"/>
+                </a:solidFill>
+                <a:effectLst/>
+                <a:latin typeface="Special#Default Metrics Font"/>
+                <a:ea typeface="Special#Default Metrics Font"/>
+                <a:cs typeface="Special#Default Metrics Font"/>
+              </a:rPr>
+              <a:t>В нашей игре два игрока </a:t>
+            </a:r>
+            <a:r>
+              <a:rPr lang="ru-RU" sz="1800" b="1" i="1" spc="0" dirty="0">
+                <a:solidFill>
+                  <a:srgbClr val="000000"/>
+                </a:solidFill>
+                <a:effectLst/>
+                <a:latin typeface="Special#Default Metrics Font"/>
+                <a:ea typeface="Special#Default Metrics Font"/>
+                <a:cs typeface="Special#Default Metrics Font"/>
+              </a:rPr>
+              <a:t>Р</a:t>
+            </a:r>
+            <a:r>
+              <a:rPr lang="ru-RU" sz="1800" i="1" spc="0" baseline="-25000" dirty="0">
+                <a:solidFill>
+                  <a:srgbClr val="000000"/>
+                </a:solidFill>
+                <a:effectLst/>
+                <a:latin typeface="Special#Default Metrics Font"/>
+                <a:ea typeface="Special#Default Metrics Font"/>
+                <a:cs typeface="Special#Default Metrics Font"/>
+              </a:rPr>
+              <a:t>1</a:t>
+            </a:r>
+            <a:r>
+              <a:rPr lang="ru-RU" sz="1800" spc="0" dirty="0">
+                <a:solidFill>
+                  <a:srgbClr val="000000"/>
+                </a:solidFill>
+                <a:effectLst/>
+                <a:latin typeface="Special#Default Metrics Font"/>
+                <a:ea typeface="Special#Default Metrics Font"/>
+                <a:cs typeface="Special#Default Metrics Font"/>
+              </a:rPr>
+              <a:t> </a:t>
+            </a:r>
+            <a:r>
+              <a:rPr lang="ru-RU" sz="1800" dirty="0">
+                <a:solidFill>
+                  <a:srgbClr val="000000"/>
+                </a:solidFill>
+                <a:effectLst/>
+                <a:latin typeface="Special#Default Metrics Font"/>
+                <a:ea typeface="Special#Default Metrics Font"/>
+                <a:cs typeface="Special#Default Metrics Font"/>
+              </a:rPr>
+              <a:t>и </a:t>
+            </a:r>
+            <a:r>
+              <a:rPr lang="ru-RU" sz="1800" b="1" i="1" spc="0" dirty="0">
+                <a:solidFill>
+                  <a:srgbClr val="000000"/>
+                </a:solidFill>
+                <a:effectLst/>
+                <a:latin typeface="Special#Default Metrics Font"/>
+                <a:ea typeface="Special#Default Metrics Font"/>
+                <a:cs typeface="Special#Default Metrics Font"/>
+              </a:rPr>
+              <a:t>Р</a:t>
+            </a:r>
+            <a:r>
+              <a:rPr lang="ru-RU" sz="1800" i="1" spc="0" baseline="-25000" dirty="0">
+                <a:solidFill>
+                  <a:srgbClr val="000000"/>
+                </a:solidFill>
+                <a:effectLst/>
+                <a:latin typeface="Special#Default Metrics Font"/>
+                <a:ea typeface="Special#Default Metrics Font"/>
+                <a:cs typeface="Special#Default Metrics Font"/>
+              </a:rPr>
+              <a:t>2</a:t>
+            </a:r>
+            <a:r>
+              <a:rPr lang="ru-RU" sz="1800" spc="0" dirty="0">
+                <a:solidFill>
+                  <a:srgbClr val="000000"/>
+                </a:solidFill>
+                <a:effectLst/>
+                <a:latin typeface="Special#Default Metrics Font"/>
+                <a:ea typeface="Special#Default Metrics Font"/>
+                <a:cs typeface="Special#Default Metrics Font"/>
+              </a:rPr>
+              <a:t> </a:t>
+            </a:r>
+            <a:r>
+              <a:rPr lang="ru-RU" sz="1800" dirty="0">
+                <a:solidFill>
+                  <a:srgbClr val="000000"/>
+                </a:solidFill>
+                <a:effectLst/>
+                <a:latin typeface="Special#Default Metrics Font"/>
+                <a:ea typeface="Special#Default Metrics Font"/>
+                <a:cs typeface="Special#Default Metrics Font"/>
+              </a:rPr>
+              <a:t>поочередно выбирают узлы в </a:t>
+            </a:r>
+            <a:r>
+              <a:rPr lang="en-US" sz="1800" dirty="0">
+                <a:solidFill>
+                  <a:srgbClr val="000000"/>
+                </a:solidFill>
+                <a:effectLst/>
+                <a:latin typeface="Special#Default Metrics Font"/>
+                <a:ea typeface="Special#Default Metrics Font"/>
+                <a:cs typeface="Special#Default Metrics Font"/>
+              </a:rPr>
+              <a:t>G</a:t>
+            </a:r>
+            <a:r>
+              <a:rPr lang="ru-RU" sz="1800" dirty="0">
+                <a:solidFill>
+                  <a:srgbClr val="000000"/>
+                </a:solidFill>
+                <a:effectLst/>
+                <a:latin typeface="Special#Default Metrics Font"/>
+                <a:ea typeface="Special#Default Metrics Font"/>
+                <a:cs typeface="Special#Default Metrics Font"/>
+              </a:rPr>
+              <a:t>, игрок </a:t>
+            </a:r>
+            <a:r>
+              <a:rPr lang="ru-RU" sz="1800" b="1" i="1" spc="0" dirty="0">
+                <a:solidFill>
+                  <a:srgbClr val="000000"/>
+                </a:solidFill>
+                <a:effectLst/>
+                <a:latin typeface="Special#Default Metrics Font"/>
+                <a:ea typeface="Special#Default Metrics Font"/>
+                <a:cs typeface="Special#Default Metrics Font"/>
+              </a:rPr>
+              <a:t>Р</a:t>
+            </a:r>
+            <a:r>
+              <a:rPr lang="ru-RU" sz="1800" i="1" spc="0" baseline="-25000" dirty="0">
+                <a:solidFill>
+                  <a:srgbClr val="000000"/>
+                </a:solidFill>
+                <a:effectLst/>
+                <a:latin typeface="Special#Default Metrics Font"/>
+                <a:ea typeface="Special#Default Metrics Font"/>
+                <a:cs typeface="Special#Default Metrics Font"/>
+              </a:rPr>
+              <a:t>1</a:t>
+            </a:r>
+            <a:r>
+              <a:rPr lang="ru-RU" sz="1800" spc="0" dirty="0">
+                <a:solidFill>
+                  <a:srgbClr val="000000"/>
+                </a:solidFill>
+                <a:effectLst/>
+                <a:latin typeface="Special#Default Metrics Font"/>
+                <a:ea typeface="Special#Default Metrics Font"/>
+                <a:cs typeface="Special#Default Metrics Font"/>
+              </a:rPr>
+              <a:t> </a:t>
+            </a:r>
+            <a:r>
+              <a:rPr lang="ru-RU" sz="1800" dirty="0">
+                <a:solidFill>
+                  <a:srgbClr val="000000"/>
+                </a:solidFill>
+                <a:effectLst/>
+                <a:latin typeface="Special#Default Metrics Font"/>
+                <a:ea typeface="Special#Default Metrics Font"/>
+                <a:cs typeface="Special#Default Metrics Font"/>
+              </a:rPr>
+              <a:t>делает первый ход. Набор всех выбранных узлов в любой момент времени должен образовать независимое множество в </a:t>
+            </a:r>
+            <a:r>
+              <a:rPr lang="en-US" sz="1800" dirty="0">
+                <a:solidFill>
+                  <a:srgbClr val="000000"/>
+                </a:solidFill>
+                <a:effectLst/>
+                <a:latin typeface="Special#Default Metrics Font"/>
+                <a:ea typeface="Special#Default Metrics Font"/>
+                <a:cs typeface="Special#Default Metrics Font"/>
+              </a:rPr>
+              <a:t>G</a:t>
+            </a:r>
+            <a:r>
+              <a:rPr lang="ru-RU" sz="1800" dirty="0">
+                <a:solidFill>
+                  <a:srgbClr val="000000"/>
+                </a:solidFill>
+                <a:effectLst/>
+                <a:latin typeface="Special#Default Metrics Font"/>
+                <a:ea typeface="Special#Default Metrics Font"/>
+                <a:cs typeface="Special#Default Metrics Font"/>
+              </a:rPr>
+              <a:t>. Предположим, игрок </a:t>
+            </a:r>
+            <a:r>
+              <a:rPr lang="ru-RU" sz="1800" b="1" i="1" spc="0" dirty="0">
+                <a:solidFill>
+                  <a:srgbClr val="000000"/>
+                </a:solidFill>
+                <a:effectLst/>
+                <a:latin typeface="Special#Default Metrics Font"/>
+                <a:ea typeface="Special#Default Metrics Font"/>
+                <a:cs typeface="Special#Default Metrics Font"/>
+              </a:rPr>
+              <a:t>Р</a:t>
+            </a:r>
+            <a:r>
+              <a:rPr lang="ru-RU" sz="1800" i="1" spc="0" baseline="-25000" dirty="0">
+                <a:solidFill>
+                  <a:srgbClr val="000000"/>
+                </a:solidFill>
+                <a:effectLst/>
+                <a:latin typeface="Special#Default Metrics Font"/>
+                <a:ea typeface="Special#Default Metrics Font"/>
+                <a:cs typeface="Special#Default Metrics Font"/>
+              </a:rPr>
+              <a:t>2</a:t>
+            </a:r>
+            <a:r>
+              <a:rPr lang="ru-RU" sz="1800" spc="0" dirty="0">
+                <a:solidFill>
+                  <a:srgbClr val="000000"/>
+                </a:solidFill>
+                <a:effectLst/>
+                <a:latin typeface="Special#Default Metrics Font"/>
+                <a:ea typeface="Special#Default Metrics Font"/>
+                <a:cs typeface="Special#Default Metrics Font"/>
+              </a:rPr>
+              <a:t> </a:t>
+            </a:r>
+            <a:r>
+              <a:rPr lang="ru-RU" sz="1800" dirty="0">
+                <a:solidFill>
+                  <a:srgbClr val="000000"/>
+                </a:solidFill>
+                <a:effectLst/>
+                <a:latin typeface="Special#Default Metrics Font"/>
+                <a:ea typeface="Special#Default Metrics Font"/>
+                <a:cs typeface="Special#Default Metrics Font"/>
+              </a:rPr>
+              <a:t>имеет целевую границу </a:t>
+            </a:r>
+            <a:r>
+              <a:rPr lang="ru-RU" sz="1800" i="1" spc="0" dirty="0">
+                <a:solidFill>
+                  <a:srgbClr val="000000"/>
+                </a:solidFill>
+                <a:effectLst/>
+                <a:latin typeface="Special#Default Metrics Font"/>
+                <a:ea typeface="Special#Default Metrics Font"/>
+                <a:cs typeface="Special#Default Metrics Font"/>
+              </a:rPr>
+              <a:t>В</a:t>
+            </a:r>
+            <a:r>
+              <a:rPr lang="ru-RU" sz="1800" dirty="0">
+                <a:solidFill>
+                  <a:srgbClr val="000000"/>
+                </a:solidFill>
+                <a:effectLst/>
+                <a:latin typeface="Special#Default Metrics Font"/>
+                <a:ea typeface="Special#Default Metrics Font"/>
+                <a:cs typeface="Special#Default Metrics Font"/>
+              </a:rPr>
+              <a:t>, и мы хотим узнать: существует ли для </a:t>
+            </a:r>
+            <a:r>
+              <a:rPr lang="ru-RU" sz="1800" b="1" i="1" spc="0" dirty="0">
+                <a:solidFill>
+                  <a:srgbClr val="000000"/>
+                </a:solidFill>
+                <a:effectLst/>
+                <a:latin typeface="Special#Default Metrics Font"/>
+                <a:ea typeface="Special#Default Metrics Font"/>
+                <a:cs typeface="Special#Default Metrics Font"/>
+              </a:rPr>
+              <a:t>Р</a:t>
+            </a:r>
+            <a:r>
+              <a:rPr lang="ru-RU" sz="1800" i="1" spc="0" baseline="-25000" dirty="0">
+                <a:solidFill>
+                  <a:srgbClr val="000000"/>
+                </a:solidFill>
+                <a:effectLst/>
+                <a:latin typeface="Special#Default Metrics Font"/>
+                <a:ea typeface="Special#Default Metrics Font"/>
+                <a:cs typeface="Special#Default Metrics Font"/>
+              </a:rPr>
+              <a:t>2</a:t>
+            </a:r>
+            <a:r>
+              <a:rPr lang="ru-RU" sz="1800" spc="0" dirty="0">
+                <a:solidFill>
+                  <a:srgbClr val="000000"/>
+                </a:solidFill>
+                <a:effectLst/>
+                <a:latin typeface="Special#Default Metrics Font"/>
+                <a:ea typeface="Special#Default Metrics Font"/>
+                <a:cs typeface="Special#Default Metrics Font"/>
+              </a:rPr>
+              <a:t> </a:t>
+            </a:r>
+            <a:r>
+              <a:rPr lang="ru-RU" sz="1800" dirty="0">
+                <a:solidFill>
+                  <a:srgbClr val="000000"/>
+                </a:solidFill>
+                <a:effectLst/>
+                <a:latin typeface="Special#Default Metrics Font"/>
+                <a:ea typeface="Special#Default Metrics Font"/>
+                <a:cs typeface="Special#Default Metrics Font"/>
+              </a:rPr>
+              <a:t>такая стратегия, чтобы независимо от выбора ходов </a:t>
+            </a:r>
+            <a:r>
+              <a:rPr lang="ru-RU" sz="1800" b="1" i="1" spc="0" dirty="0">
+                <a:solidFill>
+                  <a:srgbClr val="000000"/>
+                </a:solidFill>
+                <a:effectLst/>
+                <a:latin typeface="Special#Default Metrics Font"/>
+                <a:ea typeface="Special#Default Metrics Font"/>
+                <a:cs typeface="Special#Default Metrics Font"/>
+              </a:rPr>
+              <a:t>Р</a:t>
+            </a:r>
+            <a:r>
+              <a:rPr lang="ru-RU" sz="1800" i="1" spc="0" baseline="-25000" dirty="0">
+                <a:solidFill>
+                  <a:srgbClr val="000000"/>
+                </a:solidFill>
+                <a:effectLst/>
+                <a:latin typeface="Special#Default Metrics Font"/>
+                <a:ea typeface="Special#Default Metrics Font"/>
+                <a:cs typeface="Special#Default Metrics Font"/>
+              </a:rPr>
+              <a:t>1</a:t>
+            </a:r>
+            <a:r>
+              <a:rPr lang="ru-RU" sz="1800" spc="0" dirty="0">
+                <a:solidFill>
+                  <a:srgbClr val="000000"/>
+                </a:solidFill>
+                <a:effectLst/>
+                <a:latin typeface="Special#Default Metrics Font"/>
+                <a:ea typeface="Special#Default Metrics Font"/>
+                <a:cs typeface="Special#Default Metrics Font"/>
+              </a:rPr>
+              <a:t> </a:t>
+            </a:r>
+            <a:r>
+              <a:rPr lang="ru-RU" sz="1800" dirty="0">
+                <a:solidFill>
+                  <a:srgbClr val="000000"/>
+                </a:solidFill>
+                <a:effectLst/>
+                <a:latin typeface="Special#Default Metrics Font"/>
+                <a:ea typeface="Special#Default Metrics Font"/>
+                <a:cs typeface="Special#Default Metrics Font"/>
+              </a:rPr>
+              <a:t>игрок </a:t>
+            </a:r>
+            <a:r>
+              <a:rPr lang="ru-RU" sz="1800" b="1" i="1" spc="0" dirty="0">
+                <a:solidFill>
+                  <a:srgbClr val="000000"/>
+                </a:solidFill>
+                <a:effectLst/>
+                <a:latin typeface="Special#Default Metrics Font"/>
+                <a:ea typeface="Special#Default Metrics Font"/>
+                <a:cs typeface="Special#Default Metrics Font"/>
+              </a:rPr>
+              <a:t>Р</a:t>
+            </a:r>
+            <a:r>
+              <a:rPr lang="ru-RU" sz="1800" i="1" spc="0" baseline="-25000" dirty="0">
+                <a:solidFill>
+                  <a:srgbClr val="000000"/>
+                </a:solidFill>
+                <a:effectLst/>
+                <a:latin typeface="Special#Default Metrics Font"/>
+                <a:ea typeface="Special#Default Metrics Font"/>
+                <a:cs typeface="Special#Default Metrics Font"/>
+              </a:rPr>
+              <a:t>2</a:t>
+            </a:r>
+            <a:r>
+              <a:rPr lang="ru-RU" sz="1800" spc="0" dirty="0">
+                <a:solidFill>
+                  <a:srgbClr val="000000"/>
+                </a:solidFill>
+                <a:effectLst/>
+                <a:latin typeface="Special#Default Metrics Font"/>
+                <a:ea typeface="Special#Default Metrics Font"/>
+                <a:cs typeface="Special#Default Metrics Font"/>
+              </a:rPr>
+              <a:t> </a:t>
+            </a:r>
+            <a:r>
+              <a:rPr lang="ru-RU" sz="1800" dirty="0">
+                <a:solidFill>
+                  <a:srgbClr val="000000"/>
+                </a:solidFill>
+                <a:effectLst/>
+                <a:latin typeface="Special#Default Metrics Font"/>
+                <a:ea typeface="Special#Default Metrics Font"/>
+                <a:cs typeface="Special#Default Metrics Font"/>
+              </a:rPr>
+              <a:t>мог выбрать множество узлов с суммарной оценкой не ниже </a:t>
+            </a:r>
+            <a:r>
+              <a:rPr lang="ru-RU" sz="1800" i="1" spc="0" dirty="0">
+                <a:solidFill>
+                  <a:srgbClr val="000000"/>
+                </a:solidFill>
+                <a:effectLst/>
+                <a:latin typeface="Special#Default Metrics Font"/>
+                <a:ea typeface="Special#Default Metrics Font"/>
+                <a:cs typeface="Special#Default Metrics Font"/>
+              </a:rPr>
+              <a:t>В</a:t>
+            </a:r>
+            <a:r>
+              <a:rPr lang="ru-RU" sz="1800" dirty="0">
+                <a:solidFill>
+                  <a:srgbClr val="000000"/>
+                </a:solidFill>
+                <a:effectLst/>
+                <a:latin typeface="Special#Default Metrics Font"/>
+                <a:ea typeface="Special#Default Metrics Font"/>
+                <a:cs typeface="Special#Default Metrics Font"/>
+              </a:rPr>
+              <a:t>?</a:t>
+            </a:r>
+            <a:endParaRPr lang="ru-RU" sz="1800" dirty="0">
+              <a:effectLst/>
+              <a:latin typeface="Special#Default Metrics Font"/>
+              <a:ea typeface="Special#Default Metrics Font"/>
+              <a:cs typeface="Special#Default Metrics Font"/>
+            </a:endParaRPr>
+          </a:p>
+        </p:txBody>
+      </p:sp>
+    </p:spTree>
+    <p:extLst>
+      <p:ext uri="{BB962C8B-B14F-4D97-AF65-F5344CB8AC3E}">
+        <p14:creationId xmlns:p14="http://schemas.microsoft.com/office/powerpoint/2010/main" val="337862697"/>
+      </p:ext>
+    </p:extLst>
+  </p:cSld>
+  <p:clrMapOvr>
+    <a:masterClrMapping/>
+  </p:clrMapOvr>
+</p:sld>
+</file>
+
+<file path=ppt/slides/slide23.xml><?xml version="1.0" encoding="utf-8"?>
+<p:sld xmlns:a="http://schemas.openxmlformats.org/drawingml/2006/main" xmlns:r="http://schemas.openxmlformats.org/officeDocument/2006/relationships" xmlns:p="http://schemas.openxmlformats.org/presentationml/2006/main">
+  <p:cSld>
+    <p:spTree>
+      <p:nvGrpSpPr>
+        <p:cNvPr id="1" name=""/>
+        <p:cNvGrpSpPr/>
+        <p:nvPr/>
+      </p:nvGrpSpPr>
+      <p:grpSpPr>
+        <a:xfrm>
+          <a:off x="0" y="0"/>
+          <a:ext cx="0" cy="0"/>
+          <a:chOff x="0" y="0"/>
+          <a:chExt cx="0" cy="0"/>
+        </a:xfrm>
+      </p:grpSpPr>
+      <p:sp>
+        <p:nvSpPr>
+          <p:cNvPr id="2" name="Заголовок 1">
+            <a:extLst>
+              <a:ext uri="{FF2B5EF4-FFF2-40B4-BE49-F238E27FC236}">
+                <a16:creationId xmlns:a16="http://schemas.microsoft.com/office/drawing/2014/main" id="{9530887E-8699-2544-90A8-ABF33538D081}"/>
+              </a:ext>
+            </a:extLst>
+          </p:cNvPr>
+          <p:cNvSpPr>
+            <a:spLocks noGrp="1"/>
+          </p:cNvSpPr>
+          <p:nvPr>
+            <p:ph type="title"/>
+          </p:nvPr>
+        </p:nvSpPr>
+        <p:spPr/>
+        <p:txBody>
+          <a:bodyPr/>
+          <a:lstStyle/>
+          <a:p>
+            <a:r>
+              <a:rPr lang="ru-RU" dirty="0"/>
+              <a:t>Пример конкурентного размещения</a:t>
+            </a:r>
+          </a:p>
+        </p:txBody>
+      </p:sp>
+      <p:sp>
+        <p:nvSpPr>
+          <p:cNvPr id="3" name="Объект 2">
+            <a:extLst>
+              <a:ext uri="{FF2B5EF4-FFF2-40B4-BE49-F238E27FC236}">
+                <a16:creationId xmlns:a16="http://schemas.microsoft.com/office/drawing/2014/main" id="{FD0936E3-2DB1-E043-B760-A6E698E75A53}"/>
+              </a:ext>
+            </a:extLst>
+          </p:cNvPr>
+          <p:cNvSpPr>
+            <a:spLocks noGrp="1"/>
+          </p:cNvSpPr>
+          <p:nvPr>
+            <p:ph idx="1"/>
+          </p:nvPr>
+        </p:nvSpPr>
+        <p:spPr>
+          <a:xfrm>
+            <a:off x="628650" y="3859619"/>
+            <a:ext cx="7886700" cy="2317344"/>
+          </a:xfrm>
+        </p:spPr>
+        <p:txBody>
+          <a:bodyPr/>
+          <a:lstStyle/>
+          <a:p>
+            <a:pPr marL="0" indent="0">
+              <a:buNone/>
+            </a:pPr>
+            <a:r>
+              <a:rPr lang="ru-RU" dirty="0">
+                <a:solidFill>
+                  <a:srgbClr val="000000"/>
+                </a:solidFill>
+                <a:latin typeface="Special#Default Metrics Font"/>
+                <a:ea typeface="Special#Default Metrics Font"/>
+                <a:cs typeface="Special#Default Metrics Font"/>
+              </a:rPr>
+              <a:t>П</a:t>
+            </a:r>
+            <a:r>
+              <a:rPr lang="ru-RU" sz="2800" dirty="0">
+                <a:solidFill>
+                  <a:srgbClr val="000000"/>
+                </a:solidFill>
+                <a:effectLst/>
+                <a:latin typeface="Special#Default Metrics Font"/>
+                <a:ea typeface="Special#Default Metrics Font"/>
+                <a:cs typeface="Special#Default Metrics Font"/>
+              </a:rPr>
+              <a:t>редположим, игроку </a:t>
+            </a:r>
+            <a:r>
+              <a:rPr lang="ru-RU" sz="2800" b="1" i="1" spc="0" dirty="0">
+                <a:solidFill>
+                  <a:srgbClr val="000000"/>
+                </a:solidFill>
+                <a:effectLst/>
+                <a:latin typeface="Special#Default Metrics Font"/>
+                <a:ea typeface="Special#Default Metrics Font"/>
+                <a:cs typeface="Special#Default Metrics Font"/>
+              </a:rPr>
+              <a:t>Р</a:t>
+            </a:r>
+            <a:r>
+              <a:rPr lang="ru-RU" sz="2800" i="1" spc="0" baseline="-25000" dirty="0">
+                <a:solidFill>
+                  <a:srgbClr val="000000"/>
+                </a:solidFill>
+                <a:effectLst/>
+                <a:latin typeface="Special#Default Metrics Font"/>
+                <a:ea typeface="Special#Default Metrics Font"/>
+                <a:cs typeface="Special#Default Metrics Font"/>
+              </a:rPr>
+              <a:t>2</a:t>
+            </a:r>
+            <a:r>
+              <a:rPr lang="ru-RU" sz="2800" spc="0" dirty="0">
+                <a:solidFill>
+                  <a:srgbClr val="000000"/>
+                </a:solidFill>
+                <a:effectLst/>
+                <a:latin typeface="Special#Default Metrics Font"/>
+                <a:ea typeface="Special#Default Metrics Font"/>
+                <a:cs typeface="Special#Default Metrics Font"/>
+              </a:rPr>
+              <a:t> </a:t>
+            </a:r>
+            <a:r>
+              <a:rPr lang="ru-RU" sz="2800" dirty="0">
+                <a:solidFill>
+                  <a:srgbClr val="000000"/>
+                </a:solidFill>
+                <a:effectLst/>
+                <a:latin typeface="Special#Default Metrics Font"/>
+                <a:ea typeface="Special#Default Metrics Font"/>
+                <a:cs typeface="Special#Default Metrics Font"/>
+              </a:rPr>
+              <a:t>установлена целевая граница </a:t>
+            </a:r>
+            <a:r>
+              <a:rPr lang="ru-RU" sz="2800" b="1" i="1" spc="0" dirty="0">
+                <a:solidFill>
+                  <a:srgbClr val="000000"/>
+                </a:solidFill>
+                <a:effectLst/>
+                <a:latin typeface="Special#Default Metrics Font"/>
+                <a:ea typeface="Special#Default Metrics Font"/>
+                <a:cs typeface="Special#Default Metrics Font"/>
+              </a:rPr>
+              <a:t>В</a:t>
+            </a:r>
+            <a:r>
+              <a:rPr lang="ru-RU" sz="2800" spc="0" dirty="0">
+                <a:solidFill>
+                  <a:srgbClr val="000000"/>
+                </a:solidFill>
+                <a:effectLst/>
+                <a:latin typeface="Special#Default Metrics Font"/>
+                <a:ea typeface="Special#Default Metrics Font"/>
+                <a:cs typeface="Special#Default Metrics Font"/>
+              </a:rPr>
+              <a:t> </a:t>
+            </a:r>
+            <a:r>
+              <a:rPr lang="ru-RU" sz="2800" dirty="0">
+                <a:solidFill>
+                  <a:srgbClr val="000000"/>
+                </a:solidFill>
+                <a:effectLst/>
+                <a:latin typeface="Special#Default Metrics Font"/>
+                <a:ea typeface="Special#Default Metrics Font"/>
+                <a:cs typeface="Special#Default Metrics Font"/>
+              </a:rPr>
+              <a:t>= 20. В этом случае у </a:t>
+            </a:r>
+            <a:r>
+              <a:rPr lang="ru-RU" sz="2800" b="1" i="1" spc="0" dirty="0">
+                <a:solidFill>
+                  <a:srgbClr val="000000"/>
+                </a:solidFill>
+                <a:effectLst/>
+                <a:latin typeface="Special#Default Metrics Font"/>
+                <a:ea typeface="Special#Default Metrics Font"/>
+                <a:cs typeface="Special#Default Metrics Font"/>
+              </a:rPr>
+              <a:t>Р</a:t>
+            </a:r>
+            <a:r>
+              <a:rPr lang="ru-RU" sz="2800" i="1" spc="0" baseline="-25000" dirty="0">
+                <a:solidFill>
+                  <a:srgbClr val="000000"/>
+                </a:solidFill>
+                <a:effectLst/>
+                <a:latin typeface="Special#Default Metrics Font"/>
+                <a:ea typeface="Special#Default Metrics Font"/>
+                <a:cs typeface="Special#Default Metrics Font"/>
+              </a:rPr>
+              <a:t>2</a:t>
+            </a:r>
+            <a:r>
+              <a:rPr lang="ru-RU" sz="2800" spc="0" dirty="0">
+                <a:solidFill>
+                  <a:srgbClr val="000000"/>
+                </a:solidFill>
+                <a:effectLst/>
+                <a:latin typeface="Special#Default Metrics Font"/>
+                <a:ea typeface="Special#Default Metrics Font"/>
+                <a:cs typeface="Special#Default Metrics Font"/>
+              </a:rPr>
+              <a:t> </a:t>
+            </a:r>
+            <a:r>
+              <a:rPr lang="ru-RU" sz="2800" dirty="0">
+                <a:solidFill>
+                  <a:srgbClr val="000000"/>
+                </a:solidFill>
+                <a:effectLst/>
+                <a:latin typeface="Special#Default Metrics Font"/>
+                <a:ea typeface="Special#Default Metrics Font"/>
+                <a:cs typeface="Special#Default Metrics Font"/>
+              </a:rPr>
+              <a:t>имеется выигрышная стратегия. С другой стороны, при </a:t>
+            </a:r>
+            <a:r>
+              <a:rPr lang="ru-RU" sz="2800" b="1" i="1" spc="0" dirty="0">
+                <a:solidFill>
+                  <a:srgbClr val="000000"/>
+                </a:solidFill>
+                <a:effectLst/>
+                <a:latin typeface="Special#Default Metrics Font"/>
+                <a:ea typeface="Special#Default Metrics Font"/>
+                <a:cs typeface="Special#Default Metrics Font"/>
+              </a:rPr>
+              <a:t>В</a:t>
+            </a:r>
+            <a:r>
+              <a:rPr lang="ru-RU" sz="2800" spc="0" dirty="0">
+                <a:solidFill>
+                  <a:srgbClr val="000000"/>
+                </a:solidFill>
+                <a:effectLst/>
+                <a:latin typeface="Special#Default Metrics Font"/>
+                <a:ea typeface="Special#Default Metrics Font"/>
+                <a:cs typeface="Special#Default Metrics Font"/>
+              </a:rPr>
+              <a:t> </a:t>
+            </a:r>
+            <a:r>
+              <a:rPr lang="ru-RU" sz="2800" dirty="0">
+                <a:solidFill>
+                  <a:srgbClr val="000000"/>
+                </a:solidFill>
+                <a:effectLst/>
+                <a:latin typeface="Special#Default Metrics Font"/>
+                <a:ea typeface="Special#Default Metrics Font"/>
+                <a:cs typeface="Special#Default Metrics Font"/>
+              </a:rPr>
+              <a:t>= 25 у игрока </a:t>
+            </a:r>
+            <a:r>
+              <a:rPr lang="ru-RU" sz="2800" b="1" i="1" spc="0" dirty="0">
+                <a:solidFill>
+                  <a:srgbClr val="000000"/>
+                </a:solidFill>
+                <a:effectLst/>
+                <a:latin typeface="Special#Default Metrics Font"/>
+                <a:ea typeface="Special#Default Metrics Font"/>
+                <a:cs typeface="Special#Default Metrics Font"/>
+              </a:rPr>
+              <a:t>Р</a:t>
+            </a:r>
+            <a:r>
+              <a:rPr lang="ru-RU" sz="2800" i="1" spc="0" baseline="-25000" dirty="0">
+                <a:solidFill>
+                  <a:srgbClr val="000000"/>
+                </a:solidFill>
+                <a:effectLst/>
+                <a:latin typeface="Special#Default Metrics Font"/>
+                <a:ea typeface="Special#Default Metrics Font"/>
+                <a:cs typeface="Special#Default Metrics Font"/>
+              </a:rPr>
+              <a:t>2</a:t>
+            </a:r>
+            <a:r>
+              <a:rPr lang="ru-RU" sz="2800" spc="0" dirty="0">
+                <a:solidFill>
+                  <a:srgbClr val="000000"/>
+                </a:solidFill>
+                <a:effectLst/>
+                <a:latin typeface="Special#Default Metrics Font"/>
+                <a:ea typeface="Special#Default Metrics Font"/>
+                <a:cs typeface="Special#Default Metrics Font"/>
+              </a:rPr>
+              <a:t> </a:t>
+            </a:r>
+            <a:r>
+              <a:rPr lang="ru-RU" sz="2800" dirty="0">
+                <a:solidFill>
+                  <a:srgbClr val="000000"/>
+                </a:solidFill>
+                <a:effectLst/>
+                <a:latin typeface="Special#Default Metrics Font"/>
+                <a:ea typeface="Special#Default Metrics Font"/>
+                <a:cs typeface="Special#Default Metrics Font"/>
+              </a:rPr>
+              <a:t>такой стратегии нет.</a:t>
+            </a:r>
+            <a:endParaRPr lang="ru-RU" sz="2800" dirty="0">
+              <a:effectLst/>
+              <a:latin typeface="Special#Default Metrics Font"/>
+              <a:ea typeface="Special#Default Metrics Font"/>
+              <a:cs typeface="Special#Default Metrics Font"/>
+            </a:endParaRPr>
+          </a:p>
+          <a:p>
+            <a:endParaRPr lang="ru-RU" dirty="0"/>
+          </a:p>
+        </p:txBody>
+      </p:sp>
+      <p:pic>
+        <p:nvPicPr>
+          <p:cNvPr id="4" name="Рисунок 3">
+            <a:extLst>
+              <a:ext uri="{FF2B5EF4-FFF2-40B4-BE49-F238E27FC236}">
+                <a16:creationId xmlns:a16="http://schemas.microsoft.com/office/drawing/2014/main" id="{14B0A9F5-DF09-AC4E-9DD1-33E6DD0124DD}"/>
+              </a:ext>
+            </a:extLst>
+          </p:cNvPr>
+          <p:cNvPicPr>
+            <a:picLocks noChangeAspect="1"/>
+          </p:cNvPicPr>
+          <p:nvPr/>
+        </p:nvPicPr>
+        <p:blipFill>
+          <a:blip r:embed="rId2"/>
+          <a:stretch>
+            <a:fillRect/>
+          </a:stretch>
+        </p:blipFill>
+        <p:spPr>
+          <a:xfrm>
+            <a:off x="628650" y="2433046"/>
+            <a:ext cx="7509833" cy="809884"/>
+          </a:xfrm>
+          <a:prstGeom prst="rect">
+            <a:avLst/>
+          </a:prstGeom>
+        </p:spPr>
+      </p:pic>
+    </p:spTree>
+    <p:extLst>
+      <p:ext uri="{BB962C8B-B14F-4D97-AF65-F5344CB8AC3E}">
+        <p14:creationId xmlns:p14="http://schemas.microsoft.com/office/powerpoint/2010/main" val="1339015728"/>
+      </p:ext>
+    </p:extLst>
+  </p:cSld>
+  <p:clrMapOvr>
+    <a:masterClrMapping/>
+  </p:clrMapOvr>
+</p:sld>
+</file>
+
+<file path=ppt/slides/slide24.xml><?xml version="1.0" encoding="utf-8"?>
+<p:sld xmlns:a="http://schemas.openxmlformats.org/drawingml/2006/main" xmlns:r="http://schemas.openxmlformats.org/officeDocument/2006/relationships" xmlns:p="http://schemas.openxmlformats.org/presentationml/2006/main">
+  <p:cSld>
+    <p:spTree>
+      <p:nvGrpSpPr>
+        <p:cNvPr id="1" name=""/>
+        <p:cNvGrpSpPr/>
+        <p:nvPr/>
+      </p:nvGrpSpPr>
+      <p:grpSpPr>
+        <a:xfrm>
+          <a:off x="0" y="0"/>
+          <a:ext cx="0" cy="0"/>
+          <a:chOff x="0" y="0"/>
+          <a:chExt cx="0" cy="0"/>
+        </a:xfrm>
+      </p:grpSpPr>
+      <p:sp>
+        <p:nvSpPr>
+          <p:cNvPr id="2" name="Заголовок 1">
+            <a:extLst>
+              <a:ext uri="{FF2B5EF4-FFF2-40B4-BE49-F238E27FC236}">
+                <a16:creationId xmlns:a16="http://schemas.microsoft.com/office/drawing/2014/main" id="{2B945F8F-E17B-034B-B997-2D1128533138}"/>
+              </a:ext>
+            </a:extLst>
+          </p:cNvPr>
+          <p:cNvSpPr>
+            <a:spLocks noGrp="1"/>
+          </p:cNvSpPr>
+          <p:nvPr>
+            <p:ph type="title"/>
+          </p:nvPr>
+        </p:nvSpPr>
+        <p:spPr/>
+        <p:txBody>
+          <a:bodyPr/>
+          <a:lstStyle/>
+          <a:p>
+            <a:r>
+              <a:rPr lang="ru-RU" dirty="0"/>
+              <a:t>Класс задачи конкурентного размещения</a:t>
+            </a:r>
+          </a:p>
+        </p:txBody>
+      </p:sp>
+      <p:sp>
+        <p:nvSpPr>
+          <p:cNvPr id="3" name="Объект 2">
+            <a:extLst>
+              <a:ext uri="{FF2B5EF4-FFF2-40B4-BE49-F238E27FC236}">
+                <a16:creationId xmlns:a16="http://schemas.microsoft.com/office/drawing/2014/main" id="{4A34C9CA-2827-0445-AA82-670E1EC24868}"/>
+              </a:ext>
+            </a:extLst>
+          </p:cNvPr>
+          <p:cNvSpPr>
+            <a:spLocks noGrp="1"/>
+          </p:cNvSpPr>
+          <p:nvPr>
+            <p:ph idx="1"/>
+          </p:nvPr>
+        </p:nvSpPr>
+        <p:spPr>
+          <a:ln>
+            <a:noFill/>
+          </a:ln>
+        </p:spPr>
+        <p:style>
+          <a:lnRef idx="2">
+            <a:schemeClr val="accent1"/>
+          </a:lnRef>
+          <a:fillRef idx="1">
+            <a:schemeClr val="lt1"/>
+          </a:fillRef>
+          <a:effectRef idx="0">
+            <a:schemeClr val="accent1"/>
+          </a:effectRef>
+          <a:fontRef idx="minor">
+            <a:schemeClr val="dk1"/>
+          </a:fontRef>
+        </p:style>
+        <p:txBody>
+          <a:bodyPr>
+            <a:normAutofit fontScale="85000" lnSpcReduction="20000"/>
+          </a:bodyPr>
+          <a:lstStyle/>
+          <a:p>
+            <a:r>
+              <a:rPr lang="ru-RU" dirty="0"/>
+              <a:t>Задача конкурентного размещения отличается от задачи независимого множества, в которой, насколько нам известно, найти большое решение сложно, зато предложенное большое решение проверяется легко. </a:t>
+            </a:r>
+          </a:p>
+          <a:p>
+            <a:r>
+              <a:rPr lang="ru-RU" dirty="0"/>
+              <a:t>Эти отличия формализуются в классе </a:t>
+            </a:r>
+            <a:r>
+              <a:rPr lang="en" dirty="0"/>
+              <a:t>PSPACE-</a:t>
+            </a:r>
+            <a:r>
+              <a:rPr lang="ru-RU" dirty="0"/>
+              <a:t>полых задач, к которому принадлежит задача конкурентного размещения.</a:t>
+            </a:r>
+          </a:p>
+          <a:p>
+            <a:r>
+              <a:rPr lang="ru-RU" dirty="0"/>
+              <a:t>Считается, что </a:t>
+            </a:r>
+            <a:r>
+              <a:rPr lang="en" dirty="0"/>
+              <a:t>PSPACE-</a:t>
+            </a:r>
+            <a:r>
+              <a:rPr lang="ru-RU" dirty="0"/>
+              <a:t>полные задачи строго сложнее </a:t>
+            </a:r>
+            <a:r>
+              <a:rPr lang="en" dirty="0"/>
+              <a:t>NP-</a:t>
+            </a:r>
+            <a:r>
+              <a:rPr lang="ru-RU" dirty="0"/>
+              <a:t>полных задач, и это предполагаемое отсутствие коротких «доказательств» их решений является признаком этой повышенной сложности. </a:t>
+            </a:r>
+          </a:p>
+          <a:p>
+            <a:r>
+              <a:rPr lang="ru-RU" dirty="0"/>
+              <a:t>Концепция </a:t>
+            </a:r>
+            <a:r>
+              <a:rPr lang="en" dirty="0"/>
+              <a:t>PSPACE-</a:t>
+            </a:r>
+            <a:r>
+              <a:rPr lang="ru-RU" dirty="0"/>
+              <a:t>полноты отражает широкий спектр задач, связанных с играми и планированием; многие из них считаются фундаментальными проблемами в области искусственного интеллекта. </a:t>
+            </a:r>
+          </a:p>
+          <a:p>
+            <a:endParaRPr lang="ru-RU" dirty="0"/>
+          </a:p>
+        </p:txBody>
+      </p:sp>
+    </p:spTree>
+    <p:extLst>
+      <p:ext uri="{BB962C8B-B14F-4D97-AF65-F5344CB8AC3E}">
+        <p14:creationId xmlns:p14="http://schemas.microsoft.com/office/powerpoint/2010/main" val="1628945609"/>
+      </p:ext>
+    </p:extLst>
+  </p:cSld>
+  <p:clrMapOvr>
+    <a:masterClrMapping/>
+  </p:clrMapOvr>
+</p:sld>
+</file>
+
+<file path=ppt/slides/slide25.xml><?xml version="1.0" encoding="utf-8"?>
+<p:sld xmlns:a="http://schemas.openxmlformats.org/drawingml/2006/main" xmlns:r="http://schemas.openxmlformats.org/officeDocument/2006/relationships" xmlns:p="http://schemas.openxmlformats.org/presentationml/2006/main">
+  <p:cSld>
+    <p:spTree>
+      <p:nvGrpSpPr>
+        <p:cNvPr id="1" name=""/>
+        <p:cNvGrpSpPr/>
+        <p:nvPr/>
+      </p:nvGrpSpPr>
+      <p:grpSpPr>
+        <a:xfrm>
+          <a:off x="0" y="0"/>
+          <a:ext cx="0" cy="0"/>
+          <a:chOff x="0" y="0"/>
+          <a:chExt cx="0" cy="0"/>
+        </a:xfrm>
+      </p:grpSpPr>
+      <p:sp>
+        <p:nvSpPr>
+          <p:cNvPr id="2" name="Заголовок 1">
+            <a:extLst>
+              <a:ext uri="{FF2B5EF4-FFF2-40B4-BE49-F238E27FC236}">
+                <a16:creationId xmlns:a16="http://schemas.microsoft.com/office/drawing/2014/main" id="{E88875E0-8933-4F49-BCF4-5EEED5B70688}"/>
+              </a:ext>
+            </a:extLst>
+          </p:cNvPr>
+          <p:cNvSpPr>
+            <a:spLocks noGrp="1"/>
+          </p:cNvSpPr>
+          <p:nvPr>
+            <p:ph type="title"/>
+          </p:nvPr>
+        </p:nvSpPr>
+        <p:spPr/>
+        <p:txBody>
+          <a:bodyPr/>
+          <a:lstStyle/>
+          <a:p>
+            <a:r>
+              <a:rPr lang="ru-RU" dirty="0"/>
+              <a:t>Домашнее задание 3</a:t>
+            </a:r>
+          </a:p>
+        </p:txBody>
+      </p:sp>
+      <p:sp>
+        <p:nvSpPr>
+          <p:cNvPr id="3" name="Объект 2">
+            <a:extLst>
+              <a:ext uri="{FF2B5EF4-FFF2-40B4-BE49-F238E27FC236}">
+                <a16:creationId xmlns:a16="http://schemas.microsoft.com/office/drawing/2014/main" id="{20651419-F750-6547-BD33-02C0B24EBF13}"/>
+              </a:ext>
+            </a:extLst>
+          </p:cNvPr>
+          <p:cNvSpPr>
+            <a:spLocks noGrp="1"/>
+          </p:cNvSpPr>
+          <p:nvPr>
+            <p:ph idx="1"/>
+          </p:nvPr>
+        </p:nvSpPr>
+        <p:spPr/>
+        <p:txBody>
+          <a:bodyPr/>
+          <a:lstStyle/>
+          <a:p>
+            <a:pPr marL="0" indent="0">
+              <a:buNone/>
+            </a:pPr>
+            <a:r>
+              <a:rPr lang="ru-RU" dirty="0"/>
+              <a:t>Одна из задач на выбор:</a:t>
+            </a:r>
+          </a:p>
+          <a:p>
+            <a:pPr marL="514350" indent="-514350">
+              <a:buFont typeface="+mj-lt"/>
+              <a:buAutoNum type="arabicPeriod"/>
+            </a:pPr>
+            <a:r>
+              <a:rPr lang="ru-RU" dirty="0"/>
+              <a:t>Независимое множество</a:t>
+            </a:r>
+          </a:p>
+          <a:p>
+            <a:pPr marL="514350" indent="-514350">
+              <a:buFont typeface="+mj-lt"/>
+              <a:buAutoNum type="arabicPeriod"/>
+            </a:pPr>
+            <a:r>
+              <a:rPr lang="ru-RU" dirty="0"/>
+              <a:t>Конкурентное размещение</a:t>
+            </a:r>
+          </a:p>
+          <a:p>
+            <a:pPr marL="514350" indent="-514350">
+              <a:buFont typeface="+mj-lt"/>
+              <a:buAutoNum type="arabicPeriod"/>
+            </a:pPr>
+            <a:r>
+              <a:rPr lang="ru-RU" dirty="0"/>
+              <a:t>Двудольные </a:t>
+            </a:r>
+            <a:r>
+              <a:rPr lang="ru-RU" dirty="0" err="1"/>
+              <a:t>паросочетания</a:t>
+            </a:r>
+            <a:endParaRPr lang="ru-RU" dirty="0"/>
+          </a:p>
+          <a:p>
+            <a:pPr marL="514350" indent="-514350">
+              <a:buFont typeface="+mj-lt"/>
+              <a:buAutoNum type="arabicPeriod"/>
+            </a:pPr>
+            <a:r>
+              <a:rPr lang="ru-RU" dirty="0"/>
+              <a:t>Взвешенное интервальное планирование</a:t>
+            </a:r>
+          </a:p>
+          <a:p>
+            <a:pPr marL="0" indent="0">
+              <a:buNone/>
+            </a:pPr>
+            <a:endParaRPr lang="ru-RU" dirty="0"/>
+          </a:p>
+          <a:p>
+            <a:endParaRPr lang="ru-RU" dirty="0"/>
+          </a:p>
+        </p:txBody>
+      </p:sp>
+    </p:spTree>
+    <p:extLst>
+      <p:ext uri="{BB962C8B-B14F-4D97-AF65-F5344CB8AC3E}">
+        <p14:creationId xmlns:p14="http://schemas.microsoft.com/office/powerpoint/2010/main" val="1884016486"/>
+      </p:ext>
+    </p:extLst>
+  </p:cSld>
+  <p:clrMapOvr>
+    <a:masterClrMapping/>
+  </p:clrMapOvr>
+</p:sld>
+</file>
+
+<file path=ppt/slides/slide26.xml><?xml version="1.0" encoding="utf-8"?>
+<p:sld xmlns:a="http://schemas.openxmlformats.org/drawingml/2006/main" xmlns:r="http://schemas.openxmlformats.org/officeDocument/2006/relationships" xmlns:p="http://schemas.openxmlformats.org/presentationml/2006/main">
+  <p:cSld>
+    <p:spTree>
+      <p:nvGrpSpPr>
+        <p:cNvPr id="1" name=""/>
+        <p:cNvGrpSpPr/>
+        <p:nvPr/>
+      </p:nvGrpSpPr>
+      <p:grpSpPr>
+        <a:xfrm>
+          <a:off x="0" y="0"/>
+          <a:ext cx="0" cy="0"/>
+          <a:chOff x="0" y="0"/>
+          <a:chExt cx="0" cy="0"/>
+        </a:xfrm>
+      </p:grpSpPr>
+      <p:sp>
+        <p:nvSpPr>
+          <p:cNvPr id="2" name="Заголовок 1">
+            <a:extLst>
+              <a:ext uri="{FF2B5EF4-FFF2-40B4-BE49-F238E27FC236}">
+                <a16:creationId xmlns:a16="http://schemas.microsoft.com/office/drawing/2014/main" id="{2448160E-3C28-FC49-A9EF-16AC77871C6A}"/>
+              </a:ext>
+            </a:extLst>
+          </p:cNvPr>
+          <p:cNvSpPr>
+            <a:spLocks noGrp="1"/>
+          </p:cNvSpPr>
+          <p:nvPr>
+            <p:ph type="title"/>
+          </p:nvPr>
+        </p:nvSpPr>
+        <p:spPr/>
+        <p:txBody>
+          <a:bodyPr/>
+          <a:lstStyle/>
+          <a:p>
+            <a:r>
+              <a:rPr lang="ru-RU" dirty="0"/>
+              <a:t>Решение задачи интервального планирования</a:t>
+            </a:r>
+          </a:p>
+        </p:txBody>
+      </p:sp>
+      <p:sp>
+        <p:nvSpPr>
+          <p:cNvPr id="3" name="Объект 2">
+            <a:extLst>
+              <a:ext uri="{FF2B5EF4-FFF2-40B4-BE49-F238E27FC236}">
+                <a16:creationId xmlns:a16="http://schemas.microsoft.com/office/drawing/2014/main" id="{2B792AD9-C915-8C4F-999E-16C55C71EF46}"/>
+              </a:ext>
+            </a:extLst>
+          </p:cNvPr>
+          <p:cNvSpPr>
+            <a:spLocks noGrp="1"/>
+          </p:cNvSpPr>
+          <p:nvPr>
+            <p:ph idx="1"/>
+          </p:nvPr>
+        </p:nvSpPr>
+        <p:spPr/>
+        <p:txBody>
+          <a:bodyPr/>
+          <a:lstStyle/>
+          <a:p>
+            <a:pPr marL="0" indent="0">
+              <a:buNone/>
+            </a:pPr>
+            <a:r>
+              <a:rPr lang="ru-RU" dirty="0"/>
+              <a:t>- жадный алгоритм</a:t>
+            </a:r>
+          </a:p>
+          <a:p>
+            <a:pPr lvl="1"/>
+            <a:r>
+              <a:rPr lang="ru-RU" dirty="0"/>
+              <a:t>Что будем выбирать жадно?</a:t>
+            </a:r>
+          </a:p>
+        </p:txBody>
+      </p:sp>
+    </p:spTree>
+    <p:extLst>
+      <p:ext uri="{BB962C8B-B14F-4D97-AF65-F5344CB8AC3E}">
+        <p14:creationId xmlns:p14="http://schemas.microsoft.com/office/powerpoint/2010/main" val="2692293071"/>
+      </p:ext>
+    </p:extLst>
+  </p:cSld>
+  <p:clrMapOvr>
+    <a:masterClrMapping/>
+  </p:clrMapOvr>
+</p:sld>
+</file>
+
+<file path=ppt/slides/slide27.xml><?xml version="1.0" encoding="utf-8"?>
+<p:sld xmlns:a="http://schemas.openxmlformats.org/drawingml/2006/main" xmlns:r="http://schemas.openxmlformats.org/officeDocument/2006/relationships" xmlns:p="http://schemas.openxmlformats.org/presentationml/2006/main">
+  <p:cSld>
+    <p:spTree>
+      <p:nvGrpSpPr>
+        <p:cNvPr id="1" name=""/>
+        <p:cNvGrpSpPr/>
+        <p:nvPr/>
+      </p:nvGrpSpPr>
+      <p:grpSpPr>
+        <a:xfrm>
+          <a:off x="0" y="0"/>
+          <a:ext cx="0" cy="0"/>
+          <a:chOff x="0" y="0"/>
+          <a:chExt cx="0" cy="0"/>
+        </a:xfrm>
+      </p:grpSpPr>
+      <p:sp>
+        <p:nvSpPr>
+          <p:cNvPr id="2" name="Заголовок 1">
+            <a:extLst>
+              <a:ext uri="{FF2B5EF4-FFF2-40B4-BE49-F238E27FC236}">
+                <a16:creationId xmlns:a16="http://schemas.microsoft.com/office/drawing/2014/main" id="{8A5D23E5-2452-9F4C-8896-8F3EFF735181}"/>
+              </a:ext>
+            </a:extLst>
+          </p:cNvPr>
+          <p:cNvSpPr>
+            <a:spLocks noGrp="1"/>
+          </p:cNvSpPr>
+          <p:nvPr>
+            <p:ph type="title"/>
+          </p:nvPr>
+        </p:nvSpPr>
+        <p:spPr/>
+        <p:txBody>
+          <a:bodyPr/>
+          <a:lstStyle/>
+          <a:p>
+            <a:r>
+              <a:rPr lang="ru-RU" dirty="0"/>
+              <a:t>Решение (1)</a:t>
+            </a:r>
+          </a:p>
+        </p:txBody>
+      </p:sp>
+      <p:pic>
+        <p:nvPicPr>
+          <p:cNvPr id="4" name="Объект 3">
+            <a:extLst>
+              <a:ext uri="{FF2B5EF4-FFF2-40B4-BE49-F238E27FC236}">
+                <a16:creationId xmlns:a16="http://schemas.microsoft.com/office/drawing/2014/main" id="{910EEF9C-7B01-BD4C-A781-505851AD2D79}"/>
+              </a:ext>
+            </a:extLst>
+          </p:cNvPr>
+          <p:cNvPicPr>
+            <a:picLocks noGrp="1" noChangeAspect="1"/>
+          </p:cNvPicPr>
+          <p:nvPr>
+            <p:ph idx="1"/>
+          </p:nvPr>
+        </p:nvPicPr>
+        <p:blipFill>
+          <a:blip r:embed="rId2"/>
+          <a:stretch>
+            <a:fillRect/>
+          </a:stretch>
+        </p:blipFill>
+        <p:spPr>
+          <a:xfrm>
+            <a:off x="1047809" y="2555320"/>
+            <a:ext cx="7048381" cy="1249713"/>
+          </a:xfrm>
+          <a:prstGeom prst="rect">
+            <a:avLst/>
+          </a:prstGeom>
+        </p:spPr>
+      </p:pic>
+    </p:spTree>
+    <p:extLst>
+      <p:ext uri="{BB962C8B-B14F-4D97-AF65-F5344CB8AC3E}">
+        <p14:creationId xmlns:p14="http://schemas.microsoft.com/office/powerpoint/2010/main" val="1698066844"/>
+      </p:ext>
+    </p:extLst>
+  </p:cSld>
+  <p:clrMapOvr>
+    <a:masterClrMapping/>
+  </p:clrMapOvr>
+</p:sld>
+</file>
+
+<file path=ppt/slides/slide28.xml><?xml version="1.0" encoding="utf-8"?>
+<p:sld xmlns:a="http://schemas.openxmlformats.org/drawingml/2006/main" xmlns:r="http://schemas.openxmlformats.org/officeDocument/2006/relationships" xmlns:p="http://schemas.openxmlformats.org/presentationml/2006/main">
+  <p:cSld>
+    <p:spTree>
+      <p:nvGrpSpPr>
+        <p:cNvPr id="1" name=""/>
+        <p:cNvGrpSpPr/>
+        <p:nvPr/>
+      </p:nvGrpSpPr>
+      <p:grpSpPr>
+        <a:xfrm>
+          <a:off x="0" y="0"/>
+          <a:ext cx="0" cy="0"/>
+          <a:chOff x="0" y="0"/>
+          <a:chExt cx="0" cy="0"/>
+        </a:xfrm>
+      </p:grpSpPr>
+      <p:sp>
+        <p:nvSpPr>
+          <p:cNvPr id="2" name="Заголовок 1">
+            <a:extLst>
+              <a:ext uri="{FF2B5EF4-FFF2-40B4-BE49-F238E27FC236}">
+                <a16:creationId xmlns:a16="http://schemas.microsoft.com/office/drawing/2014/main" id="{827A6E8F-A5F6-2A4A-9F80-6D49D2D25CA1}"/>
+              </a:ext>
+            </a:extLst>
+          </p:cNvPr>
+          <p:cNvSpPr>
+            <a:spLocks noGrp="1"/>
+          </p:cNvSpPr>
+          <p:nvPr>
+            <p:ph type="title"/>
+          </p:nvPr>
+        </p:nvSpPr>
+        <p:spPr/>
+        <p:txBody>
+          <a:bodyPr/>
+          <a:lstStyle/>
+          <a:p>
+            <a:r>
+              <a:rPr lang="ru-RU" dirty="0"/>
+              <a:t>Решение (2)</a:t>
+            </a:r>
+          </a:p>
+        </p:txBody>
+      </p:sp>
+      <p:pic>
+        <p:nvPicPr>
+          <p:cNvPr id="4" name="Объект 3">
+            <a:extLst>
+              <a:ext uri="{FF2B5EF4-FFF2-40B4-BE49-F238E27FC236}">
+                <a16:creationId xmlns:a16="http://schemas.microsoft.com/office/drawing/2014/main" id="{6E3AE1A9-1616-6642-B16B-41C48565BCF3}"/>
+              </a:ext>
+            </a:extLst>
+          </p:cNvPr>
+          <p:cNvPicPr>
+            <a:picLocks noGrp="1" noChangeAspect="1"/>
+          </p:cNvPicPr>
+          <p:nvPr>
+            <p:ph idx="1"/>
+          </p:nvPr>
+        </p:nvPicPr>
+        <p:blipFill>
+          <a:blip r:embed="rId2"/>
+          <a:stretch>
+            <a:fillRect/>
+          </a:stretch>
+        </p:blipFill>
+        <p:spPr>
+          <a:xfrm>
+            <a:off x="1037560" y="2517166"/>
+            <a:ext cx="7371641" cy="1097904"/>
+          </a:xfrm>
+          <a:prstGeom prst="rect">
+            <a:avLst/>
+          </a:prstGeom>
+        </p:spPr>
+      </p:pic>
+    </p:spTree>
+    <p:extLst>
+      <p:ext uri="{BB962C8B-B14F-4D97-AF65-F5344CB8AC3E}">
+        <p14:creationId xmlns:p14="http://schemas.microsoft.com/office/powerpoint/2010/main" val="1555310720"/>
+      </p:ext>
+    </p:extLst>
+  </p:cSld>
+  <p:clrMapOvr>
+    <a:masterClrMapping/>
+  </p:clrMapOvr>
+</p:sld>
+</file>
+
+<file path=ppt/slides/slide29.xml><?xml version="1.0" encoding="utf-8"?>
+<p:sld xmlns:a="http://schemas.openxmlformats.org/drawingml/2006/main" xmlns:r="http://schemas.openxmlformats.org/officeDocument/2006/relationships" xmlns:p="http://schemas.openxmlformats.org/presentationml/2006/main">
+  <p:cSld>
+    <p:spTree>
+      <p:nvGrpSpPr>
+        <p:cNvPr id="1" name=""/>
+        <p:cNvGrpSpPr/>
+        <p:nvPr/>
+      </p:nvGrpSpPr>
+      <p:grpSpPr>
+        <a:xfrm>
+          <a:off x="0" y="0"/>
+          <a:ext cx="0" cy="0"/>
+          <a:chOff x="0" y="0"/>
+          <a:chExt cx="0" cy="0"/>
+        </a:xfrm>
+      </p:grpSpPr>
+      <p:sp>
+        <p:nvSpPr>
+          <p:cNvPr id="2" name="Заголовок 1">
+            <a:extLst>
+              <a:ext uri="{FF2B5EF4-FFF2-40B4-BE49-F238E27FC236}">
+                <a16:creationId xmlns:a16="http://schemas.microsoft.com/office/drawing/2014/main" id="{7B57F708-0E0E-6F46-BD56-741FE135853A}"/>
+              </a:ext>
+            </a:extLst>
+          </p:cNvPr>
+          <p:cNvSpPr>
+            <a:spLocks noGrp="1"/>
+          </p:cNvSpPr>
+          <p:nvPr>
+            <p:ph type="title"/>
+          </p:nvPr>
+        </p:nvSpPr>
+        <p:spPr/>
+        <p:txBody>
+          <a:bodyPr/>
+          <a:lstStyle/>
+          <a:p>
+            <a:r>
+              <a:rPr lang="ru-RU" dirty="0"/>
+              <a:t>Решение (3)</a:t>
+            </a:r>
+          </a:p>
+        </p:txBody>
+      </p:sp>
+      <p:pic>
+        <p:nvPicPr>
+          <p:cNvPr id="4" name="Объект 3">
+            <a:extLst>
+              <a:ext uri="{FF2B5EF4-FFF2-40B4-BE49-F238E27FC236}">
+                <a16:creationId xmlns:a16="http://schemas.microsoft.com/office/drawing/2014/main" id="{A8C39F97-A41B-5E42-86D9-154B093565E7}"/>
+              </a:ext>
+            </a:extLst>
+          </p:cNvPr>
+          <p:cNvPicPr>
+            <a:picLocks noGrp="1" noChangeAspect="1"/>
+          </p:cNvPicPr>
+          <p:nvPr>
+            <p:ph idx="1"/>
+          </p:nvPr>
+        </p:nvPicPr>
+        <p:blipFill>
+          <a:blip r:embed="rId2"/>
+          <a:stretch>
+            <a:fillRect/>
+          </a:stretch>
+        </p:blipFill>
+        <p:spPr>
+          <a:xfrm>
+            <a:off x="812359" y="2936920"/>
+            <a:ext cx="7519281" cy="1656345"/>
+          </a:xfrm>
+          <a:prstGeom prst="rect">
+            <a:avLst/>
+          </a:prstGeom>
+        </p:spPr>
+      </p:pic>
+    </p:spTree>
+    <p:extLst>
+      <p:ext uri="{BB962C8B-B14F-4D97-AF65-F5344CB8AC3E}">
+        <p14:creationId xmlns:p14="http://schemas.microsoft.com/office/powerpoint/2010/main" val="3843943911"/>
       </p:ext>
     </p:extLst>
   </p:cSld>
@@ -6119,6 +13592,94 @@
     <p:extLst>
       <p:ext uri="{BB962C8B-B14F-4D97-AF65-F5344CB8AC3E}">
         <p14:creationId xmlns:p14="http://schemas.microsoft.com/office/powerpoint/2010/main" val="3581444209"/>
+      </p:ext>
+    </p:extLst>
+  </p:cSld>
+  <p:clrMapOvr>
+    <a:masterClrMapping/>
+  </p:clrMapOvr>
+</p:sld>
+</file>
+
+<file path=ppt/slides/slide30.xml><?xml version="1.0" encoding="utf-8"?>
+<p:sld xmlns:a="http://schemas.openxmlformats.org/drawingml/2006/main" xmlns:r="http://schemas.openxmlformats.org/officeDocument/2006/relationships" xmlns:p="http://schemas.openxmlformats.org/presentationml/2006/main">
+  <p:cSld>
+    <p:spTree>
+      <p:nvGrpSpPr>
+        <p:cNvPr id="1" name=""/>
+        <p:cNvGrpSpPr/>
+        <p:nvPr/>
+      </p:nvGrpSpPr>
+      <p:grpSpPr>
+        <a:xfrm>
+          <a:off x="0" y="0"/>
+          <a:ext cx="0" cy="0"/>
+          <a:chOff x="0" y="0"/>
+          <a:chExt cx="0" cy="0"/>
+        </a:xfrm>
+      </p:grpSpPr>
+      <p:sp>
+        <p:nvSpPr>
+          <p:cNvPr id="2" name="Заголовок 1">
+            <a:extLst>
+              <a:ext uri="{FF2B5EF4-FFF2-40B4-BE49-F238E27FC236}">
+                <a16:creationId xmlns:a16="http://schemas.microsoft.com/office/drawing/2014/main" id="{13BDD2D4-0E51-0E4F-819B-1552360E9CD8}"/>
+              </a:ext>
+            </a:extLst>
+          </p:cNvPr>
+          <p:cNvSpPr>
+            <a:spLocks noGrp="1"/>
+          </p:cNvSpPr>
+          <p:nvPr>
+            <p:ph type="title"/>
+          </p:nvPr>
+        </p:nvSpPr>
+        <p:spPr/>
+        <p:txBody>
+          <a:bodyPr/>
+          <a:lstStyle/>
+          <a:p>
+            <a:r>
+              <a:rPr lang="ru-RU" dirty="0"/>
+              <a:t>Решение (4)</a:t>
+            </a:r>
+          </a:p>
+        </p:txBody>
+      </p:sp>
+      <p:pic>
+        <p:nvPicPr>
+          <p:cNvPr id="5" name="Рисунок 4">
+            <a:extLst>
+              <a:ext uri="{FF2B5EF4-FFF2-40B4-BE49-F238E27FC236}">
+                <a16:creationId xmlns:a16="http://schemas.microsoft.com/office/drawing/2014/main" id="{D23CC016-ED1A-574A-A2E0-0AF55B375044}"/>
+              </a:ext>
+            </a:extLst>
+          </p:cNvPr>
+          <p:cNvPicPr>
+            <a:picLocks noChangeAspect="1"/>
+          </p:cNvPicPr>
+          <p:nvPr/>
+        </p:nvPicPr>
+        <p:blipFill>
+          <a:blip r:embed="rId2"/>
+          <a:stretch>
+            <a:fillRect/>
+          </a:stretch>
+        </p:blipFill>
+        <p:spPr>
+          <a:xfrm>
+            <a:off x="774848" y="1690689"/>
+            <a:ext cx="7529180" cy="4747080"/>
+          </a:xfrm>
+          <a:prstGeom prst="rect">
+            <a:avLst/>
+          </a:prstGeom>
+        </p:spPr>
+      </p:pic>
+    </p:spTree>
+    <p:extLst>
+      <p:ext uri="{BB962C8B-B14F-4D97-AF65-F5344CB8AC3E}">
+        <p14:creationId xmlns:p14="http://schemas.microsoft.com/office/powerpoint/2010/main" val="1464213250"/>
       </p:ext>
     </p:extLst>
   </p:cSld>

--- a/practice.pptx
+++ b/practice.pptx
@@ -30,11 +30,12 @@
     <p:sldId id="582" r:id="rId24"/>
     <p:sldId id="583" r:id="rId25"/>
     <p:sldId id="584" r:id="rId26"/>
-    <p:sldId id="585" r:id="rId27"/>
-    <p:sldId id="586" r:id="rId28"/>
-    <p:sldId id="587" r:id="rId29"/>
-    <p:sldId id="588" r:id="rId30"/>
-    <p:sldId id="589" r:id="rId31"/>
+    <p:sldId id="590" r:id="rId27"/>
+    <p:sldId id="585" r:id="rId28"/>
+    <p:sldId id="586" r:id="rId29"/>
+    <p:sldId id="587" r:id="rId30"/>
+    <p:sldId id="588" r:id="rId31"/>
+    <p:sldId id="589" r:id="rId32"/>
   </p:sldIdLst>
   <p:sldSz cx="9144000" cy="6858000" type="screen4x3"/>
   <p:notesSz cx="6858000" cy="9144000"/>
@@ -3294,7 +3295,7 @@
           <a:p>
             <a:fld id="{0F351541-4E41-5244-B337-927E1F15D341}" type="datetimeFigureOut">
               <a:rPr lang="ru-RU" smtClean="0"/>
-              <a:t>24.02.2026</a:t>
+              <a:t>03.03.2026</a:t>
             </a:fld>
             <a:endParaRPr lang="ru-RU"/>
           </a:p>
@@ -3464,7 +3465,7 @@
           <a:p>
             <a:fld id="{0F351541-4E41-5244-B337-927E1F15D341}" type="datetimeFigureOut">
               <a:rPr lang="ru-RU" smtClean="0"/>
-              <a:t>24.02.2026</a:t>
+              <a:t>03.03.2026</a:t>
             </a:fld>
             <a:endParaRPr lang="ru-RU"/>
           </a:p>
@@ -3644,7 +3645,7 @@
           <a:p>
             <a:fld id="{0F351541-4E41-5244-B337-927E1F15D341}" type="datetimeFigureOut">
               <a:rPr lang="ru-RU" smtClean="0"/>
-              <a:t>24.02.2026</a:t>
+              <a:t>03.03.2026</a:t>
             </a:fld>
             <a:endParaRPr lang="ru-RU"/>
           </a:p>
@@ -3814,7 +3815,7 @@
           <a:p>
             <a:fld id="{0F351541-4E41-5244-B337-927E1F15D341}" type="datetimeFigureOut">
               <a:rPr lang="ru-RU" smtClean="0"/>
-              <a:t>24.02.2026</a:t>
+              <a:t>03.03.2026</a:t>
             </a:fld>
             <a:endParaRPr lang="ru-RU"/>
           </a:p>
@@ -4058,7 +4059,7 @@
           <a:p>
             <a:fld id="{0F351541-4E41-5244-B337-927E1F15D341}" type="datetimeFigureOut">
               <a:rPr lang="ru-RU" smtClean="0"/>
-              <a:t>24.02.2026</a:t>
+              <a:t>03.03.2026</a:t>
             </a:fld>
             <a:endParaRPr lang="ru-RU"/>
           </a:p>
@@ -4290,7 +4291,7 @@
           <a:p>
             <a:fld id="{0F351541-4E41-5244-B337-927E1F15D341}" type="datetimeFigureOut">
               <a:rPr lang="ru-RU" smtClean="0"/>
-              <a:t>24.02.2026</a:t>
+              <a:t>03.03.2026</a:t>
             </a:fld>
             <a:endParaRPr lang="ru-RU"/>
           </a:p>
@@ -4657,7 +4658,7 @@
           <a:p>
             <a:fld id="{0F351541-4E41-5244-B337-927E1F15D341}" type="datetimeFigureOut">
               <a:rPr lang="ru-RU" smtClean="0"/>
-              <a:t>24.02.2026</a:t>
+              <a:t>03.03.2026</a:t>
             </a:fld>
             <a:endParaRPr lang="ru-RU"/>
           </a:p>
@@ -4775,7 +4776,7 @@
           <a:p>
             <a:fld id="{0F351541-4E41-5244-B337-927E1F15D341}" type="datetimeFigureOut">
               <a:rPr lang="ru-RU" smtClean="0"/>
-              <a:t>24.02.2026</a:t>
+              <a:t>03.03.2026</a:t>
             </a:fld>
             <a:endParaRPr lang="ru-RU"/>
           </a:p>
@@ -4870,7 +4871,7 @@
           <a:p>
             <a:fld id="{0F351541-4E41-5244-B337-927E1F15D341}" type="datetimeFigureOut">
               <a:rPr lang="ru-RU" smtClean="0"/>
-              <a:t>24.02.2026</a:t>
+              <a:t>03.03.2026</a:t>
             </a:fld>
             <a:endParaRPr lang="ru-RU"/>
           </a:p>
@@ -5147,7 +5148,7 @@
           <a:p>
             <a:fld id="{0F351541-4E41-5244-B337-927E1F15D341}" type="datetimeFigureOut">
               <a:rPr lang="ru-RU" smtClean="0"/>
-              <a:t>24.02.2026</a:t>
+              <a:t>03.03.2026</a:t>
             </a:fld>
             <a:endParaRPr lang="ru-RU"/>
           </a:p>
@@ -5404,7 +5405,7 @@
           <a:p>
             <a:fld id="{0F351541-4E41-5244-B337-927E1F15D341}" type="datetimeFigureOut">
               <a:rPr lang="ru-RU" smtClean="0"/>
-              <a:t>24.02.2026</a:t>
+              <a:t>03.03.2026</a:t>
             </a:fld>
             <a:endParaRPr lang="ru-RU"/>
           </a:p>
@@ -5617,7 +5618,7 @@
           <a:p>
             <a:fld id="{0F351541-4E41-5244-B337-927E1F15D341}" type="datetimeFigureOut">
               <a:rPr lang="ru-RU" smtClean="0"/>
-              <a:t>24.02.2026</a:t>
+              <a:t>03.03.2026</a:t>
             </a:fld>
             <a:endParaRPr lang="ru-RU"/>
           </a:p>
@@ -13016,7 +13017,12 @@
             <p:ph idx="1"/>
           </p:nvPr>
         </p:nvSpPr>
-        <p:spPr/>
+        <p:spPr>
+          <a:xfrm>
+            <a:off x="628650" y="1825624"/>
+            <a:ext cx="7886700" cy="4872887"/>
+          </a:xfrm>
+        </p:spPr>
         <p:txBody>
           <a:bodyPr/>
           <a:lstStyle/>
@@ -13073,6 +13079,38 @@
               <a:rPr lang="ru-RU" dirty="0"/>
               <a:t>Взвешенное интервальное планирование</a:t>
             </a:r>
+          </a:p>
+          <a:p>
+            <a:pPr marL="514350" indent="-514350">
+              <a:buFont typeface="+mj-lt"/>
+              <a:buAutoNum type="arabicPeriod"/>
+            </a:pPr>
+            <a:endParaRPr lang="ru-RU" dirty="0"/>
+          </a:p>
+          <a:p>
+            <a:pPr marL="0" indent="0">
+              <a:buNone/>
+            </a:pPr>
+            <a:r>
+              <a:rPr lang="ru-RU" dirty="0"/>
+              <a:t>Написать программу решающую задачу. </a:t>
+            </a:r>
+          </a:p>
+          <a:p>
+            <a:pPr marL="0" indent="0">
+              <a:buNone/>
+            </a:pPr>
+            <a:r>
+              <a:rPr lang="ru-RU" dirty="0"/>
+              <a:t>Оценить время решения. </a:t>
+            </a:r>
+            <a:endParaRPr lang="en-US" dirty="0"/>
+          </a:p>
+          <a:p>
+            <a:pPr marL="0" indent="0">
+              <a:buNone/>
+            </a:pPr>
+            <a:endParaRPr lang="ru-RU" dirty="0"/>
           </a:p>
           <a:p>
             <a:pPr marL="0" indent="0">
@@ -13120,6 +13158,191 @@
           <p:cNvPr id="2" name="Заголовок 1">
             <a:extLst>
               <a:ext uri="{FF2B5EF4-FFF2-40B4-BE49-F238E27FC236}">
+                <a16:creationId xmlns:a16="http://schemas.microsoft.com/office/drawing/2014/main" id="{E88875E0-8933-4F49-BCF4-5EEED5B70688}"/>
+              </a:ext>
+            </a:extLst>
+          </p:cNvPr>
+          <p:cNvSpPr>
+            <a:spLocks noGrp="1"/>
+          </p:cNvSpPr>
+          <p:nvPr>
+            <p:ph type="title"/>
+          </p:nvPr>
+        </p:nvSpPr>
+        <p:spPr/>
+        <p:txBody>
+          <a:bodyPr/>
+          <a:lstStyle/>
+          <a:p>
+            <a:r>
+              <a:rPr lang="ru-RU" dirty="0"/>
+              <a:t>Домашнее задание 3</a:t>
+            </a:r>
+          </a:p>
+        </p:txBody>
+      </p:sp>
+      <p:sp>
+        <p:nvSpPr>
+          <p:cNvPr id="3" name="Объект 2">
+            <a:extLst>
+              <a:ext uri="{FF2B5EF4-FFF2-40B4-BE49-F238E27FC236}">
+                <a16:creationId xmlns:a16="http://schemas.microsoft.com/office/drawing/2014/main" id="{20651419-F750-6547-BD33-02C0B24EBF13}"/>
+              </a:ext>
+            </a:extLst>
+          </p:cNvPr>
+          <p:cNvSpPr>
+            <a:spLocks noGrp="1"/>
+          </p:cNvSpPr>
+          <p:nvPr>
+            <p:ph idx="1"/>
+          </p:nvPr>
+        </p:nvSpPr>
+        <p:spPr>
+          <a:xfrm>
+            <a:off x="628650" y="1619987"/>
+            <a:ext cx="7886700" cy="4872887"/>
+          </a:xfrm>
+        </p:spPr>
+        <p:txBody>
+          <a:bodyPr>
+            <a:normAutofit fontScale="92500" lnSpcReduction="10000"/>
+          </a:bodyPr>
+          <a:lstStyle/>
+          <a:p>
+            <a:pPr marL="0" indent="0">
+              <a:buNone/>
+            </a:pPr>
+            <a:r>
+              <a:rPr lang="ru-RU" dirty="0"/>
+              <a:t>Как оценить время:</a:t>
+            </a:r>
+          </a:p>
+          <a:p>
+            <a:r>
+              <a:rPr lang="ru-RU" dirty="0"/>
+              <a:t>Эмпирически (на базе экспериментов). Оценить математическое ожидание и СКО. </a:t>
+            </a:r>
+          </a:p>
+          <a:p>
+            <a:r>
+              <a:rPr lang="ru-RU" dirty="0"/>
+              <a:t>Построить график зависимости времени решения от размера входных данных </a:t>
+            </a:r>
+            <a:r>
+              <a:rPr lang="ru-RU" i="1" dirty="0" err="1"/>
+              <a:t>n</a:t>
+            </a:r>
+            <a:r>
+              <a:rPr lang="en-US" dirty="0"/>
+              <a:t> </a:t>
+            </a:r>
+            <a:r>
+              <a:rPr lang="ru-RU" dirty="0"/>
+              <a:t>(оценка среднего – линия, 2 СКО – трубка). Должен быть виден характер зависимости. </a:t>
+            </a:r>
+          </a:p>
+          <a:p>
+            <a:r>
+              <a:rPr lang="ru-RU" dirty="0"/>
+              <a:t>Построить гистограмму времени решения для выбранного </a:t>
+            </a:r>
+            <a:r>
+              <a:rPr lang="ru-RU" i="1" dirty="0" err="1"/>
+              <a:t>n</a:t>
+            </a:r>
+            <a:r>
+              <a:rPr lang="ru-RU" dirty="0"/>
+              <a:t> (подумайте как его выбрать)</a:t>
+            </a:r>
+            <a:r>
+              <a:rPr lang="en-US" dirty="0"/>
+              <a:t>.</a:t>
+            </a:r>
+            <a:r>
+              <a:rPr lang="ru-RU" dirty="0"/>
+              <a:t> </a:t>
+            </a:r>
+          </a:p>
+          <a:p>
+            <a:r>
+              <a:rPr lang="ru-RU" dirty="0"/>
+              <a:t>Выбрать гипотезу о законе распределения времени для выбранного </a:t>
+            </a:r>
+            <a:r>
+              <a:rPr lang="ru-RU" i="1" dirty="0" err="1"/>
+              <a:t>n</a:t>
+            </a:r>
+            <a:r>
+              <a:rPr lang="en-US" dirty="0"/>
+              <a:t> </a:t>
+            </a:r>
+            <a:r>
+              <a:rPr lang="ru-RU" dirty="0"/>
+              <a:t>и проверить ее.</a:t>
+            </a:r>
+          </a:p>
+          <a:p>
+            <a:r>
+              <a:rPr lang="ru-RU" dirty="0"/>
+              <a:t>Ответить на вопрос: является ли полученное время «хорошим»? Обосновать свой ответ.  </a:t>
+            </a:r>
+            <a:r>
+              <a:rPr lang="en-US" dirty="0"/>
+              <a:t> </a:t>
+            </a:r>
+          </a:p>
+          <a:p>
+            <a:pPr marL="0" indent="0">
+              <a:buNone/>
+            </a:pPr>
+            <a:endParaRPr lang="ru-RU" dirty="0"/>
+          </a:p>
+          <a:p>
+            <a:pPr marL="0" indent="0">
+              <a:buNone/>
+            </a:pPr>
+            <a:endParaRPr lang="ru-RU" dirty="0"/>
+          </a:p>
+          <a:p>
+            <a:endParaRPr lang="ru-RU" dirty="0"/>
+          </a:p>
+        </p:txBody>
+      </p:sp>
+    </p:spTree>
+    <p:extLst>
+      <p:ext uri="{BB962C8B-B14F-4D97-AF65-F5344CB8AC3E}">
+        <p14:creationId xmlns:p14="http://schemas.microsoft.com/office/powerpoint/2010/main" val="2764637800"/>
+      </p:ext>
+    </p:extLst>
+  </p:cSld>
+  <p:clrMapOvr>
+    <a:masterClrMapping/>
+  </p:clrMapOvr>
+</p:sld>
+</file>
+
+<file path=ppt/slides/slide27.xml><?xml version="1.0" encoding="utf-8"?>
+<p:sld xmlns:a="http://schemas.openxmlformats.org/drawingml/2006/main" xmlns:r="http://schemas.openxmlformats.org/officeDocument/2006/relationships" xmlns:p="http://schemas.openxmlformats.org/presentationml/2006/main">
+  <p:cSld>
+    <p:spTree>
+      <p:nvGrpSpPr>
+        <p:cNvPr id="1" name=""/>
+        <p:cNvGrpSpPr/>
+        <p:nvPr/>
+      </p:nvGrpSpPr>
+      <p:grpSpPr>
+        <a:xfrm>
+          <a:off x="0" y="0"/>
+          <a:ext cx="0" cy="0"/>
+          <a:chOff x="0" y="0"/>
+          <a:chExt cx="0" cy="0"/>
+        </a:xfrm>
+      </p:grpSpPr>
+      <p:sp>
+        <p:nvSpPr>
+          <p:cNvPr id="2" name="Заголовок 1">
+            <a:extLst>
+              <a:ext uri="{FF2B5EF4-FFF2-40B4-BE49-F238E27FC236}">
                 <a16:creationId xmlns:a16="http://schemas.microsoft.com/office/drawing/2014/main" id="{2448160E-3C28-FC49-A9EF-16AC77871C6A}"/>
               </a:ext>
             </a:extLst>
@@ -13194,7 +13417,7 @@
 </p:sld>
 </file>
 
-<file path=ppt/slides/slide27.xml><?xml version="1.0" encoding="utf-8"?>
+<file path=ppt/slides/slide28.xml><?xml version="1.0" encoding="utf-8"?>
 <p:sld xmlns:a="http://schemas.openxmlformats.org/drawingml/2006/main" xmlns:r="http://schemas.openxmlformats.org/officeDocument/2006/relationships" xmlns:p="http://schemas.openxmlformats.org/presentationml/2006/main">
   <p:cSld>
     <p:spTree>
@@ -13284,7 +13507,7 @@
 </p:sld>
 </file>
 
-<file path=ppt/slides/slide28.xml><?xml version="1.0" encoding="utf-8"?>
+<file path=ppt/slides/slide29.xml><?xml version="1.0" encoding="utf-8"?>
 <p:sld xmlns:a="http://schemas.openxmlformats.org/drawingml/2006/main" xmlns:r="http://schemas.openxmlformats.org/officeDocument/2006/relationships" xmlns:p="http://schemas.openxmlformats.org/presentationml/2006/main">
   <p:cSld>
     <p:spTree>
@@ -13374,7 +13597,144 @@
 </p:sld>
 </file>
 
-<file path=ppt/slides/slide29.xml><?xml version="1.0" encoding="utf-8"?>
+<file path=ppt/slides/slide3.xml><?xml version="1.0" encoding="utf-8"?>
+<p:sld xmlns:a="http://schemas.openxmlformats.org/drawingml/2006/main" xmlns:r="http://schemas.openxmlformats.org/officeDocument/2006/relationships" xmlns:p="http://schemas.openxmlformats.org/presentationml/2006/main">
+  <p:cSld>
+    <p:spTree>
+      <p:nvGrpSpPr>
+        <p:cNvPr id="1" name=""/>
+        <p:cNvGrpSpPr/>
+        <p:nvPr/>
+      </p:nvGrpSpPr>
+      <p:grpSpPr>
+        <a:xfrm>
+          <a:off x="0" y="0"/>
+          <a:ext cx="0" cy="0"/>
+          <a:chOff x="0" y="0"/>
+          <a:chExt cx="0" cy="0"/>
+        </a:xfrm>
+      </p:grpSpPr>
+      <p:sp>
+        <p:nvSpPr>
+          <p:cNvPr id="2" name="Заголовок 1">
+            <a:extLst>
+              <a:ext uri="{FF2B5EF4-FFF2-40B4-BE49-F238E27FC236}">
+                <a16:creationId xmlns:a16="http://schemas.microsoft.com/office/drawing/2014/main" id="{2EDA5D25-E7B8-B242-9FA5-5D84BDDF80EA}"/>
+              </a:ext>
+            </a:extLst>
+          </p:cNvPr>
+          <p:cNvSpPr>
+            <a:spLocks noGrp="1"/>
+          </p:cNvSpPr>
+          <p:nvPr>
+            <p:ph type="title"/>
+          </p:nvPr>
+        </p:nvSpPr>
+        <p:spPr/>
+        <p:txBody>
+          <a:bodyPr/>
+          <a:lstStyle/>
+          <a:p>
+            <a:r>
+              <a:rPr lang="ru-RU" dirty="0"/>
+              <a:t>Давайте познакомимся</a:t>
+            </a:r>
+          </a:p>
+        </p:txBody>
+      </p:sp>
+      <p:sp>
+        <p:nvSpPr>
+          <p:cNvPr id="3" name="Объект 2">
+            <a:extLst>
+              <a:ext uri="{FF2B5EF4-FFF2-40B4-BE49-F238E27FC236}">
+                <a16:creationId xmlns:a16="http://schemas.microsoft.com/office/drawing/2014/main" id="{DDACE4E4-30C6-6F44-BD55-26F0ED167E11}"/>
+              </a:ext>
+            </a:extLst>
+          </p:cNvPr>
+          <p:cNvSpPr>
+            <a:spLocks noGrp="1"/>
+          </p:cNvSpPr>
+          <p:nvPr>
+            <p:ph idx="1"/>
+          </p:nvPr>
+        </p:nvSpPr>
+        <p:spPr/>
+        <p:txBody>
+          <a:bodyPr/>
+          <a:lstStyle/>
+          <a:p>
+            <a:r>
+              <a:rPr lang="ru-RU" dirty="0"/>
+              <a:t>Дано: </a:t>
+            </a:r>
+          </a:p>
+          <a:p>
+            <a:pPr lvl="1"/>
+            <a:r>
+              <a:rPr lang="ru-RU" dirty="0"/>
+              <a:t>список группы ФИО через пробел по строкам</a:t>
+            </a:r>
+          </a:p>
+          <a:p>
+            <a:r>
+              <a:rPr lang="ru-RU" dirty="0"/>
+              <a:t>Требуется найти повторения имен:</a:t>
+            </a:r>
+          </a:p>
+          <a:p>
+            <a:pPr lvl="1"/>
+            <a:r>
+              <a:rPr lang="ru-RU" dirty="0"/>
+              <a:t>вывести  по строкам ФИО&lt;пробел&gt;&lt;число повторений имени&gt;</a:t>
+            </a:r>
+          </a:p>
+          <a:p>
+            <a:r>
+              <a:rPr lang="ru-RU" dirty="0"/>
+              <a:t>Какая группа «хорошая»?</a:t>
+            </a:r>
+          </a:p>
+          <a:p>
+            <a:r>
+              <a:rPr lang="ru-RU" dirty="0"/>
+              <a:t>Давайте сравним решения (и Ваши и LLM):</a:t>
+            </a:r>
+          </a:p>
+          <a:p>
+            <a:pPr lvl="1"/>
+            <a:r>
+              <a:rPr lang="ru-RU" dirty="0"/>
+              <a:t>по каким метрикам будем сравнивать?</a:t>
+            </a:r>
+          </a:p>
+          <a:p>
+            <a:r>
+              <a:rPr lang="ru-RU" dirty="0"/>
+              <a:t>Какая LLM хорошая? </a:t>
+            </a:r>
+          </a:p>
+          <a:p>
+            <a:endParaRPr lang="ru-RU" dirty="0"/>
+          </a:p>
+          <a:p>
+            <a:endParaRPr lang="ru-RU" dirty="0"/>
+          </a:p>
+        </p:txBody>
+      </p:sp>
+    </p:spTree>
+    <p:extLst>
+      <p:ext uri="{BB962C8B-B14F-4D97-AF65-F5344CB8AC3E}">
+        <p14:creationId xmlns:p14="http://schemas.microsoft.com/office/powerpoint/2010/main" val="3581444209"/>
+      </p:ext>
+    </p:extLst>
+  </p:cSld>
+  <p:clrMapOvr>
+    <a:masterClrMapping/>
+  </p:clrMapOvr>
+</p:sld>
+</file>
+
+<file path=ppt/slides/slide30.xml><?xml version="1.0" encoding="utf-8"?>
 <p:sld xmlns:a="http://schemas.openxmlformats.org/drawingml/2006/main" xmlns:r="http://schemas.openxmlformats.org/officeDocument/2006/relationships" xmlns:p="http://schemas.openxmlformats.org/presentationml/2006/main">
   <p:cSld>
     <p:spTree>
@@ -13464,144 +13824,7 @@
 </p:sld>
 </file>
 
-<file path=ppt/slides/slide3.xml><?xml version="1.0" encoding="utf-8"?>
-<p:sld xmlns:a="http://schemas.openxmlformats.org/drawingml/2006/main" xmlns:r="http://schemas.openxmlformats.org/officeDocument/2006/relationships" xmlns:p="http://schemas.openxmlformats.org/presentationml/2006/main">
-  <p:cSld>
-    <p:spTree>
-      <p:nvGrpSpPr>
-        <p:cNvPr id="1" name=""/>
-        <p:cNvGrpSpPr/>
-        <p:nvPr/>
-      </p:nvGrpSpPr>
-      <p:grpSpPr>
-        <a:xfrm>
-          <a:off x="0" y="0"/>
-          <a:ext cx="0" cy="0"/>
-          <a:chOff x="0" y="0"/>
-          <a:chExt cx="0" cy="0"/>
-        </a:xfrm>
-      </p:grpSpPr>
-      <p:sp>
-        <p:nvSpPr>
-          <p:cNvPr id="2" name="Заголовок 1">
-            <a:extLst>
-              <a:ext uri="{FF2B5EF4-FFF2-40B4-BE49-F238E27FC236}">
-                <a16:creationId xmlns:a16="http://schemas.microsoft.com/office/drawing/2014/main" id="{2EDA5D25-E7B8-B242-9FA5-5D84BDDF80EA}"/>
-              </a:ext>
-            </a:extLst>
-          </p:cNvPr>
-          <p:cNvSpPr>
-            <a:spLocks noGrp="1"/>
-          </p:cNvSpPr>
-          <p:nvPr>
-            <p:ph type="title"/>
-          </p:nvPr>
-        </p:nvSpPr>
-        <p:spPr/>
-        <p:txBody>
-          <a:bodyPr/>
-          <a:lstStyle/>
-          <a:p>
-            <a:r>
-              <a:rPr lang="ru-RU" dirty="0"/>
-              <a:t>Давайте познакомимся</a:t>
-            </a:r>
-          </a:p>
-        </p:txBody>
-      </p:sp>
-      <p:sp>
-        <p:nvSpPr>
-          <p:cNvPr id="3" name="Объект 2">
-            <a:extLst>
-              <a:ext uri="{FF2B5EF4-FFF2-40B4-BE49-F238E27FC236}">
-                <a16:creationId xmlns:a16="http://schemas.microsoft.com/office/drawing/2014/main" id="{DDACE4E4-30C6-6F44-BD55-26F0ED167E11}"/>
-              </a:ext>
-            </a:extLst>
-          </p:cNvPr>
-          <p:cNvSpPr>
-            <a:spLocks noGrp="1"/>
-          </p:cNvSpPr>
-          <p:nvPr>
-            <p:ph idx="1"/>
-          </p:nvPr>
-        </p:nvSpPr>
-        <p:spPr/>
-        <p:txBody>
-          <a:bodyPr/>
-          <a:lstStyle/>
-          <a:p>
-            <a:r>
-              <a:rPr lang="ru-RU" dirty="0"/>
-              <a:t>Дано: </a:t>
-            </a:r>
-          </a:p>
-          <a:p>
-            <a:pPr lvl="1"/>
-            <a:r>
-              <a:rPr lang="ru-RU" dirty="0"/>
-              <a:t>список группы ФИО через пробел по строкам</a:t>
-            </a:r>
-          </a:p>
-          <a:p>
-            <a:r>
-              <a:rPr lang="ru-RU" dirty="0"/>
-              <a:t>Требуется найти повторения имен:</a:t>
-            </a:r>
-          </a:p>
-          <a:p>
-            <a:pPr lvl="1"/>
-            <a:r>
-              <a:rPr lang="ru-RU" dirty="0"/>
-              <a:t>вывести  по строкам ФИО&lt;пробел&gt;&lt;число повторений имени&gt;</a:t>
-            </a:r>
-          </a:p>
-          <a:p>
-            <a:r>
-              <a:rPr lang="ru-RU" dirty="0"/>
-              <a:t>Какая группа «хорошая»?</a:t>
-            </a:r>
-          </a:p>
-          <a:p>
-            <a:r>
-              <a:rPr lang="ru-RU" dirty="0"/>
-              <a:t>Давайте сравним решения (и Ваши и LLM):</a:t>
-            </a:r>
-          </a:p>
-          <a:p>
-            <a:pPr lvl="1"/>
-            <a:r>
-              <a:rPr lang="ru-RU" dirty="0"/>
-              <a:t>по каким метрикам будем сравнивать?</a:t>
-            </a:r>
-          </a:p>
-          <a:p>
-            <a:r>
-              <a:rPr lang="ru-RU" dirty="0"/>
-              <a:t>Какая LLM хорошая? </a:t>
-            </a:r>
-          </a:p>
-          <a:p>
-            <a:endParaRPr lang="ru-RU" dirty="0"/>
-          </a:p>
-          <a:p>
-            <a:endParaRPr lang="ru-RU" dirty="0"/>
-          </a:p>
-        </p:txBody>
-      </p:sp>
-    </p:spTree>
-    <p:extLst>
-      <p:ext uri="{BB962C8B-B14F-4D97-AF65-F5344CB8AC3E}">
-        <p14:creationId xmlns:p14="http://schemas.microsoft.com/office/powerpoint/2010/main" val="3581444209"/>
-      </p:ext>
-    </p:extLst>
-  </p:cSld>
-  <p:clrMapOvr>
-    <a:masterClrMapping/>
-  </p:clrMapOvr>
-</p:sld>
-</file>
-
-<file path=ppt/slides/slide30.xml><?xml version="1.0" encoding="utf-8"?>
+<file path=ppt/slides/slide31.xml><?xml version="1.0" encoding="utf-8"?>
 <p:sld xmlns:a="http://schemas.openxmlformats.org/drawingml/2006/main" xmlns:r="http://schemas.openxmlformats.org/officeDocument/2006/relationships" xmlns:p="http://schemas.openxmlformats.org/presentationml/2006/main">
   <p:cSld>
     <p:spTree>
